--- a/docs/konzept/Powerpoint/Azure-Landing-Zone-Konzept.pptx
+++ b/docs/konzept/Powerpoint/Azure-Landing-Zone-Konzept.pptx
@@ -25866,7 +25866,7 @@
           <a:lstStyle/>
           <a:p>
             <a:r>
-              <a:t>Hub-and-Spoke: Azure Firewall · Bastion · Private DNS – in zwei Regionen</a:t>
+              <a:t>Hub-and-Spoke · Bechtle-Empfehlung: 1 Region · Firewall Standard · ~€1.050/Monat</a:t>
             </a:r>
           </a:p>
         </p:txBody>
@@ -25922,7 +25922,7 @@
           <a:lstStyle/>
           <a:p>
             <a:r>
-              <a:t>Hub-and-Spoke: Dienste und Kosten</a:t>
+              <a:t>Hub-and-Spoke: Bechtle-Empfehlung vs. Microsoft-Default</a:t>
             </a:r>
           </a:p>
         </p:txBody>
@@ -25945,56 +25945,56 @@
             <a:pPr/>
             <a:r>
               <a:rPr sz="1300"/>
-              <a:t>2× Hub-VNets: GWC 10.0.0.0/22 (primär) + NE 10.1.0.0/22 (sekundär), bidirektionales Peering</a:t>
+              <a:t>Bechtle-Empfehlung: 1× Hub-VNet GWC 10.0.0.0/22 – alle Kernfunktionen, eine Region, ~€1.050/Monat</a:t>
             </a:r>
           </a:p>
           <a:p>
             <a:pPr/>
             <a:r>
               <a:rPr sz="1300"/>
-              <a:t>Azure Firewall Premium: 2× ~€1.100/Monat  →  deployAzureFirewall</a:t>
+              <a:t>Microsoft-Default: 2× Hub-VNets (GWC + NE) – alle Dienste, beide Regionen, ~€5.800/Monat</a:t>
             </a:r>
           </a:p>
           <a:p>
             <a:pPr/>
             <a:r>
               <a:rPr sz="1300"/>
-              <a:t>Azure Bastion (Standard): 2× ~€120/Monat  →  deployBastion</a:t>
+              <a:t>Azure Firewall Standard (1×): ~€700/Monat  [Default: Premium 2× = ~€2.200]</a:t>
             </a:r>
           </a:p>
           <a:p>
             <a:pPr/>
             <a:r>
               <a:rPr sz="1300"/>
-              <a:t>VPN Gateway (VpnGw1AZ, BGP, ASN 65515): 2× ~€140/Monat  →  deployVpnGateway</a:t>
+              <a:t>Azure Bastion Standard (1×): ~€120/Monat  [Default: 2× = €240]</a:t>
             </a:r>
           </a:p>
           <a:p>
             <a:pPr/>
             <a:r>
               <a:rPr sz="1300"/>
-              <a:t>ExpressRoute Gateway: 2× ~€280/Monat  →  deployExpressRouteGateway</a:t>
+              <a:t>VPN Gateway VpnGw1AZ (1×): ~€140/Monat  [Default: 2× = €280]</a:t>
             </a:r>
           </a:p>
           <a:p>
             <a:pPr/>
             <a:r>
               <a:rPr sz="1300"/>
-              <a:t>DDoS Network Protection: ~€2.500/Monat – teuerster Einzelposten!  →  deployDdosProtectionPlan</a:t>
+              <a:t>ExpressRoute Gateway: deaktiviert – bei ER-Leitung aktivieren [Default: 2× = €560]</a:t>
             </a:r>
           </a:p>
           <a:p>
             <a:pPr/>
             <a:r>
               <a:rPr sz="1300"/>
-              <a:t>Private DNS Zones (alle Azure-Zonen): ~€15/Monat – empfohlen aktiv</a:t>
+              <a:t>DDoS Protection: deaktiviert – bei internet-facing Workloads aktivieren [Default: €2.500]</a:t>
             </a:r>
           </a:p>
           <a:p>
             <a:pPr/>
             <a:r>
               <a:rPr sz="1300"/>
-              <a:t>Alternative: network_type: none → MGs + Policies + Logging ≈ €0</a:t>
+              <a:t>Private DNS Zones + DNS Resolver: aktiv – unveraendert  ~€40/Monat</a:t>
             </a:r>
           </a:p>
         </p:txBody>
@@ -27036,7 +27036,7 @@
           <a:lstStyle/>
           <a:p>
             <a:r>
-              <a:t>Von ≈€0 (Governance only) bis ≈€5.800/Monat (Full Default)</a:t>
+              <a:t>Bechtle-Empfehlung: ~€1.050/Monat – voller Funktionsumfang, eine Region</a:t>
             </a:r>
           </a:p>
         </p:txBody>
@@ -27092,7 +27092,7 @@
           <a:lstStyle/>
           <a:p>
             <a:r>
-              <a:t>Kosten-Varianten – gestufter Ausbau empfohlen</a:t>
+              <a:t>Gestufter Ausbau: €0 → €1.050 → €5.800</a:t>
             </a:r>
           </a:p>
         </p:txBody>
@@ -27115,42 +27115,56 @@
             <a:pPr/>
             <a:r>
               <a:rPr sz="1300"/>
-              <a:t>Nur Governance (Pilot): network_type: none → MGs + volles Policy-Set + Logging  ≈ €0 + LAW</a:t>
+              <a:t>Stufe 1 – Governance-Pilot: network_type: none → MGs + volles Policy-Set + Logging  ca. €50/Monat (nur LAW)</a:t>
             </a:r>
           </a:p>
           <a:p>
             <a:pPr/>
             <a:r>
               <a:rPr sz="1300"/>
-              <a:t>Minimales Netzwerk: Hub-VNets + Private DNS Zones  ≈ €15/Monat</a:t>
+              <a:t>Stufe 2 – Bechtle-Empfehlung: Firewall Standard, 1 Region, kein DDoS/ER  →  ~€1.050/Monat</a:t>
+            </a:r>
+          </a:p>
+          <a:p>
+            <a:pPr lvl="1"/>
+            <a:r>
+              <a:rPr sz="1300"/>
+              <a:t>  Firewall Standard 1×: ~€700  |  Bastion 1×: ~€120  |  VPN GW 1×: ~€140  |  DNS: ~€40  |  LAW: ~€50</a:t>
             </a:r>
           </a:p>
           <a:p>
             <a:pPr/>
             <a:r>
               <a:rPr sz="1300"/>
-              <a:t>Produktionsnetz ohne DDoS: alle Dienste außer DDoS  ≈ €3.300/Monat</a:t>
+              <a:t>Stufe 3 – Geo-Redundanz: + Sekundar-Hub NE  →  ~€1.800/Monat</a:t>
             </a:r>
           </a:p>
           <a:p>
             <a:pPr/>
             <a:r>
               <a:rPr sz="1300"/>
-              <a:t>Vollständiger Microsoft-Default: beide Regionen, alle Dienste  ≈ €5.800/Monat</a:t>
+              <a:t>Stufe 4 – Firewall Premium: IDPS / TLS / URL-Filterung  →  ~€2.400/Monat</a:t>
             </a:r>
           </a:p>
           <a:p>
             <a:pPr/>
             <a:r>
               <a:rPr sz="1300"/>
-              <a:t>DDoS Protection im Default AN: ~€2.500/Monat – bewusste Entscheidung nach Risikobewertung erforderlich!</a:t>
+              <a:t>Stufe 5 – DDoS Protection: bei internet-facing Workloads  →  ~€4.900/Monat</a:t>
             </a:r>
           </a:p>
           <a:p>
             <a:pPr/>
             <a:r>
               <a:rPr sz="1300"/>
-              <a:t>Empfehlung: Governance → VNets/DNS → Firewall/Bastion → Gateways → DDoS (je nach Bedarf)</a:t>
+              <a:t>Stufe 6 – Microsoft-Default: alle Dienste, beide Regionen  →  ~€5.800/Monat</a:t>
+            </a:r>
+          </a:p>
+          <a:p>
+            <a:pPr/>
+            <a:r>
+              <a:rPr sz="1300"/>
+              <a:t>Alle Stufen sind additive Aenderungen – kein Rueckbau erforderlich</a:t>
             </a:r>
           </a:p>
         </p:txBody>

--- a/docs/konzept/Powerpoint/Azure-Landing-Zone-Konzept.pptx
+++ b/docs/konzept/Powerpoint/Azure-Landing-Zone-Konzept.pptx
@@ -49,6 +49,7 @@
     <p:sldId id="288" r:id="rId44"/>
     <p:sldId id="289" r:id="rId45"/>
     <p:sldId id="290" r:id="rId46"/>
+    <p:sldId id="291" r:id="rId47"/>
   </p:sldIdLst>
   <p:sldSz cx="12192000" cy="6858000"/>
   <p:notesSz cx="7099300" cy="10234613"/>
@@ -27553,14 +27554,114 @@
           <a:lstStyle/>
           <a:p>
             <a:r>
-              <a:t>11  ·  Roadmap und Phasen</a:t>
-            </a:r>
-          </a:p>
-        </p:txBody>
-      </p:sp>
-      <p:sp>
-        <p:nvSpPr>
-          <p:cNvPr id="3" name="Subtitle 2"/>
+              <a:t>Bechtle-Varianten: Drei Einsparstufen im Vergleich</a:t>
+            </a:r>
+          </a:p>
+        </p:txBody>
+      </p:sp>
+      <p:sp>
+        <p:nvSpPr>
+          <p:cNvPr id="3" name="Text Placeholder 2"/>
+          <p:cNvSpPr>
+            <a:spLocks noGrp="1"/>
+          </p:cNvSpPr>
+          <p:nvPr>
+            <p:ph type="body" idx="13" sz="quarter"/>
+          </p:nvPr>
+        </p:nvSpPr>
+        <p:spPr/>
+        <p:txBody>
+          <a:bodyPr wrap="square"/>
+          <a:lstStyle/>
+          <a:p>
+            <a:pPr/>
+            <a:r>
+              <a:rPr sz="1100"/>
+              <a:t>Option A – Bechtle-Standard  ~€1.050/Monat  (Baseline)</a:t>
+            </a:r>
+          </a:p>
+          <a:p>
+            <a:pPr lvl="1"/>
+            <a:r>
+              <a:rPr sz="1100"/>
+              <a:t>FW Standard ~€700 | VPN GW ~€140 | Bastion ~€120 | DNS ~€25 | LAW ~€50</a:t>
+            </a:r>
+          </a:p>
+          <a:p>
+            <a:pPr lvl="1"/>
+            <a:r>
+              <a:rPr sz="1100"/>
+              <a:t>ALZ-konform: Ja  |  Einschränkung: keine</a:t>
+            </a:r>
+          </a:p>
+          <a:p>
+            <a:pPr/>
+            <a:r>
+              <a:rPr sz="1100"/>
+              <a:t>Option B – Bechtle-Optimiert  ~€770/Monat  (ALZ-konform)</a:t>
+            </a:r>
+          </a:p>
+          <a:p>
+            <a:pPr lvl="1"/>
+            <a:r>
+              <a:rPr sz="1100"/>
+              <a:t>FW Standard reserved ~€560 | VPN Gateway deferred (€0) | Bastion ~€120 | DNS ~€40 | LAW ~€50</a:t>
+            </a:r>
+          </a:p>
+          <a:p>
+            <a:pPr lvl="1"/>
+            <a:r>
+              <a:rPr sz="1100"/>
+              <a:t>ALZ-konform: Ja  |  Ersparnis: ~€280/Mon. (26 %)</a:t>
+            </a:r>
+          </a:p>
+          <a:p>
+            <a:pPr lvl="1"/>
+            <a:r>
+              <a:rPr sz="1100"/>
+              <a:t>Einschraenkung: VPN erst deployen wenn on-prem benoetigt; 1-J.-Bindung auf FW</a:t>
+            </a:r>
+          </a:p>
+          <a:p>
+            <a:pPr/>
+            <a:r>
+              <a:rPr sz="1100"/>
+              <a:t>Option C – Bechtle-Budget  ~€500/Monat  (⚠ ALZ-Bruch)</a:t>
+            </a:r>
+          </a:p>
+          <a:p>
+            <a:pPr lvl="1"/>
+            <a:r>
+              <a:rPr sz="1100"/>
+              <a:t>FW Basic ~€300 | VPN Gateway deferred (€0) | Bastion ~€120 | DNS ~€40 | LAW ~€50</a:t>
+            </a:r>
+          </a:p>
+          <a:p>
+            <a:pPr lvl="1"/>
+            <a:r>
+              <a:rPr sz="1100"/>
+              <a:t>ALZ-konform: NEIN  |  Ersparnis: ~€550/Mon. (52 %)</a:t>
+            </a:r>
+          </a:p>
+          <a:p>
+            <a:pPr lvl="1"/>
+            <a:r>
+              <a:rPr sz="1100"/>
+              <a:t>Bruch: Firewall Basic = keine Application Rules, kein Threat Intel, kein Autoscaling</a:t>
+            </a:r>
+          </a:p>
+          <a:p>
+            <a:pPr lvl="1"/>
+            <a:r>
+              <a:rPr sz="1100"/>
+              <a:t>Microsoft: 'not recommended for enterprise' – ALZ-FW-Policies nicht kompatibel</a:t>
+            </a:r>
+          </a:p>
+        </p:txBody>
+      </p:sp>
+      <p:sp>
+        <p:nvSpPr>
+          <p:cNvPr id="4" name="Subtitle 3"/>
           <p:cNvSpPr>
             <a:spLocks noGrp="1"/>
           </p:cNvSpPr>
@@ -27574,26 +27675,9 @@
           <a:lstStyle/>
           <a:p>
             <a:r>
-              <a:t>6 Phasen – von Kickoff bis laufendem Betrieb</a:t>
-            </a:r>
-          </a:p>
-        </p:txBody>
-      </p:sp>
-      <p:sp>
-        <p:nvSpPr>
-          <p:cNvPr id="4" name="Text Placeholder 3"/>
-          <p:cNvSpPr>
-            <a:spLocks noGrp="1"/>
-          </p:cNvSpPr>
-          <p:nvPr>
-            <p:ph type="body" idx="13" sz="quarter"/>
-          </p:nvPr>
-        </p:nvSpPr>
-        <p:spPr/>
-        <p:txBody>
-          <a:bodyPr/>
-          <a:lstStyle/>
-          <a:p/>
+              <a:t>Kosten und Kostensteuerung</a:t>
+            </a:r>
+          </a:p>
         </p:txBody>
       </p:sp>
     </p:spTree>
@@ -27630,72 +27714,14 @@
           <a:lstStyle/>
           <a:p>
             <a:r>
-              <a:t>6 Projektphasen im Überblick</a:t>
-            </a:r>
-          </a:p>
-        </p:txBody>
-      </p:sp>
-      <p:sp>
-        <p:nvSpPr>
-          <p:cNvPr id="3" name="Text Placeholder 2"/>
-          <p:cNvSpPr>
-            <a:spLocks noGrp="1"/>
-          </p:cNvSpPr>
-          <p:nvPr>
-            <p:ph type="body" idx="13" sz="quarter"/>
-          </p:nvPr>
-        </p:nvSpPr>
-        <p:spPr/>
-        <p:txBody>
-          <a:bodyPr wrap="square"/>
-          <a:lstStyle/>
-          <a:p>
-            <a:pPr/>
-            <a:r>
-              <a:rPr sz="1300"/>
-              <a:t>Phase 1 – Beratung &amp; Kickoff: Discovery-Workshop; Entscheidungsprotokoll (Region, Netzwerk, DDoS, Enforcement)</a:t>
-            </a:r>
-          </a:p>
-          <a:p>
-            <a:pPr/>
-            <a:r>
-              <a:rPr sz="1300"/>
-              <a:t>Phase 2 – Bootstrap &amp; Grundgerüst: Deploy-Accelerator; MGs + Policies (DoNotEnforce); Logging aktiv  ≈ €0</a:t>
-            </a:r>
-          </a:p>
-          <a:p>
-            <a:pPr/>
-            <a:r>
-              <a:rPr sz="1300"/>
-              <a:t>Phase 3 – Netzwerk-Pilot: Hub-VNets + DNS; erste Spoke-VNets; ggf. minimale Firewall  €15–€1.300/Monat</a:t>
-            </a:r>
-          </a:p>
-          <a:p>
-            <a:pPr/>
-            <a:r>
-              <a:rPr sz="1300"/>
-              <a:t>Phase 4 – Sicherheit &amp; Enforcement: Defender aktivieren; Guardrails einschalten; Remediation  + Defender-Kosten</a:t>
-            </a:r>
-          </a:p>
-          <a:p>
-            <a:pPr/>
-            <a:r>
-              <a:rPr sz="1300"/>
-              <a:t>Phase 5 – Workload-Onboarding: erste Applikation in ALZ; Spoke-Netzwerke; RBAC-Gruppen befüllen</a:t>
-            </a:r>
-          </a:p>
-          <a:p>
-            <a:pPr/>
-            <a:r>
-              <a:rPr sz="1300"/>
-              <a:t>Phase 6 – Betrieb &amp; Optimierung: Cost Management; Tagging; Monitoring-Dashboards; Policy-Weiterentwicklung</a:t>
-            </a:r>
-          </a:p>
-        </p:txBody>
-      </p:sp>
-      <p:sp>
-        <p:nvSpPr>
-          <p:cNvPr id="4" name="Subtitle 3"/>
+              <a:t>11  ·  Roadmap und Phasen</a:t>
+            </a:r>
+          </a:p>
+        </p:txBody>
+      </p:sp>
+      <p:sp>
+        <p:nvSpPr>
+          <p:cNvPr id="3" name="Subtitle 2"/>
           <p:cNvSpPr>
             <a:spLocks noGrp="1"/>
           </p:cNvSpPr>
@@ -27709,9 +27735,26 @@
           <a:lstStyle/>
           <a:p>
             <a:r>
-              <a:t>Roadmap und Phasen</a:t>
-            </a:r>
-          </a:p>
+              <a:t>6 Phasen – von Kickoff bis laufendem Betrieb</a:t>
+            </a:r>
+          </a:p>
+        </p:txBody>
+      </p:sp>
+      <p:sp>
+        <p:nvSpPr>
+          <p:cNvPr id="4" name="Text Placeholder 3"/>
+          <p:cNvSpPr>
+            <a:spLocks noGrp="1"/>
+          </p:cNvSpPr>
+          <p:nvPr>
+            <p:ph type="body" idx="13" sz="quarter"/>
+          </p:nvPr>
+        </p:nvSpPr>
+        <p:spPr/>
+        <p:txBody>
+          <a:bodyPr/>
+          <a:lstStyle/>
+          <a:p/>
         </p:txBody>
       </p:sp>
     </p:spTree>
@@ -27748,14 +27791,72 @@
           <a:lstStyle/>
           <a:p>
             <a:r>
-              <a:t>12  ·  Risiken und Entscheidungen</a:t>
-            </a:r>
-          </a:p>
-        </p:txBody>
-      </p:sp>
-      <p:sp>
-        <p:nvSpPr>
-          <p:cNvPr id="3" name="Subtitle 2"/>
+              <a:t>6 Projektphasen im Überblick</a:t>
+            </a:r>
+          </a:p>
+        </p:txBody>
+      </p:sp>
+      <p:sp>
+        <p:nvSpPr>
+          <p:cNvPr id="3" name="Text Placeholder 2"/>
+          <p:cNvSpPr>
+            <a:spLocks noGrp="1"/>
+          </p:cNvSpPr>
+          <p:nvPr>
+            <p:ph type="body" idx="13" sz="quarter"/>
+          </p:nvPr>
+        </p:nvSpPr>
+        <p:spPr/>
+        <p:txBody>
+          <a:bodyPr wrap="square"/>
+          <a:lstStyle/>
+          <a:p>
+            <a:pPr/>
+            <a:r>
+              <a:rPr sz="1300"/>
+              <a:t>Phase 1 – Beratung &amp; Kickoff: Discovery-Workshop; Entscheidungsprotokoll (Region, Netzwerk, DDoS, Enforcement)</a:t>
+            </a:r>
+          </a:p>
+          <a:p>
+            <a:pPr/>
+            <a:r>
+              <a:rPr sz="1300"/>
+              <a:t>Phase 2 – Bootstrap &amp; Grundgerüst: Deploy-Accelerator; MGs + Policies (DoNotEnforce); Logging aktiv  ≈ €0</a:t>
+            </a:r>
+          </a:p>
+          <a:p>
+            <a:pPr/>
+            <a:r>
+              <a:rPr sz="1300"/>
+              <a:t>Phase 3 – Netzwerk-Pilot: Hub-VNets + DNS; erste Spoke-VNets; ggf. minimale Firewall  €15–€1.300/Monat</a:t>
+            </a:r>
+          </a:p>
+          <a:p>
+            <a:pPr/>
+            <a:r>
+              <a:rPr sz="1300"/>
+              <a:t>Phase 4 – Sicherheit &amp; Enforcement: Defender aktivieren; Guardrails einschalten; Remediation  + Defender-Kosten</a:t>
+            </a:r>
+          </a:p>
+          <a:p>
+            <a:pPr/>
+            <a:r>
+              <a:rPr sz="1300"/>
+              <a:t>Phase 5 – Workload-Onboarding: erste Applikation in ALZ; Spoke-Netzwerke; RBAC-Gruppen befüllen</a:t>
+            </a:r>
+          </a:p>
+          <a:p>
+            <a:pPr/>
+            <a:r>
+              <a:rPr sz="1300"/>
+              <a:t>Phase 6 – Betrieb &amp; Optimierung: Cost Management; Tagging; Monitoring-Dashboards; Policy-Weiterentwicklung</a:t>
+            </a:r>
+          </a:p>
+        </p:txBody>
+      </p:sp>
+      <p:sp>
+        <p:nvSpPr>
+          <p:cNvPr id="4" name="Subtitle 3"/>
           <p:cNvSpPr>
             <a:spLocks noGrp="1"/>
           </p:cNvSpPr>
@@ -27769,26 +27870,9 @@
           <a:lstStyle/>
           <a:p>
             <a:r>
-              <a:t>Klare Entscheidungen für einen sicheren Start</a:t>
-            </a:r>
-          </a:p>
-        </p:txBody>
-      </p:sp>
-      <p:sp>
-        <p:nvSpPr>
-          <p:cNvPr id="4" name="Text Placeholder 3"/>
-          <p:cNvSpPr>
-            <a:spLocks noGrp="1"/>
-          </p:cNvSpPr>
-          <p:nvPr>
-            <p:ph type="body" idx="13" sz="quarter"/>
-          </p:nvPr>
-        </p:nvSpPr>
-        <p:spPr/>
-        <p:txBody>
-          <a:bodyPr/>
-          <a:lstStyle/>
-          <a:p/>
+              <a:t>Roadmap und Phasen</a:t>
+            </a:r>
+          </a:p>
         </p:txBody>
       </p:sp>
     </p:spTree>
@@ -27943,79 +28027,14 @@
           <a:lstStyle/>
           <a:p>
             <a:r>
-              <a:t>Top-Risiken und Entscheidungsbedarf</a:t>
-            </a:r>
-          </a:p>
-        </p:txBody>
-      </p:sp>
-      <p:sp>
-        <p:nvSpPr>
-          <p:cNvPr id="3" name="Text Placeholder 2"/>
-          <p:cNvSpPr>
-            <a:spLocks noGrp="1"/>
-          </p:cNvSpPr>
-          <p:nvPr>
-            <p:ph type="body" idx="13" sz="quarter"/>
-          </p:nvPr>
-        </p:nvSpPr>
-        <p:spPr/>
-        <p:txBody>
-          <a:bodyPr wrap="square"/>
-          <a:lstStyle/>
-          <a:p>
-            <a:pPr/>
-            <a:r>
-              <a:rPr sz="1300"/>
-              <a:t>DDoS im Default AN → ~€2.500/Monat unerwartet; deployDdosProtectionPlan: false für Start</a:t>
-            </a:r>
-          </a:p>
-          <a:p>
-            <a:pPr/>
-            <a:r>
-              <a:rPr sz="1300"/>
-              <a:t>Subscription-Typ: kein Free Tier → EA/MCA/PAYG vor Bootstrap sicherstellen</a:t>
-            </a:r>
-          </a:p>
-          <a:p>
-            <a:pPr/>
-            <a:r>
-              <a:rPr sz="1300"/>
-              <a:t>IP-Adresskonflikt On-Prem mit Hub-VNets → IP-Plan vor Netzwerk-Deploy abstimmen</a:t>
-            </a:r>
-          </a:p>
-          <a:p>
-            <a:pPr/>
-            <a:r>
-              <a:rPr sz="1300"/>
-              <a:t>Defender-Pläne auto. per Policy aktiviert → Tier-Konfiguration vor Apply reviewen</a:t>
-            </a:r>
-          </a:p>
-          <a:p>
-            <a:pPr/>
-            <a:r>
-              <a:rPr sz="1300"/>
-              <a:t>Entscheidung: network_type: none (€0) vs. hubNetworking (~€5.800) für Pilot</a:t>
-            </a:r>
-          </a:p>
-          <a:p>
-            <a:pPr/>
-            <a:r>
-              <a:rPr sz="1300"/>
-              <a:t>Entscheidung: Enforcement-Zeitpunkt – wann von DoNotEnforce auf Enabled (Empfehlung: 4–8 Wochen Audit-Phase)</a:t>
-            </a:r>
-          </a:p>
-          <a:p>
-            <a:pPr/>
-            <a:r>
-              <a:rPr sz="1300"/>
-              <a:t>Entscheidung: On-Prem-Anbindung – VPN vs. ExpressRoute vs. keins (je nach SLA und Bandbreite)</a:t>
-            </a:r>
-          </a:p>
-        </p:txBody>
-      </p:sp>
-      <p:sp>
-        <p:nvSpPr>
-          <p:cNvPr id="4" name="Subtitle 3"/>
+              <a:t>12  ·  Risiken und Entscheidungen</a:t>
+            </a:r>
+          </a:p>
+        </p:txBody>
+      </p:sp>
+      <p:sp>
+        <p:nvSpPr>
+          <p:cNvPr id="3" name="Subtitle 2"/>
           <p:cNvSpPr>
             <a:spLocks noGrp="1"/>
           </p:cNvSpPr>
@@ -28029,9 +28048,26 @@
           <a:lstStyle/>
           <a:p>
             <a:r>
-              <a:t>Risiken und Entscheidungen</a:t>
-            </a:r>
-          </a:p>
+              <a:t>Klare Entscheidungen für einen sicheren Start</a:t>
+            </a:r>
+          </a:p>
+        </p:txBody>
+      </p:sp>
+      <p:sp>
+        <p:nvSpPr>
+          <p:cNvPr id="4" name="Text Placeholder 3"/>
+          <p:cNvSpPr>
+            <a:spLocks noGrp="1"/>
+          </p:cNvSpPr>
+          <p:nvPr>
+            <p:ph type="body" idx="13" sz="quarter"/>
+          </p:nvPr>
+        </p:nvSpPr>
+        <p:spPr/>
+        <p:txBody>
+          <a:bodyPr/>
+          <a:lstStyle/>
+          <a:p/>
         </p:txBody>
       </p:sp>
     </p:spTree>
@@ -28068,14 +28104,79 @@
           <a:lstStyle/>
           <a:p>
             <a:r>
-              <a:t>13  ·  Ergänzende Randthemen</a:t>
-            </a:r>
-          </a:p>
-        </p:txBody>
-      </p:sp>
-      <p:sp>
-        <p:nvSpPr>
-          <p:cNvPr id="3" name="Subtitle 2"/>
+              <a:t>Top-Risiken und Entscheidungsbedarf</a:t>
+            </a:r>
+          </a:p>
+        </p:txBody>
+      </p:sp>
+      <p:sp>
+        <p:nvSpPr>
+          <p:cNvPr id="3" name="Text Placeholder 2"/>
+          <p:cNvSpPr>
+            <a:spLocks noGrp="1"/>
+          </p:cNvSpPr>
+          <p:nvPr>
+            <p:ph type="body" idx="13" sz="quarter"/>
+          </p:nvPr>
+        </p:nvSpPr>
+        <p:spPr/>
+        <p:txBody>
+          <a:bodyPr wrap="square"/>
+          <a:lstStyle/>
+          <a:p>
+            <a:pPr/>
+            <a:r>
+              <a:rPr sz="1300"/>
+              <a:t>DDoS im Default AN → ~€2.500/Monat unerwartet; deployDdosProtectionPlan: false für Start</a:t>
+            </a:r>
+          </a:p>
+          <a:p>
+            <a:pPr/>
+            <a:r>
+              <a:rPr sz="1300"/>
+              <a:t>Subscription-Typ: kein Free Tier → EA/MCA/PAYG vor Bootstrap sicherstellen</a:t>
+            </a:r>
+          </a:p>
+          <a:p>
+            <a:pPr/>
+            <a:r>
+              <a:rPr sz="1300"/>
+              <a:t>IP-Adresskonflikt On-Prem mit Hub-VNets → IP-Plan vor Netzwerk-Deploy abstimmen</a:t>
+            </a:r>
+          </a:p>
+          <a:p>
+            <a:pPr/>
+            <a:r>
+              <a:rPr sz="1300"/>
+              <a:t>Defender-Pläne auto. per Policy aktiviert → Tier-Konfiguration vor Apply reviewen</a:t>
+            </a:r>
+          </a:p>
+          <a:p>
+            <a:pPr/>
+            <a:r>
+              <a:rPr sz="1300"/>
+              <a:t>Entscheidung: network_type: none (€0) vs. hubNetworking (~€5.800) für Pilot</a:t>
+            </a:r>
+          </a:p>
+          <a:p>
+            <a:pPr/>
+            <a:r>
+              <a:rPr sz="1300"/>
+              <a:t>Entscheidung: Enforcement-Zeitpunkt – wann von DoNotEnforce auf Enabled (Empfehlung: 4–8 Wochen Audit-Phase)</a:t>
+            </a:r>
+          </a:p>
+          <a:p>
+            <a:pPr/>
+            <a:r>
+              <a:rPr sz="1300"/>
+              <a:t>Entscheidung: On-Prem-Anbindung – VPN vs. ExpressRoute vs. keins (je nach SLA und Bandbreite)</a:t>
+            </a:r>
+          </a:p>
+        </p:txBody>
+      </p:sp>
+      <p:sp>
+        <p:nvSpPr>
+          <p:cNvPr id="4" name="Subtitle 3"/>
           <p:cNvSpPr>
             <a:spLocks noGrp="1"/>
           </p:cNvSpPr>
@@ -28089,26 +28190,9 @@
           <a:lstStyle/>
           <a:p>
             <a:r>
-              <a:t>Außerhalb des ALZ-Scopes – aber eng verknüpft</a:t>
-            </a:r>
-          </a:p>
-        </p:txBody>
-      </p:sp>
-      <p:sp>
-        <p:nvSpPr>
-          <p:cNvPr id="4" name="Text Placeholder 3"/>
-          <p:cNvSpPr>
-            <a:spLocks noGrp="1"/>
-          </p:cNvSpPr>
-          <p:nvPr>
-            <p:ph type="body" idx="13" sz="quarter"/>
-          </p:nvPr>
-        </p:nvSpPr>
-        <p:spPr/>
-        <p:txBody>
-          <a:bodyPr/>
-          <a:lstStyle/>
-          <a:p/>
+              <a:t>Risiken und Entscheidungen</a:t>
+            </a:r>
+          </a:p>
         </p:txBody>
       </p:sp>
     </p:spTree>
@@ -28145,72 +28229,14 @@
           <a:lstStyle/>
           <a:p>
             <a:r>
-              <a:t>Abhängigkeiten und Folge-Bausteine</a:t>
-            </a:r>
-          </a:p>
-        </p:txBody>
-      </p:sp>
-      <p:sp>
-        <p:nvSpPr>
-          <p:cNvPr id="3" name="Text Placeholder 2"/>
-          <p:cNvSpPr>
-            <a:spLocks noGrp="1"/>
-          </p:cNvSpPr>
-          <p:nvPr>
-            <p:ph type="body" idx="13" sz="quarter"/>
-          </p:nvPr>
-        </p:nvSpPr>
-        <p:spPr/>
-        <p:txBody>
-          <a:bodyPr wrap="square"/>
-          <a:lstStyle/>
-          <a:p>
-            <a:pPr/>
-            <a:r>
-              <a:rPr sz="1300"/>
-              <a:t>Entra ID &amp; Identity: PIM, Conditional Access, hybride Identitäten → Identity-Baseline als Folgestufe</a:t>
-            </a:r>
-          </a:p>
-          <a:p>
-            <a:pPr/>
-            <a:r>
-              <a:rPr sz="1300"/>
-              <a:t>On-Prem-Anbindung: VPN-Gateway (deployt, aktiv) oder ExpressRoute → Leitungsbestellung + BGP-Konfiguration außerhalb Scope</a:t>
-            </a:r>
-          </a:p>
-          <a:p>
-            <a:pPr/>
-            <a:r>
-              <a:rPr sz="1300"/>
-              <a:t>Backup &amp; DR: Deploy-VM-Backup aktiv via Policy; Recovery Vault-Konfiguration und DR-Tests als Folgestufe</a:t>
-            </a:r>
-          </a:p>
-          <a:p>
-            <a:pPr/>
-            <a:r>
-              <a:rPr sz="1300"/>
-              <a:t>Kostenmanagement: Azure Cost Management Dashboards, Budget-Alerts je MG/Sub, FinOps-Prozesse</a:t>
-            </a:r>
-          </a:p>
-          <a:p>
-            <a:pPr/>
-            <a:r>
-              <a:rPr sz="1300"/>
-              <a:t>Compliance &amp; Regulatorik: BSI, ISO 27001, DSGVO → Defender for Cloud Regulatory Compliance Dashboard</a:t>
-            </a:r>
-          </a:p>
-          <a:p>
-            <a:pPr/>
-            <a:r>
-              <a:rPr sz="1300"/>
-              <a:t>Workload-Migration: Azure Migrate Assessment → ALZ ist das Ziel, nicht der Migrations-Prozess selbst</a:t>
-            </a:r>
-          </a:p>
-        </p:txBody>
-      </p:sp>
-      <p:sp>
-        <p:nvSpPr>
-          <p:cNvPr id="4" name="Subtitle 3"/>
+              <a:t>13  ·  Ergänzende Randthemen</a:t>
+            </a:r>
+          </a:p>
+        </p:txBody>
+      </p:sp>
+      <p:sp>
+        <p:nvSpPr>
+          <p:cNvPr id="3" name="Subtitle 2"/>
           <p:cNvSpPr>
             <a:spLocks noGrp="1"/>
           </p:cNvSpPr>
@@ -28224,9 +28250,26 @@
           <a:lstStyle/>
           <a:p>
             <a:r>
-              <a:t>Ergänzende Randthemen</a:t>
-            </a:r>
-          </a:p>
+              <a:t>Außerhalb des ALZ-Scopes – aber eng verknüpft</a:t>
+            </a:r>
+          </a:p>
+        </p:txBody>
+      </p:sp>
+      <p:sp>
+        <p:nvSpPr>
+          <p:cNvPr id="4" name="Text Placeholder 3"/>
+          <p:cNvSpPr>
+            <a:spLocks noGrp="1"/>
+          </p:cNvSpPr>
+          <p:nvPr>
+            <p:ph type="body" idx="13" sz="quarter"/>
+          </p:nvPr>
+        </p:nvSpPr>
+        <p:spPr/>
+        <p:txBody>
+          <a:bodyPr/>
+          <a:lstStyle/>
+          <a:p/>
         </p:txBody>
       </p:sp>
     </p:spTree>
@@ -28263,14 +28306,72 @@
           <a:lstStyle/>
           <a:p>
             <a:r>
-              <a:t>14  ·  Nächste Schritte</a:t>
-            </a:r>
-          </a:p>
-        </p:txBody>
-      </p:sp>
-      <p:sp>
-        <p:nvSpPr>
-          <p:cNvPr id="3" name="Subtitle 2"/>
+              <a:t>Abhängigkeiten und Folge-Bausteine</a:t>
+            </a:r>
+          </a:p>
+        </p:txBody>
+      </p:sp>
+      <p:sp>
+        <p:nvSpPr>
+          <p:cNvPr id="3" name="Text Placeholder 2"/>
+          <p:cNvSpPr>
+            <a:spLocks noGrp="1"/>
+          </p:cNvSpPr>
+          <p:nvPr>
+            <p:ph type="body" idx="13" sz="quarter"/>
+          </p:nvPr>
+        </p:nvSpPr>
+        <p:spPr/>
+        <p:txBody>
+          <a:bodyPr wrap="square"/>
+          <a:lstStyle/>
+          <a:p>
+            <a:pPr/>
+            <a:r>
+              <a:rPr sz="1300"/>
+              <a:t>Entra ID &amp; Identity: PIM, Conditional Access, hybride Identitäten → Identity-Baseline als Folgestufe</a:t>
+            </a:r>
+          </a:p>
+          <a:p>
+            <a:pPr/>
+            <a:r>
+              <a:rPr sz="1300"/>
+              <a:t>On-Prem-Anbindung: VPN-Gateway (deployt, aktiv) oder ExpressRoute → Leitungsbestellung + BGP-Konfiguration außerhalb Scope</a:t>
+            </a:r>
+          </a:p>
+          <a:p>
+            <a:pPr/>
+            <a:r>
+              <a:rPr sz="1300"/>
+              <a:t>Backup &amp; DR: Deploy-VM-Backup aktiv via Policy; Recovery Vault-Konfiguration und DR-Tests als Folgestufe</a:t>
+            </a:r>
+          </a:p>
+          <a:p>
+            <a:pPr/>
+            <a:r>
+              <a:rPr sz="1300"/>
+              <a:t>Kostenmanagement: Azure Cost Management Dashboards, Budget-Alerts je MG/Sub, FinOps-Prozesse</a:t>
+            </a:r>
+          </a:p>
+          <a:p>
+            <a:pPr/>
+            <a:r>
+              <a:rPr sz="1300"/>
+              <a:t>Compliance &amp; Regulatorik: BSI, ISO 27001, DSGVO → Defender for Cloud Regulatory Compliance Dashboard</a:t>
+            </a:r>
+          </a:p>
+          <a:p>
+            <a:pPr/>
+            <a:r>
+              <a:rPr sz="1300"/>
+              <a:t>Workload-Migration: Azure Migrate Assessment → ALZ ist das Ziel, nicht der Migrations-Prozess selbst</a:t>
+            </a:r>
+          </a:p>
+        </p:txBody>
+      </p:sp>
+      <p:sp>
+        <p:nvSpPr>
+          <p:cNvPr id="4" name="Subtitle 3"/>
           <p:cNvSpPr>
             <a:spLocks noGrp="1"/>
           </p:cNvSpPr>
@@ -28284,26 +28385,9 @@
           <a:lstStyle/>
           <a:p>
             <a:r>
-              <a:t>Empfohlener Pilot-Pfad in 6 Schritten – ohne Kostenrisiko</a:t>
-            </a:r>
-          </a:p>
-        </p:txBody>
-      </p:sp>
-      <p:sp>
-        <p:nvSpPr>
-          <p:cNvPr id="4" name="Text Placeholder 3"/>
-          <p:cNvSpPr>
-            <a:spLocks noGrp="1"/>
-          </p:cNvSpPr>
-          <p:nvPr>
-            <p:ph type="body" idx="13" sz="quarter"/>
-          </p:nvPr>
-        </p:nvSpPr>
-        <p:spPr/>
-        <p:txBody>
-          <a:bodyPr/>
-          <a:lstStyle/>
-          <a:p/>
+              <a:t>Ergänzende Randthemen</a:t>
+            </a:r>
+          </a:p>
         </p:txBody>
       </p:sp>
     </p:spTree>
@@ -28340,79 +28424,14 @@
           <a:lstStyle/>
           <a:p>
             <a:r>
-              <a:t>Sofortmaßnahmen und empfohlener Pilot-Pfad</a:t>
-            </a:r>
-          </a:p>
-        </p:txBody>
-      </p:sp>
-      <p:sp>
-        <p:nvSpPr>
-          <p:cNvPr id="3" name="Text Placeholder 2"/>
-          <p:cNvSpPr>
-            <a:spLocks noGrp="1"/>
-          </p:cNvSpPr>
-          <p:nvPr>
-            <p:ph type="body" idx="13" sz="quarter"/>
-          </p:nvPr>
-        </p:nvSpPr>
-        <p:spPr/>
-        <p:txBody>
-          <a:bodyPr wrap="square"/>
-          <a:lstStyle/>
-          <a:p>
-            <a:pPr/>
-            <a:r>
-              <a:rPr sz="1300"/>
-              <a:t>1.  Subscription-ID + GitHub PAT in config/inputs-github.yaml eintragen</a:t>
-            </a:r>
-          </a:p>
-          <a:p>
-            <a:pPr/>
-            <a:r>
-              <a:rPr sz="1300"/>
-              <a:t>2.  Bootstrap: Deploy-Accelerator -inputs config/inputs-github.yaml config/platform-landing-zone.yaml</a:t>
-            </a:r>
-          </a:p>
-          <a:p>
-            <a:pPr/>
-            <a:r>
-              <a:rPr sz="1300"/>
-              <a:t>3.  Pipeline mit What-If prüfen → welche Ressourcen werden erstellt?</a:t>
-            </a:r>
-          </a:p>
-          <a:p>
-            <a:pPr/>
-            <a:r>
-              <a:rPr sz="1300"/>
-              <a:t>4.  Apply genehmigen – network_type: none (≈€0) für risikofreien Pilot-Start</a:t>
-            </a:r>
-          </a:p>
-          <a:p>
-            <a:pPr/>
-            <a:r>
-              <a:rPr sz="1300"/>
-              <a:t>5.  Policy-Compliance-Dashboard reviewen → welche Guardrails greifen, welche nicht?</a:t>
-            </a:r>
-          </a:p>
-          <a:p>
-            <a:pPr/>
-            <a:r>
-              <a:rPr sz="1300"/>
-              <a:t>6.  Schrittweise Enforcement und Netzwerk-Dienste aktivieren nach Audit-Phase</a:t>
-            </a:r>
-          </a:p>
-          <a:p>
-            <a:pPr/>
-            <a:r>
-              <a:rPr sz="1300"/>
-              <a:t>Bechtle begleitet: Kickoff-Workshop → Bootstrap-Begleitung → Pilot → Workload-Onboarding</a:t>
-            </a:r>
-          </a:p>
-        </p:txBody>
-      </p:sp>
-      <p:sp>
-        <p:nvSpPr>
-          <p:cNvPr id="4" name="Subtitle 3"/>
+              <a:t>14  ·  Nächste Schritte</a:t>
+            </a:r>
+          </a:p>
+        </p:txBody>
+      </p:sp>
+      <p:sp>
+        <p:nvSpPr>
+          <p:cNvPr id="3" name="Subtitle 2"/>
           <p:cNvSpPr>
             <a:spLocks noGrp="1"/>
           </p:cNvSpPr>
@@ -28426,9 +28445,26 @@
           <a:lstStyle/>
           <a:p>
             <a:r>
-              <a:t>Nächste Schritte</a:t>
-            </a:r>
-          </a:p>
+              <a:t>Empfohlener Pilot-Pfad in 6 Schritten – ohne Kostenrisiko</a:t>
+            </a:r>
+          </a:p>
+        </p:txBody>
+      </p:sp>
+      <p:sp>
+        <p:nvSpPr>
+          <p:cNvPr id="4" name="Text Placeholder 3"/>
+          <p:cNvSpPr>
+            <a:spLocks noGrp="1"/>
+          </p:cNvSpPr>
+          <p:nvPr>
+            <p:ph type="body" idx="13" sz="quarter"/>
+          </p:nvPr>
+        </p:nvSpPr>
+        <p:spPr/>
+        <p:txBody>
+          <a:bodyPr/>
+          <a:lstStyle/>
+          <a:p/>
         </p:txBody>
       </p:sp>
     </p:spTree>
@@ -28440,6 +28476,131 @@
 </file>
 
 <file path=ppt/slides/slide35.xml><?xml version="1.0" encoding="utf-8"?>
+<p:sld xmlns:a="http://schemas.openxmlformats.org/drawingml/2006/main" xmlns:p="http://schemas.openxmlformats.org/presentationml/2006/main" xmlns:r="http://schemas.openxmlformats.org/officeDocument/2006/relationships">
+  <p:cSld>
+    <p:spTree>
+      <p:nvGrpSpPr>
+        <p:cNvPr id="1" name=""/>
+        <p:cNvGrpSpPr/>
+        <p:nvPr/>
+      </p:nvGrpSpPr>
+      <p:grpSpPr/>
+      <p:sp>
+        <p:nvSpPr>
+          <p:cNvPr id="2" name="Title 1"/>
+          <p:cNvSpPr>
+            <a:spLocks noGrp="1"/>
+          </p:cNvSpPr>
+          <p:nvPr>
+            <p:ph type="title"/>
+          </p:nvPr>
+        </p:nvSpPr>
+        <p:spPr/>
+        <p:txBody>
+          <a:bodyPr/>
+          <a:lstStyle/>
+          <a:p>
+            <a:r>
+              <a:t>Sofortmaßnahmen und empfohlener Pilot-Pfad</a:t>
+            </a:r>
+          </a:p>
+        </p:txBody>
+      </p:sp>
+      <p:sp>
+        <p:nvSpPr>
+          <p:cNvPr id="3" name="Text Placeholder 2"/>
+          <p:cNvSpPr>
+            <a:spLocks noGrp="1"/>
+          </p:cNvSpPr>
+          <p:nvPr>
+            <p:ph type="body" idx="13" sz="quarter"/>
+          </p:nvPr>
+        </p:nvSpPr>
+        <p:spPr/>
+        <p:txBody>
+          <a:bodyPr wrap="square"/>
+          <a:lstStyle/>
+          <a:p>
+            <a:pPr/>
+            <a:r>
+              <a:rPr sz="1300"/>
+              <a:t>1.  Subscription-ID + GitHub PAT in config/inputs-github.yaml eintragen</a:t>
+            </a:r>
+          </a:p>
+          <a:p>
+            <a:pPr/>
+            <a:r>
+              <a:rPr sz="1300"/>
+              <a:t>2.  Bootstrap: Deploy-Accelerator -inputs config/inputs-github.yaml config/platform-landing-zone.yaml</a:t>
+            </a:r>
+          </a:p>
+          <a:p>
+            <a:pPr/>
+            <a:r>
+              <a:rPr sz="1300"/>
+              <a:t>3.  Pipeline mit What-If prüfen → welche Ressourcen werden erstellt?</a:t>
+            </a:r>
+          </a:p>
+          <a:p>
+            <a:pPr/>
+            <a:r>
+              <a:rPr sz="1300"/>
+              <a:t>4.  Apply genehmigen – network_type: none (≈€0) für risikofreien Pilot-Start</a:t>
+            </a:r>
+          </a:p>
+          <a:p>
+            <a:pPr/>
+            <a:r>
+              <a:rPr sz="1300"/>
+              <a:t>5.  Policy-Compliance-Dashboard reviewen → welche Guardrails greifen, welche nicht?</a:t>
+            </a:r>
+          </a:p>
+          <a:p>
+            <a:pPr/>
+            <a:r>
+              <a:rPr sz="1300"/>
+              <a:t>6.  Schrittweise Enforcement und Netzwerk-Dienste aktivieren nach Audit-Phase</a:t>
+            </a:r>
+          </a:p>
+          <a:p>
+            <a:pPr/>
+            <a:r>
+              <a:rPr sz="1300"/>
+              <a:t>Bechtle begleitet: Kickoff-Workshop → Bootstrap-Begleitung → Pilot → Workload-Onboarding</a:t>
+            </a:r>
+          </a:p>
+        </p:txBody>
+      </p:sp>
+      <p:sp>
+        <p:nvSpPr>
+          <p:cNvPr id="4" name="Subtitle 3"/>
+          <p:cNvSpPr>
+            <a:spLocks noGrp="1"/>
+          </p:cNvSpPr>
+          <p:nvPr>
+            <p:ph type="subTitle" idx="1"/>
+          </p:nvPr>
+        </p:nvSpPr>
+        <p:spPr/>
+        <p:txBody>
+          <a:bodyPr/>
+          <a:lstStyle/>
+          <a:p>
+            <a:r>
+              <a:t>Nächste Schritte</a:t>
+            </a:r>
+          </a:p>
+        </p:txBody>
+      </p:sp>
+    </p:spTree>
+  </p:cSld>
+  <p:clrMapOvr>
+    <a:masterClrMapping/>
+  </p:clrMapOvr>
+</p:sld>
+</file>
+
+<file path=ppt/slides/slide36.xml><?xml version="1.0" encoding="utf-8"?>
 <p:sld xmlns:a="http://schemas.openxmlformats.org/drawingml/2006/main" xmlns:p="http://schemas.openxmlformats.org/presentationml/2006/main" xmlns:r="http://schemas.openxmlformats.org/officeDocument/2006/relationships">
   <p:cSld>
     <p:spTree>

--- a/docs/konzept/Powerpoint/Azure-Landing-Zone-Konzept.pptx
+++ b/docs/konzept/Powerpoint/Azure-Landing-Zone-Konzept.pptx
@@ -27554,7 +27554,7 @@
           <a:lstStyle/>
           <a:p>
             <a:r>
-              <a:t>Bechtle-Varianten: Drei Einsparstufen im Vergleich</a:t>
+              <a:t>Bechtle-Varianten: Vier Konfigurationen im Vergleich</a:t>
             </a:r>
           </a:p>
         </p:txBody>
@@ -27584,14 +27584,14 @@
             <a:pPr lvl="1"/>
             <a:r>
               <a:rPr sz="1100"/>
-              <a:t>FW Standard ~€700 | VPN GW ~€140 | Bastion ~€120 | DNS ~€25 | LAW ~€50</a:t>
+              <a:t>FW Standard 1× ~€700 | VPN GW 1× ~€140 | Bastion ~€120 | DNS ~€25 | LAW ~€50</a:t>
             </a:r>
           </a:p>
           <a:p>
             <a:pPr lvl="1"/>
             <a:r>
               <a:rPr sz="1100"/>
-              <a:t>ALZ-konform: Ja  |  Einschränkung: keine</a:t>
+              <a:t>ALZ-konform: Ja  |  Differenz: Referenz</a:t>
             </a:r>
           </a:p>
           <a:p>
@@ -27605,21 +27605,14 @@
             <a:pPr lvl="1"/>
             <a:r>
               <a:rPr sz="1100"/>
-              <a:t>FW Standard reserved ~€560 | VPN Gateway deferred (€0) | Bastion ~€120 | DNS ~€40 | LAW ~€50</a:t>
+              <a:t>FW Standard reserved ~€560 | VPN Gateway deferred (€0) | Bastion ~€120 | DNS ~€25 | LAW ~€50</a:t>
             </a:r>
           </a:p>
           <a:p>
             <a:pPr lvl="1"/>
             <a:r>
               <a:rPr sz="1100"/>
-              <a:t>ALZ-konform: Ja  |  Ersparnis: ~€280/Mon. (26 %)</a:t>
-            </a:r>
-          </a:p>
-          <a:p>
-            <a:pPr lvl="1"/>
-            <a:r>
-              <a:rPr sz="1100"/>
-              <a:t>Einschraenkung: VPN erst deployen wenn on-prem benoetigt; 1-J.-Bindung auf FW</a:t>
+              <a:t>ALZ-konform: Ja  |  Differenz: −€280/Mon. (26 % günstiger)</a:t>
             </a:r>
           </a:p>
           <a:p>
@@ -27633,28 +27626,42 @@
             <a:pPr lvl="1"/>
             <a:r>
               <a:rPr sz="1100"/>
-              <a:t>FW Basic ~€300 | VPN Gateway deferred (€0) | Bastion ~€120 | DNS ~€40 | LAW ~€50</a:t>
+              <a:t>FW Basic ~€300 | VPN Gateway deferred (€0) | Bastion ~€120 | DNS ~€25 | LAW ~€50</a:t>
             </a:r>
           </a:p>
           <a:p>
             <a:pPr lvl="1"/>
             <a:r>
               <a:rPr sz="1100"/>
-              <a:t>ALZ-konform: NEIN  |  Ersparnis: ~€550/Mon. (52 %)</a:t>
+              <a:t>ALZ-konform: NEIN  |  Differenz: −€550/Mon. (52 % günstiger)</a:t>
             </a:r>
           </a:p>
           <a:p>
             <a:pPr lvl="1"/>
             <a:r>
               <a:rPr sz="1100"/>
-              <a:t>Bruch: Firewall Basic = keine Application Rules, kein Threat Intel, kein Autoscaling</a:t>
+              <a:t>Bruch: Firewall Basic = keine App-Rules, kein Threat Intel, kein Autoscaling</a:t>
+            </a:r>
+          </a:p>
+          <a:p>
+            <a:pPr/>
+            <a:r>
+              <a:rPr sz="1100"/>
+              <a:t>Option D – Microsoft-Default  ~€5.800/Monat  (maximaler Standard)</a:t>
             </a:r>
           </a:p>
           <a:p>
             <a:pPr lvl="1"/>
             <a:r>
               <a:rPr sz="1100"/>
-              <a:t>Microsoft: 'not recommended for enterprise' – ALZ-FW-Policies nicht kompatibel</a:t>
+              <a:t>FW Premium 2× ~€2.200 | DDoS Plan ~€2.500 | ER GW 2× ~€560 | VPN 2× | Bastion 2× | 2 Regionen</a:t>
+            </a:r>
+          </a:p>
+          <a:p>
+            <a:pPr lvl="1"/>
+            <a:r>
+              <a:rPr sz="1100"/>
+              <a:t>ALZ-konform: Ja (vollständig)  |  Differenz: +€4.750/Mon. (452 % teurer als A)</a:t>
             </a:r>
           </a:p>
         </p:txBody>

--- a/docs/konzept/Powerpoint/Azure-Landing-Zone-Konzept.pptx
+++ b/docs/konzept/Powerpoint/Azure-Landing-Zone-Konzept.pptx
@@ -50,6 +50,9 @@
     <p:sldId id="289" r:id="rId45"/>
     <p:sldId id="290" r:id="rId46"/>
     <p:sldId id="291" r:id="rId47"/>
+    <p:sldId id="292" r:id="rId48"/>
+    <p:sldId id="293" r:id="rId49"/>
+    <p:sldId id="294" r:id="rId50"/>
   </p:sldIdLst>
   <p:sldSz cx="12192000" cy="6858000"/>
   <p:notesSz cx="7099300" cy="10234613"/>
@@ -25626,7 +25629,8 @@
           <a:lstStyle/>
           <a:p>
             <a:r>
-              <a:t>4  ·  Governance und Policies</a:t>
+              <a:rPr sz="1800"/>
+              <a:t>Zielarchitektur: Azure Landing Zone – Hub-and-Spoke</a:t>
             </a:r>
           </a:p>
         </p:txBody>
@@ -25645,46 +25649,62 @@
         <p:txBody>
           <a:bodyPr/>
           <a:lstStyle/>
-          <a:p>
-            <a:r>
-              <a:t>149 Policy-Definitionen · 42 Initiativen · 123 Assignments</a:t>
-            </a:r>
-          </a:p>
-        </p:txBody>
-      </p:sp>
-      <p:sp>
-        <p:nvSpPr>
-          <p:cNvPr id="4" name="Text Placeholder 3"/>
-          <p:cNvSpPr>
-            <a:spLocks noGrp="1"/>
-          </p:cNvSpPr>
-          <p:nvPr>
-            <p:ph type="body" idx="13" sz="quarter"/>
-          </p:nvPr>
-        </p:nvSpPr>
-        <p:spPr/>
-        <p:txBody>
-          <a:bodyPr wrap="square"/>
+          <a:p/>
+        </p:txBody>
+      </p:sp>
+      <p:pic>
+        <p:nvPicPr>
+          <p:cNvPr id="4" name="Picture 3" descr="alz-hub-spoke.png"/>
+          <p:cNvPicPr>
+            <a:picLocks noChangeAspect="1"/>
+          </p:cNvPicPr>
+          <p:nvPr/>
+        </p:nvPicPr>
+        <p:blipFill>
+          <a:blip r:embed="rId2"/>
+          <a:stretch>
+            <a:fillRect/>
+          </a:stretch>
+        </p:blipFill>
+        <p:spPr>
+          <a:xfrm>
+            <a:off x="274320" y="1234440"/>
+            <a:ext cx="11612880" cy="6919341"/>
+          </a:xfrm>
+          <a:prstGeom prst="rect">
+            <a:avLst/>
+          </a:prstGeom>
+        </p:spPr>
+      </p:pic>
+      <p:sp>
+        <p:nvSpPr>
+          <p:cNvPr id="5" name="TextBox 4"/>
+          <p:cNvSpPr txBox="1"/>
+          <p:nvPr/>
+        </p:nvSpPr>
+        <p:spPr>
+          <a:xfrm>
+            <a:off x="274320" y="6400800"/>
+            <a:ext cx="11612880" cy="365760"/>
+          </a:xfrm>
+          <a:prstGeom prst="rect">
+            <a:avLst/>
+          </a:prstGeom>
+          <a:noFill/>
+        </p:spPr>
+        <p:txBody>
+          <a:bodyPr wrap="none">
+            <a:spAutoFit/>
+          </a:bodyPr>
           <a:lstStyle/>
           <a:p>
-            <a:pPr/>
-            <a:r>
-              <a:rPr sz="1200"/>
-              <a:t>9 MG-Ebenen mit Assignments</a:t>
-            </a:r>
-          </a:p>
-          <a:p>
-            <a:pPr/>
-            <a:r>
-              <a:rPr sz="1200"/>
-              <a:t>5 Custom RBAC-Rollen</a:t>
-            </a:r>
-          </a:p>
-          <a:p>
-            <a:pPr/>
-            <a:r>
-              <a:rPr sz="1200"/>
-              <a:t>DoNotEnforce → sanftes Onboarding</a:t>
+            <a:r>
+              <a:rPr sz="800">
+                <a:solidFill>
+                  <a:srgbClr val="595959"/>
+                </a:solidFill>
+              </a:rPr>
+              <a:t>Quelle: Microsoft Cloud Adoption Framework · learn.microsoft.com</a:t>
             </a:r>
           </a:p>
         </p:txBody>
@@ -25723,79 +25743,15 @@
           <a:lstStyle/>
           <a:p>
             <a:r>
-              <a:t>Das vollständige ALZ-Policy-Set</a:t>
-            </a:r>
-          </a:p>
-        </p:txBody>
-      </p:sp>
-      <p:sp>
-        <p:nvSpPr>
-          <p:cNvPr id="3" name="Text Placeholder 2"/>
-          <p:cNvSpPr>
-            <a:spLocks noGrp="1"/>
-          </p:cNvSpPr>
-          <p:nvPr>
-            <p:ph type="body" idx="13" sz="quarter"/>
-          </p:nvPr>
-        </p:nvSpPr>
-        <p:spPr/>
-        <p:txBody>
-          <a:bodyPr wrap="square"/>
-          <a:lstStyle/>
-          <a:p>
-            <a:pPr/>
-            <a:r>
-              <a:rPr sz="1300"/>
-              <a:t>Policy-Definitionen (Custom): 149 – Monitoring (55), Netzwerk (20), Storage (16), SQL (13), Guardrails je Dienst</a:t>
-            </a:r>
-          </a:p>
-          <a:p>
-            <a:pPr/>
-            <a:r>
-              <a:rPr sz="1300"/>
-              <a:t>Policy-Set-Definitionen (Initiativen): 42 – Deploy-MDFC-Config, Deploy-Private-DNS-Zones, Enforce-Guardrails-* je Dienst</a:t>
-            </a:r>
-          </a:p>
-          <a:p>
-            <a:pPr/>
-            <a:r>
-              <a:rPr sz="1300"/>
-              <a:t>Policy-Assignments: 123 – verteilt auf 9 MG-Ebenen; Kind-MGs erben zusätzlich</a:t>
-            </a:r>
-          </a:p>
-          <a:p>
-            <a:pPr lvl="1"/>
-            <a:r>
-              <a:rPr sz="1300"/>
-              <a:t>alz-Root: 17  ·  alz-landingzones: 53  ·  alz-platform: 40  ·  alz-corp: 5  ·  weitere: 8</a:t>
-            </a:r>
-          </a:p>
-          <a:p>
-            <a:pPr/>
-            <a:r>
-              <a:rPr sz="1300"/>
-              <a:t>5 Custom RBAC-Rollen: Subscription-Owner · Security-Ops · Network-Mgmt · App-Owners · Subnet-Contributor</a:t>
-            </a:r>
-          </a:p>
-          <a:p>
-            <a:pPr/>
-            <a:r>
-              <a:rPr sz="1300"/>
-              <a:t>DoNotEnforce-Modus: Policies greifen (Compliance-Dashboard), blockieren aber nichts → sanftes Onboarding</a:t>
-            </a:r>
-          </a:p>
-          <a:p>
-            <a:pPr/>
-            <a:r>
-              <a:rPr sz="1300"/>
-              <a:t>Stufenplan: Audit → selektiv Enabled → vollständiges Enforcement nach Remediation</a:t>
-            </a:r>
-          </a:p>
-        </p:txBody>
-      </p:sp>
-      <p:sp>
-        <p:nvSpPr>
-          <p:cNvPr id="4" name="Subtitle 3"/>
+              <a:rPr sz="1800"/>
+              <a:t>Zielarchitektur: Management Group Hierarchie</a:t>
+            </a:r>
+          </a:p>
+        </p:txBody>
+      </p:sp>
+      <p:sp>
+        <p:nvSpPr>
+          <p:cNvPr id="3" name="Subtitle 2"/>
           <p:cNvSpPr>
             <a:spLocks noGrp="1"/>
           </p:cNvSpPr>
@@ -25807,9 +25763,62 @@
         <p:txBody>
           <a:bodyPr/>
           <a:lstStyle/>
-          <a:p>
-            <a:r>
-              <a:t>Governance und Policies</a:t>
+          <a:p/>
+        </p:txBody>
+      </p:sp>
+      <p:pic>
+        <p:nvPicPr>
+          <p:cNvPr id="4" name="Picture 3" descr="alz-mg-hierarchy.png"/>
+          <p:cNvPicPr>
+            <a:picLocks noChangeAspect="1"/>
+          </p:cNvPicPr>
+          <p:nvPr/>
+        </p:nvPicPr>
+        <p:blipFill>
+          <a:blip r:embed="rId2"/>
+          <a:stretch>
+            <a:fillRect/>
+          </a:stretch>
+        </p:blipFill>
+        <p:spPr>
+          <a:xfrm>
+            <a:off x="274320" y="1234440"/>
+            <a:ext cx="11612880" cy="3839508"/>
+          </a:xfrm>
+          <a:prstGeom prst="rect">
+            <a:avLst/>
+          </a:prstGeom>
+        </p:spPr>
+      </p:pic>
+      <p:sp>
+        <p:nvSpPr>
+          <p:cNvPr id="5" name="TextBox 4"/>
+          <p:cNvSpPr txBox="1"/>
+          <p:nvPr/>
+        </p:nvSpPr>
+        <p:spPr>
+          <a:xfrm>
+            <a:off x="274320" y="6400800"/>
+            <a:ext cx="11612880" cy="365760"/>
+          </a:xfrm>
+          <a:prstGeom prst="rect">
+            <a:avLst/>
+          </a:prstGeom>
+          <a:noFill/>
+        </p:spPr>
+        <p:txBody>
+          <a:bodyPr wrap="none">
+            <a:spAutoFit/>
+          </a:bodyPr>
+          <a:lstStyle/>
+          <a:p>
+            <a:r>
+              <a:rPr sz="800">
+                <a:solidFill>
+                  <a:srgbClr val="595959"/>
+                </a:solidFill>
+              </a:rPr>
+              <a:t>Quelle: Microsoft Cloud Adoption Framework · learn.microsoft.com</a:t>
             </a:r>
           </a:p>
         </p:txBody>
@@ -25848,7 +25857,7 @@
           <a:lstStyle/>
           <a:p>
             <a:r>
-              <a:t>5  ·  Netzwerk-Architektur</a:t>
+              <a:t>4  ·  Governance und Policies</a:t>
             </a:r>
           </a:p>
         </p:txBody>
@@ -25869,7 +25878,7 @@
           <a:lstStyle/>
           <a:p>
             <a:r>
-              <a:t>Hub-and-Spoke · Bechtle-Empfehlung: 1 Region · Firewall Standard · ~€1.050/Monat</a:t>
+              <a:t>149 Policy-Definitionen · 42 Initiativen · 123 Assignments</a:t>
             </a:r>
           </a:p>
         </p:txBody>
@@ -25886,9 +25895,29 @@
         </p:nvSpPr>
         <p:spPr/>
         <p:txBody>
-          <a:bodyPr/>
+          <a:bodyPr wrap="square"/>
           <a:lstStyle/>
-          <a:p/>
+          <a:p>
+            <a:pPr/>
+            <a:r>
+              <a:rPr sz="1200"/>
+              <a:t>9 MG-Ebenen mit Assignments</a:t>
+            </a:r>
+          </a:p>
+          <a:p>
+            <a:pPr/>
+            <a:r>
+              <a:rPr sz="1200"/>
+              <a:t>5 Custom RBAC-Rollen</a:t>
+            </a:r>
+          </a:p>
+          <a:p>
+            <a:pPr/>
+            <a:r>
+              <a:rPr sz="1200"/>
+              <a:t>DoNotEnforce → sanftes Onboarding</a:t>
+            </a:r>
+          </a:p>
         </p:txBody>
       </p:sp>
     </p:spTree>
@@ -25925,7 +25954,7 @@
           <a:lstStyle/>
           <a:p>
             <a:r>
-              <a:t>Hub-and-Spoke: Bechtle-Empfehlung vs. Microsoft-Default</a:t>
+              <a:t>Das vollständige ALZ-Policy-Set</a:t>
             </a:r>
           </a:p>
         </p:txBody>
@@ -25948,56 +25977,49 @@
             <a:pPr/>
             <a:r>
               <a:rPr sz="1300"/>
-              <a:t>Bechtle-Empfehlung: 1× Hub-VNet GWC 10.0.0.0/22 – alle Kernfunktionen, eine Region, ~€1.050/Monat</a:t>
+              <a:t>Policy-Definitionen (Custom): 149 – Monitoring (55), Netzwerk (20), Storage (16), SQL (13), Guardrails je Dienst</a:t>
             </a:r>
           </a:p>
           <a:p>
             <a:pPr/>
             <a:r>
               <a:rPr sz="1300"/>
-              <a:t>Microsoft-Default: 2× Hub-VNets (GWC + NE) – alle Dienste, beide Regionen, ~€5.800/Monat</a:t>
+              <a:t>Policy-Set-Definitionen (Initiativen): 42 – Deploy-MDFC-Config, Deploy-Private-DNS-Zones, Enforce-Guardrails-* je Dienst</a:t>
             </a:r>
           </a:p>
           <a:p>
             <a:pPr/>
             <a:r>
               <a:rPr sz="1300"/>
-              <a:t>Azure Firewall Standard (1×): ~€700/Monat  [Default: Premium 2× = ~€2.200]</a:t>
+              <a:t>Policy-Assignments: 123 – verteilt auf 9 MG-Ebenen; Kind-MGs erben zusätzlich</a:t>
+            </a:r>
+          </a:p>
+          <a:p>
+            <a:pPr lvl="1"/>
+            <a:r>
+              <a:rPr sz="1300"/>
+              <a:t>alz-Root: 17  ·  alz-landingzones: 53  ·  alz-platform: 40  ·  alz-corp: 5  ·  weitere: 8</a:t>
             </a:r>
           </a:p>
           <a:p>
             <a:pPr/>
             <a:r>
               <a:rPr sz="1300"/>
-              <a:t>Azure Bastion Standard (1×): ~€120/Monat  [Default: 2× = €240]</a:t>
+              <a:t>5 Custom RBAC-Rollen: Subscription-Owner · Security-Ops · Network-Mgmt · App-Owners · Subnet-Contributor</a:t>
             </a:r>
           </a:p>
           <a:p>
             <a:pPr/>
             <a:r>
               <a:rPr sz="1300"/>
-              <a:t>VPN Gateway VpnGw1AZ (1×): ~€140/Monat  [Default: 2× = €280]</a:t>
+              <a:t>DoNotEnforce-Modus: Policies greifen (Compliance-Dashboard), blockieren aber nichts → sanftes Onboarding</a:t>
             </a:r>
           </a:p>
           <a:p>
             <a:pPr/>
             <a:r>
               <a:rPr sz="1300"/>
-              <a:t>ExpressRoute Gateway: deaktiviert – bei ER-Leitung aktivieren [Default: 2× = €560]</a:t>
-            </a:r>
-          </a:p>
-          <a:p>
-            <a:pPr/>
-            <a:r>
-              <a:rPr sz="1300"/>
-              <a:t>DDoS Protection: deaktiviert – bei internet-facing Workloads aktivieren [Default: €2.500]</a:t>
-            </a:r>
-          </a:p>
-          <a:p>
-            <a:pPr/>
-            <a:r>
-              <a:rPr sz="1300"/>
-              <a:t>Private DNS Zones + DNS Resolver: aktiv – unveraendert  ~€40/Monat</a:t>
+              <a:t>Stufenplan: Audit → selektiv Enabled → vollständiges Enforcement nach Remediation</a:t>
             </a:r>
           </a:p>
         </p:txBody>
@@ -26018,7 +26040,7 @@
           <a:lstStyle/>
           <a:p>
             <a:r>
-              <a:t>Netzwerk-Architektur</a:t>
+              <a:t>Governance und Policies</a:t>
             </a:r>
           </a:p>
         </p:txBody>
@@ -26057,7 +26079,7 @@
           <a:lstStyle/>
           <a:p>
             <a:r>
-              <a:t>6  ·  Sicherheit</a:t>
+              <a:t>5  ·  Netzwerk-Architektur</a:t>
             </a:r>
           </a:p>
         </p:txBody>
@@ -26078,7 +26100,7 @@
           <a:lstStyle/>
           <a:p>
             <a:r>
-              <a:t>Defender for Cloud · Netzwerksegmentierung · Automatische Remediation</a:t>
+              <a:t>Hub-and-Spoke · Bechtle-Empfehlung: 1 Region · Firewall Standard · ~€1.050/Monat</a:t>
             </a:r>
           </a:p>
         </p:txBody>
@@ -26134,7 +26156,7 @@
           <a:lstStyle/>
           <a:p>
             <a:r>
-              <a:t>Mehrschichtige Sicherheitsarchitektur</a:t>
+              <a:t>Hub-and-Spoke: Bechtle-Empfehlung vs. Microsoft-Default</a:t>
             </a:r>
           </a:p>
         </p:txBody>
@@ -26157,49 +26179,56 @@
             <a:pPr/>
             <a:r>
               <a:rPr sz="1300"/>
-              <a:t>Präventiv (Policies): Deny-Subnet-Without-Nsg, Deny-MgmtPorts-Internet, Deny-Public-IP, Deny-Public-Endpoints (Corp)</a:t>
+              <a:t>Bechtle-Empfehlung: 1× Hub-VNet GWC 10.0.0.0/22 – alle Kernfunktionen, eine Region, ~€1.050/Monat</a:t>
             </a:r>
           </a:p>
           <a:p>
             <a:pPr/>
             <a:r>
               <a:rPr sz="1300"/>
-              <a:t>Defender for Cloud: auto-aktiviert via Deploy-MDFC-Config-H224 auf alz-Root (DeployIfNotExists)</a:t>
+              <a:t>Microsoft-Default: 2× Hub-VNets (GWC + NE) – alle Dienste, beide Regionen, ~€5.800/Monat</a:t>
             </a:r>
           </a:p>
           <a:p>
             <a:pPr/>
             <a:r>
               <a:rPr sz="1300"/>
-              <a:t>Defender for Endpoint: Deploy-MDEndpoints auf allen VMs – im Defender Server-Plan enthalten</a:t>
+              <a:t>Azure Firewall Standard (1×): ~€700/Monat  [Default: Premium 2× = ~€2.200]</a:t>
             </a:r>
           </a:p>
           <a:p>
             <a:pPr/>
             <a:r>
               <a:rPr sz="1300"/>
-              <a:t>MDFC Benchmarks: Microsoft Cloud Security Benchmark v1 + v2 (kostenlos, Audit)</a:t>
+              <a:t>Azure Bastion Standard (1×): ~€120/Monat  [Default: 2× = €240]</a:t>
             </a:r>
           </a:p>
           <a:p>
             <a:pPr/>
             <a:r>
               <a:rPr sz="1300"/>
-              <a:t>Activity Logs + Diagnose: alle Subscriptions und Ressourcen → Log Analytics (via DINE-Policies)</a:t>
+              <a:t>VPN Gateway VpnGw1AZ (1×): ~€140/Monat  [Default: 2× = €280]</a:t>
             </a:r>
           </a:p>
           <a:p>
             <a:pPr/>
             <a:r>
               <a:rPr sz="1300"/>
-              <a:t>Backup: Deploy-VM-Backup sichert VMs ohne Backup-Tag automatisch in Recovery Vault</a:t>
+              <a:t>ExpressRoute Gateway: deaktiviert – bei ER-Leitung aktivieren [Default: 2× = €560]</a:t>
             </a:r>
           </a:p>
           <a:p>
             <a:pPr/>
             <a:r>
               <a:rPr sz="1300"/>
-              <a:t>Roadmap: Microsoft Sentinel als SIEM-Folgestufe (nicht Bestandteil der Landing Zone)</a:t>
+              <a:t>DDoS Protection: deaktiviert – bei internet-facing Workloads aktivieren [Default: €2.500]</a:t>
+            </a:r>
+          </a:p>
+          <a:p>
+            <a:pPr/>
+            <a:r>
+              <a:rPr sz="1300"/>
+              <a:t>Private DNS Zones + DNS Resolver: aktiv – unveraendert  ~€40/Monat</a:t>
             </a:r>
           </a:p>
         </p:txBody>
@@ -26220,7 +26249,7 @@
           <a:lstStyle/>
           <a:p>
             <a:r>
-              <a:t>Sicherheit</a:t>
+              <a:t>Netzwerk-Architektur</a:t>
             </a:r>
           </a:p>
         </p:txBody>
@@ -26259,7 +26288,8 @@
           <a:lstStyle/>
           <a:p>
             <a:r>
-              <a:t>7  ·  Monitoring und Logging</a:t>
+              <a:rPr sz="1800"/>
+              <a:t>Netzwerk-Architektur: Hub-and-Spoke-Topologie</a:t>
             </a:r>
           </a:p>
         </p:txBody>
@@ -26272,27 +26302,6 @@
           </p:cNvSpPr>
           <p:nvPr>
             <p:ph type="subTitle" idx="1"/>
-          </p:nvPr>
-        </p:nvSpPr>
-        <p:spPr/>
-        <p:txBody>
-          <a:bodyPr/>
-          <a:lstStyle/>
-          <a:p>
-            <a:r>
-              <a:t>Zentraler Log Analytics Workspace + 3 Data Collection Rules</a:t>
-            </a:r>
-          </a:p>
-        </p:txBody>
-      </p:sp>
-      <p:sp>
-        <p:nvSpPr>
-          <p:cNvPr id="4" name="Text Placeholder 3"/>
-          <p:cNvSpPr>
-            <a:spLocks noGrp="1"/>
-          </p:cNvSpPr>
-          <p:nvPr>
-            <p:ph type="body" idx="13" sz="quarter"/>
           </p:nvPr>
         </p:nvSpPr>
         <p:spPr/>
@@ -26300,6 +26309,63 @@
           <a:bodyPr/>
           <a:lstStyle/>
           <a:p/>
+        </p:txBody>
+      </p:sp>
+      <p:pic>
+        <p:nvPicPr>
+          <p:cNvPr id="4" name="Picture 3" descr="alz-hub-spoke.png"/>
+          <p:cNvPicPr>
+            <a:picLocks noChangeAspect="1"/>
+          </p:cNvPicPr>
+          <p:nvPr/>
+        </p:nvPicPr>
+        <p:blipFill>
+          <a:blip r:embed="rId2"/>
+          <a:stretch>
+            <a:fillRect/>
+          </a:stretch>
+        </p:blipFill>
+        <p:spPr>
+          <a:xfrm>
+            <a:off x="274320" y="1234440"/>
+            <a:ext cx="11612880" cy="6919341"/>
+          </a:xfrm>
+          <a:prstGeom prst="rect">
+            <a:avLst/>
+          </a:prstGeom>
+        </p:spPr>
+      </p:pic>
+      <p:sp>
+        <p:nvSpPr>
+          <p:cNvPr id="5" name="TextBox 4"/>
+          <p:cNvSpPr txBox="1"/>
+          <p:nvPr/>
+        </p:nvSpPr>
+        <p:spPr>
+          <a:xfrm>
+            <a:off x="274320" y="6400800"/>
+            <a:ext cx="11612880" cy="365760"/>
+          </a:xfrm>
+          <a:prstGeom prst="rect">
+            <a:avLst/>
+          </a:prstGeom>
+          <a:noFill/>
+        </p:spPr>
+        <p:txBody>
+          <a:bodyPr wrap="none">
+            <a:spAutoFit/>
+          </a:bodyPr>
+          <a:lstStyle/>
+          <a:p>
+            <a:r>
+              <a:rPr sz="800">
+                <a:solidFill>
+                  <a:srgbClr val="595959"/>
+                </a:solidFill>
+              </a:rPr>
+              <a:t>Connectivity Subscription: Firewall · Bastion · VPN/ExpressRoute · DNS Private Resolver  | Quelle: Microsoft Cloud Adoption Framework</a:t>
+            </a:r>
+          </a:p>
         </p:txBody>
       </p:sp>
     </p:spTree>
@@ -26336,72 +26402,14 @@
           <a:lstStyle/>
           <a:p>
             <a:r>
-              <a:t>Zentrales Logging (AVM-Pattern avm/ptn/alz/ama:0.2.0)</a:t>
-            </a:r>
-          </a:p>
-        </p:txBody>
-      </p:sp>
-      <p:sp>
-        <p:nvSpPr>
-          <p:cNvPr id="3" name="Text Placeholder 2"/>
-          <p:cNvSpPr>
-            <a:spLocks noGrp="1"/>
-          </p:cNvSpPr>
-          <p:nvPr>
-            <p:ph type="body" idx="13" sz="quarter"/>
-          </p:nvPr>
-        </p:nvSpPr>
-        <p:spPr/>
-        <p:txBody>
-          <a:bodyPr wrap="square"/>
-          <a:lstStyle/>
-          <a:p>
-            <a:pPr/>
-            <a:r>
-              <a:rPr sz="1300"/>
-              <a:t>Log Analytics Workspace: law-alz-&lt;region&gt;, PerGB2018, 365 Tage Retention</a:t>
-            </a:r>
-          </a:p>
-          <a:p>
-            <a:pPr/>
-            <a:r>
-              <a:rPr sz="1300"/>
-              <a:t>3 Data Collection Rules: VM Insights · Change Tracking · Defender for SQL</a:t>
-            </a:r>
-          </a:p>
-          <a:p>
-            <a:pPr/>
-            <a:r>
-              <a:rPr sz="1300"/>
-              <a:t>User-Assigned Managed Identity: mi-alz-&lt;region&gt; für passwortlose Policy-Remediation (DeployIfNotExists)</a:t>
-            </a:r>
-          </a:p>
-          <a:p>
-            <a:pPr/>
-            <a:r>
-              <a:rPr sz="1300"/>
-              <a:t>DINE-Policies: jede neue VM verbindet sich automatisch mit LAW + DCRs – keine manuelle Konfiguration</a:t>
-            </a:r>
-          </a:p>
-          <a:p>
-            <a:pPr/>
-            <a:r>
-              <a:rPr sz="1300"/>
-              <a:t>Deploy-Diag-LogsCat: leitet alle Diagnose-Kategorien aller Ressourcen in Log Analytics</a:t>
-            </a:r>
-          </a:p>
-          <a:p>
-            <a:pPr/>
-            <a:r>
-              <a:rPr sz="1300"/>
-              <a:t>Kosten: 5 GB/Monat kostenlos; danach ~€2/GB; Automation Account optional (default: aus)</a:t>
-            </a:r>
-          </a:p>
-        </p:txBody>
-      </p:sp>
-      <p:sp>
-        <p:nvSpPr>
-          <p:cNvPr id="4" name="Subtitle 3"/>
+              <a:t>6  ·  Sicherheit</a:t>
+            </a:r>
+          </a:p>
+        </p:txBody>
+      </p:sp>
+      <p:sp>
+        <p:nvSpPr>
+          <p:cNvPr id="3" name="Subtitle 2"/>
           <p:cNvSpPr>
             <a:spLocks noGrp="1"/>
           </p:cNvSpPr>
@@ -26415,9 +26423,26 @@
           <a:lstStyle/>
           <a:p>
             <a:r>
-              <a:t>Monitoring und Logging</a:t>
-            </a:r>
-          </a:p>
+              <a:t>Defender for Cloud · Netzwerksegmentierung · Automatische Remediation</a:t>
+            </a:r>
+          </a:p>
+        </p:txBody>
+      </p:sp>
+      <p:sp>
+        <p:nvSpPr>
+          <p:cNvPr id="4" name="Text Placeholder 3"/>
+          <p:cNvSpPr>
+            <a:spLocks noGrp="1"/>
+          </p:cNvSpPr>
+          <p:nvPr>
+            <p:ph type="body" idx="13" sz="quarter"/>
+          </p:nvPr>
+        </p:nvSpPr>
+        <p:spPr/>
+        <p:txBody>
+          <a:bodyPr/>
+          <a:lstStyle/>
+          <a:p/>
         </p:txBody>
       </p:sp>
     </p:spTree>
@@ -26454,14 +26479,79 @@
           <a:lstStyle/>
           <a:p>
             <a:r>
-              <a:t>8  ·  Identity und RBAC</a:t>
-            </a:r>
-          </a:p>
-        </p:txBody>
-      </p:sp>
-      <p:sp>
-        <p:nvSpPr>
-          <p:cNvPr id="3" name="Subtitle 2"/>
+              <a:t>Mehrschichtige Sicherheitsarchitektur</a:t>
+            </a:r>
+          </a:p>
+        </p:txBody>
+      </p:sp>
+      <p:sp>
+        <p:nvSpPr>
+          <p:cNvPr id="3" name="Text Placeholder 2"/>
+          <p:cNvSpPr>
+            <a:spLocks noGrp="1"/>
+          </p:cNvSpPr>
+          <p:nvPr>
+            <p:ph type="body" idx="13" sz="quarter"/>
+          </p:nvPr>
+        </p:nvSpPr>
+        <p:spPr/>
+        <p:txBody>
+          <a:bodyPr wrap="square"/>
+          <a:lstStyle/>
+          <a:p>
+            <a:pPr/>
+            <a:r>
+              <a:rPr sz="1300"/>
+              <a:t>Präventiv (Policies): Deny-Subnet-Without-Nsg, Deny-MgmtPorts-Internet, Deny-Public-IP, Deny-Public-Endpoints (Corp)</a:t>
+            </a:r>
+          </a:p>
+          <a:p>
+            <a:pPr/>
+            <a:r>
+              <a:rPr sz="1300"/>
+              <a:t>Defender for Cloud: auto-aktiviert via Deploy-MDFC-Config-H224 auf alz-Root (DeployIfNotExists)</a:t>
+            </a:r>
+          </a:p>
+          <a:p>
+            <a:pPr/>
+            <a:r>
+              <a:rPr sz="1300"/>
+              <a:t>Defender for Endpoint: Deploy-MDEndpoints auf allen VMs – im Defender Server-Plan enthalten</a:t>
+            </a:r>
+          </a:p>
+          <a:p>
+            <a:pPr/>
+            <a:r>
+              <a:rPr sz="1300"/>
+              <a:t>MDFC Benchmarks: Microsoft Cloud Security Benchmark v1 + v2 (kostenlos, Audit)</a:t>
+            </a:r>
+          </a:p>
+          <a:p>
+            <a:pPr/>
+            <a:r>
+              <a:rPr sz="1300"/>
+              <a:t>Activity Logs + Diagnose: alle Subscriptions und Ressourcen → Log Analytics (via DINE-Policies)</a:t>
+            </a:r>
+          </a:p>
+          <a:p>
+            <a:pPr/>
+            <a:r>
+              <a:rPr sz="1300"/>
+              <a:t>Backup: Deploy-VM-Backup sichert VMs ohne Backup-Tag automatisch in Recovery Vault</a:t>
+            </a:r>
+          </a:p>
+          <a:p>
+            <a:pPr/>
+            <a:r>
+              <a:rPr sz="1300"/>
+              <a:t>Roadmap: Microsoft Sentinel als SIEM-Folgestufe (nicht Bestandteil der Landing Zone)</a:t>
+            </a:r>
+          </a:p>
+        </p:txBody>
+      </p:sp>
+      <p:sp>
+        <p:nvSpPr>
+          <p:cNvPr id="4" name="Subtitle 3"/>
           <p:cNvSpPr>
             <a:spLocks noGrp="1"/>
           </p:cNvSpPr>
@@ -26475,26 +26565,9 @@
           <a:lstStyle/>
           <a:p>
             <a:r>
-              <a:t>5 Custom-Rollen + Entra-ID-Gruppen-basierte Zuweisungen</a:t>
-            </a:r>
-          </a:p>
-        </p:txBody>
-      </p:sp>
-      <p:sp>
-        <p:nvSpPr>
-          <p:cNvPr id="4" name="Text Placeholder 3"/>
-          <p:cNvSpPr>
-            <a:spLocks noGrp="1"/>
-          </p:cNvSpPr>
-          <p:nvPr>
-            <p:ph type="body" idx="13" sz="quarter"/>
-          </p:nvPr>
-        </p:nvSpPr>
-        <p:spPr/>
-        <p:txBody>
-          <a:bodyPr/>
-          <a:lstStyle/>
-          <a:p/>
+              <a:t>Sicherheit</a:t>
+            </a:r>
+          </a:p>
         </p:txBody>
       </p:sp>
     </p:spTree>
@@ -26691,79 +26764,14 @@
           <a:lstStyle/>
           <a:p>
             <a:r>
-              <a:t>5 Custom RBAC-Rollen</a:t>
-            </a:r>
-          </a:p>
-        </p:txBody>
-      </p:sp>
-      <p:sp>
-        <p:nvSpPr>
-          <p:cNvPr id="3" name="Text Placeholder 2"/>
-          <p:cNvSpPr>
-            <a:spLocks noGrp="1"/>
-          </p:cNvSpPr>
-          <p:nvPr>
-            <p:ph type="body" idx="13" sz="quarter"/>
-          </p:nvPr>
-        </p:nvSpPr>
-        <p:spPr/>
-        <p:txBody>
-          <a:bodyPr wrap="square"/>
-          <a:lstStyle/>
-          <a:p>
-            <a:pPr/>
-            <a:r>
-              <a:rPr sz="1300"/>
-              <a:t>Subscription-Owner (alz): delegierter Owner, eingeschränkt ohne volle Owner-Rechte (1 Action)  → Plattform-Admins</a:t>
-            </a:r>
-          </a:p>
-          <a:p>
-            <a:pPr/>
-            <a:r>
-              <a:rPr sz="1300"/>
-              <a:t>Security-Operations (alz): horizontale Sicherheitssicht über alle Subscriptions (12 Actions)  → Security-Team</a:t>
-            </a:r>
-          </a:p>
-          <a:p>
-            <a:pPr/>
-            <a:r>
-              <a:rPr sz="1300"/>
-              <a:t>Network-Management (alz): VNets, UDRs, NSGs, NVAs plattformweit (4 Actions)  → Netzwerk-Team</a:t>
-            </a:r>
-          </a:p>
-          <a:p>
-            <a:pPr/>
-            <a:r>
-              <a:rPr sz="1300"/>
-              <a:t>Application-Owners (alz): Contributor auf Resource-Group-Ebene (1 Action)  → App-/Ops-Teams</a:t>
-            </a:r>
-          </a:p>
-          <a:p>
-            <a:pPr/>
-            <a:r>
-              <a:rPr sz="1300"/>
-              <a:t>Network-Subnet-Contributor (alz): vollständiger Subnetz-Zugriff (8 Actions)  → Netzwerk-Ops</a:t>
-            </a:r>
-          </a:p>
-          <a:p>
-            <a:pPr/>
-            <a:r>
-              <a:rPr sz="1300"/>
-              <a:t>Zuweisung: Entra-ID-Gruppen-Object-IDs in Bicep-Params; leeres Array = No-Op (gefahrlos)</a:t>
-            </a:r>
-          </a:p>
-          <a:p>
-            <a:pPr/>
-            <a:r>
-              <a:rPr sz="1300"/>
-              <a:t>Roadmap: PIM, Conditional Access, hybride Identitäten als Folge-Baustein (Identity-Baseline)</a:t>
-            </a:r>
-          </a:p>
-        </p:txBody>
-      </p:sp>
-      <p:sp>
-        <p:nvSpPr>
-          <p:cNvPr id="4" name="Subtitle 3"/>
+              <a:t>7  ·  Monitoring und Logging</a:t>
+            </a:r>
+          </a:p>
+        </p:txBody>
+      </p:sp>
+      <p:sp>
+        <p:nvSpPr>
+          <p:cNvPr id="3" name="Subtitle 2"/>
           <p:cNvSpPr>
             <a:spLocks noGrp="1"/>
           </p:cNvSpPr>
@@ -26777,9 +26785,26 @@
           <a:lstStyle/>
           <a:p>
             <a:r>
-              <a:t>Identity und RBAC</a:t>
-            </a:r>
-          </a:p>
+              <a:t>Zentraler Log Analytics Workspace + 3 Data Collection Rules</a:t>
+            </a:r>
+          </a:p>
+        </p:txBody>
+      </p:sp>
+      <p:sp>
+        <p:nvSpPr>
+          <p:cNvPr id="4" name="Text Placeholder 3"/>
+          <p:cNvSpPr>
+            <a:spLocks noGrp="1"/>
+          </p:cNvSpPr>
+          <p:nvPr>
+            <p:ph type="body" idx="13" sz="quarter"/>
+          </p:nvPr>
+        </p:nvSpPr>
+        <p:spPr/>
+        <p:txBody>
+          <a:bodyPr/>
+          <a:lstStyle/>
+          <a:p/>
         </p:txBody>
       </p:sp>
     </p:spTree>
@@ -26816,14 +26841,72 @@
           <a:lstStyle/>
           <a:p>
             <a:r>
-              <a:t>9  ·  Automatisierung und CI/CD</a:t>
-            </a:r>
-          </a:p>
-        </p:txBody>
-      </p:sp>
-      <p:sp>
-        <p:nvSpPr>
-          <p:cNvPr id="3" name="Subtitle 2"/>
+              <a:t>Zentrales Logging (AVM-Pattern avm/ptn/alz/ama:0.2.0)</a:t>
+            </a:r>
+          </a:p>
+        </p:txBody>
+      </p:sp>
+      <p:sp>
+        <p:nvSpPr>
+          <p:cNvPr id="3" name="Text Placeholder 2"/>
+          <p:cNvSpPr>
+            <a:spLocks noGrp="1"/>
+          </p:cNvSpPr>
+          <p:nvPr>
+            <p:ph type="body" idx="13" sz="quarter"/>
+          </p:nvPr>
+        </p:nvSpPr>
+        <p:spPr/>
+        <p:txBody>
+          <a:bodyPr wrap="square"/>
+          <a:lstStyle/>
+          <a:p>
+            <a:pPr/>
+            <a:r>
+              <a:rPr sz="1300"/>
+              <a:t>Log Analytics Workspace: law-alz-&lt;region&gt;, PerGB2018, 365 Tage Retention</a:t>
+            </a:r>
+          </a:p>
+          <a:p>
+            <a:pPr/>
+            <a:r>
+              <a:rPr sz="1300"/>
+              <a:t>3 Data Collection Rules: VM Insights · Change Tracking · Defender for SQL</a:t>
+            </a:r>
+          </a:p>
+          <a:p>
+            <a:pPr/>
+            <a:r>
+              <a:rPr sz="1300"/>
+              <a:t>User-Assigned Managed Identity: mi-alz-&lt;region&gt; für passwortlose Policy-Remediation (DeployIfNotExists)</a:t>
+            </a:r>
+          </a:p>
+          <a:p>
+            <a:pPr/>
+            <a:r>
+              <a:rPr sz="1300"/>
+              <a:t>DINE-Policies: jede neue VM verbindet sich automatisch mit LAW + DCRs – keine manuelle Konfiguration</a:t>
+            </a:r>
+          </a:p>
+          <a:p>
+            <a:pPr/>
+            <a:r>
+              <a:rPr sz="1300"/>
+              <a:t>Deploy-Diag-LogsCat: leitet alle Diagnose-Kategorien aller Ressourcen in Log Analytics</a:t>
+            </a:r>
+          </a:p>
+          <a:p>
+            <a:pPr/>
+            <a:r>
+              <a:rPr sz="1300"/>
+              <a:t>Kosten: 5 GB/Monat kostenlos; danach ~€2/GB; Automation Account optional (default: aus)</a:t>
+            </a:r>
+          </a:p>
+        </p:txBody>
+      </p:sp>
+      <p:sp>
+        <p:nvSpPr>
+          <p:cNvPr id="4" name="Subtitle 3"/>
           <p:cNvSpPr>
             <a:spLocks noGrp="1"/>
           </p:cNvSpPr>
@@ -26837,26 +26920,9 @@
           <a:lstStyle/>
           <a:p>
             <a:r>
-              <a:t>Bootstrap → 18 Deploy-Stufen → GitOps-Betrieb</a:t>
-            </a:r>
-          </a:p>
-        </p:txBody>
-      </p:sp>
-      <p:sp>
-        <p:nvSpPr>
-          <p:cNvPr id="4" name="Text Placeholder 3"/>
-          <p:cNvSpPr>
-            <a:spLocks noGrp="1"/>
-          </p:cNvSpPr>
-          <p:nvPr>
-            <p:ph type="body" idx="13" sz="quarter"/>
-          </p:nvPr>
-        </p:nvSpPr>
-        <p:spPr/>
-        <p:txBody>
-          <a:bodyPr/>
-          <a:lstStyle/>
-          <a:p/>
+              <a:t>Monitoring und Logging</a:t>
+            </a:r>
+          </a:p>
         </p:txBody>
       </p:sp>
     </p:spTree>
@@ -26893,79 +26959,14 @@
           <a:lstStyle/>
           <a:p>
             <a:r>
-              <a:t>Pipeline-Workflow (GitHub Actions)</a:t>
-            </a:r>
-          </a:p>
-        </p:txBody>
-      </p:sp>
-      <p:sp>
-        <p:nvSpPr>
-          <p:cNvPr id="3" name="Text Placeholder 2"/>
-          <p:cNvSpPr>
-            <a:spLocks noGrp="1"/>
-          </p:cNvSpPr>
-          <p:nvPr>
-            <p:ph type="body" idx="13" sz="quarter"/>
-          </p:nvPr>
-        </p:nvSpPr>
-        <p:spPr/>
-        <p:txBody>
-          <a:bodyPr wrap="square"/>
-          <a:lstStyle/>
-          <a:p>
-            <a:pPr/>
-            <a:r>
-              <a:rPr sz="1300"/>
-              <a:t>Bootstrap (Phase 0, Terraform): Resource Group + Storage (State) + Managed Identity (OIDC Federated Credentials)</a:t>
-            </a:r>
-          </a:p>
-          <a:p>
-            <a:pPr/>
-            <a:r>
-              <a:rPr sz="1300"/>
-              <a:t>GitHub-Repo + Environments + Approval-Gates automatisch generiert</a:t>
-            </a:r>
-          </a:p>
-          <a:p>
-            <a:pPr/>
-            <a:r>
-              <a:rPr sz="1300"/>
-              <a:t>5 Pipeline-Schritte: Trigger → Validation (bicep build) → What-If → Approval → Apply</a:t>
-            </a:r>
-          </a:p>
-          <a:p>
-            <a:pPr/>
-            <a:r>
-              <a:rPr sz="1300"/>
-              <a:t>18 Stufen sequenziell: Governance-MGs (1–12) → RBAC (13–15) → Logging (16) → Hub-Netzwerk (17) oder vWAN (18)</a:t>
-            </a:r>
-          </a:p>
-          <a:p>
-            <a:pPr/>
-            <a:r>
-              <a:rPr sz="1300"/>
-              <a:t>OIDC Federated Identity: keine Passwörter, keine Zertifikate, keine Secrets in Pipelines</a:t>
-            </a:r>
-          </a:p>
-          <a:p>
-            <a:pPr/>
-            <a:r>
-              <a:rPr sz="1300"/>
-              <a:t>GitOps: PR → Review → Approval → Deploy; jede Änderung mit Autor + Timestamp in Git-History</a:t>
-            </a:r>
-          </a:p>
-          <a:p>
-            <a:pPr/>
-            <a:r>
-              <a:rPr sz="1300"/>
-              <a:t>Rückrollbarkeit: neuer Commit → Rollback-Pipeline; vollständiges Audit-Trail in Azure Activity Log</a:t>
-            </a:r>
-          </a:p>
-        </p:txBody>
-      </p:sp>
-      <p:sp>
-        <p:nvSpPr>
-          <p:cNvPr id="4" name="Subtitle 3"/>
+              <a:t>8  ·  Identity und RBAC</a:t>
+            </a:r>
+          </a:p>
+        </p:txBody>
+      </p:sp>
+      <p:sp>
+        <p:nvSpPr>
+          <p:cNvPr id="3" name="Subtitle 2"/>
           <p:cNvSpPr>
             <a:spLocks noGrp="1"/>
           </p:cNvSpPr>
@@ -26979,9 +26980,26 @@
           <a:lstStyle/>
           <a:p>
             <a:r>
-              <a:t>Automatisierung und CI/CD</a:t>
-            </a:r>
-          </a:p>
+              <a:t>5 Custom-Rollen + Entra-ID-Gruppen-basierte Zuweisungen</a:t>
+            </a:r>
+          </a:p>
+        </p:txBody>
+      </p:sp>
+      <p:sp>
+        <p:nvSpPr>
+          <p:cNvPr id="4" name="Text Placeholder 3"/>
+          <p:cNvSpPr>
+            <a:spLocks noGrp="1"/>
+          </p:cNvSpPr>
+          <p:nvPr>
+            <p:ph type="body" idx="13" sz="quarter"/>
+          </p:nvPr>
+        </p:nvSpPr>
+        <p:spPr/>
+        <p:txBody>
+          <a:bodyPr/>
+          <a:lstStyle/>
+          <a:p/>
         </p:txBody>
       </p:sp>
     </p:spTree>
@@ -27018,14 +27036,79 @@
           <a:lstStyle/>
           <a:p>
             <a:r>
-              <a:t>10  ·  Kosten und Kostensteuerung</a:t>
-            </a:r>
-          </a:p>
-        </p:txBody>
-      </p:sp>
-      <p:sp>
-        <p:nvSpPr>
-          <p:cNvPr id="3" name="Subtitle 2"/>
+              <a:t>5 Custom RBAC-Rollen</a:t>
+            </a:r>
+          </a:p>
+        </p:txBody>
+      </p:sp>
+      <p:sp>
+        <p:nvSpPr>
+          <p:cNvPr id="3" name="Text Placeholder 2"/>
+          <p:cNvSpPr>
+            <a:spLocks noGrp="1"/>
+          </p:cNvSpPr>
+          <p:nvPr>
+            <p:ph type="body" idx="13" sz="quarter"/>
+          </p:nvPr>
+        </p:nvSpPr>
+        <p:spPr/>
+        <p:txBody>
+          <a:bodyPr wrap="square"/>
+          <a:lstStyle/>
+          <a:p>
+            <a:pPr/>
+            <a:r>
+              <a:rPr sz="1300"/>
+              <a:t>Subscription-Owner (alz): delegierter Owner, eingeschränkt ohne volle Owner-Rechte (1 Action)  → Plattform-Admins</a:t>
+            </a:r>
+          </a:p>
+          <a:p>
+            <a:pPr/>
+            <a:r>
+              <a:rPr sz="1300"/>
+              <a:t>Security-Operations (alz): horizontale Sicherheitssicht über alle Subscriptions (12 Actions)  → Security-Team</a:t>
+            </a:r>
+          </a:p>
+          <a:p>
+            <a:pPr/>
+            <a:r>
+              <a:rPr sz="1300"/>
+              <a:t>Network-Management (alz): VNets, UDRs, NSGs, NVAs plattformweit (4 Actions)  → Netzwerk-Team</a:t>
+            </a:r>
+          </a:p>
+          <a:p>
+            <a:pPr/>
+            <a:r>
+              <a:rPr sz="1300"/>
+              <a:t>Application-Owners (alz): Contributor auf Resource-Group-Ebene (1 Action)  → App-/Ops-Teams</a:t>
+            </a:r>
+          </a:p>
+          <a:p>
+            <a:pPr/>
+            <a:r>
+              <a:rPr sz="1300"/>
+              <a:t>Network-Subnet-Contributor (alz): vollständiger Subnetz-Zugriff (8 Actions)  → Netzwerk-Ops</a:t>
+            </a:r>
+          </a:p>
+          <a:p>
+            <a:pPr/>
+            <a:r>
+              <a:rPr sz="1300"/>
+              <a:t>Zuweisung: Entra-ID-Gruppen-Object-IDs in Bicep-Params; leeres Array = No-Op (gefahrlos)</a:t>
+            </a:r>
+          </a:p>
+          <a:p>
+            <a:pPr/>
+            <a:r>
+              <a:rPr sz="1300"/>
+              <a:t>Roadmap: PIM, Conditional Access, hybride Identitäten als Folge-Baustein (Identity-Baseline)</a:t>
+            </a:r>
+          </a:p>
+        </p:txBody>
+      </p:sp>
+      <p:sp>
+        <p:nvSpPr>
+          <p:cNvPr id="4" name="Subtitle 3"/>
           <p:cNvSpPr>
             <a:spLocks noGrp="1"/>
           </p:cNvSpPr>
@@ -27039,26 +27122,9 @@
           <a:lstStyle/>
           <a:p>
             <a:r>
-              <a:t>Bechtle-Empfehlung: ~€1.050/Monat – voller Funktionsumfang, eine Region</a:t>
-            </a:r>
-          </a:p>
-        </p:txBody>
-      </p:sp>
-      <p:sp>
-        <p:nvSpPr>
-          <p:cNvPr id="4" name="Text Placeholder 3"/>
-          <p:cNvSpPr>
-            <a:spLocks noGrp="1"/>
-          </p:cNvSpPr>
-          <p:nvPr>
-            <p:ph type="body" idx="13" sz="quarter"/>
-          </p:nvPr>
-        </p:nvSpPr>
-        <p:spPr/>
-        <p:txBody>
-          <a:bodyPr/>
-          <a:lstStyle/>
-          <a:p/>
+              <a:t>Identity und RBAC</a:t>
+            </a:r>
+          </a:p>
         </p:txBody>
       </p:sp>
     </p:spTree>
@@ -27095,86 +27161,14 @@
           <a:lstStyle/>
           <a:p>
             <a:r>
-              <a:t>Gestufter Ausbau: €0 → €1.050 → €5.800</a:t>
-            </a:r>
-          </a:p>
-        </p:txBody>
-      </p:sp>
-      <p:sp>
-        <p:nvSpPr>
-          <p:cNvPr id="3" name="Text Placeholder 2"/>
-          <p:cNvSpPr>
-            <a:spLocks noGrp="1"/>
-          </p:cNvSpPr>
-          <p:nvPr>
-            <p:ph type="body" idx="13" sz="quarter"/>
-          </p:nvPr>
-        </p:nvSpPr>
-        <p:spPr/>
-        <p:txBody>
-          <a:bodyPr wrap="square"/>
-          <a:lstStyle/>
-          <a:p>
-            <a:pPr/>
-            <a:r>
-              <a:rPr sz="1300"/>
-              <a:t>Stufe 1 – Governance-Pilot: network_type: none → MGs + volles Policy-Set + Logging  ca. €50/Monat (nur LAW)</a:t>
-            </a:r>
-          </a:p>
-          <a:p>
-            <a:pPr/>
-            <a:r>
-              <a:rPr sz="1300"/>
-              <a:t>Stufe 2 – Bechtle-Empfehlung: Firewall Standard, 1 Region, kein DDoS/ER  →  ~€1.050/Monat</a:t>
-            </a:r>
-          </a:p>
-          <a:p>
-            <a:pPr lvl="1"/>
-            <a:r>
-              <a:rPr sz="1300"/>
-              <a:t>  Firewall Standard 1×: ~€700  |  Bastion 1×: ~€120  |  VPN GW 1×: ~€140  |  DNS: ~€40  |  LAW: ~€50</a:t>
-            </a:r>
-          </a:p>
-          <a:p>
-            <a:pPr/>
-            <a:r>
-              <a:rPr sz="1300"/>
-              <a:t>Stufe 3 – Geo-Redundanz: + Sekundar-Hub NE  →  ~€1.800/Monat</a:t>
-            </a:r>
-          </a:p>
-          <a:p>
-            <a:pPr/>
-            <a:r>
-              <a:rPr sz="1300"/>
-              <a:t>Stufe 4 – Firewall Premium: IDPS / TLS / URL-Filterung  →  ~€2.400/Monat</a:t>
-            </a:r>
-          </a:p>
-          <a:p>
-            <a:pPr/>
-            <a:r>
-              <a:rPr sz="1300"/>
-              <a:t>Stufe 5 – DDoS Protection: bei internet-facing Workloads  →  ~€4.900/Monat</a:t>
-            </a:r>
-          </a:p>
-          <a:p>
-            <a:pPr/>
-            <a:r>
-              <a:rPr sz="1300"/>
-              <a:t>Stufe 6 – Microsoft-Default: alle Dienste, beide Regionen  →  ~€5.800/Monat</a:t>
-            </a:r>
-          </a:p>
-          <a:p>
-            <a:pPr/>
-            <a:r>
-              <a:rPr sz="1300"/>
-              <a:t>Alle Stufen sind additive Aenderungen – kein Rueckbau erforderlich</a:t>
-            </a:r>
-          </a:p>
-        </p:txBody>
-      </p:sp>
-      <p:sp>
-        <p:nvSpPr>
-          <p:cNvPr id="4" name="Subtitle 3"/>
+              <a:t>9  ·  Automatisierung und CI/CD</a:t>
+            </a:r>
+          </a:p>
+        </p:txBody>
+      </p:sp>
+      <p:sp>
+        <p:nvSpPr>
+          <p:cNvPr id="3" name="Subtitle 2"/>
           <p:cNvSpPr>
             <a:spLocks noGrp="1"/>
           </p:cNvSpPr>
@@ -27188,9 +27182,26 @@
           <a:lstStyle/>
           <a:p>
             <a:r>
-              <a:t>Kosten und Kostensteuerung</a:t>
-            </a:r>
-          </a:p>
+              <a:t>Bootstrap → 18 Deploy-Stufen → GitOps-Betrieb</a:t>
+            </a:r>
+          </a:p>
+        </p:txBody>
+      </p:sp>
+      <p:sp>
+        <p:nvSpPr>
+          <p:cNvPr id="4" name="Text Placeholder 3"/>
+          <p:cNvSpPr>
+            <a:spLocks noGrp="1"/>
+          </p:cNvSpPr>
+          <p:nvPr>
+            <p:ph type="body" idx="13" sz="quarter"/>
+          </p:nvPr>
+        </p:nvSpPr>
+        <p:spPr/>
+        <p:txBody>
+          <a:bodyPr/>
+          <a:lstStyle/>
+          <a:p/>
         </p:txBody>
       </p:sp>
     </p:spTree>
@@ -27227,7 +27238,7 @@
           <a:lstStyle/>
           <a:p>
             <a:r>
-              <a:t>Konfigurationsvergleich: Vorteile und Nachteile (1/2)</a:t>
+              <a:t>Pipeline-Workflow (GitHub Actions)</a:t>
             </a:r>
           </a:p>
         </p:txBody>
@@ -27249,92 +27260,50 @@
           <a:p>
             <a:pPr/>
             <a:r>
-              <a:rPr sz="1100"/>
-              <a:t>Pilot  ~€50/Monat  (network_type: none)</a:t>
-            </a:r>
-          </a:p>
-          <a:p>
-            <a:pPr lvl="1"/>
-            <a:r>
-              <a:rPr sz="1100"/>
-              <a:t>+ Nullrisiko; volles Governance-Set (MGs, Policies, Logging)</a:t>
-            </a:r>
-          </a:p>
-          <a:p>
-            <a:pPr lvl="1"/>
-            <a:r>
-              <a:rPr sz="1100"/>
-              <a:t>– Keine Netzwerkkonnektivität; Workloads nicht deploybar</a:t>
-            </a:r>
-          </a:p>
-          <a:p>
-            <a:pPr lvl="1"/>
-            <a:r>
-              <a:rPr sz="1100"/>
-              <a:t>  Empfehlung: Einstieg, PoC, Compliance-Audit ohne Netzwerkbedarf</a:t>
+              <a:rPr sz="1300"/>
+              <a:t>Bootstrap (Phase 0, Terraform): Resource Group + Storage (State) + Managed Identity (OIDC Federated Credentials)</a:t>
             </a:r>
           </a:p>
           <a:p>
             <a:pPr/>
             <a:r>
-              <a:rPr sz="1100"/>
-              <a:t>Bechtle-Empfehlung  ~€1.050/Monat  (Standard FW, 1 Region)</a:t>
-            </a:r>
-          </a:p>
-          <a:p>
-            <a:pPr lvl="1"/>
-            <a:r>
-              <a:rPr sz="1100"/>
-              <a:t>+ Voller Funktionsumfang; 4× günstiger als Microsoft-Default</a:t>
-            </a:r>
-          </a:p>
-          <a:p>
-            <a:pPr lvl="1"/>
-            <a:r>
-              <a:rPr sz="1100"/>
-              <a:t>+ Firewall, Bastion, VPN, DNS aktiv; In-Place-Upgrade auf Premium möglich</a:t>
-            </a:r>
-          </a:p>
-          <a:p>
-            <a:pPr lvl="1"/>
-            <a:r>
-              <a:rPr sz="1100"/>
-              <a:t>– Keine zweite Region; kein IDPS/TLS; kein DDoS-Schutz</a:t>
-            </a:r>
-          </a:p>
-          <a:p>
-            <a:pPr lvl="1"/>
-            <a:r>
-              <a:rPr sz="1100"/>
-              <a:t>  Empfehlung: Standard-Produktionsumgebungen, erste Workloads</a:t>
+              <a:rPr sz="1300"/>
+              <a:t>GitHub-Repo + Environments + Approval-Gates automatisch generiert</a:t>
             </a:r>
           </a:p>
           <a:p>
             <a:pPr/>
             <a:r>
-              <a:rPr sz="1100"/>
-              <a:t>Geo-Redundanz  ~€1.800/Monat  (+ Hub North Europe)</a:t>
-            </a:r>
-          </a:p>
-          <a:p>
-            <a:pPr lvl="1"/>
-            <a:r>
-              <a:rPr sz="1100"/>
-              <a:t>+ Regionale Ausfallsicherheit; zwei unabhängige Netzwerkhubs</a:t>
-            </a:r>
-          </a:p>
-          <a:p>
-            <a:pPr lvl="1"/>
-            <a:r>
-              <a:rPr sz="1100"/>
-              <a:t>– Doppelte Netzwerkkosten; erhöhte Betriebskomplexität</a:t>
-            </a:r>
-          </a:p>
-          <a:p>
-            <a:pPr lvl="1"/>
-            <a:r>
-              <a:rPr sz="1100"/>
-              <a:t>  Empfehlung: SLA-kritische Systeme, Multi-Region-Anforderungen</a:t>
+              <a:rPr sz="1300"/>
+              <a:t>5 Pipeline-Schritte: Trigger → Validation (bicep build) → What-If → Approval → Apply</a:t>
+            </a:r>
+          </a:p>
+          <a:p>
+            <a:pPr/>
+            <a:r>
+              <a:rPr sz="1300"/>
+              <a:t>18 Stufen sequenziell: Governance-MGs (1–12) → RBAC (13–15) → Logging (16) → Hub-Netzwerk (17) oder vWAN (18)</a:t>
+            </a:r>
+          </a:p>
+          <a:p>
+            <a:pPr/>
+            <a:r>
+              <a:rPr sz="1300"/>
+              <a:t>OIDC Federated Identity: keine Passwörter, keine Zertifikate, keine Secrets in Pipelines</a:t>
+            </a:r>
+          </a:p>
+          <a:p>
+            <a:pPr/>
+            <a:r>
+              <a:rPr sz="1300"/>
+              <a:t>GitOps: PR → Review → Approval → Deploy; jede Änderung mit Autor + Timestamp in Git-History</a:t>
+            </a:r>
+          </a:p>
+          <a:p>
+            <a:pPr/>
+            <a:r>
+              <a:rPr sz="1300"/>
+              <a:t>Rückrollbarkeit: neuer Commit → Rollback-Pipeline; vollständiges Audit-Trail in Azure Activity Log</a:t>
             </a:r>
           </a:p>
         </p:txBody>
@@ -27355,7 +27324,7 @@
           <a:lstStyle/>
           <a:p>
             <a:r>
-              <a:t>Kosten und Kostensteuerung</a:t>
+              <a:t>Automatisierung und CI/CD</a:t>
             </a:r>
           </a:p>
         </p:txBody>
@@ -27394,114 +27363,14 @@
           <a:lstStyle/>
           <a:p>
             <a:r>
-              <a:t>Konfigurationsvergleich: Vorteile und Nachteile (2/2)</a:t>
-            </a:r>
-          </a:p>
-        </p:txBody>
-      </p:sp>
-      <p:sp>
-        <p:nvSpPr>
-          <p:cNvPr id="3" name="Text Placeholder 2"/>
-          <p:cNvSpPr>
-            <a:spLocks noGrp="1"/>
-          </p:cNvSpPr>
-          <p:nvPr>
-            <p:ph type="body" idx="13" sz="quarter"/>
-          </p:nvPr>
-        </p:nvSpPr>
-        <p:spPr/>
-        <p:txBody>
-          <a:bodyPr wrap="square"/>
-          <a:lstStyle/>
-          <a:p>
-            <a:pPr/>
-            <a:r>
-              <a:rPr sz="1100"/>
-              <a:t>Firewall Premium  ~€2.400/Monat  (+ IDPS / TLS-Inspektion)</a:t>
-            </a:r>
-          </a:p>
-          <a:p>
-            <a:pPr lvl="1"/>
-            <a:r>
-              <a:rPr sz="1100"/>
-              <a:t>+ IDPS, TLS-Inspektion, URL-Filterung; In-Place-Upgrade ohne Rebuild</a:t>
-            </a:r>
-          </a:p>
-          <a:p>
-            <a:pPr lvl="1"/>
-            <a:r>
-              <a:rPr sz="1100"/>
-              <a:t>– +€1.350 ggü. Bechtle-Empfehlung; Zertifikat-Rollout erforderlich</a:t>
-            </a:r>
-          </a:p>
-          <a:p>
-            <a:pPr lvl="1"/>
-            <a:r>
-              <a:rPr sz="1100"/>
-              <a:t>  Empfehlung: Hohe Sicherheitsanforderungen, regulierte Branchen</a:t>
-            </a:r>
-          </a:p>
-          <a:p>
-            <a:pPr/>
-            <a:r>
-              <a:rPr sz="1100"/>
-              <a:t>DDoS Protection  ~€4.900/Monat  (+ Network Protection Plan)</a:t>
-            </a:r>
-          </a:p>
-          <a:p>
-            <a:pPr lvl="1"/>
-            <a:r>
-              <a:rPr sz="1100"/>
-              <a:t>+ Vollständiger DDoS-Schutz für alle öffentlichen IPs; SLA-Garantie</a:t>
-            </a:r>
-          </a:p>
-          <a:p>
-            <a:pPr lvl="1"/>
-            <a:r>
-              <a:rPr sz="1100"/>
-              <a:t>– ~€2.500/Monat Fixkosten (Plan Fee), unabhängig von Angriffen</a:t>
-            </a:r>
-          </a:p>
-          <a:p>
-            <a:pPr lvl="1"/>
-            <a:r>
-              <a:rPr sz="1100"/>
-              <a:t>  Empfehlung: Nur bei internet-facing Workloads mit realem DDoS-Risiko</a:t>
-            </a:r>
-          </a:p>
-          <a:p>
-            <a:pPr/>
-            <a:r>
-              <a:rPr sz="1100"/>
-              <a:t>Microsoft-Default  ~€5.800/Monat  (alle Dienste, 2 Regionen)</a:t>
-            </a:r>
-          </a:p>
-          <a:p>
-            <a:pPr lvl="1"/>
-            <a:r>
-              <a:rPr sz="1100"/>
-              <a:t>+ Maximale Redundanz; Enterprise-Standard; Herstellerempfehlung</a:t>
-            </a:r>
-          </a:p>
-          <a:p>
-            <a:pPr lvl="1"/>
-            <a:r>
-              <a:rPr sz="1100"/>
-              <a:t>– Höchste Kosten; viele Komponenten initial ungenutzt; Overkill für Start</a:t>
-            </a:r>
-          </a:p>
-          <a:p>
-            <a:pPr lvl="1"/>
-            <a:r>
-              <a:rPr sz="1100"/>
-              <a:t>  Empfehlung: Unternehmenskritische Systeme mit strengster Compliance</a:t>
-            </a:r>
-          </a:p>
-        </p:txBody>
-      </p:sp>
-      <p:sp>
-        <p:nvSpPr>
-          <p:cNvPr id="4" name="Subtitle 3"/>
+              <a:t>10  ·  Kosten und Kostensteuerung</a:t>
+            </a:r>
+          </a:p>
+        </p:txBody>
+      </p:sp>
+      <p:sp>
+        <p:nvSpPr>
+          <p:cNvPr id="3" name="Subtitle 2"/>
           <p:cNvSpPr>
             <a:spLocks noGrp="1"/>
           </p:cNvSpPr>
@@ -27515,9 +27384,26 @@
           <a:lstStyle/>
           <a:p>
             <a:r>
-              <a:t>Kosten und Kostensteuerung</a:t>
-            </a:r>
-          </a:p>
+              <a:t>Bechtle-Empfehlung: ~€1.050/Monat – voller Funktionsumfang, eine Region</a:t>
+            </a:r>
+          </a:p>
+        </p:txBody>
+      </p:sp>
+      <p:sp>
+        <p:nvSpPr>
+          <p:cNvPr id="4" name="Text Placeholder 3"/>
+          <p:cNvSpPr>
+            <a:spLocks noGrp="1"/>
+          </p:cNvSpPr>
+          <p:nvPr>
+            <p:ph type="body" idx="13" sz="quarter"/>
+          </p:nvPr>
+        </p:nvSpPr>
+        <p:spPr/>
+        <p:txBody>
+          <a:bodyPr/>
+          <a:lstStyle/>
+          <a:p/>
         </p:txBody>
       </p:sp>
     </p:spTree>
@@ -27554,7 +27440,7 @@
           <a:lstStyle/>
           <a:p>
             <a:r>
-              <a:t>Bechtle-Varianten: Vier Konfigurationen im Vergleich</a:t>
+              <a:t>Gestufter Ausbau: €0 → €1.050 → €5.800</a:t>
             </a:r>
           </a:p>
         </p:txBody>
@@ -27576,92 +27462,57 @@
           <a:p>
             <a:pPr/>
             <a:r>
-              <a:rPr sz="1100"/>
-              <a:t>Option A – Bechtle-Standard  ~€1.050/Monat  (Baseline)</a:t>
+              <a:rPr sz="1300"/>
+              <a:t>Stufe 1 – Governance-Pilot: network_type: none → MGs + volles Policy-Set + Logging  ca. €50/Monat (nur LAW)</a:t>
+            </a:r>
+          </a:p>
+          <a:p>
+            <a:pPr/>
+            <a:r>
+              <a:rPr sz="1300"/>
+              <a:t>Stufe 2 – Bechtle-Empfehlung: Firewall Standard, 1 Region, kein DDoS/ER  →  ~€1.050/Monat</a:t>
             </a:r>
           </a:p>
           <a:p>
             <a:pPr lvl="1"/>
             <a:r>
-              <a:rPr sz="1100"/>
-              <a:t>FW Standard 1× ~€700 | VPN GW 1× ~€140 | Bastion ~€120 | DNS ~€25 | LAW ~€50</a:t>
-            </a:r>
-          </a:p>
-          <a:p>
-            <a:pPr lvl="1"/>
-            <a:r>
-              <a:rPr sz="1100"/>
-              <a:t>ALZ-konform: Ja  |  Differenz: Referenz</a:t>
+              <a:rPr sz="1300"/>
+              <a:t>  Firewall Standard 1×: ~€700  |  Bastion 1×: ~€120  |  VPN GW 1×: ~€140  |  DNS: ~€40  |  LAW: ~€50</a:t>
             </a:r>
           </a:p>
           <a:p>
             <a:pPr/>
             <a:r>
-              <a:rPr sz="1100"/>
-              <a:t>Option B – Bechtle-Optimiert  ~€770/Monat  (ALZ-konform)</a:t>
-            </a:r>
-          </a:p>
-          <a:p>
-            <a:pPr lvl="1"/>
-            <a:r>
-              <a:rPr sz="1100"/>
-              <a:t>FW Standard reserved ~€560 | VPN Gateway deferred (€0) | Bastion ~€120 | DNS ~€25 | LAW ~€50</a:t>
-            </a:r>
-          </a:p>
-          <a:p>
-            <a:pPr lvl="1"/>
-            <a:r>
-              <a:rPr sz="1100"/>
-              <a:t>ALZ-konform: Ja  |  Differenz: −€280/Mon. (26 % günstiger)</a:t>
+              <a:rPr sz="1300"/>
+              <a:t>Stufe 3 – Geo-Redundanz: + Sekundar-Hub NE  →  ~€1.800/Monat</a:t>
             </a:r>
           </a:p>
           <a:p>
             <a:pPr/>
             <a:r>
-              <a:rPr sz="1100"/>
-              <a:t>Option C – Bechtle-Budget  ~€500/Monat  (⚠ ALZ-Bruch)</a:t>
-            </a:r>
-          </a:p>
-          <a:p>
-            <a:pPr lvl="1"/>
-            <a:r>
-              <a:rPr sz="1100"/>
-              <a:t>FW Basic ~€300 | VPN Gateway deferred (€0) | Bastion ~€120 | DNS ~€25 | LAW ~€50</a:t>
-            </a:r>
-          </a:p>
-          <a:p>
-            <a:pPr lvl="1"/>
-            <a:r>
-              <a:rPr sz="1100"/>
-              <a:t>ALZ-konform: NEIN  |  Differenz: −€550/Mon. (52 % günstiger)</a:t>
-            </a:r>
-          </a:p>
-          <a:p>
-            <a:pPr lvl="1"/>
-            <a:r>
-              <a:rPr sz="1100"/>
-              <a:t>Bruch: Firewall Basic = keine App-Rules, kein Threat Intel, kein Autoscaling</a:t>
+              <a:rPr sz="1300"/>
+              <a:t>Stufe 4 – Firewall Premium: IDPS / TLS / URL-Filterung  →  ~€2.400/Monat</a:t>
             </a:r>
           </a:p>
           <a:p>
             <a:pPr/>
             <a:r>
-              <a:rPr sz="1100"/>
-              <a:t>Option D – Microsoft-Default  ~€5.800/Monat  (maximaler Standard)</a:t>
-            </a:r>
-          </a:p>
-          <a:p>
-            <a:pPr lvl="1"/>
-            <a:r>
-              <a:rPr sz="1100"/>
-              <a:t>FW Premium 2× ~€2.200 | DDoS Plan ~€2.500 | ER GW 2× ~€560 | VPN 2× | Bastion 2× | 2 Regionen</a:t>
-            </a:r>
-          </a:p>
-          <a:p>
-            <a:pPr lvl="1"/>
-            <a:r>
-              <a:rPr sz="1100"/>
-              <a:t>ALZ-konform: Ja (vollständig)  |  Differenz: +€4.750/Mon. (452 % teurer als A)</a:t>
+              <a:rPr sz="1300"/>
+              <a:t>Stufe 5 – DDoS Protection: bei internet-facing Workloads  →  ~€4.900/Monat</a:t>
+            </a:r>
+          </a:p>
+          <a:p>
+            <a:pPr/>
+            <a:r>
+              <a:rPr sz="1300"/>
+              <a:t>Stufe 6 – Microsoft-Default: alle Dienste, beide Regionen  →  ~€5.800/Monat</a:t>
+            </a:r>
+          </a:p>
+          <a:p>
+            <a:pPr/>
+            <a:r>
+              <a:rPr sz="1300"/>
+              <a:t>Alle Stufen sind additive Aenderungen – kein Rueckbau erforderlich</a:t>
             </a:r>
           </a:p>
         </p:txBody>
@@ -27721,14 +27572,121 @@
           <a:lstStyle/>
           <a:p>
             <a:r>
-              <a:t>11  ·  Roadmap und Phasen</a:t>
-            </a:r>
-          </a:p>
-        </p:txBody>
-      </p:sp>
-      <p:sp>
-        <p:nvSpPr>
-          <p:cNvPr id="3" name="Subtitle 2"/>
+              <a:t>Konfigurationsvergleich: Vorteile und Nachteile (1/2)</a:t>
+            </a:r>
+          </a:p>
+        </p:txBody>
+      </p:sp>
+      <p:sp>
+        <p:nvSpPr>
+          <p:cNvPr id="3" name="Text Placeholder 2"/>
+          <p:cNvSpPr>
+            <a:spLocks noGrp="1"/>
+          </p:cNvSpPr>
+          <p:nvPr>
+            <p:ph type="body" idx="13" sz="quarter"/>
+          </p:nvPr>
+        </p:nvSpPr>
+        <p:spPr/>
+        <p:txBody>
+          <a:bodyPr wrap="square"/>
+          <a:lstStyle/>
+          <a:p>
+            <a:pPr/>
+            <a:r>
+              <a:rPr sz="1100"/>
+              <a:t>Pilot  ~€50/Monat  (network_type: none)</a:t>
+            </a:r>
+          </a:p>
+          <a:p>
+            <a:pPr lvl="1"/>
+            <a:r>
+              <a:rPr sz="1100"/>
+              <a:t>+ Nullrisiko; volles Governance-Set (MGs, Policies, Logging)</a:t>
+            </a:r>
+          </a:p>
+          <a:p>
+            <a:pPr lvl="1"/>
+            <a:r>
+              <a:rPr sz="1100"/>
+              <a:t>– Keine Netzwerkkonnektivität; Workloads nicht deploybar</a:t>
+            </a:r>
+          </a:p>
+          <a:p>
+            <a:pPr lvl="1"/>
+            <a:r>
+              <a:rPr sz="1100"/>
+              <a:t>  Empfehlung: Einstieg, PoC, Compliance-Audit ohne Netzwerkbedarf</a:t>
+            </a:r>
+          </a:p>
+          <a:p>
+            <a:pPr/>
+            <a:r>
+              <a:rPr sz="1100"/>
+              <a:t>Bechtle-Empfehlung  ~€1.050/Monat  (Standard FW, 1 Region)</a:t>
+            </a:r>
+          </a:p>
+          <a:p>
+            <a:pPr lvl="1"/>
+            <a:r>
+              <a:rPr sz="1100"/>
+              <a:t>+ Voller Funktionsumfang; 4× günstiger als Microsoft-Default</a:t>
+            </a:r>
+          </a:p>
+          <a:p>
+            <a:pPr lvl="1"/>
+            <a:r>
+              <a:rPr sz="1100"/>
+              <a:t>+ Firewall, Bastion, VPN, DNS aktiv; In-Place-Upgrade auf Premium möglich</a:t>
+            </a:r>
+          </a:p>
+          <a:p>
+            <a:pPr lvl="1"/>
+            <a:r>
+              <a:rPr sz="1100"/>
+              <a:t>– Keine zweite Region; kein IDPS/TLS; kein DDoS-Schutz</a:t>
+            </a:r>
+          </a:p>
+          <a:p>
+            <a:pPr lvl="1"/>
+            <a:r>
+              <a:rPr sz="1100"/>
+              <a:t>  Empfehlung: Standard-Produktionsumgebungen, erste Workloads</a:t>
+            </a:r>
+          </a:p>
+          <a:p>
+            <a:pPr/>
+            <a:r>
+              <a:rPr sz="1100"/>
+              <a:t>Geo-Redundanz  ~€1.800/Monat  (+ Hub North Europe)</a:t>
+            </a:r>
+          </a:p>
+          <a:p>
+            <a:pPr lvl="1"/>
+            <a:r>
+              <a:rPr sz="1100"/>
+              <a:t>+ Regionale Ausfallsicherheit; zwei unabhängige Netzwerkhubs</a:t>
+            </a:r>
+          </a:p>
+          <a:p>
+            <a:pPr lvl="1"/>
+            <a:r>
+              <a:rPr sz="1100"/>
+              <a:t>– Doppelte Netzwerkkosten; erhöhte Betriebskomplexität</a:t>
+            </a:r>
+          </a:p>
+          <a:p>
+            <a:pPr lvl="1"/>
+            <a:r>
+              <a:rPr sz="1100"/>
+              <a:t>  Empfehlung: SLA-kritische Systeme, Multi-Region-Anforderungen</a:t>
+            </a:r>
+          </a:p>
+        </p:txBody>
+      </p:sp>
+      <p:sp>
+        <p:nvSpPr>
+          <p:cNvPr id="4" name="Subtitle 3"/>
           <p:cNvSpPr>
             <a:spLocks noGrp="1"/>
           </p:cNvSpPr>
@@ -27742,26 +27700,9 @@
           <a:lstStyle/>
           <a:p>
             <a:r>
-              <a:t>6 Phasen – von Kickoff bis laufendem Betrieb</a:t>
-            </a:r>
-          </a:p>
-        </p:txBody>
-      </p:sp>
-      <p:sp>
-        <p:nvSpPr>
-          <p:cNvPr id="4" name="Text Placeholder 3"/>
-          <p:cNvSpPr>
-            <a:spLocks noGrp="1"/>
-          </p:cNvSpPr>
-          <p:nvPr>
-            <p:ph type="body" idx="13" sz="quarter"/>
-          </p:nvPr>
-        </p:nvSpPr>
-        <p:spPr/>
-        <p:txBody>
-          <a:bodyPr/>
-          <a:lstStyle/>
-          <a:p/>
+              <a:t>Kosten und Kostensteuerung</a:t>
+            </a:r>
+          </a:p>
         </p:txBody>
       </p:sp>
     </p:spTree>
@@ -27798,7 +27739,7 @@
           <a:lstStyle/>
           <a:p>
             <a:r>
-              <a:t>6 Projektphasen im Überblick</a:t>
+              <a:t>Konfigurationsvergleich: Vorteile und Nachteile (2/2)</a:t>
             </a:r>
           </a:p>
         </p:txBody>
@@ -27820,43 +27761,85 @@
           <a:p>
             <a:pPr/>
             <a:r>
-              <a:rPr sz="1300"/>
-              <a:t>Phase 1 – Beratung &amp; Kickoff: Discovery-Workshop; Entscheidungsprotokoll (Region, Netzwerk, DDoS, Enforcement)</a:t>
+              <a:rPr sz="1100"/>
+              <a:t>Firewall Premium  ~€2.400/Monat  (+ IDPS / TLS-Inspektion)</a:t>
+            </a:r>
+          </a:p>
+          <a:p>
+            <a:pPr lvl="1"/>
+            <a:r>
+              <a:rPr sz="1100"/>
+              <a:t>+ IDPS, TLS-Inspektion, URL-Filterung; In-Place-Upgrade ohne Rebuild</a:t>
+            </a:r>
+          </a:p>
+          <a:p>
+            <a:pPr lvl="1"/>
+            <a:r>
+              <a:rPr sz="1100"/>
+              <a:t>– +€1.350 ggü. Bechtle-Empfehlung; Zertifikat-Rollout erforderlich</a:t>
+            </a:r>
+          </a:p>
+          <a:p>
+            <a:pPr lvl="1"/>
+            <a:r>
+              <a:rPr sz="1100"/>
+              <a:t>  Empfehlung: Hohe Sicherheitsanforderungen, regulierte Branchen</a:t>
             </a:r>
           </a:p>
           <a:p>
             <a:pPr/>
             <a:r>
-              <a:rPr sz="1300"/>
-              <a:t>Phase 2 – Bootstrap &amp; Grundgerüst: Deploy-Accelerator; MGs + Policies (DoNotEnforce); Logging aktiv  ≈ €0</a:t>
+              <a:rPr sz="1100"/>
+              <a:t>DDoS Protection  ~€4.900/Monat  (+ Network Protection Plan)</a:t>
+            </a:r>
+          </a:p>
+          <a:p>
+            <a:pPr lvl="1"/>
+            <a:r>
+              <a:rPr sz="1100"/>
+              <a:t>+ Vollständiger DDoS-Schutz für alle öffentlichen IPs; SLA-Garantie</a:t>
+            </a:r>
+          </a:p>
+          <a:p>
+            <a:pPr lvl="1"/>
+            <a:r>
+              <a:rPr sz="1100"/>
+              <a:t>– ~€2.500/Monat Fixkosten (Plan Fee), unabhängig von Angriffen</a:t>
+            </a:r>
+          </a:p>
+          <a:p>
+            <a:pPr lvl="1"/>
+            <a:r>
+              <a:rPr sz="1100"/>
+              <a:t>  Empfehlung: Nur bei internet-facing Workloads mit realem DDoS-Risiko</a:t>
             </a:r>
           </a:p>
           <a:p>
             <a:pPr/>
             <a:r>
-              <a:rPr sz="1300"/>
-              <a:t>Phase 3 – Netzwerk-Pilot: Hub-VNets + DNS; erste Spoke-VNets; ggf. minimale Firewall  €15–€1.300/Monat</a:t>
-            </a:r>
-          </a:p>
-          <a:p>
-            <a:pPr/>
-            <a:r>
-              <a:rPr sz="1300"/>
-              <a:t>Phase 4 – Sicherheit &amp; Enforcement: Defender aktivieren; Guardrails einschalten; Remediation  + Defender-Kosten</a:t>
-            </a:r>
-          </a:p>
-          <a:p>
-            <a:pPr/>
-            <a:r>
-              <a:rPr sz="1300"/>
-              <a:t>Phase 5 – Workload-Onboarding: erste Applikation in ALZ; Spoke-Netzwerke; RBAC-Gruppen befüllen</a:t>
-            </a:r>
-          </a:p>
-          <a:p>
-            <a:pPr/>
-            <a:r>
-              <a:rPr sz="1300"/>
-              <a:t>Phase 6 – Betrieb &amp; Optimierung: Cost Management; Tagging; Monitoring-Dashboards; Policy-Weiterentwicklung</a:t>
+              <a:rPr sz="1100"/>
+              <a:t>Microsoft-Default  ~€5.800/Monat  (alle Dienste, 2 Regionen)</a:t>
+            </a:r>
+          </a:p>
+          <a:p>
+            <a:pPr lvl="1"/>
+            <a:r>
+              <a:rPr sz="1100"/>
+              <a:t>+ Maximale Redundanz; Enterprise-Standard; Herstellerempfehlung</a:t>
+            </a:r>
+          </a:p>
+          <a:p>
+            <a:pPr lvl="1"/>
+            <a:r>
+              <a:rPr sz="1100"/>
+              <a:t>– Höchste Kosten; viele Komponenten initial ungenutzt; Overkill für Start</a:t>
+            </a:r>
+          </a:p>
+          <a:p>
+            <a:pPr lvl="1"/>
+            <a:r>
+              <a:rPr sz="1100"/>
+              <a:t>  Empfehlung: Unternehmenskritische Systeme mit strengster Compliance</a:t>
             </a:r>
           </a:p>
         </p:txBody>
@@ -27877,7 +27860,7 @@
           <a:lstStyle/>
           <a:p>
             <a:r>
-              <a:t>Roadmap und Phasen</a:t>
+              <a:t>Kosten und Kostensteuerung</a:t>
             </a:r>
           </a:p>
         </p:txBody>
@@ -28034,14 +28017,121 @@
           <a:lstStyle/>
           <a:p>
             <a:r>
-              <a:t>12  ·  Risiken und Entscheidungen</a:t>
-            </a:r>
-          </a:p>
-        </p:txBody>
-      </p:sp>
-      <p:sp>
-        <p:nvSpPr>
-          <p:cNvPr id="3" name="Subtitle 2"/>
+              <a:t>Bechtle-Varianten: Vier Konfigurationen im Vergleich</a:t>
+            </a:r>
+          </a:p>
+        </p:txBody>
+      </p:sp>
+      <p:sp>
+        <p:nvSpPr>
+          <p:cNvPr id="3" name="Text Placeholder 2"/>
+          <p:cNvSpPr>
+            <a:spLocks noGrp="1"/>
+          </p:cNvSpPr>
+          <p:nvPr>
+            <p:ph type="body" idx="13" sz="quarter"/>
+          </p:nvPr>
+        </p:nvSpPr>
+        <p:spPr/>
+        <p:txBody>
+          <a:bodyPr wrap="square"/>
+          <a:lstStyle/>
+          <a:p>
+            <a:pPr/>
+            <a:r>
+              <a:rPr sz="1100"/>
+              <a:t>Option A – Bechtle-Standard  ~€1.050/Monat  (Baseline)</a:t>
+            </a:r>
+          </a:p>
+          <a:p>
+            <a:pPr lvl="1"/>
+            <a:r>
+              <a:rPr sz="1100"/>
+              <a:t>FW Standard 1× ~€700 | VPN GW 1× ~€140 | Bastion ~€120 | DNS ~€25 | LAW ~€50</a:t>
+            </a:r>
+          </a:p>
+          <a:p>
+            <a:pPr lvl="1"/>
+            <a:r>
+              <a:rPr sz="1100"/>
+              <a:t>ALZ-konform: Ja  |  Differenz: Referenz</a:t>
+            </a:r>
+          </a:p>
+          <a:p>
+            <a:pPr/>
+            <a:r>
+              <a:rPr sz="1100"/>
+              <a:t>Option B – Bechtle-Optimiert  ~€770/Monat  (ALZ-konform)</a:t>
+            </a:r>
+          </a:p>
+          <a:p>
+            <a:pPr lvl="1"/>
+            <a:r>
+              <a:rPr sz="1100"/>
+              <a:t>FW Standard reserved ~€560 | VPN Gateway deferred (€0) | Bastion ~€120 | DNS ~€25 | LAW ~€50</a:t>
+            </a:r>
+          </a:p>
+          <a:p>
+            <a:pPr lvl="1"/>
+            <a:r>
+              <a:rPr sz="1100"/>
+              <a:t>ALZ-konform: Ja  |  Differenz: −€280/Mon. (26 % günstiger)</a:t>
+            </a:r>
+          </a:p>
+          <a:p>
+            <a:pPr/>
+            <a:r>
+              <a:rPr sz="1100"/>
+              <a:t>Option C – Bechtle-Budget  ~€500/Monat  (⚠ ALZ-Bruch)</a:t>
+            </a:r>
+          </a:p>
+          <a:p>
+            <a:pPr lvl="1"/>
+            <a:r>
+              <a:rPr sz="1100"/>
+              <a:t>FW Basic ~€300 | VPN Gateway deferred (€0) | Bastion ~€120 | DNS ~€25 | LAW ~€50</a:t>
+            </a:r>
+          </a:p>
+          <a:p>
+            <a:pPr lvl="1"/>
+            <a:r>
+              <a:rPr sz="1100"/>
+              <a:t>ALZ-konform: NEIN  |  Differenz: −€550/Mon. (52 % günstiger)</a:t>
+            </a:r>
+          </a:p>
+          <a:p>
+            <a:pPr lvl="1"/>
+            <a:r>
+              <a:rPr sz="1100"/>
+              <a:t>Bruch: Firewall Basic = keine App-Rules, kein Threat Intel, kein Autoscaling</a:t>
+            </a:r>
+          </a:p>
+          <a:p>
+            <a:pPr/>
+            <a:r>
+              <a:rPr sz="1100"/>
+              <a:t>Option D – Microsoft-Default  ~€5.800/Monat  (maximaler Standard)</a:t>
+            </a:r>
+          </a:p>
+          <a:p>
+            <a:pPr lvl="1"/>
+            <a:r>
+              <a:rPr sz="1100"/>
+              <a:t>FW Premium 2× ~€2.200 | DDoS Plan ~€2.500 | ER GW 2× ~€560 | VPN 2× | Bastion 2× | 2 Regionen</a:t>
+            </a:r>
+          </a:p>
+          <a:p>
+            <a:pPr lvl="1"/>
+            <a:r>
+              <a:rPr sz="1100"/>
+              <a:t>ALZ-konform: Ja (vollständig)  |  Differenz: +€4.750/Mon. (452 % teurer als A)</a:t>
+            </a:r>
+          </a:p>
+        </p:txBody>
+      </p:sp>
+      <p:sp>
+        <p:nvSpPr>
+          <p:cNvPr id="4" name="Subtitle 3"/>
           <p:cNvSpPr>
             <a:spLocks noGrp="1"/>
           </p:cNvSpPr>
@@ -28055,26 +28145,9 @@
           <a:lstStyle/>
           <a:p>
             <a:r>
-              <a:t>Klare Entscheidungen für einen sicheren Start</a:t>
-            </a:r>
-          </a:p>
-        </p:txBody>
-      </p:sp>
-      <p:sp>
-        <p:nvSpPr>
-          <p:cNvPr id="4" name="Text Placeholder 3"/>
-          <p:cNvSpPr>
-            <a:spLocks noGrp="1"/>
-          </p:cNvSpPr>
-          <p:nvPr>
-            <p:ph type="body" idx="13" sz="quarter"/>
-          </p:nvPr>
-        </p:nvSpPr>
-        <p:spPr/>
-        <p:txBody>
-          <a:bodyPr/>
-          <a:lstStyle/>
-          <a:p/>
+              <a:t>Kosten und Kostensteuerung</a:t>
+            </a:r>
+          </a:p>
         </p:txBody>
       </p:sp>
     </p:spTree>
@@ -28111,79 +28184,14 @@
           <a:lstStyle/>
           <a:p>
             <a:r>
-              <a:t>Top-Risiken und Entscheidungsbedarf</a:t>
-            </a:r>
-          </a:p>
-        </p:txBody>
-      </p:sp>
-      <p:sp>
-        <p:nvSpPr>
-          <p:cNvPr id="3" name="Text Placeholder 2"/>
-          <p:cNvSpPr>
-            <a:spLocks noGrp="1"/>
-          </p:cNvSpPr>
-          <p:nvPr>
-            <p:ph type="body" idx="13" sz="quarter"/>
-          </p:nvPr>
-        </p:nvSpPr>
-        <p:spPr/>
-        <p:txBody>
-          <a:bodyPr wrap="square"/>
-          <a:lstStyle/>
-          <a:p>
-            <a:pPr/>
-            <a:r>
-              <a:rPr sz="1300"/>
-              <a:t>DDoS im Default AN → ~€2.500/Monat unerwartet; deployDdosProtectionPlan: false für Start</a:t>
-            </a:r>
-          </a:p>
-          <a:p>
-            <a:pPr/>
-            <a:r>
-              <a:rPr sz="1300"/>
-              <a:t>Subscription-Typ: kein Free Tier → EA/MCA/PAYG vor Bootstrap sicherstellen</a:t>
-            </a:r>
-          </a:p>
-          <a:p>
-            <a:pPr/>
-            <a:r>
-              <a:rPr sz="1300"/>
-              <a:t>IP-Adresskonflikt On-Prem mit Hub-VNets → IP-Plan vor Netzwerk-Deploy abstimmen</a:t>
-            </a:r>
-          </a:p>
-          <a:p>
-            <a:pPr/>
-            <a:r>
-              <a:rPr sz="1300"/>
-              <a:t>Defender-Pläne auto. per Policy aktiviert → Tier-Konfiguration vor Apply reviewen</a:t>
-            </a:r>
-          </a:p>
-          <a:p>
-            <a:pPr/>
-            <a:r>
-              <a:rPr sz="1300"/>
-              <a:t>Entscheidung: network_type: none (€0) vs. hubNetworking (~€5.800) für Pilot</a:t>
-            </a:r>
-          </a:p>
-          <a:p>
-            <a:pPr/>
-            <a:r>
-              <a:rPr sz="1300"/>
-              <a:t>Entscheidung: Enforcement-Zeitpunkt – wann von DoNotEnforce auf Enabled (Empfehlung: 4–8 Wochen Audit-Phase)</a:t>
-            </a:r>
-          </a:p>
-          <a:p>
-            <a:pPr/>
-            <a:r>
-              <a:rPr sz="1300"/>
-              <a:t>Entscheidung: On-Prem-Anbindung – VPN vs. ExpressRoute vs. keins (je nach SLA und Bandbreite)</a:t>
-            </a:r>
-          </a:p>
-        </p:txBody>
-      </p:sp>
-      <p:sp>
-        <p:nvSpPr>
-          <p:cNvPr id="4" name="Subtitle 3"/>
+              <a:t>11  ·  Roadmap und Phasen</a:t>
+            </a:r>
+          </a:p>
+        </p:txBody>
+      </p:sp>
+      <p:sp>
+        <p:nvSpPr>
+          <p:cNvPr id="3" name="Subtitle 2"/>
           <p:cNvSpPr>
             <a:spLocks noGrp="1"/>
           </p:cNvSpPr>
@@ -28197,9 +28205,26 @@
           <a:lstStyle/>
           <a:p>
             <a:r>
-              <a:t>Risiken und Entscheidungen</a:t>
-            </a:r>
-          </a:p>
+              <a:t>6 Phasen – von Kickoff bis laufendem Betrieb</a:t>
+            </a:r>
+          </a:p>
+        </p:txBody>
+      </p:sp>
+      <p:sp>
+        <p:nvSpPr>
+          <p:cNvPr id="4" name="Text Placeholder 3"/>
+          <p:cNvSpPr>
+            <a:spLocks noGrp="1"/>
+          </p:cNvSpPr>
+          <p:nvPr>
+            <p:ph type="body" idx="13" sz="quarter"/>
+          </p:nvPr>
+        </p:nvSpPr>
+        <p:spPr/>
+        <p:txBody>
+          <a:bodyPr/>
+          <a:lstStyle/>
+          <a:p/>
         </p:txBody>
       </p:sp>
     </p:spTree>
@@ -28236,14 +28261,72 @@
           <a:lstStyle/>
           <a:p>
             <a:r>
-              <a:t>13  ·  Ergänzende Randthemen</a:t>
-            </a:r>
-          </a:p>
-        </p:txBody>
-      </p:sp>
-      <p:sp>
-        <p:nvSpPr>
-          <p:cNvPr id="3" name="Subtitle 2"/>
+              <a:t>6 Projektphasen im Überblick</a:t>
+            </a:r>
+          </a:p>
+        </p:txBody>
+      </p:sp>
+      <p:sp>
+        <p:nvSpPr>
+          <p:cNvPr id="3" name="Text Placeholder 2"/>
+          <p:cNvSpPr>
+            <a:spLocks noGrp="1"/>
+          </p:cNvSpPr>
+          <p:nvPr>
+            <p:ph type="body" idx="13" sz="quarter"/>
+          </p:nvPr>
+        </p:nvSpPr>
+        <p:spPr/>
+        <p:txBody>
+          <a:bodyPr wrap="square"/>
+          <a:lstStyle/>
+          <a:p>
+            <a:pPr/>
+            <a:r>
+              <a:rPr sz="1300"/>
+              <a:t>Phase 1 – Beratung &amp; Kickoff: Discovery-Workshop; Entscheidungsprotokoll (Region, Netzwerk, DDoS, Enforcement)</a:t>
+            </a:r>
+          </a:p>
+          <a:p>
+            <a:pPr/>
+            <a:r>
+              <a:rPr sz="1300"/>
+              <a:t>Phase 2 – Bootstrap &amp; Grundgerüst: Deploy-Accelerator; MGs + Policies (DoNotEnforce); Logging aktiv  ≈ €0</a:t>
+            </a:r>
+          </a:p>
+          <a:p>
+            <a:pPr/>
+            <a:r>
+              <a:rPr sz="1300"/>
+              <a:t>Phase 3 – Netzwerk-Pilot: Hub-VNets + DNS; erste Spoke-VNets; ggf. minimale Firewall  €15–€1.300/Monat</a:t>
+            </a:r>
+          </a:p>
+          <a:p>
+            <a:pPr/>
+            <a:r>
+              <a:rPr sz="1300"/>
+              <a:t>Phase 4 – Sicherheit &amp; Enforcement: Defender aktivieren; Guardrails einschalten; Remediation  + Defender-Kosten</a:t>
+            </a:r>
+          </a:p>
+          <a:p>
+            <a:pPr/>
+            <a:r>
+              <a:rPr sz="1300"/>
+              <a:t>Phase 5 – Workload-Onboarding: erste Applikation in ALZ; Spoke-Netzwerke; RBAC-Gruppen befüllen</a:t>
+            </a:r>
+          </a:p>
+          <a:p>
+            <a:pPr/>
+            <a:r>
+              <a:rPr sz="1300"/>
+              <a:t>Phase 6 – Betrieb &amp; Optimierung: Cost Management; Tagging; Monitoring-Dashboards; Policy-Weiterentwicklung</a:t>
+            </a:r>
+          </a:p>
+        </p:txBody>
+      </p:sp>
+      <p:sp>
+        <p:nvSpPr>
+          <p:cNvPr id="4" name="Subtitle 3"/>
           <p:cNvSpPr>
             <a:spLocks noGrp="1"/>
           </p:cNvSpPr>
@@ -28257,26 +28340,9 @@
           <a:lstStyle/>
           <a:p>
             <a:r>
-              <a:t>Außerhalb des ALZ-Scopes – aber eng verknüpft</a:t>
-            </a:r>
-          </a:p>
-        </p:txBody>
-      </p:sp>
-      <p:sp>
-        <p:nvSpPr>
-          <p:cNvPr id="4" name="Text Placeholder 3"/>
-          <p:cNvSpPr>
-            <a:spLocks noGrp="1"/>
-          </p:cNvSpPr>
-          <p:nvPr>
-            <p:ph type="body" idx="13" sz="quarter"/>
-          </p:nvPr>
-        </p:nvSpPr>
-        <p:spPr/>
-        <p:txBody>
-          <a:bodyPr/>
-          <a:lstStyle/>
-          <a:p/>
+              <a:t>Roadmap und Phasen</a:t>
+            </a:r>
+          </a:p>
         </p:txBody>
       </p:sp>
     </p:spTree>
@@ -28313,72 +28379,14 @@
           <a:lstStyle/>
           <a:p>
             <a:r>
-              <a:t>Abhängigkeiten und Folge-Bausteine</a:t>
-            </a:r>
-          </a:p>
-        </p:txBody>
-      </p:sp>
-      <p:sp>
-        <p:nvSpPr>
-          <p:cNvPr id="3" name="Text Placeholder 2"/>
-          <p:cNvSpPr>
-            <a:spLocks noGrp="1"/>
-          </p:cNvSpPr>
-          <p:nvPr>
-            <p:ph type="body" idx="13" sz="quarter"/>
-          </p:nvPr>
-        </p:nvSpPr>
-        <p:spPr/>
-        <p:txBody>
-          <a:bodyPr wrap="square"/>
-          <a:lstStyle/>
-          <a:p>
-            <a:pPr/>
-            <a:r>
-              <a:rPr sz="1300"/>
-              <a:t>Entra ID &amp; Identity: PIM, Conditional Access, hybride Identitäten → Identity-Baseline als Folgestufe</a:t>
-            </a:r>
-          </a:p>
-          <a:p>
-            <a:pPr/>
-            <a:r>
-              <a:rPr sz="1300"/>
-              <a:t>On-Prem-Anbindung: VPN-Gateway (deployt, aktiv) oder ExpressRoute → Leitungsbestellung + BGP-Konfiguration außerhalb Scope</a:t>
-            </a:r>
-          </a:p>
-          <a:p>
-            <a:pPr/>
-            <a:r>
-              <a:rPr sz="1300"/>
-              <a:t>Backup &amp; DR: Deploy-VM-Backup aktiv via Policy; Recovery Vault-Konfiguration und DR-Tests als Folgestufe</a:t>
-            </a:r>
-          </a:p>
-          <a:p>
-            <a:pPr/>
-            <a:r>
-              <a:rPr sz="1300"/>
-              <a:t>Kostenmanagement: Azure Cost Management Dashboards, Budget-Alerts je MG/Sub, FinOps-Prozesse</a:t>
-            </a:r>
-          </a:p>
-          <a:p>
-            <a:pPr/>
-            <a:r>
-              <a:rPr sz="1300"/>
-              <a:t>Compliance &amp; Regulatorik: BSI, ISO 27001, DSGVO → Defender for Cloud Regulatory Compliance Dashboard</a:t>
-            </a:r>
-          </a:p>
-          <a:p>
-            <a:pPr/>
-            <a:r>
-              <a:rPr sz="1300"/>
-              <a:t>Workload-Migration: Azure Migrate Assessment → ALZ ist das Ziel, nicht der Migrations-Prozess selbst</a:t>
-            </a:r>
-          </a:p>
-        </p:txBody>
-      </p:sp>
-      <p:sp>
-        <p:nvSpPr>
-          <p:cNvPr id="4" name="Subtitle 3"/>
+              <a:t>12  ·  Risiken und Entscheidungen</a:t>
+            </a:r>
+          </a:p>
+        </p:txBody>
+      </p:sp>
+      <p:sp>
+        <p:nvSpPr>
+          <p:cNvPr id="3" name="Subtitle 2"/>
           <p:cNvSpPr>
             <a:spLocks noGrp="1"/>
           </p:cNvSpPr>
@@ -28392,9 +28400,26 @@
           <a:lstStyle/>
           <a:p>
             <a:r>
-              <a:t>Ergänzende Randthemen</a:t>
-            </a:r>
-          </a:p>
+              <a:t>Klare Entscheidungen für einen sicheren Start</a:t>
+            </a:r>
+          </a:p>
+        </p:txBody>
+      </p:sp>
+      <p:sp>
+        <p:nvSpPr>
+          <p:cNvPr id="4" name="Text Placeholder 3"/>
+          <p:cNvSpPr>
+            <a:spLocks noGrp="1"/>
+          </p:cNvSpPr>
+          <p:nvPr>
+            <p:ph type="body" idx="13" sz="quarter"/>
+          </p:nvPr>
+        </p:nvSpPr>
+        <p:spPr/>
+        <p:txBody>
+          <a:bodyPr/>
+          <a:lstStyle/>
+          <a:p/>
         </p:txBody>
       </p:sp>
     </p:spTree>
@@ -28431,14 +28456,79 @@
           <a:lstStyle/>
           <a:p>
             <a:r>
-              <a:t>14  ·  Nächste Schritte</a:t>
-            </a:r>
-          </a:p>
-        </p:txBody>
-      </p:sp>
-      <p:sp>
-        <p:nvSpPr>
-          <p:cNvPr id="3" name="Subtitle 2"/>
+              <a:t>Top-Risiken und Entscheidungsbedarf</a:t>
+            </a:r>
+          </a:p>
+        </p:txBody>
+      </p:sp>
+      <p:sp>
+        <p:nvSpPr>
+          <p:cNvPr id="3" name="Text Placeholder 2"/>
+          <p:cNvSpPr>
+            <a:spLocks noGrp="1"/>
+          </p:cNvSpPr>
+          <p:nvPr>
+            <p:ph type="body" idx="13" sz="quarter"/>
+          </p:nvPr>
+        </p:nvSpPr>
+        <p:spPr/>
+        <p:txBody>
+          <a:bodyPr wrap="square"/>
+          <a:lstStyle/>
+          <a:p>
+            <a:pPr/>
+            <a:r>
+              <a:rPr sz="1300"/>
+              <a:t>DDoS im Default AN → ~€2.500/Monat unerwartet; deployDdosProtectionPlan: false für Start</a:t>
+            </a:r>
+          </a:p>
+          <a:p>
+            <a:pPr/>
+            <a:r>
+              <a:rPr sz="1300"/>
+              <a:t>Subscription-Typ: kein Free Tier → EA/MCA/PAYG vor Bootstrap sicherstellen</a:t>
+            </a:r>
+          </a:p>
+          <a:p>
+            <a:pPr/>
+            <a:r>
+              <a:rPr sz="1300"/>
+              <a:t>IP-Adresskonflikt On-Prem mit Hub-VNets → IP-Plan vor Netzwerk-Deploy abstimmen</a:t>
+            </a:r>
+          </a:p>
+          <a:p>
+            <a:pPr/>
+            <a:r>
+              <a:rPr sz="1300"/>
+              <a:t>Defender-Pläne auto. per Policy aktiviert → Tier-Konfiguration vor Apply reviewen</a:t>
+            </a:r>
+          </a:p>
+          <a:p>
+            <a:pPr/>
+            <a:r>
+              <a:rPr sz="1300"/>
+              <a:t>Entscheidung: network_type: none (€0) vs. hubNetworking (~€5.800) für Pilot</a:t>
+            </a:r>
+          </a:p>
+          <a:p>
+            <a:pPr/>
+            <a:r>
+              <a:rPr sz="1300"/>
+              <a:t>Entscheidung: Enforcement-Zeitpunkt – wann von DoNotEnforce auf Enabled (Empfehlung: 4–8 Wochen Audit-Phase)</a:t>
+            </a:r>
+          </a:p>
+          <a:p>
+            <a:pPr/>
+            <a:r>
+              <a:rPr sz="1300"/>
+              <a:t>Entscheidung: On-Prem-Anbindung – VPN vs. ExpressRoute vs. keins (je nach SLA und Bandbreite)</a:t>
+            </a:r>
+          </a:p>
+        </p:txBody>
+      </p:sp>
+      <p:sp>
+        <p:nvSpPr>
+          <p:cNvPr id="4" name="Subtitle 3"/>
           <p:cNvSpPr>
             <a:spLocks noGrp="1"/>
           </p:cNvSpPr>
@@ -28452,26 +28542,9 @@
           <a:lstStyle/>
           <a:p>
             <a:r>
-              <a:t>Empfohlener Pilot-Pfad in 6 Schritten – ohne Kostenrisiko</a:t>
-            </a:r>
-          </a:p>
-        </p:txBody>
-      </p:sp>
-      <p:sp>
-        <p:nvSpPr>
-          <p:cNvPr id="4" name="Text Placeholder 3"/>
-          <p:cNvSpPr>
-            <a:spLocks noGrp="1"/>
-          </p:cNvSpPr>
-          <p:nvPr>
-            <p:ph type="body" idx="13" sz="quarter"/>
-          </p:nvPr>
-        </p:nvSpPr>
-        <p:spPr/>
-        <p:txBody>
-          <a:bodyPr/>
-          <a:lstStyle/>
-          <a:p/>
+              <a:t>Risiken und Entscheidungen</a:t>
+            </a:r>
+          </a:p>
         </p:txBody>
       </p:sp>
     </p:spTree>
@@ -28508,79 +28581,14 @@
           <a:lstStyle/>
           <a:p>
             <a:r>
-              <a:t>Sofortmaßnahmen und empfohlener Pilot-Pfad</a:t>
-            </a:r>
-          </a:p>
-        </p:txBody>
-      </p:sp>
-      <p:sp>
-        <p:nvSpPr>
-          <p:cNvPr id="3" name="Text Placeholder 2"/>
-          <p:cNvSpPr>
-            <a:spLocks noGrp="1"/>
-          </p:cNvSpPr>
-          <p:nvPr>
-            <p:ph type="body" idx="13" sz="quarter"/>
-          </p:nvPr>
-        </p:nvSpPr>
-        <p:spPr/>
-        <p:txBody>
-          <a:bodyPr wrap="square"/>
-          <a:lstStyle/>
-          <a:p>
-            <a:pPr/>
-            <a:r>
-              <a:rPr sz="1300"/>
-              <a:t>1.  Subscription-ID + GitHub PAT in config/inputs-github.yaml eintragen</a:t>
-            </a:r>
-          </a:p>
-          <a:p>
-            <a:pPr/>
-            <a:r>
-              <a:rPr sz="1300"/>
-              <a:t>2.  Bootstrap: Deploy-Accelerator -inputs config/inputs-github.yaml config/platform-landing-zone.yaml</a:t>
-            </a:r>
-          </a:p>
-          <a:p>
-            <a:pPr/>
-            <a:r>
-              <a:rPr sz="1300"/>
-              <a:t>3.  Pipeline mit What-If prüfen → welche Ressourcen werden erstellt?</a:t>
-            </a:r>
-          </a:p>
-          <a:p>
-            <a:pPr/>
-            <a:r>
-              <a:rPr sz="1300"/>
-              <a:t>4.  Apply genehmigen – network_type: none (≈€0) für risikofreien Pilot-Start</a:t>
-            </a:r>
-          </a:p>
-          <a:p>
-            <a:pPr/>
-            <a:r>
-              <a:rPr sz="1300"/>
-              <a:t>5.  Policy-Compliance-Dashboard reviewen → welche Guardrails greifen, welche nicht?</a:t>
-            </a:r>
-          </a:p>
-          <a:p>
-            <a:pPr/>
-            <a:r>
-              <a:rPr sz="1300"/>
-              <a:t>6.  Schrittweise Enforcement und Netzwerk-Dienste aktivieren nach Audit-Phase</a:t>
-            </a:r>
-          </a:p>
-          <a:p>
-            <a:pPr/>
-            <a:r>
-              <a:rPr sz="1300"/>
-              <a:t>Bechtle begleitet: Kickoff-Workshop → Bootstrap-Begleitung → Pilot → Workload-Onboarding</a:t>
-            </a:r>
-          </a:p>
-        </p:txBody>
-      </p:sp>
-      <p:sp>
-        <p:nvSpPr>
-          <p:cNvPr id="4" name="Subtitle 3"/>
+              <a:t>13  ·  Ergänzende Randthemen</a:t>
+            </a:r>
+          </a:p>
+        </p:txBody>
+      </p:sp>
+      <p:sp>
+        <p:nvSpPr>
+          <p:cNvPr id="3" name="Subtitle 2"/>
           <p:cNvSpPr>
             <a:spLocks noGrp="1"/>
           </p:cNvSpPr>
@@ -28594,9 +28602,26 @@
           <a:lstStyle/>
           <a:p>
             <a:r>
-              <a:t>Nächste Schritte</a:t>
-            </a:r>
-          </a:p>
+              <a:t>Außerhalb des ALZ-Scopes – aber eng verknüpft</a:t>
+            </a:r>
+          </a:p>
+        </p:txBody>
+      </p:sp>
+      <p:sp>
+        <p:nvSpPr>
+          <p:cNvPr id="4" name="Text Placeholder 3"/>
+          <p:cNvSpPr>
+            <a:spLocks noGrp="1"/>
+          </p:cNvSpPr>
+          <p:nvPr>
+            <p:ph type="body" idx="13" sz="quarter"/>
+          </p:nvPr>
+        </p:nvSpPr>
+        <p:spPr/>
+        <p:txBody>
+          <a:bodyPr/>
+          <a:lstStyle/>
+          <a:p/>
         </p:txBody>
       </p:sp>
     </p:spTree>
@@ -28608,6 +28633,326 @@
 </file>
 
 <file path=ppt/slides/slide36.xml><?xml version="1.0" encoding="utf-8"?>
+<p:sld xmlns:a="http://schemas.openxmlformats.org/drawingml/2006/main" xmlns:p="http://schemas.openxmlformats.org/presentationml/2006/main" xmlns:r="http://schemas.openxmlformats.org/officeDocument/2006/relationships">
+  <p:cSld>
+    <p:spTree>
+      <p:nvGrpSpPr>
+        <p:cNvPr id="1" name=""/>
+        <p:cNvGrpSpPr/>
+        <p:nvPr/>
+      </p:nvGrpSpPr>
+      <p:grpSpPr/>
+      <p:sp>
+        <p:nvSpPr>
+          <p:cNvPr id="2" name="Title 1"/>
+          <p:cNvSpPr>
+            <a:spLocks noGrp="1"/>
+          </p:cNvSpPr>
+          <p:nvPr>
+            <p:ph type="title"/>
+          </p:nvPr>
+        </p:nvSpPr>
+        <p:spPr/>
+        <p:txBody>
+          <a:bodyPr/>
+          <a:lstStyle/>
+          <a:p>
+            <a:r>
+              <a:t>Abhängigkeiten und Folge-Bausteine</a:t>
+            </a:r>
+          </a:p>
+        </p:txBody>
+      </p:sp>
+      <p:sp>
+        <p:nvSpPr>
+          <p:cNvPr id="3" name="Text Placeholder 2"/>
+          <p:cNvSpPr>
+            <a:spLocks noGrp="1"/>
+          </p:cNvSpPr>
+          <p:nvPr>
+            <p:ph type="body" idx="13" sz="quarter"/>
+          </p:nvPr>
+        </p:nvSpPr>
+        <p:spPr/>
+        <p:txBody>
+          <a:bodyPr wrap="square"/>
+          <a:lstStyle/>
+          <a:p>
+            <a:pPr/>
+            <a:r>
+              <a:rPr sz="1300"/>
+              <a:t>Entra ID &amp; Identity: PIM, Conditional Access, hybride Identitäten → Identity-Baseline als Folgestufe</a:t>
+            </a:r>
+          </a:p>
+          <a:p>
+            <a:pPr/>
+            <a:r>
+              <a:rPr sz="1300"/>
+              <a:t>On-Prem-Anbindung: VPN-Gateway (deployt, aktiv) oder ExpressRoute → Leitungsbestellung + BGP-Konfiguration außerhalb Scope</a:t>
+            </a:r>
+          </a:p>
+          <a:p>
+            <a:pPr/>
+            <a:r>
+              <a:rPr sz="1300"/>
+              <a:t>Backup &amp; DR: Deploy-VM-Backup aktiv via Policy; Recovery Vault-Konfiguration und DR-Tests als Folgestufe</a:t>
+            </a:r>
+          </a:p>
+          <a:p>
+            <a:pPr/>
+            <a:r>
+              <a:rPr sz="1300"/>
+              <a:t>Kostenmanagement: Azure Cost Management Dashboards, Budget-Alerts je MG/Sub, FinOps-Prozesse</a:t>
+            </a:r>
+          </a:p>
+          <a:p>
+            <a:pPr/>
+            <a:r>
+              <a:rPr sz="1300"/>
+              <a:t>Compliance &amp; Regulatorik: BSI, ISO 27001, DSGVO → Defender for Cloud Regulatory Compliance Dashboard</a:t>
+            </a:r>
+          </a:p>
+          <a:p>
+            <a:pPr/>
+            <a:r>
+              <a:rPr sz="1300"/>
+              <a:t>Workload-Migration: Azure Migrate Assessment → ALZ ist das Ziel, nicht der Migrations-Prozess selbst</a:t>
+            </a:r>
+          </a:p>
+        </p:txBody>
+      </p:sp>
+      <p:sp>
+        <p:nvSpPr>
+          <p:cNvPr id="4" name="Subtitle 3"/>
+          <p:cNvSpPr>
+            <a:spLocks noGrp="1"/>
+          </p:cNvSpPr>
+          <p:nvPr>
+            <p:ph type="subTitle" idx="1"/>
+          </p:nvPr>
+        </p:nvSpPr>
+        <p:spPr/>
+        <p:txBody>
+          <a:bodyPr/>
+          <a:lstStyle/>
+          <a:p>
+            <a:r>
+              <a:t>Ergänzende Randthemen</a:t>
+            </a:r>
+          </a:p>
+        </p:txBody>
+      </p:sp>
+    </p:spTree>
+  </p:cSld>
+  <p:clrMapOvr>
+    <a:masterClrMapping/>
+  </p:clrMapOvr>
+</p:sld>
+</file>
+
+<file path=ppt/slides/slide37.xml><?xml version="1.0" encoding="utf-8"?>
+<p:sld xmlns:a="http://schemas.openxmlformats.org/drawingml/2006/main" xmlns:p="http://schemas.openxmlformats.org/presentationml/2006/main" xmlns:r="http://schemas.openxmlformats.org/officeDocument/2006/relationships">
+  <p:cSld>
+    <p:spTree>
+      <p:nvGrpSpPr>
+        <p:cNvPr id="1" name=""/>
+        <p:cNvGrpSpPr/>
+        <p:nvPr/>
+      </p:nvGrpSpPr>
+      <p:grpSpPr/>
+      <p:sp>
+        <p:nvSpPr>
+          <p:cNvPr id="2" name="Title 1"/>
+          <p:cNvSpPr>
+            <a:spLocks noGrp="1"/>
+          </p:cNvSpPr>
+          <p:nvPr>
+            <p:ph type="title"/>
+          </p:nvPr>
+        </p:nvSpPr>
+        <p:spPr/>
+        <p:txBody>
+          <a:bodyPr/>
+          <a:lstStyle/>
+          <a:p>
+            <a:r>
+              <a:t>14  ·  Nächste Schritte</a:t>
+            </a:r>
+          </a:p>
+        </p:txBody>
+      </p:sp>
+      <p:sp>
+        <p:nvSpPr>
+          <p:cNvPr id="3" name="Subtitle 2"/>
+          <p:cNvSpPr>
+            <a:spLocks noGrp="1"/>
+          </p:cNvSpPr>
+          <p:nvPr>
+            <p:ph type="subTitle" idx="1"/>
+          </p:nvPr>
+        </p:nvSpPr>
+        <p:spPr/>
+        <p:txBody>
+          <a:bodyPr/>
+          <a:lstStyle/>
+          <a:p>
+            <a:r>
+              <a:t>Empfohlener Pilot-Pfad in 6 Schritten – ohne Kostenrisiko</a:t>
+            </a:r>
+          </a:p>
+        </p:txBody>
+      </p:sp>
+      <p:sp>
+        <p:nvSpPr>
+          <p:cNvPr id="4" name="Text Placeholder 3"/>
+          <p:cNvSpPr>
+            <a:spLocks noGrp="1"/>
+          </p:cNvSpPr>
+          <p:nvPr>
+            <p:ph type="body" idx="13" sz="quarter"/>
+          </p:nvPr>
+        </p:nvSpPr>
+        <p:spPr/>
+        <p:txBody>
+          <a:bodyPr/>
+          <a:lstStyle/>
+          <a:p/>
+        </p:txBody>
+      </p:sp>
+    </p:spTree>
+  </p:cSld>
+  <p:clrMapOvr>
+    <a:masterClrMapping/>
+  </p:clrMapOvr>
+</p:sld>
+</file>
+
+<file path=ppt/slides/slide38.xml><?xml version="1.0" encoding="utf-8"?>
+<p:sld xmlns:a="http://schemas.openxmlformats.org/drawingml/2006/main" xmlns:p="http://schemas.openxmlformats.org/presentationml/2006/main" xmlns:r="http://schemas.openxmlformats.org/officeDocument/2006/relationships">
+  <p:cSld>
+    <p:spTree>
+      <p:nvGrpSpPr>
+        <p:cNvPr id="1" name=""/>
+        <p:cNvGrpSpPr/>
+        <p:nvPr/>
+      </p:nvGrpSpPr>
+      <p:grpSpPr/>
+      <p:sp>
+        <p:nvSpPr>
+          <p:cNvPr id="2" name="Title 1"/>
+          <p:cNvSpPr>
+            <a:spLocks noGrp="1"/>
+          </p:cNvSpPr>
+          <p:nvPr>
+            <p:ph type="title"/>
+          </p:nvPr>
+        </p:nvSpPr>
+        <p:spPr/>
+        <p:txBody>
+          <a:bodyPr/>
+          <a:lstStyle/>
+          <a:p>
+            <a:r>
+              <a:t>Sofortmaßnahmen und empfohlener Pilot-Pfad</a:t>
+            </a:r>
+          </a:p>
+        </p:txBody>
+      </p:sp>
+      <p:sp>
+        <p:nvSpPr>
+          <p:cNvPr id="3" name="Text Placeholder 2"/>
+          <p:cNvSpPr>
+            <a:spLocks noGrp="1"/>
+          </p:cNvSpPr>
+          <p:nvPr>
+            <p:ph type="body" idx="13" sz="quarter"/>
+          </p:nvPr>
+        </p:nvSpPr>
+        <p:spPr/>
+        <p:txBody>
+          <a:bodyPr wrap="square"/>
+          <a:lstStyle/>
+          <a:p>
+            <a:pPr/>
+            <a:r>
+              <a:rPr sz="1300"/>
+              <a:t>1.  Subscription-ID + GitHub PAT in config/inputs-github.yaml eintragen</a:t>
+            </a:r>
+          </a:p>
+          <a:p>
+            <a:pPr/>
+            <a:r>
+              <a:rPr sz="1300"/>
+              <a:t>2.  Bootstrap: Deploy-Accelerator -inputs config/inputs-github.yaml config/platform-landing-zone.yaml</a:t>
+            </a:r>
+          </a:p>
+          <a:p>
+            <a:pPr/>
+            <a:r>
+              <a:rPr sz="1300"/>
+              <a:t>3.  Pipeline mit What-If prüfen → welche Ressourcen werden erstellt?</a:t>
+            </a:r>
+          </a:p>
+          <a:p>
+            <a:pPr/>
+            <a:r>
+              <a:rPr sz="1300"/>
+              <a:t>4.  Apply genehmigen – network_type: none (≈€0) für risikofreien Pilot-Start</a:t>
+            </a:r>
+          </a:p>
+          <a:p>
+            <a:pPr/>
+            <a:r>
+              <a:rPr sz="1300"/>
+              <a:t>5.  Policy-Compliance-Dashboard reviewen → welche Guardrails greifen, welche nicht?</a:t>
+            </a:r>
+          </a:p>
+          <a:p>
+            <a:pPr/>
+            <a:r>
+              <a:rPr sz="1300"/>
+              <a:t>6.  Schrittweise Enforcement und Netzwerk-Dienste aktivieren nach Audit-Phase</a:t>
+            </a:r>
+          </a:p>
+          <a:p>
+            <a:pPr/>
+            <a:r>
+              <a:rPr sz="1300"/>
+              <a:t>Bechtle begleitet: Kickoff-Workshop → Bootstrap-Begleitung → Pilot → Workload-Onboarding</a:t>
+            </a:r>
+          </a:p>
+        </p:txBody>
+      </p:sp>
+      <p:sp>
+        <p:nvSpPr>
+          <p:cNvPr id="4" name="Subtitle 3"/>
+          <p:cNvSpPr>
+            <a:spLocks noGrp="1"/>
+          </p:cNvSpPr>
+          <p:nvPr>
+            <p:ph type="subTitle" idx="1"/>
+          </p:nvPr>
+        </p:nvSpPr>
+        <p:spPr/>
+        <p:txBody>
+          <a:bodyPr/>
+          <a:lstStyle/>
+          <a:p>
+            <a:r>
+              <a:t>Nächste Schritte</a:t>
+            </a:r>
+          </a:p>
+        </p:txBody>
+      </p:sp>
+    </p:spTree>
+  </p:cSld>
+  <p:clrMapOvr>
+    <a:masterClrMapping/>
+  </p:clrMapOvr>
+</p:sld>
+</file>
+
+<file path=ppt/slides/slide39.xml><?xml version="1.0" encoding="utf-8"?>
 <p:sld xmlns:a="http://schemas.openxmlformats.org/drawingml/2006/main" xmlns:p="http://schemas.openxmlformats.org/presentationml/2006/main" xmlns:r="http://schemas.openxmlformats.org/officeDocument/2006/relationships">
   <p:cSld>
     <p:spTree>

--- a/docs/konzept/Powerpoint/Azure-Landing-Zone-Konzept.pptx
+++ b/docs/konzept/Powerpoint/Azure-Landing-Zone-Konzept.pptx
@@ -25615,41 +25615,78 @@
       <p:grpSpPr/>
       <p:sp>
         <p:nvSpPr>
-          <p:cNvPr id="2" name="Title 1"/>
-          <p:cNvSpPr>
-            <a:spLocks noGrp="1"/>
-          </p:cNvSpPr>
-          <p:nvPr>
-            <p:ph type="title"/>
-          </p:nvPr>
-        </p:nvSpPr>
-        <p:spPr/>
-        <p:txBody>
-          <a:bodyPr/>
+          <p:cNvPr id="2" name="TextBox 1"/>
+          <p:cNvSpPr txBox="1"/>
+          <p:nvPr/>
+        </p:nvSpPr>
+        <p:spPr>
+          <a:xfrm>
+            <a:off x="137160" y="73152"/>
+            <a:ext cx="11887200" cy="438912"/>
+          </a:xfrm>
+          <a:prstGeom prst="rect">
+            <a:avLst/>
+          </a:prstGeom>
+          <a:noFill/>
+        </p:spPr>
+        <p:txBody>
+          <a:bodyPr wrap="none">
+            <a:spAutoFit/>
+          </a:bodyPr>
           <a:lstStyle/>
           <a:p>
             <a:r>
-              <a:rPr sz="1800"/>
-              <a:t>Zielarchitektur: Azure Landing Zone – Hub-and-Spoke</a:t>
-            </a:r>
-          </a:p>
-        </p:txBody>
-      </p:sp>
-      <p:sp>
-        <p:nvSpPr>
-          <p:cNvPr id="3" name="Subtitle 2"/>
-          <p:cNvSpPr>
-            <a:spLocks noGrp="1"/>
-          </p:cNvSpPr>
-          <p:nvPr>
-            <p:ph type="subTitle" idx="1"/>
-          </p:nvPr>
-        </p:nvSpPr>
-        <p:spPr/>
-        <p:txBody>
-          <a:bodyPr/>
+              <a:rPr sz="1500" b="1">
+                <a:solidFill>
+                  <a:srgbClr val="075033"/>
+                </a:solidFill>
+              </a:rPr>
+              <a:t>Zielarchitektur: Azure Landing Zone – Hub-and-Spoke-Topologie</a:t>
+            </a:r>
+          </a:p>
+        </p:txBody>
+      </p:sp>
+      <p:sp>
+        <p:nvSpPr>
+          <p:cNvPr id="3" name="Rectangle 2"/>
+          <p:cNvSpPr/>
+          <p:nvPr/>
+        </p:nvSpPr>
+        <p:spPr>
+          <a:xfrm>
+            <a:off x="137160" y="548640"/>
+            <a:ext cx="11887200" cy="22860"/>
+          </a:xfrm>
+          <a:prstGeom prst="rect">
+            <a:avLst/>
+          </a:prstGeom>
+          <a:solidFill>
+            <a:srgbClr val="23A96A"/>
+          </a:solidFill>
+          <a:ln>
+            <a:noFill/>
+          </a:ln>
+        </p:spPr>
+        <p:style>
+          <a:lnRef idx="1">
+            <a:schemeClr val="accent1"/>
+          </a:lnRef>
+          <a:fillRef idx="3">
+            <a:schemeClr val="accent1"/>
+          </a:fillRef>
+          <a:effectRef idx="2">
+            <a:schemeClr val="accent1"/>
+          </a:effectRef>
+          <a:fontRef idx="minor">
+            <a:schemeClr val="lt1"/>
+          </a:fontRef>
+        </p:style>
+        <p:txBody>
+          <a:bodyPr rtlCol="0" anchor="ctr"/>
           <a:lstStyle/>
-          <a:p/>
+          <a:p>
+            <a:pPr algn="ctr"/>
+          </a:p>
         </p:txBody>
       </p:sp>
       <p:pic>
@@ -25668,8 +25705,8 @@
         </p:blipFill>
         <p:spPr>
           <a:xfrm>
-            <a:off x="274320" y="1234440"/>
-            <a:ext cx="11612880" cy="6919341"/>
+            <a:off x="137160" y="621792"/>
+            <a:ext cx="8001000" cy="4767262"/>
           </a:xfrm>
           <a:prstGeom prst="rect">
             <a:avLst/>
@@ -25684,8 +25721,8 @@
         </p:nvSpPr>
         <p:spPr>
           <a:xfrm>
-            <a:off x="274320" y="6400800"/>
-            <a:ext cx="11612880" cy="365760"/>
+            <a:off x="137160" y="6629400"/>
+            <a:ext cx="8001000" cy="201168"/>
           </a:xfrm>
           <a:prstGeom prst="rect">
             <a:avLst/>
@@ -25699,12 +25736,626 @@
           <a:lstStyle/>
           <a:p>
             <a:r>
+              <a:rPr sz="700">
+                <a:solidFill>
+                  <a:srgbClr val="595959"/>
+                </a:solidFill>
+              </a:rPr>
+              <a:t>Quelle: Microsoft Cloud Adoption Framework · learn.microsoft.com (unverändert)</a:t>
+            </a:r>
+          </a:p>
+        </p:txBody>
+      </p:sp>
+      <p:sp>
+        <p:nvSpPr>
+          <p:cNvPr id="6" name="Rectangle 5"/>
+          <p:cNvSpPr/>
+          <p:nvPr/>
+        </p:nvSpPr>
+        <p:spPr>
+          <a:xfrm>
+            <a:off x="8366760" y="621792"/>
+            <a:ext cx="3657600" cy="1435608"/>
+          </a:xfrm>
+          <a:prstGeom prst="rect">
+            <a:avLst/>
+          </a:prstGeom>
+          <a:solidFill>
+            <a:srgbClr val="F2F9F5"/>
+          </a:solidFill>
+          <a:ln w="15875">
+            <a:solidFill>
+              <a:srgbClr val="075033"/>
+            </a:solidFill>
+          </a:ln>
+        </p:spPr>
+        <p:style>
+          <a:lnRef idx="1">
+            <a:schemeClr val="accent1"/>
+          </a:lnRef>
+          <a:fillRef idx="3">
+            <a:schemeClr val="accent1"/>
+          </a:fillRef>
+          <a:effectRef idx="2">
+            <a:schemeClr val="accent1"/>
+          </a:effectRef>
+          <a:fontRef idx="minor">
+            <a:schemeClr val="lt1"/>
+          </a:fontRef>
+        </p:style>
+        <p:txBody>
+          <a:bodyPr rtlCol="0" anchor="ctr"/>
+          <a:lstStyle/>
+          <a:p>
+            <a:pPr algn="ctr"/>
+          </a:p>
+        </p:txBody>
+      </p:sp>
+      <p:sp>
+        <p:nvSpPr>
+          <p:cNvPr id="7" name="Rectangle 6"/>
+          <p:cNvSpPr/>
+          <p:nvPr/>
+        </p:nvSpPr>
+        <p:spPr>
+          <a:xfrm>
+            <a:off x="8366760" y="621792"/>
+            <a:ext cx="64008" cy="1435608"/>
+          </a:xfrm>
+          <a:prstGeom prst="rect">
+            <a:avLst/>
+          </a:prstGeom>
+          <a:solidFill>
+            <a:srgbClr val="075033"/>
+          </a:solidFill>
+          <a:ln>
+            <a:noFill/>
+          </a:ln>
+        </p:spPr>
+        <p:style>
+          <a:lnRef idx="1">
+            <a:schemeClr val="accent1"/>
+          </a:lnRef>
+          <a:fillRef idx="3">
+            <a:schemeClr val="accent1"/>
+          </a:fillRef>
+          <a:effectRef idx="2">
+            <a:schemeClr val="accent1"/>
+          </a:effectRef>
+          <a:fontRef idx="minor">
+            <a:schemeClr val="lt1"/>
+          </a:fontRef>
+        </p:style>
+        <p:txBody>
+          <a:bodyPr rtlCol="0" anchor="ctr"/>
+          <a:lstStyle/>
+          <a:p>
+            <a:pPr algn="ctr"/>
+          </a:p>
+        </p:txBody>
+      </p:sp>
+      <p:sp>
+        <p:nvSpPr>
+          <p:cNvPr id="8" name="TextBox 7"/>
+          <p:cNvSpPr txBox="1"/>
+          <p:nvPr/>
+        </p:nvSpPr>
+        <p:spPr>
+          <a:xfrm>
+            <a:off x="8476488" y="685800"/>
+            <a:ext cx="3493008" cy="1344168"/>
+          </a:xfrm>
+          <a:prstGeom prst="rect">
+            <a:avLst/>
+          </a:prstGeom>
+          <a:noFill/>
+        </p:spPr>
+        <p:txBody>
+          <a:bodyPr wrap="square">
+            <a:spAutoFit/>
+          </a:bodyPr>
+          <a:lstStyle/>
+          <a:p>
+            <a:r>
+              <a:rPr b="1" sz="900">
+                <a:solidFill>
+                  <a:srgbClr val="075033"/>
+                </a:solidFill>
+              </a:rPr>
+              <a:t>Bechtle-Empfehlung (~€1.050/Mon.)</a:t>
+            </a:r>
+          </a:p>
+          <a:p>
+            <a:r>
               <a:rPr sz="800">
                 <a:solidFill>
-                  <a:srgbClr val="595959"/>
+                  <a:srgbClr val="1A1A1A"/>
                 </a:solidFill>
               </a:rPr>
-              <a:t>Quelle: Microsoft Cloud Adoption Framework · learn.microsoft.com</a:t>
+              <a:t>Connectivity Sub: Firewall Standard 1×</a:t>
+            </a:r>
+          </a:p>
+          <a:p>
+            <a:r>
+              <a:rPr sz="800">
+                <a:solidFill>
+                  <a:srgbClr val="1A1A1A"/>
+                </a:solidFill>
+              </a:rPr>
+              <a:t>Bastion 1×  ·  VPN GW 1×  ·  DNS Resolver 1×</a:t>
+            </a:r>
+          </a:p>
+          <a:p>
+            <a:r>
+              <a:rPr sz="800">
+                <a:solidFill>
+                  <a:srgbClr val="1A1A1A"/>
+                </a:solidFill>
+              </a:rPr>
+              <a:t>Region: Germany West Central (GWC)</a:t>
+            </a:r>
+          </a:p>
+        </p:txBody>
+      </p:sp>
+      <p:sp>
+        <p:nvSpPr>
+          <p:cNvPr id="9" name="Rectangle 8"/>
+          <p:cNvSpPr/>
+          <p:nvPr/>
+        </p:nvSpPr>
+        <p:spPr>
+          <a:xfrm>
+            <a:off x="8366760" y="2130552"/>
+            <a:ext cx="3657600" cy="1435608"/>
+          </a:xfrm>
+          <a:prstGeom prst="rect">
+            <a:avLst/>
+          </a:prstGeom>
+          <a:solidFill>
+            <a:srgbClr val="F2F9F5"/>
+          </a:solidFill>
+          <a:ln w="15875">
+            <a:solidFill>
+              <a:srgbClr val="075033"/>
+            </a:solidFill>
+          </a:ln>
+        </p:spPr>
+        <p:style>
+          <a:lnRef idx="1">
+            <a:schemeClr val="accent1"/>
+          </a:lnRef>
+          <a:fillRef idx="3">
+            <a:schemeClr val="accent1"/>
+          </a:fillRef>
+          <a:effectRef idx="2">
+            <a:schemeClr val="accent1"/>
+          </a:effectRef>
+          <a:fontRef idx="minor">
+            <a:schemeClr val="lt1"/>
+          </a:fontRef>
+        </p:style>
+        <p:txBody>
+          <a:bodyPr rtlCol="0" anchor="ctr"/>
+          <a:lstStyle/>
+          <a:p>
+            <a:pPr algn="ctr"/>
+          </a:p>
+        </p:txBody>
+      </p:sp>
+      <p:sp>
+        <p:nvSpPr>
+          <p:cNvPr id="10" name="Rectangle 9"/>
+          <p:cNvSpPr/>
+          <p:nvPr/>
+        </p:nvSpPr>
+        <p:spPr>
+          <a:xfrm>
+            <a:off x="8366760" y="2130552"/>
+            <a:ext cx="64008" cy="1435608"/>
+          </a:xfrm>
+          <a:prstGeom prst="rect">
+            <a:avLst/>
+          </a:prstGeom>
+          <a:solidFill>
+            <a:srgbClr val="075033"/>
+          </a:solidFill>
+          <a:ln>
+            <a:noFill/>
+          </a:ln>
+        </p:spPr>
+        <p:style>
+          <a:lnRef idx="1">
+            <a:schemeClr val="accent1"/>
+          </a:lnRef>
+          <a:fillRef idx="3">
+            <a:schemeClr val="accent1"/>
+          </a:fillRef>
+          <a:effectRef idx="2">
+            <a:schemeClr val="accent1"/>
+          </a:effectRef>
+          <a:fontRef idx="minor">
+            <a:schemeClr val="lt1"/>
+          </a:fontRef>
+        </p:style>
+        <p:txBody>
+          <a:bodyPr rtlCol="0" anchor="ctr"/>
+          <a:lstStyle/>
+          <a:p>
+            <a:pPr algn="ctr"/>
+          </a:p>
+        </p:txBody>
+      </p:sp>
+      <p:sp>
+        <p:nvSpPr>
+          <p:cNvPr id="11" name="TextBox 10"/>
+          <p:cNvSpPr txBox="1"/>
+          <p:nvPr/>
+        </p:nvSpPr>
+        <p:spPr>
+          <a:xfrm>
+            <a:off x="8476488" y="2194560"/>
+            <a:ext cx="3493008" cy="1344168"/>
+          </a:xfrm>
+          <a:prstGeom prst="rect">
+            <a:avLst/>
+          </a:prstGeom>
+          <a:noFill/>
+        </p:spPr>
+        <p:txBody>
+          <a:bodyPr wrap="square">
+            <a:spAutoFit/>
+          </a:bodyPr>
+          <a:lstStyle/>
+          <a:p>
+            <a:r>
+              <a:rPr b="1" sz="900">
+                <a:solidFill>
+                  <a:srgbClr val="075033"/>
+                </a:solidFill>
+              </a:rPr>
+              <a:t>Erweiterung: Geo-Redundanz (~€1.800)</a:t>
+            </a:r>
+          </a:p>
+          <a:p>
+            <a:r>
+              <a:rPr sz="800">
+                <a:solidFill>
+                  <a:srgbClr val="1A1A1A"/>
+                </a:solidFill>
+              </a:rPr>
+              <a:t>Zweiter Hub (North Europe) per</a:t>
+            </a:r>
+          </a:p>
+          <a:p>
+            <a:r>
+              <a:rPr sz="800">
+                <a:solidFill>
+                  <a:srgbClr val="1A1A1A"/>
+                </a:solidFill>
+              </a:rPr>
+              <a:t>additivem Parameter-Update –</a:t>
+            </a:r>
+          </a:p>
+          <a:p>
+            <a:r>
+              <a:rPr sz="800">
+                <a:solidFill>
+                  <a:srgbClr val="1A1A1A"/>
+                </a:solidFill>
+              </a:rPr>
+              <a:t>kein Rebuild erforderlich</a:t>
+            </a:r>
+          </a:p>
+        </p:txBody>
+      </p:sp>
+      <p:sp>
+        <p:nvSpPr>
+          <p:cNvPr id="12" name="Rectangle 11"/>
+          <p:cNvSpPr/>
+          <p:nvPr/>
+        </p:nvSpPr>
+        <p:spPr>
+          <a:xfrm>
+            <a:off x="8366760" y="3639312"/>
+            <a:ext cx="3657600" cy="1435608"/>
+          </a:xfrm>
+          <a:prstGeom prst="rect">
+            <a:avLst/>
+          </a:prstGeom>
+          <a:solidFill>
+            <a:srgbClr val="F2F9F5"/>
+          </a:solidFill>
+          <a:ln w="15875">
+            <a:solidFill>
+              <a:srgbClr val="075033"/>
+            </a:solidFill>
+          </a:ln>
+        </p:spPr>
+        <p:style>
+          <a:lnRef idx="1">
+            <a:schemeClr val="accent1"/>
+          </a:lnRef>
+          <a:fillRef idx="3">
+            <a:schemeClr val="accent1"/>
+          </a:fillRef>
+          <a:effectRef idx="2">
+            <a:schemeClr val="accent1"/>
+          </a:effectRef>
+          <a:fontRef idx="minor">
+            <a:schemeClr val="lt1"/>
+          </a:fontRef>
+        </p:style>
+        <p:txBody>
+          <a:bodyPr rtlCol="0" anchor="ctr"/>
+          <a:lstStyle/>
+          <a:p>
+            <a:pPr algn="ctr"/>
+          </a:p>
+        </p:txBody>
+      </p:sp>
+      <p:sp>
+        <p:nvSpPr>
+          <p:cNvPr id="13" name="Rectangle 12"/>
+          <p:cNvSpPr/>
+          <p:nvPr/>
+        </p:nvSpPr>
+        <p:spPr>
+          <a:xfrm>
+            <a:off x="8366760" y="3639312"/>
+            <a:ext cx="64008" cy="1435608"/>
+          </a:xfrm>
+          <a:prstGeom prst="rect">
+            <a:avLst/>
+          </a:prstGeom>
+          <a:solidFill>
+            <a:srgbClr val="075033"/>
+          </a:solidFill>
+          <a:ln>
+            <a:noFill/>
+          </a:ln>
+        </p:spPr>
+        <p:style>
+          <a:lnRef idx="1">
+            <a:schemeClr val="accent1"/>
+          </a:lnRef>
+          <a:fillRef idx="3">
+            <a:schemeClr val="accent1"/>
+          </a:fillRef>
+          <a:effectRef idx="2">
+            <a:schemeClr val="accent1"/>
+          </a:effectRef>
+          <a:fontRef idx="minor">
+            <a:schemeClr val="lt1"/>
+          </a:fontRef>
+        </p:style>
+        <p:txBody>
+          <a:bodyPr rtlCol="0" anchor="ctr"/>
+          <a:lstStyle/>
+          <a:p>
+            <a:pPr algn="ctr"/>
+          </a:p>
+        </p:txBody>
+      </p:sp>
+      <p:sp>
+        <p:nvSpPr>
+          <p:cNvPr id="14" name="TextBox 13"/>
+          <p:cNvSpPr txBox="1"/>
+          <p:nvPr/>
+        </p:nvSpPr>
+        <p:spPr>
+          <a:xfrm>
+            <a:off x="8476488" y="3703320"/>
+            <a:ext cx="3493008" cy="1344168"/>
+          </a:xfrm>
+          <a:prstGeom prst="rect">
+            <a:avLst/>
+          </a:prstGeom>
+          <a:noFill/>
+        </p:spPr>
+        <p:txBody>
+          <a:bodyPr wrap="square">
+            <a:spAutoFit/>
+          </a:bodyPr>
+          <a:lstStyle/>
+          <a:p>
+            <a:r>
+              <a:rPr b="1" sz="900">
+                <a:solidFill>
+                  <a:srgbClr val="075033"/>
+                </a:solidFill>
+              </a:rPr>
+              <a:t>Landing Zones (Workload-Subs)</a:t>
+            </a:r>
+          </a:p>
+          <a:p>
+            <a:r>
+              <a:rPr sz="800">
+                <a:solidFill>
+                  <a:srgbClr val="1A1A1A"/>
+                </a:solidFill>
+              </a:rPr>
+              <a:t>alz-corp: interne Workloads (kein Public EP)</a:t>
+            </a:r>
+          </a:p>
+          <a:p>
+            <a:r>
+              <a:rPr sz="800">
+                <a:solidFill>
+                  <a:srgbClr val="1A1A1A"/>
+                </a:solidFill>
+              </a:rPr>
+              <a:t>alz-online: internetseitige Dienste</a:t>
+            </a:r>
+          </a:p>
+          <a:p>
+            <a:r>
+              <a:rPr sz="800">
+                <a:solidFill>
+                  <a:srgbClr val="1A1A1A"/>
+                </a:solidFill>
+              </a:rPr>
+              <a:t>alz-sandbox: Experimente / PoC</a:t>
+            </a:r>
+          </a:p>
+        </p:txBody>
+      </p:sp>
+      <p:sp>
+        <p:nvSpPr>
+          <p:cNvPr id="15" name="Rectangle 14"/>
+          <p:cNvSpPr/>
+          <p:nvPr/>
+        </p:nvSpPr>
+        <p:spPr>
+          <a:xfrm>
+            <a:off x="8366760" y="5148072"/>
+            <a:ext cx="3657600" cy="1435608"/>
+          </a:xfrm>
+          <a:prstGeom prst="rect">
+            <a:avLst/>
+          </a:prstGeom>
+          <a:solidFill>
+            <a:srgbClr val="F2F9F5"/>
+          </a:solidFill>
+          <a:ln w="15875">
+            <a:solidFill>
+              <a:srgbClr val="075033"/>
+            </a:solidFill>
+          </a:ln>
+        </p:spPr>
+        <p:style>
+          <a:lnRef idx="1">
+            <a:schemeClr val="accent1"/>
+          </a:lnRef>
+          <a:fillRef idx="3">
+            <a:schemeClr val="accent1"/>
+          </a:fillRef>
+          <a:effectRef idx="2">
+            <a:schemeClr val="accent1"/>
+          </a:effectRef>
+          <a:fontRef idx="minor">
+            <a:schemeClr val="lt1"/>
+          </a:fontRef>
+        </p:style>
+        <p:txBody>
+          <a:bodyPr rtlCol="0" anchor="ctr"/>
+          <a:lstStyle/>
+          <a:p>
+            <a:pPr algn="ctr"/>
+          </a:p>
+        </p:txBody>
+      </p:sp>
+      <p:sp>
+        <p:nvSpPr>
+          <p:cNvPr id="16" name="Rectangle 15"/>
+          <p:cNvSpPr/>
+          <p:nvPr/>
+        </p:nvSpPr>
+        <p:spPr>
+          <a:xfrm>
+            <a:off x="8366760" y="5148072"/>
+            <a:ext cx="64008" cy="1435608"/>
+          </a:xfrm>
+          <a:prstGeom prst="rect">
+            <a:avLst/>
+          </a:prstGeom>
+          <a:solidFill>
+            <a:srgbClr val="075033"/>
+          </a:solidFill>
+          <a:ln>
+            <a:noFill/>
+          </a:ln>
+        </p:spPr>
+        <p:style>
+          <a:lnRef idx="1">
+            <a:schemeClr val="accent1"/>
+          </a:lnRef>
+          <a:fillRef idx="3">
+            <a:schemeClr val="accent1"/>
+          </a:fillRef>
+          <a:effectRef idx="2">
+            <a:schemeClr val="accent1"/>
+          </a:effectRef>
+          <a:fontRef idx="minor">
+            <a:schemeClr val="lt1"/>
+          </a:fontRef>
+        </p:style>
+        <p:txBody>
+          <a:bodyPr rtlCol="0" anchor="ctr"/>
+          <a:lstStyle/>
+          <a:p>
+            <a:pPr algn="ctr"/>
+          </a:p>
+        </p:txBody>
+      </p:sp>
+      <p:sp>
+        <p:nvSpPr>
+          <p:cNvPr id="17" name="TextBox 16"/>
+          <p:cNvSpPr txBox="1"/>
+          <p:nvPr/>
+        </p:nvSpPr>
+        <p:spPr>
+          <a:xfrm>
+            <a:off x="8476488" y="5212080"/>
+            <a:ext cx="3493008" cy="1344168"/>
+          </a:xfrm>
+          <a:prstGeom prst="rect">
+            <a:avLst/>
+          </a:prstGeom>
+          <a:noFill/>
+        </p:spPr>
+        <p:txBody>
+          <a:bodyPr wrap="square">
+            <a:spAutoFit/>
+          </a:bodyPr>
+          <a:lstStyle/>
+          <a:p>
+            <a:r>
+              <a:rPr b="1" sz="900">
+                <a:solidFill>
+                  <a:srgbClr val="075033"/>
+                </a:solidFill>
+              </a:rPr>
+              <a:t>On-Prem-Anbindung</a:t>
+            </a:r>
+          </a:p>
+          <a:p>
+            <a:r>
+              <a:rPr sz="800">
+                <a:solidFill>
+                  <a:srgbClr val="1A1A1A"/>
+                </a:solidFill>
+              </a:rPr>
+              <a:t>VPN Gateway: aktiv (Empfehlung)</a:t>
+            </a:r>
+          </a:p>
+          <a:p>
+            <a:r>
+              <a:rPr sz="800">
+                <a:solidFill>
+                  <a:srgbClr val="1A1A1A"/>
+                </a:solidFill>
+              </a:rPr>
+              <a:t>ExpressRoute: deferred – aktivieren</a:t>
+            </a:r>
+          </a:p>
+          <a:p>
+            <a:r>
+              <a:rPr sz="800">
+                <a:solidFill>
+                  <a:srgbClr val="1A1A1A"/>
+                </a:solidFill>
+              </a:rPr>
+              <a:t>bei ER-Leitungsbestellung</a:t>
+            </a:r>
+          </a:p>
+          <a:p>
+            <a:r>
+              <a:rPr sz="800">
+                <a:solidFill>
+                  <a:srgbClr val="1A1A1A"/>
+                </a:solidFill>
+              </a:rPr>
+              <a:t>CrowdStrike-SIEM: Event-Hub-Export</a:t>
             </a:r>
           </a:p>
         </p:txBody>
@@ -25729,21 +26380,32 @@
       <p:grpSpPr/>
       <p:sp>
         <p:nvSpPr>
-          <p:cNvPr id="2" name="Title 1"/>
-          <p:cNvSpPr>
-            <a:spLocks noGrp="1"/>
-          </p:cNvSpPr>
-          <p:nvPr>
-            <p:ph type="title"/>
-          </p:nvPr>
-        </p:nvSpPr>
-        <p:spPr/>
-        <p:txBody>
-          <a:bodyPr/>
+          <p:cNvPr id="2" name="TextBox 1"/>
+          <p:cNvSpPr txBox="1"/>
+          <p:nvPr/>
+        </p:nvSpPr>
+        <p:spPr>
+          <a:xfrm>
+            <a:off x="137160" y="73152"/>
+            <a:ext cx="11887200" cy="438912"/>
+          </a:xfrm>
+          <a:prstGeom prst="rect">
+            <a:avLst/>
+          </a:prstGeom>
+          <a:noFill/>
+        </p:spPr>
+        <p:txBody>
+          <a:bodyPr wrap="none">
+            <a:spAutoFit/>
+          </a:bodyPr>
           <a:lstStyle/>
           <a:p>
             <a:r>
-              <a:rPr sz="1800"/>
+              <a:rPr sz="1500" b="1">
+                <a:solidFill>
+                  <a:srgbClr val="075033"/>
+                </a:solidFill>
+              </a:rPr>
               <a:t>Zielarchitektur: Management Group Hierarchie</a:t>
             </a:r>
           </a:p>
@@ -25751,19 +26413,45 @@
       </p:sp>
       <p:sp>
         <p:nvSpPr>
-          <p:cNvPr id="3" name="Subtitle 2"/>
-          <p:cNvSpPr>
-            <a:spLocks noGrp="1"/>
-          </p:cNvSpPr>
-          <p:nvPr>
-            <p:ph type="subTitle" idx="1"/>
-          </p:nvPr>
-        </p:nvSpPr>
-        <p:spPr/>
-        <p:txBody>
-          <a:bodyPr/>
+          <p:cNvPr id="3" name="Rectangle 2"/>
+          <p:cNvSpPr/>
+          <p:nvPr/>
+        </p:nvSpPr>
+        <p:spPr>
+          <a:xfrm>
+            <a:off x="137160" y="548640"/>
+            <a:ext cx="11887200" cy="22860"/>
+          </a:xfrm>
+          <a:prstGeom prst="rect">
+            <a:avLst/>
+          </a:prstGeom>
+          <a:solidFill>
+            <a:srgbClr val="23A96A"/>
+          </a:solidFill>
+          <a:ln>
+            <a:noFill/>
+          </a:ln>
+        </p:spPr>
+        <p:style>
+          <a:lnRef idx="1">
+            <a:schemeClr val="accent1"/>
+          </a:lnRef>
+          <a:fillRef idx="3">
+            <a:schemeClr val="accent1"/>
+          </a:fillRef>
+          <a:effectRef idx="2">
+            <a:schemeClr val="accent1"/>
+          </a:effectRef>
+          <a:fontRef idx="minor">
+            <a:schemeClr val="lt1"/>
+          </a:fontRef>
+        </p:style>
+        <p:txBody>
+          <a:bodyPr rtlCol="0" anchor="ctr"/>
           <a:lstStyle/>
-          <a:p/>
+          <a:p>
+            <a:pPr algn="ctr"/>
+          </a:p>
         </p:txBody>
       </p:sp>
       <p:pic>
@@ -25782,8 +26470,8 @@
         </p:blipFill>
         <p:spPr>
           <a:xfrm>
-            <a:off x="274320" y="1234440"/>
-            <a:ext cx="11612880" cy="3839508"/>
+            <a:off x="137160" y="621792"/>
+            <a:ext cx="8001000" cy="2645331"/>
           </a:xfrm>
           <a:prstGeom prst="rect">
             <a:avLst/>
@@ -25798,8 +26486,8 @@
         </p:nvSpPr>
         <p:spPr>
           <a:xfrm>
-            <a:off x="274320" y="6400800"/>
-            <a:ext cx="11612880" cy="365760"/>
+            <a:off x="137160" y="6629400"/>
+            <a:ext cx="8001000" cy="201168"/>
           </a:xfrm>
           <a:prstGeom prst="rect">
             <a:avLst/>
@@ -25813,12 +26501,616 @@
           <a:lstStyle/>
           <a:p>
             <a:r>
+              <a:rPr sz="700">
+                <a:solidFill>
+                  <a:srgbClr val="595959"/>
+                </a:solidFill>
+              </a:rPr>
+              <a:t>Quelle: Microsoft Cloud Adoption Framework · learn.microsoft.com (unverändert)</a:t>
+            </a:r>
+          </a:p>
+        </p:txBody>
+      </p:sp>
+      <p:sp>
+        <p:nvSpPr>
+          <p:cNvPr id="6" name="Rectangle 5"/>
+          <p:cNvSpPr/>
+          <p:nvPr/>
+        </p:nvSpPr>
+        <p:spPr>
+          <a:xfrm>
+            <a:off x="8366760" y="621792"/>
+            <a:ext cx="3657600" cy="1435608"/>
+          </a:xfrm>
+          <a:prstGeom prst="rect">
+            <a:avLst/>
+          </a:prstGeom>
+          <a:solidFill>
+            <a:srgbClr val="F2F9F5"/>
+          </a:solidFill>
+          <a:ln w="15875">
+            <a:solidFill>
+              <a:srgbClr val="075033"/>
+            </a:solidFill>
+          </a:ln>
+        </p:spPr>
+        <p:style>
+          <a:lnRef idx="1">
+            <a:schemeClr val="accent1"/>
+          </a:lnRef>
+          <a:fillRef idx="3">
+            <a:schemeClr val="accent1"/>
+          </a:fillRef>
+          <a:effectRef idx="2">
+            <a:schemeClr val="accent1"/>
+          </a:effectRef>
+          <a:fontRef idx="minor">
+            <a:schemeClr val="lt1"/>
+          </a:fontRef>
+        </p:style>
+        <p:txBody>
+          <a:bodyPr rtlCol="0" anchor="ctr"/>
+          <a:lstStyle/>
+          <a:p>
+            <a:pPr algn="ctr"/>
+          </a:p>
+        </p:txBody>
+      </p:sp>
+      <p:sp>
+        <p:nvSpPr>
+          <p:cNvPr id="7" name="Rectangle 6"/>
+          <p:cNvSpPr/>
+          <p:nvPr/>
+        </p:nvSpPr>
+        <p:spPr>
+          <a:xfrm>
+            <a:off x="8366760" y="621792"/>
+            <a:ext cx="64008" cy="1435608"/>
+          </a:xfrm>
+          <a:prstGeom prst="rect">
+            <a:avLst/>
+          </a:prstGeom>
+          <a:solidFill>
+            <a:srgbClr val="075033"/>
+          </a:solidFill>
+          <a:ln>
+            <a:noFill/>
+          </a:ln>
+        </p:spPr>
+        <p:style>
+          <a:lnRef idx="1">
+            <a:schemeClr val="accent1"/>
+          </a:lnRef>
+          <a:fillRef idx="3">
+            <a:schemeClr val="accent1"/>
+          </a:fillRef>
+          <a:effectRef idx="2">
+            <a:schemeClr val="accent1"/>
+          </a:effectRef>
+          <a:fontRef idx="minor">
+            <a:schemeClr val="lt1"/>
+          </a:fontRef>
+        </p:style>
+        <p:txBody>
+          <a:bodyPr rtlCol="0" anchor="ctr"/>
+          <a:lstStyle/>
+          <a:p>
+            <a:pPr algn="ctr"/>
+          </a:p>
+        </p:txBody>
+      </p:sp>
+      <p:sp>
+        <p:nvSpPr>
+          <p:cNvPr id="8" name="TextBox 7"/>
+          <p:cNvSpPr txBox="1"/>
+          <p:nvPr/>
+        </p:nvSpPr>
+        <p:spPr>
+          <a:xfrm>
+            <a:off x="8476488" y="685800"/>
+            <a:ext cx="3493008" cy="1344168"/>
+          </a:xfrm>
+          <a:prstGeom prst="rect">
+            <a:avLst/>
+          </a:prstGeom>
+          <a:noFill/>
+        </p:spPr>
+        <p:txBody>
+          <a:bodyPr wrap="square">
+            <a:spAutoFit/>
+          </a:bodyPr>
+          <a:lstStyle/>
+          <a:p>
+            <a:r>
+              <a:rPr b="1" sz="900">
+                <a:solidFill>
+                  <a:srgbClr val="075033"/>
+                </a:solidFill>
+              </a:rPr>
+              <a:t>12 Management Groups</a:t>
+            </a:r>
+          </a:p>
+          <a:p>
+            <a:r>
               <a:rPr sz="800">
                 <a:solidFill>
-                  <a:srgbClr val="595959"/>
+                  <a:srgbClr val="1A1A1A"/>
                 </a:solidFill>
               </a:rPr>
-              <a:t>Quelle: Microsoft Cloud Adoption Framework · learn.microsoft.com</a:t>
+              <a:t>Vollständig per ALZ Bicep Accelerator</a:t>
+            </a:r>
+          </a:p>
+          <a:p>
+            <a:r>
+              <a:rPr sz="800">
+                <a:solidFill>
+                  <a:srgbClr val="1A1A1A"/>
+                </a:solidFill>
+              </a:rPr>
+              <a:t>deployt – kein manueller Aufwand</a:t>
+            </a:r>
+          </a:p>
+        </p:txBody>
+      </p:sp>
+      <p:sp>
+        <p:nvSpPr>
+          <p:cNvPr id="9" name="Rectangle 8"/>
+          <p:cNvSpPr/>
+          <p:nvPr/>
+        </p:nvSpPr>
+        <p:spPr>
+          <a:xfrm>
+            <a:off x="8366760" y="2130552"/>
+            <a:ext cx="3657600" cy="1435608"/>
+          </a:xfrm>
+          <a:prstGeom prst="rect">
+            <a:avLst/>
+          </a:prstGeom>
+          <a:solidFill>
+            <a:srgbClr val="F2F9F5"/>
+          </a:solidFill>
+          <a:ln w="15875">
+            <a:solidFill>
+              <a:srgbClr val="075033"/>
+            </a:solidFill>
+          </a:ln>
+        </p:spPr>
+        <p:style>
+          <a:lnRef idx="1">
+            <a:schemeClr val="accent1"/>
+          </a:lnRef>
+          <a:fillRef idx="3">
+            <a:schemeClr val="accent1"/>
+          </a:fillRef>
+          <a:effectRef idx="2">
+            <a:schemeClr val="accent1"/>
+          </a:effectRef>
+          <a:fontRef idx="minor">
+            <a:schemeClr val="lt1"/>
+          </a:fontRef>
+        </p:style>
+        <p:txBody>
+          <a:bodyPr rtlCol="0" anchor="ctr"/>
+          <a:lstStyle/>
+          <a:p>
+            <a:pPr algn="ctr"/>
+          </a:p>
+        </p:txBody>
+      </p:sp>
+      <p:sp>
+        <p:nvSpPr>
+          <p:cNvPr id="10" name="Rectangle 9"/>
+          <p:cNvSpPr/>
+          <p:nvPr/>
+        </p:nvSpPr>
+        <p:spPr>
+          <a:xfrm>
+            <a:off x="8366760" y="2130552"/>
+            <a:ext cx="64008" cy="1435608"/>
+          </a:xfrm>
+          <a:prstGeom prst="rect">
+            <a:avLst/>
+          </a:prstGeom>
+          <a:solidFill>
+            <a:srgbClr val="075033"/>
+          </a:solidFill>
+          <a:ln>
+            <a:noFill/>
+          </a:ln>
+        </p:spPr>
+        <p:style>
+          <a:lnRef idx="1">
+            <a:schemeClr val="accent1"/>
+          </a:lnRef>
+          <a:fillRef idx="3">
+            <a:schemeClr val="accent1"/>
+          </a:fillRef>
+          <a:effectRef idx="2">
+            <a:schemeClr val="accent1"/>
+          </a:effectRef>
+          <a:fontRef idx="minor">
+            <a:schemeClr val="lt1"/>
+          </a:fontRef>
+        </p:style>
+        <p:txBody>
+          <a:bodyPr rtlCol="0" anchor="ctr"/>
+          <a:lstStyle/>
+          <a:p>
+            <a:pPr algn="ctr"/>
+          </a:p>
+        </p:txBody>
+      </p:sp>
+      <p:sp>
+        <p:nvSpPr>
+          <p:cNvPr id="11" name="TextBox 10"/>
+          <p:cNvSpPr txBox="1"/>
+          <p:nvPr/>
+        </p:nvSpPr>
+        <p:spPr>
+          <a:xfrm>
+            <a:off x="8476488" y="2194560"/>
+            <a:ext cx="3493008" cy="1344168"/>
+          </a:xfrm>
+          <a:prstGeom prst="rect">
+            <a:avLst/>
+          </a:prstGeom>
+          <a:noFill/>
+        </p:spPr>
+        <p:txBody>
+          <a:bodyPr wrap="square">
+            <a:spAutoFit/>
+          </a:bodyPr>
+          <a:lstStyle/>
+          <a:p>
+            <a:r>
+              <a:rPr b="1" sz="900">
+                <a:solidFill>
+                  <a:srgbClr val="075033"/>
+                </a:solidFill>
+              </a:rPr>
+              <a:t>Policy-Vererbung</a:t>
+            </a:r>
+          </a:p>
+          <a:p>
+            <a:r>
+              <a:rPr sz="800">
+                <a:solidFill>
+                  <a:srgbClr val="1A1A1A"/>
+                </a:solidFill>
+              </a:rPr>
+              <a:t>149 Definitionen · 42 Initiativen</a:t>
+            </a:r>
+          </a:p>
+          <a:p>
+            <a:r>
+              <a:rPr sz="800">
+                <a:solidFill>
+                  <a:srgbClr val="1A1A1A"/>
+                </a:solidFill>
+              </a:rPr>
+              <a:t>123 Assignments – alz-Root vererbt</a:t>
+            </a:r>
+          </a:p>
+          <a:p>
+            <a:r>
+              <a:rPr sz="800">
+                <a:solidFill>
+                  <a:srgbClr val="1A1A1A"/>
+                </a:solidFill>
+              </a:rPr>
+              <a:t>an alle Child-MGs automatisch</a:t>
+            </a:r>
+          </a:p>
+        </p:txBody>
+      </p:sp>
+      <p:sp>
+        <p:nvSpPr>
+          <p:cNvPr id="12" name="Rectangle 11"/>
+          <p:cNvSpPr/>
+          <p:nvPr/>
+        </p:nvSpPr>
+        <p:spPr>
+          <a:xfrm>
+            <a:off x="8366760" y="3639312"/>
+            <a:ext cx="3657600" cy="1435608"/>
+          </a:xfrm>
+          <a:prstGeom prst="rect">
+            <a:avLst/>
+          </a:prstGeom>
+          <a:solidFill>
+            <a:srgbClr val="F2F9F5"/>
+          </a:solidFill>
+          <a:ln w="15875">
+            <a:solidFill>
+              <a:srgbClr val="075033"/>
+            </a:solidFill>
+          </a:ln>
+        </p:spPr>
+        <p:style>
+          <a:lnRef idx="1">
+            <a:schemeClr val="accent1"/>
+          </a:lnRef>
+          <a:fillRef idx="3">
+            <a:schemeClr val="accent1"/>
+          </a:fillRef>
+          <a:effectRef idx="2">
+            <a:schemeClr val="accent1"/>
+          </a:effectRef>
+          <a:fontRef idx="minor">
+            <a:schemeClr val="lt1"/>
+          </a:fontRef>
+        </p:style>
+        <p:txBody>
+          <a:bodyPr rtlCol="0" anchor="ctr"/>
+          <a:lstStyle/>
+          <a:p>
+            <a:pPr algn="ctr"/>
+          </a:p>
+        </p:txBody>
+      </p:sp>
+      <p:sp>
+        <p:nvSpPr>
+          <p:cNvPr id="13" name="Rectangle 12"/>
+          <p:cNvSpPr/>
+          <p:nvPr/>
+        </p:nvSpPr>
+        <p:spPr>
+          <a:xfrm>
+            <a:off x="8366760" y="3639312"/>
+            <a:ext cx="64008" cy="1435608"/>
+          </a:xfrm>
+          <a:prstGeom prst="rect">
+            <a:avLst/>
+          </a:prstGeom>
+          <a:solidFill>
+            <a:srgbClr val="075033"/>
+          </a:solidFill>
+          <a:ln>
+            <a:noFill/>
+          </a:ln>
+        </p:spPr>
+        <p:style>
+          <a:lnRef idx="1">
+            <a:schemeClr val="accent1"/>
+          </a:lnRef>
+          <a:fillRef idx="3">
+            <a:schemeClr val="accent1"/>
+          </a:fillRef>
+          <a:effectRef idx="2">
+            <a:schemeClr val="accent1"/>
+          </a:effectRef>
+          <a:fontRef idx="minor">
+            <a:schemeClr val="lt1"/>
+          </a:fontRef>
+        </p:style>
+        <p:txBody>
+          <a:bodyPr rtlCol="0" anchor="ctr"/>
+          <a:lstStyle/>
+          <a:p>
+            <a:pPr algn="ctr"/>
+          </a:p>
+        </p:txBody>
+      </p:sp>
+      <p:sp>
+        <p:nvSpPr>
+          <p:cNvPr id="14" name="TextBox 13"/>
+          <p:cNvSpPr txBox="1"/>
+          <p:nvPr/>
+        </p:nvSpPr>
+        <p:spPr>
+          <a:xfrm>
+            <a:off x="8476488" y="3703320"/>
+            <a:ext cx="3493008" cy="1344168"/>
+          </a:xfrm>
+          <a:prstGeom prst="rect">
+            <a:avLst/>
+          </a:prstGeom>
+          <a:noFill/>
+        </p:spPr>
+        <p:txBody>
+          <a:bodyPr wrap="square">
+            <a:spAutoFit/>
+          </a:bodyPr>
+          <a:lstStyle/>
+          <a:p>
+            <a:r>
+              <a:rPr b="1" sz="900">
+                <a:solidFill>
+                  <a:srgbClr val="075033"/>
+                </a:solidFill>
+              </a:rPr>
+              <a:t>DoNotEnforce-Start</a:t>
+            </a:r>
+          </a:p>
+          <a:p>
+            <a:r>
+              <a:rPr sz="800">
+                <a:solidFill>
+                  <a:srgbClr val="1A1A1A"/>
+                </a:solidFill>
+              </a:rPr>
+              <a:t>Alle Policies starten im Audit-Modus.</a:t>
+            </a:r>
+          </a:p>
+          <a:p>
+            <a:r>
+              <a:rPr sz="800">
+                <a:solidFill>
+                  <a:srgbClr val="1A1A1A"/>
+                </a:solidFill>
+              </a:rPr>
+              <a:t>Bestehende Ressourcen werden</a:t>
+            </a:r>
+          </a:p>
+          <a:p>
+            <a:r>
+              <a:rPr sz="800">
+                <a:solidFill>
+                  <a:srgbClr val="1A1A1A"/>
+                </a:solidFill>
+              </a:rPr>
+              <a:t>gemeldet, nicht blockiert.</a:t>
+            </a:r>
+          </a:p>
+        </p:txBody>
+      </p:sp>
+      <p:sp>
+        <p:nvSpPr>
+          <p:cNvPr id="15" name="Rectangle 14"/>
+          <p:cNvSpPr/>
+          <p:nvPr/>
+        </p:nvSpPr>
+        <p:spPr>
+          <a:xfrm>
+            <a:off x="8366760" y="5148072"/>
+            <a:ext cx="3657600" cy="1435608"/>
+          </a:xfrm>
+          <a:prstGeom prst="rect">
+            <a:avLst/>
+          </a:prstGeom>
+          <a:solidFill>
+            <a:srgbClr val="F2F9F5"/>
+          </a:solidFill>
+          <a:ln w="15875">
+            <a:solidFill>
+              <a:srgbClr val="075033"/>
+            </a:solidFill>
+          </a:ln>
+        </p:spPr>
+        <p:style>
+          <a:lnRef idx="1">
+            <a:schemeClr val="accent1"/>
+          </a:lnRef>
+          <a:fillRef idx="3">
+            <a:schemeClr val="accent1"/>
+          </a:fillRef>
+          <a:effectRef idx="2">
+            <a:schemeClr val="accent1"/>
+          </a:effectRef>
+          <a:fontRef idx="minor">
+            <a:schemeClr val="lt1"/>
+          </a:fontRef>
+        </p:style>
+        <p:txBody>
+          <a:bodyPr rtlCol="0" anchor="ctr"/>
+          <a:lstStyle/>
+          <a:p>
+            <a:pPr algn="ctr"/>
+          </a:p>
+        </p:txBody>
+      </p:sp>
+      <p:sp>
+        <p:nvSpPr>
+          <p:cNvPr id="16" name="Rectangle 15"/>
+          <p:cNvSpPr/>
+          <p:nvPr/>
+        </p:nvSpPr>
+        <p:spPr>
+          <a:xfrm>
+            <a:off x="8366760" y="5148072"/>
+            <a:ext cx="64008" cy="1435608"/>
+          </a:xfrm>
+          <a:prstGeom prst="rect">
+            <a:avLst/>
+          </a:prstGeom>
+          <a:solidFill>
+            <a:srgbClr val="075033"/>
+          </a:solidFill>
+          <a:ln>
+            <a:noFill/>
+          </a:ln>
+        </p:spPr>
+        <p:style>
+          <a:lnRef idx="1">
+            <a:schemeClr val="accent1"/>
+          </a:lnRef>
+          <a:fillRef idx="3">
+            <a:schemeClr val="accent1"/>
+          </a:fillRef>
+          <a:effectRef idx="2">
+            <a:schemeClr val="accent1"/>
+          </a:effectRef>
+          <a:fontRef idx="minor">
+            <a:schemeClr val="lt1"/>
+          </a:fontRef>
+        </p:style>
+        <p:txBody>
+          <a:bodyPr rtlCol="0" anchor="ctr"/>
+          <a:lstStyle/>
+          <a:p>
+            <a:pPr algn="ctr"/>
+          </a:p>
+        </p:txBody>
+      </p:sp>
+      <p:sp>
+        <p:nvSpPr>
+          <p:cNvPr id="17" name="TextBox 16"/>
+          <p:cNvSpPr txBox="1"/>
+          <p:nvPr/>
+        </p:nvSpPr>
+        <p:spPr>
+          <a:xfrm>
+            <a:off x="8476488" y="5212080"/>
+            <a:ext cx="3493008" cy="1344168"/>
+          </a:xfrm>
+          <a:prstGeom prst="rect">
+            <a:avLst/>
+          </a:prstGeom>
+          <a:noFill/>
+        </p:spPr>
+        <p:txBody>
+          <a:bodyPr wrap="square">
+            <a:spAutoFit/>
+          </a:bodyPr>
+          <a:lstStyle/>
+          <a:p>
+            <a:r>
+              <a:rPr b="1" sz="900">
+                <a:solidFill>
+                  <a:srgbClr val="075033"/>
+                </a:solidFill>
+              </a:rPr>
+              <a:t>Schutz bestehender Ressourcen</a:t>
+            </a:r>
+          </a:p>
+          <a:p>
+            <a:r>
+              <a:rPr sz="800">
+                <a:solidFill>
+                  <a:srgbClr val="1A1A1A"/>
+                </a:solidFill>
+              </a:rPr>
+              <a:t>What-If vor jedem Subscription-Move.</a:t>
+            </a:r>
+          </a:p>
+          <a:p>
+            <a:r>
+              <a:rPr sz="800">
+                <a:solidFill>
+                  <a:srgbClr val="1A1A1A"/>
+                </a:solidFill>
+              </a:rPr>
+              <a:t>Exemptions für Legacy-Ressourcen.</a:t>
+            </a:r>
+          </a:p>
+          <a:p>
+            <a:r>
+              <a:rPr sz="800">
+                <a:solidFill>
+                  <a:srgbClr val="1A1A1A"/>
+                </a:solidFill>
+              </a:rPr>
+              <a:t>Enforcement erst nach Audit-Phase</a:t>
+            </a:r>
+          </a:p>
+          <a:p>
+            <a:r>
+              <a:rPr sz="800">
+                <a:solidFill>
+                  <a:srgbClr val="1A1A1A"/>
+                </a:solidFill>
+              </a:rPr>
+              <a:t>(Empfehlung: 4–8 Wochen).</a:t>
             </a:r>
           </a:p>
         </p:txBody>
@@ -26274,41 +27566,78 @@
       <p:grpSpPr/>
       <p:sp>
         <p:nvSpPr>
-          <p:cNvPr id="2" name="Title 1"/>
-          <p:cNvSpPr>
-            <a:spLocks noGrp="1"/>
-          </p:cNvSpPr>
-          <p:nvPr>
-            <p:ph type="title"/>
-          </p:nvPr>
-        </p:nvSpPr>
-        <p:spPr/>
-        <p:txBody>
-          <a:bodyPr/>
+          <p:cNvPr id="2" name="TextBox 1"/>
+          <p:cNvSpPr txBox="1"/>
+          <p:nvPr/>
+        </p:nvSpPr>
+        <p:spPr>
+          <a:xfrm>
+            <a:off x="137160" y="73152"/>
+            <a:ext cx="11887200" cy="438912"/>
+          </a:xfrm>
+          <a:prstGeom prst="rect">
+            <a:avLst/>
+          </a:prstGeom>
+          <a:noFill/>
+        </p:spPr>
+        <p:txBody>
+          <a:bodyPr wrap="none">
+            <a:spAutoFit/>
+          </a:bodyPr>
           <a:lstStyle/>
           <a:p>
             <a:r>
-              <a:rPr sz="1800"/>
-              <a:t>Netzwerk-Architektur: Hub-and-Spoke-Topologie</a:t>
-            </a:r>
-          </a:p>
-        </p:txBody>
-      </p:sp>
-      <p:sp>
-        <p:nvSpPr>
-          <p:cNvPr id="3" name="Subtitle 2"/>
-          <p:cNvSpPr>
-            <a:spLocks noGrp="1"/>
-          </p:cNvSpPr>
-          <p:nvPr>
-            <p:ph type="subTitle" idx="1"/>
-          </p:nvPr>
-        </p:nvSpPr>
-        <p:spPr/>
-        <p:txBody>
-          <a:bodyPr/>
+              <a:rPr sz="1500" b="1">
+                <a:solidFill>
+                  <a:srgbClr val="075033"/>
+                </a:solidFill>
+              </a:rPr>
+              <a:t>Netzwerk-Architektur: Hub-and-Spoke – Connectivity Subscription im Detail</a:t>
+            </a:r>
+          </a:p>
+        </p:txBody>
+      </p:sp>
+      <p:sp>
+        <p:nvSpPr>
+          <p:cNvPr id="3" name="Rectangle 2"/>
+          <p:cNvSpPr/>
+          <p:nvPr/>
+        </p:nvSpPr>
+        <p:spPr>
+          <a:xfrm>
+            <a:off x="137160" y="548640"/>
+            <a:ext cx="11887200" cy="22860"/>
+          </a:xfrm>
+          <a:prstGeom prst="rect">
+            <a:avLst/>
+          </a:prstGeom>
+          <a:solidFill>
+            <a:srgbClr val="23A96A"/>
+          </a:solidFill>
+          <a:ln>
+            <a:noFill/>
+          </a:ln>
+        </p:spPr>
+        <p:style>
+          <a:lnRef idx="1">
+            <a:schemeClr val="accent1"/>
+          </a:lnRef>
+          <a:fillRef idx="3">
+            <a:schemeClr val="accent1"/>
+          </a:fillRef>
+          <a:effectRef idx="2">
+            <a:schemeClr val="accent1"/>
+          </a:effectRef>
+          <a:fontRef idx="minor">
+            <a:schemeClr val="lt1"/>
+          </a:fontRef>
+        </p:style>
+        <p:txBody>
+          <a:bodyPr rtlCol="0" anchor="ctr"/>
           <a:lstStyle/>
-          <a:p/>
+          <a:p>
+            <a:pPr algn="ctr"/>
+          </a:p>
         </p:txBody>
       </p:sp>
       <p:pic>
@@ -26327,8 +27656,8 @@
         </p:blipFill>
         <p:spPr>
           <a:xfrm>
-            <a:off x="274320" y="1234440"/>
-            <a:ext cx="11612880" cy="6919341"/>
+            <a:off x="137160" y="621792"/>
+            <a:ext cx="8001000" cy="4767262"/>
           </a:xfrm>
           <a:prstGeom prst="rect">
             <a:avLst/>
@@ -26343,8 +27672,8 @@
         </p:nvSpPr>
         <p:spPr>
           <a:xfrm>
-            <a:off x="274320" y="6400800"/>
-            <a:ext cx="11612880" cy="365760"/>
+            <a:off x="137160" y="6629400"/>
+            <a:ext cx="8001000" cy="201168"/>
           </a:xfrm>
           <a:prstGeom prst="rect">
             <a:avLst/>
@@ -26358,12 +27687,656 @@
           <a:lstStyle/>
           <a:p>
             <a:r>
+              <a:rPr sz="700">
+                <a:solidFill>
+                  <a:srgbClr val="595959"/>
+                </a:solidFill>
+              </a:rPr>
+              <a:t>Quelle: Microsoft Cloud Adoption Framework · learn.microsoft.com (unverändert)</a:t>
+            </a:r>
+          </a:p>
+        </p:txBody>
+      </p:sp>
+      <p:sp>
+        <p:nvSpPr>
+          <p:cNvPr id="6" name="Rectangle 5"/>
+          <p:cNvSpPr/>
+          <p:nvPr/>
+        </p:nvSpPr>
+        <p:spPr>
+          <a:xfrm>
+            <a:off x="8366760" y="621792"/>
+            <a:ext cx="3657600" cy="1435608"/>
+          </a:xfrm>
+          <a:prstGeom prst="rect">
+            <a:avLst/>
+          </a:prstGeom>
+          <a:solidFill>
+            <a:srgbClr val="F2F9F5"/>
+          </a:solidFill>
+          <a:ln w="15875">
+            <a:solidFill>
+              <a:srgbClr val="075033"/>
+            </a:solidFill>
+          </a:ln>
+        </p:spPr>
+        <p:style>
+          <a:lnRef idx="1">
+            <a:schemeClr val="accent1"/>
+          </a:lnRef>
+          <a:fillRef idx="3">
+            <a:schemeClr val="accent1"/>
+          </a:fillRef>
+          <a:effectRef idx="2">
+            <a:schemeClr val="accent1"/>
+          </a:effectRef>
+          <a:fontRef idx="minor">
+            <a:schemeClr val="lt1"/>
+          </a:fontRef>
+        </p:style>
+        <p:txBody>
+          <a:bodyPr rtlCol="0" anchor="ctr"/>
+          <a:lstStyle/>
+          <a:p>
+            <a:pPr algn="ctr"/>
+          </a:p>
+        </p:txBody>
+      </p:sp>
+      <p:sp>
+        <p:nvSpPr>
+          <p:cNvPr id="7" name="Rectangle 6"/>
+          <p:cNvSpPr/>
+          <p:nvPr/>
+        </p:nvSpPr>
+        <p:spPr>
+          <a:xfrm>
+            <a:off x="8366760" y="621792"/>
+            <a:ext cx="64008" cy="1435608"/>
+          </a:xfrm>
+          <a:prstGeom prst="rect">
+            <a:avLst/>
+          </a:prstGeom>
+          <a:solidFill>
+            <a:srgbClr val="075033"/>
+          </a:solidFill>
+          <a:ln>
+            <a:noFill/>
+          </a:ln>
+        </p:spPr>
+        <p:style>
+          <a:lnRef idx="1">
+            <a:schemeClr val="accent1"/>
+          </a:lnRef>
+          <a:fillRef idx="3">
+            <a:schemeClr val="accent1"/>
+          </a:fillRef>
+          <a:effectRef idx="2">
+            <a:schemeClr val="accent1"/>
+          </a:effectRef>
+          <a:fontRef idx="minor">
+            <a:schemeClr val="lt1"/>
+          </a:fontRef>
+        </p:style>
+        <p:txBody>
+          <a:bodyPr rtlCol="0" anchor="ctr"/>
+          <a:lstStyle/>
+          <a:p>
+            <a:pPr algn="ctr"/>
+          </a:p>
+        </p:txBody>
+      </p:sp>
+      <p:sp>
+        <p:nvSpPr>
+          <p:cNvPr id="8" name="TextBox 7"/>
+          <p:cNvSpPr txBox="1"/>
+          <p:nvPr/>
+        </p:nvSpPr>
+        <p:spPr>
+          <a:xfrm>
+            <a:off x="8476488" y="685800"/>
+            <a:ext cx="3493008" cy="1344168"/>
+          </a:xfrm>
+          <a:prstGeom prst="rect">
+            <a:avLst/>
+          </a:prstGeom>
+          <a:noFill/>
+        </p:spPr>
+        <p:txBody>
+          <a:bodyPr wrap="square">
+            <a:spAutoFit/>
+          </a:bodyPr>
+          <a:lstStyle/>
+          <a:p>
+            <a:r>
+              <a:rPr b="1" sz="900">
+                <a:solidFill>
+                  <a:srgbClr val="075033"/>
+                </a:solidFill>
+              </a:rPr>
+              <a:t>Azure Firewall Standard</a:t>
+            </a:r>
+          </a:p>
+          <a:p>
+            <a:r>
               <a:rPr sz="800">
                 <a:solidFill>
-                  <a:srgbClr val="595959"/>
+                  <a:srgbClr val="1A1A1A"/>
                 </a:solidFill>
               </a:rPr>
-              <a:t>Connectivity Subscription: Firewall · Bastion · VPN/ExpressRoute · DNS Private Resolver  | Quelle: Microsoft Cloud Adoption Framework</a:t>
+              <a:t>Zentraler Egress-Kontrollpunkt</a:t>
+            </a:r>
+          </a:p>
+          <a:p>
+            <a:r>
+              <a:rPr sz="800">
+                <a:solidFill>
+                  <a:srgbClr val="1A1A1A"/>
+                </a:solidFill>
+              </a:rPr>
+              <a:t>FQDN-Filterung · NAT · Threat Intel</a:t>
+            </a:r>
+          </a:p>
+          <a:p>
+            <a:r>
+              <a:rPr sz="800">
+                <a:solidFill>
+                  <a:srgbClr val="1A1A1A"/>
+                </a:solidFill>
+              </a:rPr>
+              <a:t>Upgrade → Premium ohne Rebuild</a:t>
+            </a:r>
+          </a:p>
+          <a:p>
+            <a:r>
+              <a:rPr sz="800">
+                <a:solidFill>
+                  <a:srgbClr val="1A1A1A"/>
+                </a:solidFill>
+              </a:rPr>
+              <a:t>~€700/Monat (1 Region)</a:t>
+            </a:r>
+          </a:p>
+        </p:txBody>
+      </p:sp>
+      <p:sp>
+        <p:nvSpPr>
+          <p:cNvPr id="9" name="Rectangle 8"/>
+          <p:cNvSpPr/>
+          <p:nvPr/>
+        </p:nvSpPr>
+        <p:spPr>
+          <a:xfrm>
+            <a:off x="8366760" y="2130552"/>
+            <a:ext cx="3657600" cy="1435608"/>
+          </a:xfrm>
+          <a:prstGeom prst="rect">
+            <a:avLst/>
+          </a:prstGeom>
+          <a:solidFill>
+            <a:srgbClr val="F2F9F5"/>
+          </a:solidFill>
+          <a:ln w="15875">
+            <a:solidFill>
+              <a:srgbClr val="075033"/>
+            </a:solidFill>
+          </a:ln>
+        </p:spPr>
+        <p:style>
+          <a:lnRef idx="1">
+            <a:schemeClr val="accent1"/>
+          </a:lnRef>
+          <a:fillRef idx="3">
+            <a:schemeClr val="accent1"/>
+          </a:fillRef>
+          <a:effectRef idx="2">
+            <a:schemeClr val="accent1"/>
+          </a:effectRef>
+          <a:fontRef idx="minor">
+            <a:schemeClr val="lt1"/>
+          </a:fontRef>
+        </p:style>
+        <p:txBody>
+          <a:bodyPr rtlCol="0" anchor="ctr"/>
+          <a:lstStyle/>
+          <a:p>
+            <a:pPr algn="ctr"/>
+          </a:p>
+        </p:txBody>
+      </p:sp>
+      <p:sp>
+        <p:nvSpPr>
+          <p:cNvPr id="10" name="Rectangle 9"/>
+          <p:cNvSpPr/>
+          <p:nvPr/>
+        </p:nvSpPr>
+        <p:spPr>
+          <a:xfrm>
+            <a:off x="8366760" y="2130552"/>
+            <a:ext cx="64008" cy="1435608"/>
+          </a:xfrm>
+          <a:prstGeom prst="rect">
+            <a:avLst/>
+          </a:prstGeom>
+          <a:solidFill>
+            <a:srgbClr val="075033"/>
+          </a:solidFill>
+          <a:ln>
+            <a:noFill/>
+          </a:ln>
+        </p:spPr>
+        <p:style>
+          <a:lnRef idx="1">
+            <a:schemeClr val="accent1"/>
+          </a:lnRef>
+          <a:fillRef idx="3">
+            <a:schemeClr val="accent1"/>
+          </a:fillRef>
+          <a:effectRef idx="2">
+            <a:schemeClr val="accent1"/>
+          </a:effectRef>
+          <a:fontRef idx="minor">
+            <a:schemeClr val="lt1"/>
+          </a:fontRef>
+        </p:style>
+        <p:txBody>
+          <a:bodyPr rtlCol="0" anchor="ctr"/>
+          <a:lstStyle/>
+          <a:p>
+            <a:pPr algn="ctr"/>
+          </a:p>
+        </p:txBody>
+      </p:sp>
+      <p:sp>
+        <p:nvSpPr>
+          <p:cNvPr id="11" name="TextBox 10"/>
+          <p:cNvSpPr txBox="1"/>
+          <p:nvPr/>
+        </p:nvSpPr>
+        <p:spPr>
+          <a:xfrm>
+            <a:off x="8476488" y="2194560"/>
+            <a:ext cx="3493008" cy="1344168"/>
+          </a:xfrm>
+          <a:prstGeom prst="rect">
+            <a:avLst/>
+          </a:prstGeom>
+          <a:noFill/>
+        </p:spPr>
+        <p:txBody>
+          <a:bodyPr wrap="square">
+            <a:spAutoFit/>
+          </a:bodyPr>
+          <a:lstStyle/>
+          <a:p>
+            <a:r>
+              <a:rPr b="1" sz="900">
+                <a:solidFill>
+                  <a:srgbClr val="075033"/>
+                </a:solidFill>
+              </a:rPr>
+              <a:t>Gateways &amp; Zugriff</a:t>
+            </a:r>
+          </a:p>
+          <a:p>
+            <a:r>
+              <a:rPr sz="800">
+                <a:solidFill>
+                  <a:srgbClr val="1A1A1A"/>
+                </a:solidFill>
+              </a:rPr>
+              <a:t>VPN GW VpnGw1AZ: ~€140/Mon.</a:t>
+            </a:r>
+          </a:p>
+          <a:p>
+            <a:r>
+              <a:rPr sz="800">
+                <a:solidFill>
+                  <a:srgbClr val="1A1A1A"/>
+                </a:solidFill>
+              </a:rPr>
+              <a:t>Azure Bastion: sicheres RDP/SSH</a:t>
+            </a:r>
+          </a:p>
+          <a:p>
+            <a:r>
+              <a:rPr sz="800">
+                <a:solidFill>
+                  <a:srgbClr val="1A1A1A"/>
+                </a:solidFill>
+              </a:rPr>
+              <a:t>ohne Public IP · ~€120/Mon.</a:t>
+            </a:r>
+          </a:p>
+          <a:p>
+            <a:r>
+              <a:rPr sz="800">
+                <a:solidFill>
+                  <a:srgbClr val="1A1A1A"/>
+                </a:solidFill>
+              </a:rPr>
+              <a:t>ExpressRoute GW: deferred</a:t>
+            </a:r>
+          </a:p>
+        </p:txBody>
+      </p:sp>
+      <p:sp>
+        <p:nvSpPr>
+          <p:cNvPr id="12" name="Rectangle 11"/>
+          <p:cNvSpPr/>
+          <p:nvPr/>
+        </p:nvSpPr>
+        <p:spPr>
+          <a:xfrm>
+            <a:off x="8366760" y="3639312"/>
+            <a:ext cx="3657600" cy="1435608"/>
+          </a:xfrm>
+          <a:prstGeom prst="rect">
+            <a:avLst/>
+          </a:prstGeom>
+          <a:solidFill>
+            <a:srgbClr val="F2F9F5"/>
+          </a:solidFill>
+          <a:ln w="15875">
+            <a:solidFill>
+              <a:srgbClr val="075033"/>
+            </a:solidFill>
+          </a:ln>
+        </p:spPr>
+        <p:style>
+          <a:lnRef idx="1">
+            <a:schemeClr val="accent1"/>
+          </a:lnRef>
+          <a:fillRef idx="3">
+            <a:schemeClr val="accent1"/>
+          </a:fillRef>
+          <a:effectRef idx="2">
+            <a:schemeClr val="accent1"/>
+          </a:effectRef>
+          <a:fontRef idx="minor">
+            <a:schemeClr val="lt1"/>
+          </a:fontRef>
+        </p:style>
+        <p:txBody>
+          <a:bodyPr rtlCol="0" anchor="ctr"/>
+          <a:lstStyle/>
+          <a:p>
+            <a:pPr algn="ctr"/>
+          </a:p>
+        </p:txBody>
+      </p:sp>
+      <p:sp>
+        <p:nvSpPr>
+          <p:cNvPr id="13" name="Rectangle 12"/>
+          <p:cNvSpPr/>
+          <p:nvPr/>
+        </p:nvSpPr>
+        <p:spPr>
+          <a:xfrm>
+            <a:off x="8366760" y="3639312"/>
+            <a:ext cx="64008" cy="1435608"/>
+          </a:xfrm>
+          <a:prstGeom prst="rect">
+            <a:avLst/>
+          </a:prstGeom>
+          <a:solidFill>
+            <a:srgbClr val="075033"/>
+          </a:solidFill>
+          <a:ln>
+            <a:noFill/>
+          </a:ln>
+        </p:spPr>
+        <p:style>
+          <a:lnRef idx="1">
+            <a:schemeClr val="accent1"/>
+          </a:lnRef>
+          <a:fillRef idx="3">
+            <a:schemeClr val="accent1"/>
+          </a:fillRef>
+          <a:effectRef idx="2">
+            <a:schemeClr val="accent1"/>
+          </a:effectRef>
+          <a:fontRef idx="minor">
+            <a:schemeClr val="lt1"/>
+          </a:fontRef>
+        </p:style>
+        <p:txBody>
+          <a:bodyPr rtlCol="0" anchor="ctr"/>
+          <a:lstStyle/>
+          <a:p>
+            <a:pPr algn="ctr"/>
+          </a:p>
+        </p:txBody>
+      </p:sp>
+      <p:sp>
+        <p:nvSpPr>
+          <p:cNvPr id="14" name="TextBox 13"/>
+          <p:cNvSpPr txBox="1"/>
+          <p:nvPr/>
+        </p:nvSpPr>
+        <p:spPr>
+          <a:xfrm>
+            <a:off x="8476488" y="3703320"/>
+            <a:ext cx="3493008" cy="1344168"/>
+          </a:xfrm>
+          <a:prstGeom prst="rect">
+            <a:avLst/>
+          </a:prstGeom>
+          <a:noFill/>
+        </p:spPr>
+        <p:txBody>
+          <a:bodyPr wrap="square">
+            <a:spAutoFit/>
+          </a:bodyPr>
+          <a:lstStyle/>
+          <a:p>
+            <a:r>
+              <a:rPr b="1" sz="900">
+                <a:solidFill>
+                  <a:srgbClr val="075033"/>
+                </a:solidFill>
+              </a:rPr>
+              <a:t>DNS &amp; Private Connectivity</a:t>
+            </a:r>
+          </a:p>
+          <a:p>
+            <a:r>
+              <a:rPr sz="800">
+                <a:solidFill>
+                  <a:srgbClr val="1A1A1A"/>
+                </a:solidFill>
+              </a:rPr>
+              <a:t>DNS Private Resolver: ~€25/Mon.</a:t>
+            </a:r>
+          </a:p>
+          <a:p>
+            <a:r>
+              <a:rPr sz="800">
+                <a:solidFill>
+                  <a:srgbClr val="1A1A1A"/>
+                </a:solidFill>
+              </a:rPr>
+              <a:t>Private DNS Zones: ~€15/Mon.</a:t>
+            </a:r>
+          </a:p>
+          <a:p>
+            <a:r>
+              <a:rPr sz="800">
+                <a:solidFill>
+                  <a:srgbClr val="1A1A1A"/>
+                </a:solidFill>
+              </a:rPr>
+              <a:t>Key Vault für Zertifikate</a:t>
+            </a:r>
+          </a:p>
+          <a:p>
+            <a:r>
+              <a:rPr sz="800">
+                <a:solidFill>
+                  <a:srgbClr val="1A1A1A"/>
+                </a:solidFill>
+              </a:rPr>
+              <a:t>Event Hub → CrowdStrike SIEM</a:t>
+            </a:r>
+          </a:p>
+        </p:txBody>
+      </p:sp>
+      <p:sp>
+        <p:nvSpPr>
+          <p:cNvPr id="15" name="Rectangle 14"/>
+          <p:cNvSpPr/>
+          <p:nvPr/>
+        </p:nvSpPr>
+        <p:spPr>
+          <a:xfrm>
+            <a:off x="8366760" y="5148072"/>
+            <a:ext cx="3657600" cy="1435608"/>
+          </a:xfrm>
+          <a:prstGeom prst="rect">
+            <a:avLst/>
+          </a:prstGeom>
+          <a:solidFill>
+            <a:srgbClr val="F2F9F5"/>
+          </a:solidFill>
+          <a:ln w="15875">
+            <a:solidFill>
+              <a:srgbClr val="075033"/>
+            </a:solidFill>
+          </a:ln>
+        </p:spPr>
+        <p:style>
+          <a:lnRef idx="1">
+            <a:schemeClr val="accent1"/>
+          </a:lnRef>
+          <a:fillRef idx="3">
+            <a:schemeClr val="accent1"/>
+          </a:fillRef>
+          <a:effectRef idx="2">
+            <a:schemeClr val="accent1"/>
+          </a:effectRef>
+          <a:fontRef idx="minor">
+            <a:schemeClr val="lt1"/>
+          </a:fontRef>
+        </p:style>
+        <p:txBody>
+          <a:bodyPr rtlCol="0" anchor="ctr"/>
+          <a:lstStyle/>
+          <a:p>
+            <a:pPr algn="ctr"/>
+          </a:p>
+        </p:txBody>
+      </p:sp>
+      <p:sp>
+        <p:nvSpPr>
+          <p:cNvPr id="16" name="Rectangle 15"/>
+          <p:cNvSpPr/>
+          <p:nvPr/>
+        </p:nvSpPr>
+        <p:spPr>
+          <a:xfrm>
+            <a:off x="8366760" y="5148072"/>
+            <a:ext cx="64008" cy="1435608"/>
+          </a:xfrm>
+          <a:prstGeom prst="rect">
+            <a:avLst/>
+          </a:prstGeom>
+          <a:solidFill>
+            <a:srgbClr val="075033"/>
+          </a:solidFill>
+          <a:ln>
+            <a:noFill/>
+          </a:ln>
+        </p:spPr>
+        <p:style>
+          <a:lnRef idx="1">
+            <a:schemeClr val="accent1"/>
+          </a:lnRef>
+          <a:fillRef idx="3">
+            <a:schemeClr val="accent1"/>
+          </a:fillRef>
+          <a:effectRef idx="2">
+            <a:schemeClr val="accent1"/>
+          </a:effectRef>
+          <a:fontRef idx="minor">
+            <a:schemeClr val="lt1"/>
+          </a:fontRef>
+        </p:style>
+        <p:txBody>
+          <a:bodyPr rtlCol="0" anchor="ctr"/>
+          <a:lstStyle/>
+          <a:p>
+            <a:pPr algn="ctr"/>
+          </a:p>
+        </p:txBody>
+      </p:sp>
+      <p:sp>
+        <p:nvSpPr>
+          <p:cNvPr id="17" name="TextBox 16"/>
+          <p:cNvSpPr txBox="1"/>
+          <p:nvPr/>
+        </p:nvSpPr>
+        <p:spPr>
+          <a:xfrm>
+            <a:off x="8476488" y="5212080"/>
+            <a:ext cx="3493008" cy="1344168"/>
+          </a:xfrm>
+          <a:prstGeom prst="rect">
+            <a:avLst/>
+          </a:prstGeom>
+          <a:noFill/>
+        </p:spPr>
+        <p:txBody>
+          <a:bodyPr wrap="square">
+            <a:spAutoFit/>
+          </a:bodyPr>
+          <a:lstStyle/>
+          <a:p>
+            <a:r>
+              <a:rPr b="1" sz="900">
+                <a:solidFill>
+                  <a:srgbClr val="075033"/>
+                </a:solidFill>
+              </a:rPr>
+              <a:t>Spoke-Schutz</a:t>
+            </a:r>
+          </a:p>
+          <a:p>
+            <a:r>
+              <a:rPr sz="800">
+                <a:solidFill>
+                  <a:srgbClr val="1A1A1A"/>
+                </a:solidFill>
+              </a:rPr>
+              <a:t>Jede Workload-Sub = eigenes VNet</a:t>
+            </a:r>
+          </a:p>
+          <a:p>
+            <a:r>
+              <a:rPr sz="800">
+                <a:solidFill>
+                  <a:srgbClr val="1A1A1A"/>
+                </a:solidFill>
+              </a:rPr>
+              <a:t>Peering zum Hub-VNet</a:t>
+            </a:r>
+          </a:p>
+          <a:p>
+            <a:r>
+              <a:rPr sz="800">
+                <a:solidFill>
+                  <a:srgbClr val="1A1A1A"/>
+                </a:solidFill>
+              </a:rPr>
+              <a:t>UDR: gesamter Traffic über</a:t>
+            </a:r>
+          </a:p>
+          <a:p>
+            <a:r>
+              <a:rPr sz="800">
+                <a:solidFill>
+                  <a:srgbClr val="1A1A1A"/>
+                </a:solidFill>
+              </a:rPr>
+              <a:t>Azure Firewall zwingend geleitet</a:t>
             </a:r>
           </a:p>
         </p:txBody>

--- a/docs/konzept/Powerpoint/Azure-Landing-Zone-Konzept.pptx
+++ b/docs/konzept/Powerpoint/Azure-Landing-Zone-Konzept.pptx
@@ -53,6 +53,9 @@
     <p:sldId id="292" r:id="rId48"/>
     <p:sldId id="293" r:id="rId49"/>
     <p:sldId id="294" r:id="rId50"/>
+    <p:sldId id="295" r:id="rId51"/>
+    <p:sldId id="296" r:id="rId52"/>
+    <p:sldId id="297" r:id="rId53"/>
   </p:sldIdLst>
   <p:sldSz cx="12192000" cy="6858000"/>
   <p:notesSz cx="7099300" cy="10234613"/>
@@ -25476,107 +25479,14 @@
           <a:lstStyle/>
           <a:p>
             <a:r>
-              <a:t>Management Group Hierarchie (12 MGs)</a:t>
-            </a:r>
-          </a:p>
-        </p:txBody>
-      </p:sp>
-      <p:sp>
-        <p:nvSpPr>
-          <p:cNvPr id="3" name="Text Placeholder 2"/>
-          <p:cNvSpPr>
-            <a:spLocks noGrp="1"/>
-          </p:cNvSpPr>
-          <p:nvPr>
-            <p:ph type="body" idx="13" sz="quarter"/>
-          </p:nvPr>
-        </p:nvSpPr>
-        <p:spPr/>
-        <p:txBody>
-          <a:bodyPr wrap="square"/>
-          <a:lstStyle/>
-          <a:p>
-            <a:pPr/>
-            <a:r>
-              <a:rPr sz="1300"/>
-              <a:t>Tenant Root</a:t>
-            </a:r>
-          </a:p>
-          <a:p>
-            <a:pPr lvl="1"/>
-            <a:r>
-              <a:rPr sz="1300"/>
-              <a:t>alz (Intermediate Root) – alle ALZ-Policies erben von hier</a:t>
-            </a:r>
-          </a:p>
-          <a:p>
-            <a:pPr lvl="1"/>
-            <a:r>
-              <a:rPr sz="1300"/>
-              <a:t>alz-platform: connectivity · identity · management · security</a:t>
-            </a:r>
-          </a:p>
-          <a:p>
-            <a:pPr lvl="1"/>
-            <a:r>
-              <a:rPr sz="1300"/>
-              <a:t>alz-platform-connectivity  → Hub-Netzwerk, Firewall, DNS</a:t>
-            </a:r>
-          </a:p>
-          <a:p>
-            <a:pPr lvl="1"/>
-            <a:r>
-              <a:rPr sz="1300"/>
-              <a:t>alz-platform-identity      → Identity-Dienste (Entra, AD DS)</a:t>
-            </a:r>
-          </a:p>
-          <a:p>
-            <a:pPr lvl="1"/>
-            <a:r>
-              <a:rPr sz="1300"/>
-              <a:t>alz-platform-management    → Logging, Monitoring, Operations</a:t>
-            </a:r>
-          </a:p>
-          <a:p>
-            <a:pPr lvl="1"/>
-            <a:r>
-              <a:rPr sz="1300"/>
-              <a:t>alz-platform-security      → Security-Tooling, Defender</a:t>
-            </a:r>
-          </a:p>
-          <a:p>
-            <a:pPr lvl="1"/>
-            <a:r>
-              <a:rPr sz="1300"/>
-              <a:t>alz-landingzones: corp · online · local</a:t>
-            </a:r>
-          </a:p>
-          <a:p>
-            <a:pPr lvl="1"/>
-            <a:r>
-              <a:rPr sz="1300"/>
-              <a:t>alz-sandbox  ·  alz-decommissioned</a:t>
-            </a:r>
-          </a:p>
-          <a:p>
-            <a:pPr/>
-            <a:r>
-              <a:rPr sz="1300"/>
-              <a:t>Region: Germany West Central (primär 10.0.0.0/22) + North Europe (sekundär 10.1.0.0/22)</a:t>
-            </a:r>
-          </a:p>
-          <a:p>
-            <a:pPr/>
-            <a:r>
-              <a:rPr sz="1300"/>
-              <a:t>Subscription-Strategie: Single-Sub für Pilot → 4 dedizierte Platform-Subs für Produktion</a:t>
-            </a:r>
-          </a:p>
-        </p:txBody>
-      </p:sp>
-      <p:sp>
-        <p:nvSpPr>
-          <p:cNvPr id="4" name="Subtitle 3"/>
+              <a:t>3  ·  Zielarchitektur</a:t>
+            </a:r>
+          </a:p>
+        </p:txBody>
+      </p:sp>
+      <p:sp>
+        <p:nvSpPr>
+          <p:cNvPr id="3" name="Subtitle 2"/>
           <p:cNvSpPr>
             <a:spLocks noGrp="1"/>
           </p:cNvSpPr>
@@ -25590,9 +25500,26 @@
           <a:lstStyle/>
           <a:p>
             <a:r>
-              <a:t>Zielarchitektur</a:t>
-            </a:r>
-          </a:p>
+              <a:t>12 Management Groups + Hub-and-Spoke-Netzwerk in zwei Regionen</a:t>
+            </a:r>
+          </a:p>
+        </p:txBody>
+      </p:sp>
+      <p:sp>
+        <p:nvSpPr>
+          <p:cNvPr id="4" name="Text Placeholder 3"/>
+          <p:cNvSpPr>
+            <a:spLocks noGrp="1"/>
+          </p:cNvSpPr>
+          <p:nvPr>
+            <p:ph type="body" idx="13" sz="quarter"/>
+          </p:nvPr>
+        </p:nvSpPr>
+        <p:spPr/>
+        <p:txBody>
+          <a:bodyPr/>
+          <a:lstStyle/>
+          <a:p/>
         </p:txBody>
       </p:sp>
     </p:spTree>
@@ -25615,747 +25542,135 @@
       <p:grpSpPr/>
       <p:sp>
         <p:nvSpPr>
-          <p:cNvPr id="2" name="TextBox 1"/>
-          <p:cNvSpPr txBox="1"/>
-          <p:nvPr/>
-        </p:nvSpPr>
-        <p:spPr>
-          <a:xfrm>
-            <a:off x="137160" y="73152"/>
-            <a:ext cx="11887200" cy="438912"/>
-          </a:xfrm>
-          <a:prstGeom prst="rect">
-            <a:avLst/>
-          </a:prstGeom>
-          <a:noFill/>
-        </p:spPr>
-        <p:txBody>
-          <a:bodyPr wrap="none">
-            <a:spAutoFit/>
-          </a:bodyPr>
+          <p:cNvPr id="2" name="Title 1"/>
+          <p:cNvSpPr>
+            <a:spLocks noGrp="1"/>
+          </p:cNvSpPr>
+          <p:nvPr>
+            <p:ph type="title"/>
+          </p:nvPr>
+        </p:nvSpPr>
+        <p:spPr/>
+        <p:txBody>
+          <a:bodyPr/>
           <a:lstStyle/>
           <a:p>
             <a:r>
-              <a:rPr sz="1500" b="1">
-                <a:solidFill>
-                  <a:srgbClr val="075033"/>
-                </a:solidFill>
-              </a:rPr>
-              <a:t>Zielarchitektur: Azure Landing Zone – Hub-and-Spoke-Topologie</a:t>
-            </a:r>
-          </a:p>
-        </p:txBody>
-      </p:sp>
-      <p:sp>
-        <p:nvSpPr>
-          <p:cNvPr id="3" name="Rectangle 2"/>
-          <p:cNvSpPr/>
-          <p:nvPr/>
-        </p:nvSpPr>
-        <p:spPr>
-          <a:xfrm>
-            <a:off x="137160" y="548640"/>
-            <a:ext cx="11887200" cy="22860"/>
-          </a:xfrm>
-          <a:prstGeom prst="rect">
-            <a:avLst/>
-          </a:prstGeom>
-          <a:solidFill>
-            <a:srgbClr val="23A96A"/>
-          </a:solidFill>
-          <a:ln>
-            <a:noFill/>
-          </a:ln>
-        </p:spPr>
-        <p:style>
-          <a:lnRef idx="1">
-            <a:schemeClr val="accent1"/>
-          </a:lnRef>
-          <a:fillRef idx="3">
-            <a:schemeClr val="accent1"/>
-          </a:fillRef>
-          <a:effectRef idx="2">
-            <a:schemeClr val="accent1"/>
-          </a:effectRef>
-          <a:fontRef idx="minor">
-            <a:schemeClr val="lt1"/>
-          </a:fontRef>
-        </p:style>
-        <p:txBody>
-          <a:bodyPr rtlCol="0" anchor="ctr"/>
+              <a:t>Management Group Hierarchie (12 MGs)</a:t>
+            </a:r>
+          </a:p>
+        </p:txBody>
+      </p:sp>
+      <p:sp>
+        <p:nvSpPr>
+          <p:cNvPr id="3" name="Text Placeholder 2"/>
+          <p:cNvSpPr>
+            <a:spLocks noGrp="1"/>
+          </p:cNvSpPr>
+          <p:nvPr>
+            <p:ph type="body" idx="13" sz="quarter"/>
+          </p:nvPr>
+        </p:nvSpPr>
+        <p:spPr/>
+        <p:txBody>
+          <a:bodyPr wrap="square"/>
           <a:lstStyle/>
           <a:p>
-            <a:pPr algn="ctr"/>
-          </a:p>
-        </p:txBody>
-      </p:sp>
-      <p:pic>
-        <p:nvPicPr>
-          <p:cNvPr id="4" name="Picture 3" descr="alz-hub-spoke.png"/>
-          <p:cNvPicPr>
-            <a:picLocks noChangeAspect="1"/>
-          </p:cNvPicPr>
-          <p:nvPr/>
-        </p:nvPicPr>
-        <p:blipFill>
-          <a:blip r:embed="rId2"/>
-          <a:stretch>
-            <a:fillRect/>
-          </a:stretch>
-        </p:blipFill>
-        <p:spPr>
-          <a:xfrm>
-            <a:off x="137160" y="621792"/>
-            <a:ext cx="8001000" cy="4767262"/>
-          </a:xfrm>
-          <a:prstGeom prst="rect">
-            <a:avLst/>
-          </a:prstGeom>
-        </p:spPr>
-      </p:pic>
-      <p:sp>
-        <p:nvSpPr>
-          <p:cNvPr id="5" name="TextBox 4"/>
-          <p:cNvSpPr txBox="1"/>
-          <p:nvPr/>
-        </p:nvSpPr>
-        <p:spPr>
-          <a:xfrm>
-            <a:off x="137160" y="6629400"/>
-            <a:ext cx="8001000" cy="201168"/>
-          </a:xfrm>
-          <a:prstGeom prst="rect">
-            <a:avLst/>
-          </a:prstGeom>
-          <a:noFill/>
-        </p:spPr>
-        <p:txBody>
-          <a:bodyPr wrap="none">
-            <a:spAutoFit/>
-          </a:bodyPr>
+            <a:pPr/>
+            <a:r>
+              <a:rPr sz="1300"/>
+              <a:t>Tenant Root</a:t>
+            </a:r>
+          </a:p>
+          <a:p>
+            <a:pPr lvl="1"/>
+            <a:r>
+              <a:rPr sz="1300"/>
+              <a:t>alz (Intermediate Root) – alle ALZ-Policies erben von hier</a:t>
+            </a:r>
+          </a:p>
+          <a:p>
+            <a:pPr lvl="1"/>
+            <a:r>
+              <a:rPr sz="1300"/>
+              <a:t>alz-platform: connectivity · identity · management · security</a:t>
+            </a:r>
+          </a:p>
+          <a:p>
+            <a:pPr lvl="1"/>
+            <a:r>
+              <a:rPr sz="1300"/>
+              <a:t>alz-platform-connectivity  → Hub-Netzwerk, Firewall, DNS</a:t>
+            </a:r>
+          </a:p>
+          <a:p>
+            <a:pPr lvl="1"/>
+            <a:r>
+              <a:rPr sz="1300"/>
+              <a:t>alz-platform-identity      → Identity-Dienste (Entra, AD DS)</a:t>
+            </a:r>
+          </a:p>
+          <a:p>
+            <a:pPr lvl="1"/>
+            <a:r>
+              <a:rPr sz="1300"/>
+              <a:t>alz-platform-management    → Logging, Monitoring, Operations</a:t>
+            </a:r>
+          </a:p>
+          <a:p>
+            <a:pPr lvl="1"/>
+            <a:r>
+              <a:rPr sz="1300"/>
+              <a:t>alz-platform-security      → Security-Tooling, Defender</a:t>
+            </a:r>
+          </a:p>
+          <a:p>
+            <a:pPr lvl="1"/>
+            <a:r>
+              <a:rPr sz="1300"/>
+              <a:t>alz-landingzones: corp · online · local</a:t>
+            </a:r>
+          </a:p>
+          <a:p>
+            <a:pPr lvl="1"/>
+            <a:r>
+              <a:rPr sz="1300"/>
+              <a:t>alz-sandbox  ·  alz-decommissioned</a:t>
+            </a:r>
+          </a:p>
+          <a:p>
+            <a:pPr/>
+            <a:r>
+              <a:rPr sz="1300"/>
+              <a:t>Region: Germany West Central (primär 10.0.0.0/22) + North Europe (sekundär 10.1.0.0/22)</a:t>
+            </a:r>
+          </a:p>
+          <a:p>
+            <a:pPr/>
+            <a:r>
+              <a:rPr sz="1300"/>
+              <a:t>Subscription-Strategie: Single-Sub für Pilot → 4 dedizierte Platform-Subs für Produktion</a:t>
+            </a:r>
+          </a:p>
+        </p:txBody>
+      </p:sp>
+      <p:sp>
+        <p:nvSpPr>
+          <p:cNvPr id="4" name="Subtitle 3"/>
+          <p:cNvSpPr>
+            <a:spLocks noGrp="1"/>
+          </p:cNvSpPr>
+          <p:nvPr>
+            <p:ph type="subTitle" idx="1"/>
+          </p:nvPr>
+        </p:nvSpPr>
+        <p:spPr/>
+        <p:txBody>
+          <a:bodyPr/>
           <a:lstStyle/>
           <a:p>
             <a:r>
-              <a:rPr sz="700">
-                <a:solidFill>
-                  <a:srgbClr val="595959"/>
-                </a:solidFill>
-              </a:rPr>
-              <a:t>Quelle: Microsoft Cloud Adoption Framework · learn.microsoft.com (unverändert)</a:t>
-            </a:r>
-          </a:p>
-        </p:txBody>
-      </p:sp>
-      <p:sp>
-        <p:nvSpPr>
-          <p:cNvPr id="6" name="Rectangle 5"/>
-          <p:cNvSpPr/>
-          <p:nvPr/>
-        </p:nvSpPr>
-        <p:spPr>
-          <a:xfrm>
-            <a:off x="8366760" y="621792"/>
-            <a:ext cx="3657600" cy="1435608"/>
-          </a:xfrm>
-          <a:prstGeom prst="rect">
-            <a:avLst/>
-          </a:prstGeom>
-          <a:solidFill>
-            <a:srgbClr val="F2F9F5"/>
-          </a:solidFill>
-          <a:ln w="15875">
-            <a:solidFill>
-              <a:srgbClr val="075033"/>
-            </a:solidFill>
-          </a:ln>
-        </p:spPr>
-        <p:style>
-          <a:lnRef idx="1">
-            <a:schemeClr val="accent1"/>
-          </a:lnRef>
-          <a:fillRef idx="3">
-            <a:schemeClr val="accent1"/>
-          </a:fillRef>
-          <a:effectRef idx="2">
-            <a:schemeClr val="accent1"/>
-          </a:effectRef>
-          <a:fontRef idx="minor">
-            <a:schemeClr val="lt1"/>
-          </a:fontRef>
-        </p:style>
-        <p:txBody>
-          <a:bodyPr rtlCol="0" anchor="ctr"/>
-          <a:lstStyle/>
-          <a:p>
-            <a:pPr algn="ctr"/>
-          </a:p>
-        </p:txBody>
-      </p:sp>
-      <p:sp>
-        <p:nvSpPr>
-          <p:cNvPr id="7" name="Rectangle 6"/>
-          <p:cNvSpPr/>
-          <p:nvPr/>
-        </p:nvSpPr>
-        <p:spPr>
-          <a:xfrm>
-            <a:off x="8366760" y="621792"/>
-            <a:ext cx="64008" cy="1435608"/>
-          </a:xfrm>
-          <a:prstGeom prst="rect">
-            <a:avLst/>
-          </a:prstGeom>
-          <a:solidFill>
-            <a:srgbClr val="075033"/>
-          </a:solidFill>
-          <a:ln>
-            <a:noFill/>
-          </a:ln>
-        </p:spPr>
-        <p:style>
-          <a:lnRef idx="1">
-            <a:schemeClr val="accent1"/>
-          </a:lnRef>
-          <a:fillRef idx="3">
-            <a:schemeClr val="accent1"/>
-          </a:fillRef>
-          <a:effectRef idx="2">
-            <a:schemeClr val="accent1"/>
-          </a:effectRef>
-          <a:fontRef idx="minor">
-            <a:schemeClr val="lt1"/>
-          </a:fontRef>
-        </p:style>
-        <p:txBody>
-          <a:bodyPr rtlCol="0" anchor="ctr"/>
-          <a:lstStyle/>
-          <a:p>
-            <a:pPr algn="ctr"/>
-          </a:p>
-        </p:txBody>
-      </p:sp>
-      <p:sp>
-        <p:nvSpPr>
-          <p:cNvPr id="8" name="TextBox 7"/>
-          <p:cNvSpPr txBox="1"/>
-          <p:nvPr/>
-        </p:nvSpPr>
-        <p:spPr>
-          <a:xfrm>
-            <a:off x="8476488" y="685800"/>
-            <a:ext cx="3493008" cy="1344168"/>
-          </a:xfrm>
-          <a:prstGeom prst="rect">
-            <a:avLst/>
-          </a:prstGeom>
-          <a:noFill/>
-        </p:spPr>
-        <p:txBody>
-          <a:bodyPr wrap="square">
-            <a:spAutoFit/>
-          </a:bodyPr>
-          <a:lstStyle/>
-          <a:p>
-            <a:r>
-              <a:rPr b="1" sz="900">
-                <a:solidFill>
-                  <a:srgbClr val="075033"/>
-                </a:solidFill>
-              </a:rPr>
-              <a:t>Bechtle-Empfehlung (~€1.050/Mon.)</a:t>
-            </a:r>
-          </a:p>
-          <a:p>
-            <a:r>
-              <a:rPr sz="800">
-                <a:solidFill>
-                  <a:srgbClr val="1A1A1A"/>
-                </a:solidFill>
-              </a:rPr>
-              <a:t>Connectivity Sub: Firewall Standard 1×</a:t>
-            </a:r>
-          </a:p>
-          <a:p>
-            <a:r>
-              <a:rPr sz="800">
-                <a:solidFill>
-                  <a:srgbClr val="1A1A1A"/>
-                </a:solidFill>
-              </a:rPr>
-              <a:t>Bastion 1×  ·  VPN GW 1×  ·  DNS Resolver 1×</a:t>
-            </a:r>
-          </a:p>
-          <a:p>
-            <a:r>
-              <a:rPr sz="800">
-                <a:solidFill>
-                  <a:srgbClr val="1A1A1A"/>
-                </a:solidFill>
-              </a:rPr>
-              <a:t>Region: Germany West Central (GWC)</a:t>
-            </a:r>
-          </a:p>
-        </p:txBody>
-      </p:sp>
-      <p:sp>
-        <p:nvSpPr>
-          <p:cNvPr id="9" name="Rectangle 8"/>
-          <p:cNvSpPr/>
-          <p:nvPr/>
-        </p:nvSpPr>
-        <p:spPr>
-          <a:xfrm>
-            <a:off x="8366760" y="2130552"/>
-            <a:ext cx="3657600" cy="1435608"/>
-          </a:xfrm>
-          <a:prstGeom prst="rect">
-            <a:avLst/>
-          </a:prstGeom>
-          <a:solidFill>
-            <a:srgbClr val="F2F9F5"/>
-          </a:solidFill>
-          <a:ln w="15875">
-            <a:solidFill>
-              <a:srgbClr val="075033"/>
-            </a:solidFill>
-          </a:ln>
-        </p:spPr>
-        <p:style>
-          <a:lnRef idx="1">
-            <a:schemeClr val="accent1"/>
-          </a:lnRef>
-          <a:fillRef idx="3">
-            <a:schemeClr val="accent1"/>
-          </a:fillRef>
-          <a:effectRef idx="2">
-            <a:schemeClr val="accent1"/>
-          </a:effectRef>
-          <a:fontRef idx="minor">
-            <a:schemeClr val="lt1"/>
-          </a:fontRef>
-        </p:style>
-        <p:txBody>
-          <a:bodyPr rtlCol="0" anchor="ctr"/>
-          <a:lstStyle/>
-          <a:p>
-            <a:pPr algn="ctr"/>
-          </a:p>
-        </p:txBody>
-      </p:sp>
-      <p:sp>
-        <p:nvSpPr>
-          <p:cNvPr id="10" name="Rectangle 9"/>
-          <p:cNvSpPr/>
-          <p:nvPr/>
-        </p:nvSpPr>
-        <p:spPr>
-          <a:xfrm>
-            <a:off x="8366760" y="2130552"/>
-            <a:ext cx="64008" cy="1435608"/>
-          </a:xfrm>
-          <a:prstGeom prst="rect">
-            <a:avLst/>
-          </a:prstGeom>
-          <a:solidFill>
-            <a:srgbClr val="075033"/>
-          </a:solidFill>
-          <a:ln>
-            <a:noFill/>
-          </a:ln>
-        </p:spPr>
-        <p:style>
-          <a:lnRef idx="1">
-            <a:schemeClr val="accent1"/>
-          </a:lnRef>
-          <a:fillRef idx="3">
-            <a:schemeClr val="accent1"/>
-          </a:fillRef>
-          <a:effectRef idx="2">
-            <a:schemeClr val="accent1"/>
-          </a:effectRef>
-          <a:fontRef idx="minor">
-            <a:schemeClr val="lt1"/>
-          </a:fontRef>
-        </p:style>
-        <p:txBody>
-          <a:bodyPr rtlCol="0" anchor="ctr"/>
-          <a:lstStyle/>
-          <a:p>
-            <a:pPr algn="ctr"/>
-          </a:p>
-        </p:txBody>
-      </p:sp>
-      <p:sp>
-        <p:nvSpPr>
-          <p:cNvPr id="11" name="TextBox 10"/>
-          <p:cNvSpPr txBox="1"/>
-          <p:nvPr/>
-        </p:nvSpPr>
-        <p:spPr>
-          <a:xfrm>
-            <a:off x="8476488" y="2194560"/>
-            <a:ext cx="3493008" cy="1344168"/>
-          </a:xfrm>
-          <a:prstGeom prst="rect">
-            <a:avLst/>
-          </a:prstGeom>
-          <a:noFill/>
-        </p:spPr>
-        <p:txBody>
-          <a:bodyPr wrap="square">
-            <a:spAutoFit/>
-          </a:bodyPr>
-          <a:lstStyle/>
-          <a:p>
-            <a:r>
-              <a:rPr b="1" sz="900">
-                <a:solidFill>
-                  <a:srgbClr val="075033"/>
-                </a:solidFill>
-              </a:rPr>
-              <a:t>Erweiterung: Geo-Redundanz (~€1.800)</a:t>
-            </a:r>
-          </a:p>
-          <a:p>
-            <a:r>
-              <a:rPr sz="800">
-                <a:solidFill>
-                  <a:srgbClr val="1A1A1A"/>
-                </a:solidFill>
-              </a:rPr>
-              <a:t>Zweiter Hub (North Europe) per</a:t>
-            </a:r>
-          </a:p>
-          <a:p>
-            <a:r>
-              <a:rPr sz="800">
-                <a:solidFill>
-                  <a:srgbClr val="1A1A1A"/>
-                </a:solidFill>
-              </a:rPr>
-              <a:t>additivem Parameter-Update –</a:t>
-            </a:r>
-          </a:p>
-          <a:p>
-            <a:r>
-              <a:rPr sz="800">
-                <a:solidFill>
-                  <a:srgbClr val="1A1A1A"/>
-                </a:solidFill>
-              </a:rPr>
-              <a:t>kein Rebuild erforderlich</a:t>
-            </a:r>
-          </a:p>
-        </p:txBody>
-      </p:sp>
-      <p:sp>
-        <p:nvSpPr>
-          <p:cNvPr id="12" name="Rectangle 11"/>
-          <p:cNvSpPr/>
-          <p:nvPr/>
-        </p:nvSpPr>
-        <p:spPr>
-          <a:xfrm>
-            <a:off x="8366760" y="3639312"/>
-            <a:ext cx="3657600" cy="1435608"/>
-          </a:xfrm>
-          <a:prstGeom prst="rect">
-            <a:avLst/>
-          </a:prstGeom>
-          <a:solidFill>
-            <a:srgbClr val="F2F9F5"/>
-          </a:solidFill>
-          <a:ln w="15875">
-            <a:solidFill>
-              <a:srgbClr val="075033"/>
-            </a:solidFill>
-          </a:ln>
-        </p:spPr>
-        <p:style>
-          <a:lnRef idx="1">
-            <a:schemeClr val="accent1"/>
-          </a:lnRef>
-          <a:fillRef idx="3">
-            <a:schemeClr val="accent1"/>
-          </a:fillRef>
-          <a:effectRef idx="2">
-            <a:schemeClr val="accent1"/>
-          </a:effectRef>
-          <a:fontRef idx="minor">
-            <a:schemeClr val="lt1"/>
-          </a:fontRef>
-        </p:style>
-        <p:txBody>
-          <a:bodyPr rtlCol="0" anchor="ctr"/>
-          <a:lstStyle/>
-          <a:p>
-            <a:pPr algn="ctr"/>
-          </a:p>
-        </p:txBody>
-      </p:sp>
-      <p:sp>
-        <p:nvSpPr>
-          <p:cNvPr id="13" name="Rectangle 12"/>
-          <p:cNvSpPr/>
-          <p:nvPr/>
-        </p:nvSpPr>
-        <p:spPr>
-          <a:xfrm>
-            <a:off x="8366760" y="3639312"/>
-            <a:ext cx="64008" cy="1435608"/>
-          </a:xfrm>
-          <a:prstGeom prst="rect">
-            <a:avLst/>
-          </a:prstGeom>
-          <a:solidFill>
-            <a:srgbClr val="075033"/>
-          </a:solidFill>
-          <a:ln>
-            <a:noFill/>
-          </a:ln>
-        </p:spPr>
-        <p:style>
-          <a:lnRef idx="1">
-            <a:schemeClr val="accent1"/>
-          </a:lnRef>
-          <a:fillRef idx="3">
-            <a:schemeClr val="accent1"/>
-          </a:fillRef>
-          <a:effectRef idx="2">
-            <a:schemeClr val="accent1"/>
-          </a:effectRef>
-          <a:fontRef idx="minor">
-            <a:schemeClr val="lt1"/>
-          </a:fontRef>
-        </p:style>
-        <p:txBody>
-          <a:bodyPr rtlCol="0" anchor="ctr"/>
-          <a:lstStyle/>
-          <a:p>
-            <a:pPr algn="ctr"/>
-          </a:p>
-        </p:txBody>
-      </p:sp>
-      <p:sp>
-        <p:nvSpPr>
-          <p:cNvPr id="14" name="TextBox 13"/>
-          <p:cNvSpPr txBox="1"/>
-          <p:nvPr/>
-        </p:nvSpPr>
-        <p:spPr>
-          <a:xfrm>
-            <a:off x="8476488" y="3703320"/>
-            <a:ext cx="3493008" cy="1344168"/>
-          </a:xfrm>
-          <a:prstGeom prst="rect">
-            <a:avLst/>
-          </a:prstGeom>
-          <a:noFill/>
-        </p:spPr>
-        <p:txBody>
-          <a:bodyPr wrap="square">
-            <a:spAutoFit/>
-          </a:bodyPr>
-          <a:lstStyle/>
-          <a:p>
-            <a:r>
-              <a:rPr b="1" sz="900">
-                <a:solidFill>
-                  <a:srgbClr val="075033"/>
-                </a:solidFill>
-              </a:rPr>
-              <a:t>Landing Zones (Workload-Subs)</a:t>
-            </a:r>
-          </a:p>
-          <a:p>
-            <a:r>
-              <a:rPr sz="800">
-                <a:solidFill>
-                  <a:srgbClr val="1A1A1A"/>
-                </a:solidFill>
-              </a:rPr>
-              <a:t>alz-corp: interne Workloads (kein Public EP)</a:t>
-            </a:r>
-          </a:p>
-          <a:p>
-            <a:r>
-              <a:rPr sz="800">
-                <a:solidFill>
-                  <a:srgbClr val="1A1A1A"/>
-                </a:solidFill>
-              </a:rPr>
-              <a:t>alz-online: internetseitige Dienste</a:t>
-            </a:r>
-          </a:p>
-          <a:p>
-            <a:r>
-              <a:rPr sz="800">
-                <a:solidFill>
-                  <a:srgbClr val="1A1A1A"/>
-                </a:solidFill>
-              </a:rPr>
-              <a:t>alz-sandbox: Experimente / PoC</a:t>
-            </a:r>
-          </a:p>
-        </p:txBody>
-      </p:sp>
-      <p:sp>
-        <p:nvSpPr>
-          <p:cNvPr id="15" name="Rectangle 14"/>
-          <p:cNvSpPr/>
-          <p:nvPr/>
-        </p:nvSpPr>
-        <p:spPr>
-          <a:xfrm>
-            <a:off x="8366760" y="5148072"/>
-            <a:ext cx="3657600" cy="1435608"/>
-          </a:xfrm>
-          <a:prstGeom prst="rect">
-            <a:avLst/>
-          </a:prstGeom>
-          <a:solidFill>
-            <a:srgbClr val="F2F9F5"/>
-          </a:solidFill>
-          <a:ln w="15875">
-            <a:solidFill>
-              <a:srgbClr val="075033"/>
-            </a:solidFill>
-          </a:ln>
-        </p:spPr>
-        <p:style>
-          <a:lnRef idx="1">
-            <a:schemeClr val="accent1"/>
-          </a:lnRef>
-          <a:fillRef idx="3">
-            <a:schemeClr val="accent1"/>
-          </a:fillRef>
-          <a:effectRef idx="2">
-            <a:schemeClr val="accent1"/>
-          </a:effectRef>
-          <a:fontRef idx="minor">
-            <a:schemeClr val="lt1"/>
-          </a:fontRef>
-        </p:style>
-        <p:txBody>
-          <a:bodyPr rtlCol="0" anchor="ctr"/>
-          <a:lstStyle/>
-          <a:p>
-            <a:pPr algn="ctr"/>
-          </a:p>
-        </p:txBody>
-      </p:sp>
-      <p:sp>
-        <p:nvSpPr>
-          <p:cNvPr id="16" name="Rectangle 15"/>
-          <p:cNvSpPr/>
-          <p:nvPr/>
-        </p:nvSpPr>
-        <p:spPr>
-          <a:xfrm>
-            <a:off x="8366760" y="5148072"/>
-            <a:ext cx="64008" cy="1435608"/>
-          </a:xfrm>
-          <a:prstGeom prst="rect">
-            <a:avLst/>
-          </a:prstGeom>
-          <a:solidFill>
-            <a:srgbClr val="075033"/>
-          </a:solidFill>
-          <a:ln>
-            <a:noFill/>
-          </a:ln>
-        </p:spPr>
-        <p:style>
-          <a:lnRef idx="1">
-            <a:schemeClr val="accent1"/>
-          </a:lnRef>
-          <a:fillRef idx="3">
-            <a:schemeClr val="accent1"/>
-          </a:fillRef>
-          <a:effectRef idx="2">
-            <a:schemeClr val="accent1"/>
-          </a:effectRef>
-          <a:fontRef idx="minor">
-            <a:schemeClr val="lt1"/>
-          </a:fontRef>
-        </p:style>
-        <p:txBody>
-          <a:bodyPr rtlCol="0" anchor="ctr"/>
-          <a:lstStyle/>
-          <a:p>
-            <a:pPr algn="ctr"/>
-          </a:p>
-        </p:txBody>
-      </p:sp>
-      <p:sp>
-        <p:nvSpPr>
-          <p:cNvPr id="17" name="TextBox 16"/>
-          <p:cNvSpPr txBox="1"/>
-          <p:nvPr/>
-        </p:nvSpPr>
-        <p:spPr>
-          <a:xfrm>
-            <a:off x="8476488" y="5212080"/>
-            <a:ext cx="3493008" cy="1344168"/>
-          </a:xfrm>
-          <a:prstGeom prst="rect">
-            <a:avLst/>
-          </a:prstGeom>
-          <a:noFill/>
-        </p:spPr>
-        <p:txBody>
-          <a:bodyPr wrap="square">
-            <a:spAutoFit/>
-          </a:bodyPr>
-          <a:lstStyle/>
-          <a:p>
-            <a:r>
-              <a:rPr b="1" sz="900">
-                <a:solidFill>
-                  <a:srgbClr val="075033"/>
-                </a:solidFill>
-              </a:rPr>
-              <a:t>On-Prem-Anbindung</a:t>
-            </a:r>
-          </a:p>
-          <a:p>
-            <a:r>
-              <a:rPr sz="800">
-                <a:solidFill>
-                  <a:srgbClr val="1A1A1A"/>
-                </a:solidFill>
-              </a:rPr>
-              <a:t>VPN Gateway: aktiv (Empfehlung)</a:t>
-            </a:r>
-          </a:p>
-          <a:p>
-            <a:r>
-              <a:rPr sz="800">
-                <a:solidFill>
-                  <a:srgbClr val="1A1A1A"/>
-                </a:solidFill>
-              </a:rPr>
-              <a:t>ExpressRoute: deferred – aktivieren</a:t>
-            </a:r>
-          </a:p>
-          <a:p>
-            <a:r>
-              <a:rPr sz="800">
-                <a:solidFill>
-                  <a:srgbClr val="1A1A1A"/>
-                </a:solidFill>
-              </a:rPr>
-              <a:t>bei ER-Leitungsbestellung</a:t>
-            </a:r>
-          </a:p>
-          <a:p>
-            <a:r>
-              <a:rPr sz="800">
-                <a:solidFill>
-                  <a:srgbClr val="1A1A1A"/>
-                </a:solidFill>
-              </a:rPr>
-              <a:t>CrowdStrike-SIEM: Event-Hub-Export</a:t>
+              <a:t>Zielarchitektur</a:t>
             </a:r>
           </a:p>
         </p:txBody>
@@ -26378,739 +25693,114 @@
         <p:nvPr/>
       </p:nvGrpSpPr>
       <p:grpSpPr/>
-      <p:sp>
-        <p:nvSpPr>
-          <p:cNvPr id="2" name="TextBox 1"/>
-          <p:cNvSpPr txBox="1"/>
-          <p:nvPr/>
-        </p:nvSpPr>
-        <p:spPr>
-          <a:xfrm>
-            <a:off x="137160" y="73152"/>
-            <a:ext cx="11887200" cy="438912"/>
-          </a:xfrm>
-          <a:prstGeom prst="rect">
-            <a:avLst/>
-          </a:prstGeom>
-          <a:noFill/>
-        </p:spPr>
-        <p:txBody>
-          <a:bodyPr wrap="none">
-            <a:spAutoFit/>
-          </a:bodyPr>
-          <a:lstStyle/>
-          <a:p>
-            <a:r>
-              <a:rPr sz="1500" b="1">
-                <a:solidFill>
-                  <a:srgbClr val="075033"/>
-                </a:solidFill>
-              </a:rPr>
-              <a:t>Zielarchitektur: Management Group Hierarchie</a:t>
-            </a:r>
-          </a:p>
-        </p:txBody>
-      </p:sp>
-      <p:sp>
-        <p:nvSpPr>
-          <p:cNvPr id="3" name="Rectangle 2"/>
-          <p:cNvSpPr/>
-          <p:nvPr/>
-        </p:nvSpPr>
-        <p:spPr>
-          <a:xfrm>
-            <a:off x="137160" y="548640"/>
-            <a:ext cx="11887200" cy="22860"/>
-          </a:xfrm>
-          <a:prstGeom prst="rect">
-            <a:avLst/>
-          </a:prstGeom>
-          <a:solidFill>
-            <a:srgbClr val="23A96A"/>
-          </a:solidFill>
-          <a:ln>
-            <a:noFill/>
-          </a:ln>
-        </p:spPr>
-        <p:style>
-          <a:lnRef idx="1">
-            <a:schemeClr val="accent1"/>
-          </a:lnRef>
-          <a:fillRef idx="3">
-            <a:schemeClr val="accent1"/>
-          </a:fillRef>
-          <a:effectRef idx="2">
-            <a:schemeClr val="accent1"/>
-          </a:effectRef>
-          <a:fontRef idx="minor">
-            <a:schemeClr val="lt1"/>
-          </a:fontRef>
-        </p:style>
-        <p:txBody>
-          <a:bodyPr rtlCol="0" anchor="ctr"/>
-          <a:lstStyle/>
-          <a:p>
-            <a:pPr algn="ctr"/>
-          </a:p>
-        </p:txBody>
-      </p:sp>
       <p:pic>
         <p:nvPicPr>
-          <p:cNvPr id="4" name="Picture 3" descr="alz-mg-hierarchy.png"/>
+          <p:cNvPr id="2" name="Picture Placeholder 1" descr="alz-hub-spoke.png"/>
           <p:cNvPicPr>
-            <a:picLocks noChangeAspect="1"/>
+            <a:picLocks noGrp="1" noChangeAspect="1"/>
           </p:cNvPicPr>
-          <p:nvPr/>
+          <p:nvPr>
+            <p:ph type="pic" idx="14" sz="quarter"/>
+          </p:nvPr>
         </p:nvPicPr>
         <p:blipFill>
           <a:blip r:embed="rId2"/>
+          <a:srcRect l="14133" r="14133"/>
           <a:stretch>
             <a:fillRect/>
           </a:stretch>
         </p:blipFill>
-        <p:spPr>
-          <a:xfrm>
-            <a:off x="137160" y="621792"/>
-            <a:ext cx="8001000" cy="2645331"/>
-          </a:xfrm>
-          <a:prstGeom prst="rect">
-            <a:avLst/>
-          </a:prstGeom>
-        </p:spPr>
+        <p:spPr/>
       </p:pic>
       <p:sp>
         <p:nvSpPr>
-          <p:cNvPr id="5" name="TextBox 4"/>
-          <p:cNvSpPr txBox="1"/>
-          <p:nvPr/>
-        </p:nvSpPr>
-        <p:spPr>
-          <a:xfrm>
-            <a:off x="137160" y="6629400"/>
-            <a:ext cx="8001000" cy="201168"/>
-          </a:xfrm>
-          <a:prstGeom prst="rect">
-            <a:avLst/>
-          </a:prstGeom>
-          <a:noFill/>
-        </p:spPr>
-        <p:txBody>
-          <a:bodyPr wrap="none">
-            <a:spAutoFit/>
-          </a:bodyPr>
+          <p:cNvPr id="3" name="Title 2"/>
+          <p:cNvSpPr>
+            <a:spLocks noGrp="1"/>
+          </p:cNvSpPr>
+          <p:nvPr>
+            <p:ph type="title"/>
+          </p:nvPr>
+        </p:nvSpPr>
+        <p:spPr/>
+        <p:txBody>
+          <a:bodyPr/>
           <a:lstStyle/>
           <a:p>
             <a:r>
-              <a:rPr sz="700">
-                <a:solidFill>
-                  <a:srgbClr val="595959"/>
-                </a:solidFill>
-              </a:rPr>
-              <a:t>Quelle: Microsoft Cloud Adoption Framework · learn.microsoft.com (unverändert)</a:t>
-            </a:r>
-          </a:p>
-        </p:txBody>
-      </p:sp>
-      <p:sp>
-        <p:nvSpPr>
-          <p:cNvPr id="6" name="Rectangle 5"/>
-          <p:cNvSpPr/>
-          <p:nvPr/>
-        </p:nvSpPr>
-        <p:spPr>
-          <a:xfrm>
-            <a:off x="8366760" y="621792"/>
-            <a:ext cx="3657600" cy="1435608"/>
-          </a:xfrm>
-          <a:prstGeom prst="rect">
-            <a:avLst/>
-          </a:prstGeom>
-          <a:solidFill>
-            <a:srgbClr val="F2F9F5"/>
-          </a:solidFill>
-          <a:ln w="15875">
-            <a:solidFill>
-              <a:srgbClr val="075033"/>
-            </a:solidFill>
-          </a:ln>
-        </p:spPr>
-        <p:style>
-          <a:lnRef idx="1">
-            <a:schemeClr val="accent1"/>
-          </a:lnRef>
-          <a:fillRef idx="3">
-            <a:schemeClr val="accent1"/>
-          </a:fillRef>
-          <a:effectRef idx="2">
-            <a:schemeClr val="accent1"/>
-          </a:effectRef>
-          <a:fontRef idx="minor">
-            <a:schemeClr val="lt1"/>
-          </a:fontRef>
-        </p:style>
-        <p:txBody>
-          <a:bodyPr rtlCol="0" anchor="ctr"/>
+              <a:t>Hub-and-Spoke-Topologie</a:t>
+            </a:r>
+          </a:p>
+        </p:txBody>
+      </p:sp>
+      <p:sp>
+        <p:nvSpPr>
+          <p:cNvPr id="4" name="Text Placeholder 3"/>
+          <p:cNvSpPr>
+            <a:spLocks noGrp="1"/>
+          </p:cNvSpPr>
+          <p:nvPr>
+            <p:ph type="body" idx="13" sz="quarter"/>
+          </p:nvPr>
+        </p:nvSpPr>
+        <p:spPr/>
+        <p:txBody>
+          <a:bodyPr wrap="square"/>
           <a:lstStyle/>
           <a:p>
-            <a:pPr algn="ctr"/>
-          </a:p>
-        </p:txBody>
-      </p:sp>
-      <p:sp>
-        <p:nvSpPr>
-          <p:cNvPr id="7" name="Rectangle 6"/>
-          <p:cNvSpPr/>
-          <p:nvPr/>
-        </p:nvSpPr>
-        <p:spPr>
-          <a:xfrm>
-            <a:off x="8366760" y="621792"/>
-            <a:ext cx="64008" cy="1435608"/>
-          </a:xfrm>
-          <a:prstGeom prst="rect">
-            <a:avLst/>
-          </a:prstGeom>
-          <a:solidFill>
-            <a:srgbClr val="075033"/>
-          </a:solidFill>
-          <a:ln>
-            <a:noFill/>
-          </a:ln>
-        </p:spPr>
-        <p:style>
-          <a:lnRef idx="1">
-            <a:schemeClr val="accent1"/>
-          </a:lnRef>
-          <a:fillRef idx="3">
-            <a:schemeClr val="accent1"/>
-          </a:fillRef>
-          <a:effectRef idx="2">
-            <a:schemeClr val="accent1"/>
-          </a:effectRef>
-          <a:fontRef idx="minor">
-            <a:schemeClr val="lt1"/>
-          </a:fontRef>
-        </p:style>
-        <p:txBody>
-          <a:bodyPr rtlCol="0" anchor="ctr"/>
+            <a:pPr/>
+            <a:r>
+              <a:rPr sz="1100"/>
+              <a:t>Bechtle-Empfehlung: GWC · Firewall Standard · ~€1.050/Mon.</a:t>
+            </a:r>
+          </a:p>
+          <a:p>
+            <a:pPr/>
+            <a:r>
+              <a:rPr sz="1100"/>
+              <a:t>Connectivity Sub: Firewall · Bastion · VPN GW · DNS Resolver</a:t>
+            </a:r>
+          </a:p>
+          <a:p>
+            <a:pPr/>
+            <a:r>
+              <a:rPr sz="1100"/>
+              <a:t>Landing Zones: alz-corp · alz-online · alz-sandbox</a:t>
+            </a:r>
+          </a:p>
+          <a:p>
+            <a:pPr/>
+            <a:r>
+              <a:rPr sz="1100"/>
+              <a:t>On-Prem: VPN aktiv · ExpressRoute deferred</a:t>
+            </a:r>
+          </a:p>
+          <a:p>
+            <a:pPr/>
+            <a:r>
+              <a:rPr sz="1100"/>
+              <a:t>SIEM: CrowdStrike via Event-Hub-Export</a:t>
+            </a:r>
+          </a:p>
+        </p:txBody>
+      </p:sp>
+      <p:sp>
+        <p:nvSpPr>
+          <p:cNvPr id="5" name="Subtitle 4"/>
+          <p:cNvSpPr>
+            <a:spLocks noGrp="1"/>
+          </p:cNvSpPr>
+          <p:nvPr>
+            <p:ph type="subTitle" idx="1"/>
+          </p:nvPr>
+        </p:nvSpPr>
+        <p:spPr/>
+        <p:txBody>
+          <a:bodyPr/>
           <a:lstStyle/>
           <a:p>
-            <a:pPr algn="ctr"/>
-          </a:p>
-        </p:txBody>
-      </p:sp>
-      <p:sp>
-        <p:nvSpPr>
-          <p:cNvPr id="8" name="TextBox 7"/>
-          <p:cNvSpPr txBox="1"/>
-          <p:nvPr/>
-        </p:nvSpPr>
-        <p:spPr>
-          <a:xfrm>
-            <a:off x="8476488" y="685800"/>
-            <a:ext cx="3493008" cy="1344168"/>
-          </a:xfrm>
-          <a:prstGeom prst="rect">
-            <a:avLst/>
-          </a:prstGeom>
-          <a:noFill/>
-        </p:spPr>
-        <p:txBody>
-          <a:bodyPr wrap="square">
-            <a:spAutoFit/>
-          </a:bodyPr>
-          <a:lstStyle/>
-          <a:p>
-            <a:r>
-              <a:rPr b="1" sz="900">
-                <a:solidFill>
-                  <a:srgbClr val="075033"/>
-                </a:solidFill>
-              </a:rPr>
-              <a:t>12 Management Groups</a:t>
-            </a:r>
-          </a:p>
-          <a:p>
-            <a:r>
-              <a:rPr sz="800">
-                <a:solidFill>
-                  <a:srgbClr val="1A1A1A"/>
-                </a:solidFill>
-              </a:rPr>
-              <a:t>Vollständig per ALZ Bicep Accelerator</a:t>
-            </a:r>
-          </a:p>
-          <a:p>
-            <a:r>
-              <a:rPr sz="800">
-                <a:solidFill>
-                  <a:srgbClr val="1A1A1A"/>
-                </a:solidFill>
-              </a:rPr>
-              <a:t>deployt – kein manueller Aufwand</a:t>
-            </a:r>
-          </a:p>
-        </p:txBody>
-      </p:sp>
-      <p:sp>
-        <p:nvSpPr>
-          <p:cNvPr id="9" name="Rectangle 8"/>
-          <p:cNvSpPr/>
-          <p:nvPr/>
-        </p:nvSpPr>
-        <p:spPr>
-          <a:xfrm>
-            <a:off x="8366760" y="2130552"/>
-            <a:ext cx="3657600" cy="1435608"/>
-          </a:xfrm>
-          <a:prstGeom prst="rect">
-            <a:avLst/>
-          </a:prstGeom>
-          <a:solidFill>
-            <a:srgbClr val="F2F9F5"/>
-          </a:solidFill>
-          <a:ln w="15875">
-            <a:solidFill>
-              <a:srgbClr val="075033"/>
-            </a:solidFill>
-          </a:ln>
-        </p:spPr>
-        <p:style>
-          <a:lnRef idx="1">
-            <a:schemeClr val="accent1"/>
-          </a:lnRef>
-          <a:fillRef idx="3">
-            <a:schemeClr val="accent1"/>
-          </a:fillRef>
-          <a:effectRef idx="2">
-            <a:schemeClr val="accent1"/>
-          </a:effectRef>
-          <a:fontRef idx="minor">
-            <a:schemeClr val="lt1"/>
-          </a:fontRef>
-        </p:style>
-        <p:txBody>
-          <a:bodyPr rtlCol="0" anchor="ctr"/>
-          <a:lstStyle/>
-          <a:p>
-            <a:pPr algn="ctr"/>
-          </a:p>
-        </p:txBody>
-      </p:sp>
-      <p:sp>
-        <p:nvSpPr>
-          <p:cNvPr id="10" name="Rectangle 9"/>
-          <p:cNvSpPr/>
-          <p:nvPr/>
-        </p:nvSpPr>
-        <p:spPr>
-          <a:xfrm>
-            <a:off x="8366760" y="2130552"/>
-            <a:ext cx="64008" cy="1435608"/>
-          </a:xfrm>
-          <a:prstGeom prst="rect">
-            <a:avLst/>
-          </a:prstGeom>
-          <a:solidFill>
-            <a:srgbClr val="075033"/>
-          </a:solidFill>
-          <a:ln>
-            <a:noFill/>
-          </a:ln>
-        </p:spPr>
-        <p:style>
-          <a:lnRef idx="1">
-            <a:schemeClr val="accent1"/>
-          </a:lnRef>
-          <a:fillRef idx="3">
-            <a:schemeClr val="accent1"/>
-          </a:fillRef>
-          <a:effectRef idx="2">
-            <a:schemeClr val="accent1"/>
-          </a:effectRef>
-          <a:fontRef idx="minor">
-            <a:schemeClr val="lt1"/>
-          </a:fontRef>
-        </p:style>
-        <p:txBody>
-          <a:bodyPr rtlCol="0" anchor="ctr"/>
-          <a:lstStyle/>
-          <a:p>
-            <a:pPr algn="ctr"/>
-          </a:p>
-        </p:txBody>
-      </p:sp>
-      <p:sp>
-        <p:nvSpPr>
-          <p:cNvPr id="11" name="TextBox 10"/>
-          <p:cNvSpPr txBox="1"/>
-          <p:nvPr/>
-        </p:nvSpPr>
-        <p:spPr>
-          <a:xfrm>
-            <a:off x="8476488" y="2194560"/>
-            <a:ext cx="3493008" cy="1344168"/>
-          </a:xfrm>
-          <a:prstGeom prst="rect">
-            <a:avLst/>
-          </a:prstGeom>
-          <a:noFill/>
-        </p:spPr>
-        <p:txBody>
-          <a:bodyPr wrap="square">
-            <a:spAutoFit/>
-          </a:bodyPr>
-          <a:lstStyle/>
-          <a:p>
-            <a:r>
-              <a:rPr b="1" sz="900">
-                <a:solidFill>
-                  <a:srgbClr val="075033"/>
-                </a:solidFill>
-              </a:rPr>
-              <a:t>Policy-Vererbung</a:t>
-            </a:r>
-          </a:p>
-          <a:p>
-            <a:r>
-              <a:rPr sz="800">
-                <a:solidFill>
-                  <a:srgbClr val="1A1A1A"/>
-                </a:solidFill>
-              </a:rPr>
-              <a:t>149 Definitionen · 42 Initiativen</a:t>
-            </a:r>
-          </a:p>
-          <a:p>
-            <a:r>
-              <a:rPr sz="800">
-                <a:solidFill>
-                  <a:srgbClr val="1A1A1A"/>
-                </a:solidFill>
-              </a:rPr>
-              <a:t>123 Assignments – alz-Root vererbt</a:t>
-            </a:r>
-          </a:p>
-          <a:p>
-            <a:r>
-              <a:rPr sz="800">
-                <a:solidFill>
-                  <a:srgbClr val="1A1A1A"/>
-                </a:solidFill>
-              </a:rPr>
-              <a:t>an alle Child-MGs automatisch</a:t>
-            </a:r>
-          </a:p>
-        </p:txBody>
-      </p:sp>
-      <p:sp>
-        <p:nvSpPr>
-          <p:cNvPr id="12" name="Rectangle 11"/>
-          <p:cNvSpPr/>
-          <p:nvPr/>
-        </p:nvSpPr>
-        <p:spPr>
-          <a:xfrm>
-            <a:off x="8366760" y="3639312"/>
-            <a:ext cx="3657600" cy="1435608"/>
-          </a:xfrm>
-          <a:prstGeom prst="rect">
-            <a:avLst/>
-          </a:prstGeom>
-          <a:solidFill>
-            <a:srgbClr val="F2F9F5"/>
-          </a:solidFill>
-          <a:ln w="15875">
-            <a:solidFill>
-              <a:srgbClr val="075033"/>
-            </a:solidFill>
-          </a:ln>
-        </p:spPr>
-        <p:style>
-          <a:lnRef idx="1">
-            <a:schemeClr val="accent1"/>
-          </a:lnRef>
-          <a:fillRef idx="3">
-            <a:schemeClr val="accent1"/>
-          </a:fillRef>
-          <a:effectRef idx="2">
-            <a:schemeClr val="accent1"/>
-          </a:effectRef>
-          <a:fontRef idx="minor">
-            <a:schemeClr val="lt1"/>
-          </a:fontRef>
-        </p:style>
-        <p:txBody>
-          <a:bodyPr rtlCol="0" anchor="ctr"/>
-          <a:lstStyle/>
-          <a:p>
-            <a:pPr algn="ctr"/>
-          </a:p>
-        </p:txBody>
-      </p:sp>
-      <p:sp>
-        <p:nvSpPr>
-          <p:cNvPr id="13" name="Rectangle 12"/>
-          <p:cNvSpPr/>
-          <p:nvPr/>
-        </p:nvSpPr>
-        <p:spPr>
-          <a:xfrm>
-            <a:off x="8366760" y="3639312"/>
-            <a:ext cx="64008" cy="1435608"/>
-          </a:xfrm>
-          <a:prstGeom prst="rect">
-            <a:avLst/>
-          </a:prstGeom>
-          <a:solidFill>
-            <a:srgbClr val="075033"/>
-          </a:solidFill>
-          <a:ln>
-            <a:noFill/>
-          </a:ln>
-        </p:spPr>
-        <p:style>
-          <a:lnRef idx="1">
-            <a:schemeClr val="accent1"/>
-          </a:lnRef>
-          <a:fillRef idx="3">
-            <a:schemeClr val="accent1"/>
-          </a:fillRef>
-          <a:effectRef idx="2">
-            <a:schemeClr val="accent1"/>
-          </a:effectRef>
-          <a:fontRef idx="minor">
-            <a:schemeClr val="lt1"/>
-          </a:fontRef>
-        </p:style>
-        <p:txBody>
-          <a:bodyPr rtlCol="0" anchor="ctr"/>
-          <a:lstStyle/>
-          <a:p>
-            <a:pPr algn="ctr"/>
-          </a:p>
-        </p:txBody>
-      </p:sp>
-      <p:sp>
-        <p:nvSpPr>
-          <p:cNvPr id="14" name="TextBox 13"/>
-          <p:cNvSpPr txBox="1"/>
-          <p:nvPr/>
-        </p:nvSpPr>
-        <p:spPr>
-          <a:xfrm>
-            <a:off x="8476488" y="3703320"/>
-            <a:ext cx="3493008" cy="1344168"/>
-          </a:xfrm>
-          <a:prstGeom prst="rect">
-            <a:avLst/>
-          </a:prstGeom>
-          <a:noFill/>
-        </p:spPr>
-        <p:txBody>
-          <a:bodyPr wrap="square">
-            <a:spAutoFit/>
-          </a:bodyPr>
-          <a:lstStyle/>
-          <a:p>
-            <a:r>
-              <a:rPr b="1" sz="900">
-                <a:solidFill>
-                  <a:srgbClr val="075033"/>
-                </a:solidFill>
-              </a:rPr>
-              <a:t>DoNotEnforce-Start</a:t>
-            </a:r>
-          </a:p>
-          <a:p>
-            <a:r>
-              <a:rPr sz="800">
-                <a:solidFill>
-                  <a:srgbClr val="1A1A1A"/>
-                </a:solidFill>
-              </a:rPr>
-              <a:t>Alle Policies starten im Audit-Modus.</a:t>
-            </a:r>
-          </a:p>
-          <a:p>
-            <a:r>
-              <a:rPr sz="800">
-                <a:solidFill>
-                  <a:srgbClr val="1A1A1A"/>
-                </a:solidFill>
-              </a:rPr>
-              <a:t>Bestehende Ressourcen werden</a:t>
-            </a:r>
-          </a:p>
-          <a:p>
-            <a:r>
-              <a:rPr sz="800">
-                <a:solidFill>
-                  <a:srgbClr val="1A1A1A"/>
-                </a:solidFill>
-              </a:rPr>
-              <a:t>gemeldet, nicht blockiert.</a:t>
-            </a:r>
-          </a:p>
-        </p:txBody>
-      </p:sp>
-      <p:sp>
-        <p:nvSpPr>
-          <p:cNvPr id="15" name="Rectangle 14"/>
-          <p:cNvSpPr/>
-          <p:nvPr/>
-        </p:nvSpPr>
-        <p:spPr>
-          <a:xfrm>
-            <a:off x="8366760" y="5148072"/>
-            <a:ext cx="3657600" cy="1435608"/>
-          </a:xfrm>
-          <a:prstGeom prst="rect">
-            <a:avLst/>
-          </a:prstGeom>
-          <a:solidFill>
-            <a:srgbClr val="F2F9F5"/>
-          </a:solidFill>
-          <a:ln w="15875">
-            <a:solidFill>
-              <a:srgbClr val="075033"/>
-            </a:solidFill>
-          </a:ln>
-        </p:spPr>
-        <p:style>
-          <a:lnRef idx="1">
-            <a:schemeClr val="accent1"/>
-          </a:lnRef>
-          <a:fillRef idx="3">
-            <a:schemeClr val="accent1"/>
-          </a:fillRef>
-          <a:effectRef idx="2">
-            <a:schemeClr val="accent1"/>
-          </a:effectRef>
-          <a:fontRef idx="minor">
-            <a:schemeClr val="lt1"/>
-          </a:fontRef>
-        </p:style>
-        <p:txBody>
-          <a:bodyPr rtlCol="0" anchor="ctr"/>
-          <a:lstStyle/>
-          <a:p>
-            <a:pPr algn="ctr"/>
-          </a:p>
-        </p:txBody>
-      </p:sp>
-      <p:sp>
-        <p:nvSpPr>
-          <p:cNvPr id="16" name="Rectangle 15"/>
-          <p:cNvSpPr/>
-          <p:nvPr/>
-        </p:nvSpPr>
-        <p:spPr>
-          <a:xfrm>
-            <a:off x="8366760" y="5148072"/>
-            <a:ext cx="64008" cy="1435608"/>
-          </a:xfrm>
-          <a:prstGeom prst="rect">
-            <a:avLst/>
-          </a:prstGeom>
-          <a:solidFill>
-            <a:srgbClr val="075033"/>
-          </a:solidFill>
-          <a:ln>
-            <a:noFill/>
-          </a:ln>
-        </p:spPr>
-        <p:style>
-          <a:lnRef idx="1">
-            <a:schemeClr val="accent1"/>
-          </a:lnRef>
-          <a:fillRef idx="3">
-            <a:schemeClr val="accent1"/>
-          </a:fillRef>
-          <a:effectRef idx="2">
-            <a:schemeClr val="accent1"/>
-          </a:effectRef>
-          <a:fontRef idx="minor">
-            <a:schemeClr val="lt1"/>
-          </a:fontRef>
-        </p:style>
-        <p:txBody>
-          <a:bodyPr rtlCol="0" anchor="ctr"/>
-          <a:lstStyle/>
-          <a:p>
-            <a:pPr algn="ctr"/>
-          </a:p>
-        </p:txBody>
-      </p:sp>
-      <p:sp>
-        <p:nvSpPr>
-          <p:cNvPr id="17" name="TextBox 16"/>
-          <p:cNvSpPr txBox="1"/>
-          <p:nvPr/>
-        </p:nvSpPr>
-        <p:spPr>
-          <a:xfrm>
-            <a:off x="8476488" y="5212080"/>
-            <a:ext cx="3493008" cy="1344168"/>
-          </a:xfrm>
-          <a:prstGeom prst="rect">
-            <a:avLst/>
-          </a:prstGeom>
-          <a:noFill/>
-        </p:spPr>
-        <p:txBody>
-          <a:bodyPr wrap="square">
-            <a:spAutoFit/>
-          </a:bodyPr>
-          <a:lstStyle/>
-          <a:p>
-            <a:r>
-              <a:rPr b="1" sz="900">
-                <a:solidFill>
-                  <a:srgbClr val="075033"/>
-                </a:solidFill>
-              </a:rPr>
-              <a:t>Schutz bestehender Ressourcen</a:t>
-            </a:r>
-          </a:p>
-          <a:p>
-            <a:r>
-              <a:rPr sz="800">
-                <a:solidFill>
-                  <a:srgbClr val="1A1A1A"/>
-                </a:solidFill>
-              </a:rPr>
-              <a:t>What-If vor jedem Subscription-Move.</a:t>
-            </a:r>
-          </a:p>
-          <a:p>
-            <a:r>
-              <a:rPr sz="800">
-                <a:solidFill>
-                  <a:srgbClr val="1A1A1A"/>
-                </a:solidFill>
-              </a:rPr>
-              <a:t>Exemptions für Legacy-Ressourcen.</a:t>
-            </a:r>
-          </a:p>
-          <a:p>
-            <a:r>
-              <a:rPr sz="800">
-                <a:solidFill>
-                  <a:srgbClr val="1A1A1A"/>
-                </a:solidFill>
-              </a:rPr>
-              <a:t>Enforcement erst nach Audit-Phase</a:t>
-            </a:r>
-          </a:p>
-          <a:p>
-            <a:r>
-              <a:rPr sz="800">
-                <a:solidFill>
-                  <a:srgbClr val="1A1A1A"/>
-                </a:solidFill>
-              </a:rPr>
-              <a:t>(Empfehlung: 4–8 Wochen).</a:t>
+            <a:r>
+              <a:t>Zielarchitektur</a:t>
             </a:r>
           </a:p>
         </p:txBody>
@@ -27149,14 +25839,65 @@
           <a:lstStyle/>
           <a:p>
             <a:r>
-              <a:t>4  ·  Governance und Policies</a:t>
-            </a:r>
-          </a:p>
-        </p:txBody>
-      </p:sp>
-      <p:sp>
-        <p:nvSpPr>
-          <p:cNvPr id="3" name="Subtitle 2"/>
+              <a:t>Management Group Hierarchie (12 MGs)</a:t>
+            </a:r>
+          </a:p>
+        </p:txBody>
+      </p:sp>
+      <p:sp>
+        <p:nvSpPr>
+          <p:cNvPr id="3" name="Text Placeholder 2"/>
+          <p:cNvSpPr>
+            <a:spLocks noGrp="1"/>
+          </p:cNvSpPr>
+          <p:nvPr>
+            <p:ph type="body" idx="13" sz="quarter"/>
+          </p:nvPr>
+        </p:nvSpPr>
+        <p:spPr/>
+        <p:txBody>
+          <a:bodyPr wrap="square"/>
+          <a:lstStyle/>
+          <a:p>
+            <a:pPr/>
+            <a:r>
+              <a:rPr sz="1100"/>
+              <a:t>Vollständig per ALZ Bicep Accelerator deployt</a:t>
+            </a:r>
+          </a:p>
+          <a:p>
+            <a:pPr/>
+            <a:r>
+              <a:rPr sz="1100"/>
+              <a:t>149 Definitionen · 42 Initiativen · 123 Assignments</a:t>
+            </a:r>
+          </a:p>
+          <a:p>
+            <a:pPr/>
+            <a:r>
+              <a:rPr sz="1100"/>
+              <a:t>DoNotEnforce: Audit-Modus schützt Bestandsressourcen</a:t>
+            </a:r>
+          </a:p>
+          <a:p>
+            <a:pPr/>
+            <a:r>
+              <a:rPr sz="1100"/>
+              <a:t>What-If vor jedem Subscription-Move</a:t>
+            </a:r>
+          </a:p>
+          <a:p>
+            <a:pPr/>
+            <a:r>
+              <a:rPr sz="1100"/>
+              <a:t>Exemptions für Legacy-Ressourcen möglich</a:t>
+            </a:r>
+          </a:p>
+        </p:txBody>
+      </p:sp>
+      <p:sp>
+        <p:nvSpPr>
+          <p:cNvPr id="4" name="Subtitle 3"/>
           <p:cNvSpPr>
             <a:spLocks noGrp="1"/>
           </p:cNvSpPr>
@@ -27170,48 +25911,30 @@
           <a:lstStyle/>
           <a:p>
             <a:r>
-              <a:t>149 Policy-Definitionen · 42 Initiativen · 123 Assignments</a:t>
-            </a:r>
-          </a:p>
-        </p:txBody>
-      </p:sp>
-      <p:sp>
-        <p:nvSpPr>
-          <p:cNvPr id="4" name="Text Placeholder 3"/>
-          <p:cNvSpPr>
-            <a:spLocks noGrp="1"/>
-          </p:cNvSpPr>
-          <p:nvPr>
-            <p:ph type="body" idx="13" sz="quarter"/>
-          </p:nvPr>
-        </p:nvSpPr>
+              <a:t>Zielarchitektur</a:t>
+            </a:r>
+          </a:p>
+        </p:txBody>
+      </p:sp>
+      <p:pic>
+        <p:nvPicPr>
+          <p:cNvPr id="5" name="Picture Placeholder 4" descr="alz-mg-hierarchy.png"/>
+          <p:cNvPicPr>
+            <a:picLocks noGrp="1" noChangeAspect="1"/>
+          </p:cNvPicPr>
+          <p:nvPr>
+            <p:ph type="pic" idx="14" sz="quarter"/>
+          </p:nvPr>
+        </p:nvPicPr>
+        <p:blipFill>
+          <a:blip r:embed="rId2"/>
+          <a:srcRect l="35306" r="35306"/>
+          <a:stretch>
+            <a:fillRect/>
+          </a:stretch>
+        </p:blipFill>
         <p:spPr/>
-        <p:txBody>
-          <a:bodyPr wrap="square"/>
-          <a:lstStyle/>
-          <a:p>
-            <a:pPr/>
-            <a:r>
-              <a:rPr sz="1200"/>
-              <a:t>9 MG-Ebenen mit Assignments</a:t>
-            </a:r>
-          </a:p>
-          <a:p>
-            <a:pPr/>
-            <a:r>
-              <a:rPr sz="1200"/>
-              <a:t>5 Custom RBAC-Rollen</a:t>
-            </a:r>
-          </a:p>
-          <a:p>
-            <a:pPr/>
-            <a:r>
-              <a:rPr sz="1200"/>
-              <a:t>DoNotEnforce → sanftes Onboarding</a:t>
-            </a:r>
-          </a:p>
-        </p:txBody>
-      </p:sp>
+      </p:pic>
     </p:spTree>
   </p:cSld>
   <p:clrMapOvr>
@@ -27246,14 +25969,35 @@
           <a:lstStyle/>
           <a:p>
             <a:r>
-              <a:t>Das vollständige ALZ-Policy-Set</a:t>
-            </a:r>
-          </a:p>
-        </p:txBody>
-      </p:sp>
-      <p:sp>
-        <p:nvSpPr>
-          <p:cNvPr id="3" name="Text Placeholder 2"/>
+              <a:t>4  ·  Governance und Policies</a:t>
+            </a:r>
+          </a:p>
+        </p:txBody>
+      </p:sp>
+      <p:sp>
+        <p:nvSpPr>
+          <p:cNvPr id="3" name="Subtitle 2"/>
+          <p:cNvSpPr>
+            <a:spLocks noGrp="1"/>
+          </p:cNvSpPr>
+          <p:nvPr>
+            <p:ph type="subTitle" idx="1"/>
+          </p:nvPr>
+        </p:nvSpPr>
+        <p:spPr/>
+        <p:txBody>
+          <a:bodyPr/>
+          <a:lstStyle/>
+          <a:p>
+            <a:r>
+              <a:t>149 Policy-Definitionen · 42 Initiativen · 123 Assignments</a:t>
+            </a:r>
+          </a:p>
+        </p:txBody>
+      </p:sp>
+      <p:sp>
+        <p:nvSpPr>
+          <p:cNvPr id="4" name="Text Placeholder 3"/>
           <p:cNvSpPr>
             <a:spLocks noGrp="1"/>
           </p:cNvSpPr>
@@ -27268,71 +26012,22 @@
           <a:p>
             <a:pPr/>
             <a:r>
-              <a:rPr sz="1300"/>
-              <a:t>Policy-Definitionen (Custom): 149 – Monitoring (55), Netzwerk (20), Storage (16), SQL (13), Guardrails je Dienst</a:t>
+              <a:rPr sz="1200"/>
+              <a:t>9 MG-Ebenen mit Assignments</a:t>
             </a:r>
           </a:p>
           <a:p>
             <a:pPr/>
             <a:r>
-              <a:rPr sz="1300"/>
-              <a:t>Policy-Set-Definitionen (Initiativen): 42 – Deploy-MDFC-Config, Deploy-Private-DNS-Zones, Enforce-Guardrails-* je Dienst</a:t>
+              <a:rPr sz="1200"/>
+              <a:t>5 Custom RBAC-Rollen</a:t>
             </a:r>
           </a:p>
           <a:p>
             <a:pPr/>
             <a:r>
-              <a:rPr sz="1300"/>
-              <a:t>Policy-Assignments: 123 – verteilt auf 9 MG-Ebenen; Kind-MGs erben zusätzlich</a:t>
-            </a:r>
-          </a:p>
-          <a:p>
-            <a:pPr lvl="1"/>
-            <a:r>
-              <a:rPr sz="1300"/>
-              <a:t>alz-Root: 17  ·  alz-landingzones: 53  ·  alz-platform: 40  ·  alz-corp: 5  ·  weitere: 8</a:t>
-            </a:r>
-          </a:p>
-          <a:p>
-            <a:pPr/>
-            <a:r>
-              <a:rPr sz="1300"/>
-              <a:t>5 Custom RBAC-Rollen: Subscription-Owner · Security-Ops · Network-Mgmt · App-Owners · Subnet-Contributor</a:t>
-            </a:r>
-          </a:p>
-          <a:p>
-            <a:pPr/>
-            <a:r>
-              <a:rPr sz="1300"/>
-              <a:t>DoNotEnforce-Modus: Policies greifen (Compliance-Dashboard), blockieren aber nichts → sanftes Onboarding</a:t>
-            </a:r>
-          </a:p>
-          <a:p>
-            <a:pPr/>
-            <a:r>
-              <a:rPr sz="1300"/>
-              <a:t>Stufenplan: Audit → selektiv Enabled → vollständiges Enforcement nach Remediation</a:t>
-            </a:r>
-          </a:p>
-        </p:txBody>
-      </p:sp>
-      <p:sp>
-        <p:nvSpPr>
-          <p:cNvPr id="4" name="Subtitle 3"/>
-          <p:cNvSpPr>
-            <a:spLocks noGrp="1"/>
-          </p:cNvSpPr>
-          <p:nvPr>
-            <p:ph type="subTitle" idx="1"/>
-          </p:nvPr>
-        </p:nvSpPr>
-        <p:spPr/>
-        <p:txBody>
-          <a:bodyPr/>
-          <a:lstStyle/>
-          <a:p>
-            <a:r>
-              <a:t>Governance und Policies</a:t>
+              <a:rPr sz="1200"/>
+              <a:t>DoNotEnforce → sanftes Onboarding</a:t>
             </a:r>
           </a:p>
         </p:txBody>
@@ -27371,14 +26066,79 @@
           <a:lstStyle/>
           <a:p>
             <a:r>
-              <a:t>5  ·  Netzwerk-Architektur</a:t>
-            </a:r>
-          </a:p>
-        </p:txBody>
-      </p:sp>
-      <p:sp>
-        <p:nvSpPr>
-          <p:cNvPr id="3" name="Subtitle 2"/>
+              <a:t>Das vollständige ALZ-Policy-Set</a:t>
+            </a:r>
+          </a:p>
+        </p:txBody>
+      </p:sp>
+      <p:sp>
+        <p:nvSpPr>
+          <p:cNvPr id="3" name="Text Placeholder 2"/>
+          <p:cNvSpPr>
+            <a:spLocks noGrp="1"/>
+          </p:cNvSpPr>
+          <p:nvPr>
+            <p:ph type="body" idx="13" sz="quarter"/>
+          </p:nvPr>
+        </p:nvSpPr>
+        <p:spPr/>
+        <p:txBody>
+          <a:bodyPr wrap="square"/>
+          <a:lstStyle/>
+          <a:p>
+            <a:pPr/>
+            <a:r>
+              <a:rPr sz="1300"/>
+              <a:t>Policy-Definitionen (Custom): 149 – Monitoring (55), Netzwerk (20), Storage (16), SQL (13), Guardrails je Dienst</a:t>
+            </a:r>
+          </a:p>
+          <a:p>
+            <a:pPr/>
+            <a:r>
+              <a:rPr sz="1300"/>
+              <a:t>Policy-Set-Definitionen (Initiativen): 42 – Deploy-MDFC-Config, Deploy-Private-DNS-Zones, Enforce-Guardrails-* je Dienst</a:t>
+            </a:r>
+          </a:p>
+          <a:p>
+            <a:pPr/>
+            <a:r>
+              <a:rPr sz="1300"/>
+              <a:t>Policy-Assignments: 123 – verteilt auf 9 MG-Ebenen; Kind-MGs erben zusätzlich</a:t>
+            </a:r>
+          </a:p>
+          <a:p>
+            <a:pPr lvl="1"/>
+            <a:r>
+              <a:rPr sz="1300"/>
+              <a:t>alz-Root: 17  ·  alz-landingzones: 53  ·  alz-platform: 40  ·  alz-corp: 5  ·  weitere: 8</a:t>
+            </a:r>
+          </a:p>
+          <a:p>
+            <a:pPr/>
+            <a:r>
+              <a:rPr sz="1300"/>
+              <a:t>5 Custom RBAC-Rollen: Subscription-Owner · Security-Ops · Network-Mgmt · App-Owners · Subnet-Contributor</a:t>
+            </a:r>
+          </a:p>
+          <a:p>
+            <a:pPr/>
+            <a:r>
+              <a:rPr sz="1300"/>
+              <a:t>DoNotEnforce-Modus: Policies greifen (Compliance-Dashboard), blockieren aber nichts → sanftes Onboarding</a:t>
+            </a:r>
+          </a:p>
+          <a:p>
+            <a:pPr/>
+            <a:r>
+              <a:rPr sz="1300"/>
+              <a:t>Stufenplan: Audit → selektiv Enabled → vollständiges Enforcement nach Remediation</a:t>
+            </a:r>
+          </a:p>
+        </p:txBody>
+      </p:sp>
+      <p:sp>
+        <p:nvSpPr>
+          <p:cNvPr id="4" name="Subtitle 3"/>
           <p:cNvSpPr>
             <a:spLocks noGrp="1"/>
           </p:cNvSpPr>
@@ -27392,26 +26152,9 @@
           <a:lstStyle/>
           <a:p>
             <a:r>
-              <a:t>Hub-and-Spoke · Bechtle-Empfehlung: 1 Region · Firewall Standard · ~€1.050/Monat</a:t>
-            </a:r>
-          </a:p>
-        </p:txBody>
-      </p:sp>
-      <p:sp>
-        <p:nvSpPr>
-          <p:cNvPr id="4" name="Text Placeholder 3"/>
-          <p:cNvSpPr>
-            <a:spLocks noGrp="1"/>
-          </p:cNvSpPr>
-          <p:nvPr>
-            <p:ph type="body" idx="13" sz="quarter"/>
-          </p:nvPr>
-        </p:nvSpPr>
-        <p:spPr/>
-        <p:txBody>
-          <a:bodyPr/>
-          <a:lstStyle/>
-          <a:p/>
+              <a:t>Governance und Policies</a:t>
+            </a:r>
+          </a:p>
         </p:txBody>
       </p:sp>
     </p:spTree>
@@ -27448,86 +26191,14 @@
           <a:lstStyle/>
           <a:p>
             <a:r>
-              <a:t>Hub-and-Spoke: Bechtle-Empfehlung vs. Microsoft-Default</a:t>
-            </a:r>
-          </a:p>
-        </p:txBody>
-      </p:sp>
-      <p:sp>
-        <p:nvSpPr>
-          <p:cNvPr id="3" name="Text Placeholder 2"/>
-          <p:cNvSpPr>
-            <a:spLocks noGrp="1"/>
-          </p:cNvSpPr>
-          <p:nvPr>
-            <p:ph type="body" idx="13" sz="quarter"/>
-          </p:nvPr>
-        </p:nvSpPr>
-        <p:spPr/>
-        <p:txBody>
-          <a:bodyPr wrap="square"/>
-          <a:lstStyle/>
-          <a:p>
-            <a:pPr/>
-            <a:r>
-              <a:rPr sz="1300"/>
-              <a:t>Bechtle-Empfehlung: 1× Hub-VNet GWC 10.0.0.0/22 – alle Kernfunktionen, eine Region, ~€1.050/Monat</a:t>
-            </a:r>
-          </a:p>
-          <a:p>
-            <a:pPr/>
-            <a:r>
-              <a:rPr sz="1300"/>
-              <a:t>Microsoft-Default: 2× Hub-VNets (GWC + NE) – alle Dienste, beide Regionen, ~€5.800/Monat</a:t>
-            </a:r>
-          </a:p>
-          <a:p>
-            <a:pPr/>
-            <a:r>
-              <a:rPr sz="1300"/>
-              <a:t>Azure Firewall Standard (1×): ~€700/Monat  [Default: Premium 2× = ~€2.200]</a:t>
-            </a:r>
-          </a:p>
-          <a:p>
-            <a:pPr/>
-            <a:r>
-              <a:rPr sz="1300"/>
-              <a:t>Azure Bastion Standard (1×): ~€120/Monat  [Default: 2× = €240]</a:t>
-            </a:r>
-          </a:p>
-          <a:p>
-            <a:pPr/>
-            <a:r>
-              <a:rPr sz="1300"/>
-              <a:t>VPN Gateway VpnGw1AZ (1×): ~€140/Monat  [Default: 2× = €280]</a:t>
-            </a:r>
-          </a:p>
-          <a:p>
-            <a:pPr/>
-            <a:r>
-              <a:rPr sz="1300"/>
-              <a:t>ExpressRoute Gateway: deaktiviert – bei ER-Leitung aktivieren [Default: 2× = €560]</a:t>
-            </a:r>
-          </a:p>
-          <a:p>
-            <a:pPr/>
-            <a:r>
-              <a:rPr sz="1300"/>
-              <a:t>DDoS Protection: deaktiviert – bei internet-facing Workloads aktivieren [Default: €2.500]</a:t>
-            </a:r>
-          </a:p>
-          <a:p>
-            <a:pPr/>
-            <a:r>
-              <a:rPr sz="1300"/>
-              <a:t>Private DNS Zones + DNS Resolver: aktiv – unveraendert  ~€40/Monat</a:t>
-            </a:r>
-          </a:p>
-        </p:txBody>
-      </p:sp>
-      <p:sp>
-        <p:nvSpPr>
-          <p:cNvPr id="4" name="Subtitle 3"/>
+              <a:t>5  ·  Netzwerk-Architektur</a:t>
+            </a:r>
+          </a:p>
+        </p:txBody>
+      </p:sp>
+      <p:sp>
+        <p:nvSpPr>
+          <p:cNvPr id="3" name="Subtitle 2"/>
           <p:cNvSpPr>
             <a:spLocks noGrp="1"/>
           </p:cNvSpPr>
@@ -27541,9 +26212,26 @@
           <a:lstStyle/>
           <a:p>
             <a:r>
-              <a:t>Netzwerk-Architektur</a:t>
-            </a:r>
-          </a:p>
+              <a:t>Hub-and-Spoke · Bechtle-Empfehlung: 1 Region · Firewall Standard · ~€1.050/Monat</a:t>
+            </a:r>
+          </a:p>
+        </p:txBody>
+      </p:sp>
+      <p:sp>
+        <p:nvSpPr>
+          <p:cNvPr id="4" name="Text Placeholder 3"/>
+          <p:cNvSpPr>
+            <a:spLocks noGrp="1"/>
+          </p:cNvSpPr>
+          <p:nvPr>
+            <p:ph type="body" idx="13" sz="quarter"/>
+          </p:nvPr>
+        </p:nvSpPr>
+        <p:spPr/>
+        <p:txBody>
+          <a:bodyPr/>
+          <a:lstStyle/>
+          <a:p/>
         </p:txBody>
       </p:sp>
     </p:spTree>
@@ -27566,777 +26254,114 @@
       <p:grpSpPr/>
       <p:sp>
         <p:nvSpPr>
-          <p:cNvPr id="2" name="TextBox 1"/>
-          <p:cNvSpPr txBox="1"/>
-          <p:nvPr/>
-        </p:nvSpPr>
-        <p:spPr>
-          <a:xfrm>
-            <a:off x="137160" y="73152"/>
-            <a:ext cx="11887200" cy="438912"/>
-          </a:xfrm>
-          <a:prstGeom prst="rect">
-            <a:avLst/>
-          </a:prstGeom>
-          <a:noFill/>
-        </p:spPr>
-        <p:txBody>
-          <a:bodyPr wrap="none">
-            <a:spAutoFit/>
-          </a:bodyPr>
+          <p:cNvPr id="2" name="Title 1"/>
+          <p:cNvSpPr>
+            <a:spLocks noGrp="1"/>
+          </p:cNvSpPr>
+          <p:nvPr>
+            <p:ph type="title"/>
+          </p:nvPr>
+        </p:nvSpPr>
+        <p:spPr/>
+        <p:txBody>
+          <a:bodyPr/>
           <a:lstStyle/>
           <a:p>
             <a:r>
-              <a:rPr sz="1500" b="1">
-                <a:solidFill>
-                  <a:srgbClr val="075033"/>
-                </a:solidFill>
-              </a:rPr>
-              <a:t>Netzwerk-Architektur: Hub-and-Spoke – Connectivity Subscription im Detail</a:t>
-            </a:r>
-          </a:p>
-        </p:txBody>
-      </p:sp>
-      <p:sp>
-        <p:nvSpPr>
-          <p:cNvPr id="3" name="Rectangle 2"/>
-          <p:cNvSpPr/>
-          <p:nvPr/>
-        </p:nvSpPr>
-        <p:spPr>
-          <a:xfrm>
-            <a:off x="137160" y="548640"/>
-            <a:ext cx="11887200" cy="22860"/>
-          </a:xfrm>
-          <a:prstGeom prst="rect">
-            <a:avLst/>
-          </a:prstGeom>
-          <a:solidFill>
-            <a:srgbClr val="23A96A"/>
-          </a:solidFill>
-          <a:ln>
-            <a:noFill/>
-          </a:ln>
-        </p:spPr>
-        <p:style>
-          <a:lnRef idx="1">
-            <a:schemeClr val="accent1"/>
-          </a:lnRef>
-          <a:fillRef idx="3">
-            <a:schemeClr val="accent1"/>
-          </a:fillRef>
-          <a:effectRef idx="2">
-            <a:schemeClr val="accent1"/>
-          </a:effectRef>
-          <a:fontRef idx="minor">
-            <a:schemeClr val="lt1"/>
-          </a:fontRef>
-        </p:style>
-        <p:txBody>
-          <a:bodyPr rtlCol="0" anchor="ctr"/>
+              <a:t>Hub-and-Spoke: Bechtle-Empfehlung vs. Microsoft-Default</a:t>
+            </a:r>
+          </a:p>
+        </p:txBody>
+      </p:sp>
+      <p:sp>
+        <p:nvSpPr>
+          <p:cNvPr id="3" name="Text Placeholder 2"/>
+          <p:cNvSpPr>
+            <a:spLocks noGrp="1"/>
+          </p:cNvSpPr>
+          <p:nvPr>
+            <p:ph type="body" idx="13" sz="quarter"/>
+          </p:nvPr>
+        </p:nvSpPr>
+        <p:spPr/>
+        <p:txBody>
+          <a:bodyPr wrap="square"/>
           <a:lstStyle/>
           <a:p>
-            <a:pPr algn="ctr"/>
-          </a:p>
-        </p:txBody>
-      </p:sp>
-      <p:pic>
-        <p:nvPicPr>
-          <p:cNvPr id="4" name="Picture 3" descr="alz-hub-spoke.png"/>
-          <p:cNvPicPr>
-            <a:picLocks noChangeAspect="1"/>
-          </p:cNvPicPr>
-          <p:nvPr/>
-        </p:nvPicPr>
-        <p:blipFill>
-          <a:blip r:embed="rId2"/>
-          <a:stretch>
-            <a:fillRect/>
-          </a:stretch>
-        </p:blipFill>
-        <p:spPr>
-          <a:xfrm>
-            <a:off x="137160" y="621792"/>
-            <a:ext cx="8001000" cy="4767262"/>
-          </a:xfrm>
-          <a:prstGeom prst="rect">
-            <a:avLst/>
-          </a:prstGeom>
-        </p:spPr>
-      </p:pic>
-      <p:sp>
-        <p:nvSpPr>
-          <p:cNvPr id="5" name="TextBox 4"/>
-          <p:cNvSpPr txBox="1"/>
-          <p:nvPr/>
-        </p:nvSpPr>
-        <p:spPr>
-          <a:xfrm>
-            <a:off x="137160" y="6629400"/>
-            <a:ext cx="8001000" cy="201168"/>
-          </a:xfrm>
-          <a:prstGeom prst="rect">
-            <a:avLst/>
-          </a:prstGeom>
-          <a:noFill/>
-        </p:spPr>
-        <p:txBody>
-          <a:bodyPr wrap="none">
-            <a:spAutoFit/>
-          </a:bodyPr>
+            <a:pPr/>
+            <a:r>
+              <a:rPr sz="1300"/>
+              <a:t>Bechtle-Empfehlung: 1× Hub-VNet GWC 10.0.0.0/22 – alle Kernfunktionen, eine Region, ~€1.050/Monat</a:t>
+            </a:r>
+          </a:p>
+          <a:p>
+            <a:pPr/>
+            <a:r>
+              <a:rPr sz="1300"/>
+              <a:t>Microsoft-Default: 2× Hub-VNets (GWC + NE) – alle Dienste, beide Regionen, ~€5.800/Monat</a:t>
+            </a:r>
+          </a:p>
+          <a:p>
+            <a:pPr/>
+            <a:r>
+              <a:rPr sz="1300"/>
+              <a:t>Azure Firewall Standard (1×): ~€700/Monat  [Default: Premium 2× = ~€2.200]</a:t>
+            </a:r>
+          </a:p>
+          <a:p>
+            <a:pPr/>
+            <a:r>
+              <a:rPr sz="1300"/>
+              <a:t>Azure Bastion Standard (1×): ~€120/Monat  [Default: 2× = €240]</a:t>
+            </a:r>
+          </a:p>
+          <a:p>
+            <a:pPr/>
+            <a:r>
+              <a:rPr sz="1300"/>
+              <a:t>VPN Gateway VpnGw1AZ (1×): ~€140/Monat  [Default: 2× = €280]</a:t>
+            </a:r>
+          </a:p>
+          <a:p>
+            <a:pPr/>
+            <a:r>
+              <a:rPr sz="1300"/>
+              <a:t>ExpressRoute Gateway: deaktiviert – bei ER-Leitung aktivieren [Default: 2× = €560]</a:t>
+            </a:r>
+          </a:p>
+          <a:p>
+            <a:pPr/>
+            <a:r>
+              <a:rPr sz="1300"/>
+              <a:t>DDoS Protection: deaktiviert – bei internet-facing Workloads aktivieren [Default: €2.500]</a:t>
+            </a:r>
+          </a:p>
+          <a:p>
+            <a:pPr/>
+            <a:r>
+              <a:rPr sz="1300"/>
+              <a:t>Private DNS Zones + DNS Resolver: aktiv – unveraendert  ~€40/Monat</a:t>
+            </a:r>
+          </a:p>
+        </p:txBody>
+      </p:sp>
+      <p:sp>
+        <p:nvSpPr>
+          <p:cNvPr id="4" name="Subtitle 3"/>
+          <p:cNvSpPr>
+            <a:spLocks noGrp="1"/>
+          </p:cNvSpPr>
+          <p:nvPr>
+            <p:ph type="subTitle" idx="1"/>
+          </p:nvPr>
+        </p:nvSpPr>
+        <p:spPr/>
+        <p:txBody>
+          <a:bodyPr/>
           <a:lstStyle/>
           <a:p>
             <a:r>
-              <a:rPr sz="700">
-                <a:solidFill>
-                  <a:srgbClr val="595959"/>
-                </a:solidFill>
-              </a:rPr>
-              <a:t>Quelle: Microsoft Cloud Adoption Framework · learn.microsoft.com (unverändert)</a:t>
-            </a:r>
-          </a:p>
-        </p:txBody>
-      </p:sp>
-      <p:sp>
-        <p:nvSpPr>
-          <p:cNvPr id="6" name="Rectangle 5"/>
-          <p:cNvSpPr/>
-          <p:nvPr/>
-        </p:nvSpPr>
-        <p:spPr>
-          <a:xfrm>
-            <a:off x="8366760" y="621792"/>
-            <a:ext cx="3657600" cy="1435608"/>
-          </a:xfrm>
-          <a:prstGeom prst="rect">
-            <a:avLst/>
-          </a:prstGeom>
-          <a:solidFill>
-            <a:srgbClr val="F2F9F5"/>
-          </a:solidFill>
-          <a:ln w="15875">
-            <a:solidFill>
-              <a:srgbClr val="075033"/>
-            </a:solidFill>
-          </a:ln>
-        </p:spPr>
-        <p:style>
-          <a:lnRef idx="1">
-            <a:schemeClr val="accent1"/>
-          </a:lnRef>
-          <a:fillRef idx="3">
-            <a:schemeClr val="accent1"/>
-          </a:fillRef>
-          <a:effectRef idx="2">
-            <a:schemeClr val="accent1"/>
-          </a:effectRef>
-          <a:fontRef idx="minor">
-            <a:schemeClr val="lt1"/>
-          </a:fontRef>
-        </p:style>
-        <p:txBody>
-          <a:bodyPr rtlCol="0" anchor="ctr"/>
-          <a:lstStyle/>
-          <a:p>
-            <a:pPr algn="ctr"/>
-          </a:p>
-        </p:txBody>
-      </p:sp>
-      <p:sp>
-        <p:nvSpPr>
-          <p:cNvPr id="7" name="Rectangle 6"/>
-          <p:cNvSpPr/>
-          <p:nvPr/>
-        </p:nvSpPr>
-        <p:spPr>
-          <a:xfrm>
-            <a:off x="8366760" y="621792"/>
-            <a:ext cx="64008" cy="1435608"/>
-          </a:xfrm>
-          <a:prstGeom prst="rect">
-            <a:avLst/>
-          </a:prstGeom>
-          <a:solidFill>
-            <a:srgbClr val="075033"/>
-          </a:solidFill>
-          <a:ln>
-            <a:noFill/>
-          </a:ln>
-        </p:spPr>
-        <p:style>
-          <a:lnRef idx="1">
-            <a:schemeClr val="accent1"/>
-          </a:lnRef>
-          <a:fillRef idx="3">
-            <a:schemeClr val="accent1"/>
-          </a:fillRef>
-          <a:effectRef idx="2">
-            <a:schemeClr val="accent1"/>
-          </a:effectRef>
-          <a:fontRef idx="minor">
-            <a:schemeClr val="lt1"/>
-          </a:fontRef>
-        </p:style>
-        <p:txBody>
-          <a:bodyPr rtlCol="0" anchor="ctr"/>
-          <a:lstStyle/>
-          <a:p>
-            <a:pPr algn="ctr"/>
-          </a:p>
-        </p:txBody>
-      </p:sp>
-      <p:sp>
-        <p:nvSpPr>
-          <p:cNvPr id="8" name="TextBox 7"/>
-          <p:cNvSpPr txBox="1"/>
-          <p:nvPr/>
-        </p:nvSpPr>
-        <p:spPr>
-          <a:xfrm>
-            <a:off x="8476488" y="685800"/>
-            <a:ext cx="3493008" cy="1344168"/>
-          </a:xfrm>
-          <a:prstGeom prst="rect">
-            <a:avLst/>
-          </a:prstGeom>
-          <a:noFill/>
-        </p:spPr>
-        <p:txBody>
-          <a:bodyPr wrap="square">
-            <a:spAutoFit/>
-          </a:bodyPr>
-          <a:lstStyle/>
-          <a:p>
-            <a:r>
-              <a:rPr b="1" sz="900">
-                <a:solidFill>
-                  <a:srgbClr val="075033"/>
-                </a:solidFill>
-              </a:rPr>
-              <a:t>Azure Firewall Standard</a:t>
-            </a:r>
-          </a:p>
-          <a:p>
-            <a:r>
-              <a:rPr sz="800">
-                <a:solidFill>
-                  <a:srgbClr val="1A1A1A"/>
-                </a:solidFill>
-              </a:rPr>
-              <a:t>Zentraler Egress-Kontrollpunkt</a:t>
-            </a:r>
-          </a:p>
-          <a:p>
-            <a:r>
-              <a:rPr sz="800">
-                <a:solidFill>
-                  <a:srgbClr val="1A1A1A"/>
-                </a:solidFill>
-              </a:rPr>
-              <a:t>FQDN-Filterung · NAT · Threat Intel</a:t>
-            </a:r>
-          </a:p>
-          <a:p>
-            <a:r>
-              <a:rPr sz="800">
-                <a:solidFill>
-                  <a:srgbClr val="1A1A1A"/>
-                </a:solidFill>
-              </a:rPr>
-              <a:t>Upgrade → Premium ohne Rebuild</a:t>
-            </a:r>
-          </a:p>
-          <a:p>
-            <a:r>
-              <a:rPr sz="800">
-                <a:solidFill>
-                  <a:srgbClr val="1A1A1A"/>
-                </a:solidFill>
-              </a:rPr>
-              <a:t>~€700/Monat (1 Region)</a:t>
-            </a:r>
-          </a:p>
-        </p:txBody>
-      </p:sp>
-      <p:sp>
-        <p:nvSpPr>
-          <p:cNvPr id="9" name="Rectangle 8"/>
-          <p:cNvSpPr/>
-          <p:nvPr/>
-        </p:nvSpPr>
-        <p:spPr>
-          <a:xfrm>
-            <a:off x="8366760" y="2130552"/>
-            <a:ext cx="3657600" cy="1435608"/>
-          </a:xfrm>
-          <a:prstGeom prst="rect">
-            <a:avLst/>
-          </a:prstGeom>
-          <a:solidFill>
-            <a:srgbClr val="F2F9F5"/>
-          </a:solidFill>
-          <a:ln w="15875">
-            <a:solidFill>
-              <a:srgbClr val="075033"/>
-            </a:solidFill>
-          </a:ln>
-        </p:spPr>
-        <p:style>
-          <a:lnRef idx="1">
-            <a:schemeClr val="accent1"/>
-          </a:lnRef>
-          <a:fillRef idx="3">
-            <a:schemeClr val="accent1"/>
-          </a:fillRef>
-          <a:effectRef idx="2">
-            <a:schemeClr val="accent1"/>
-          </a:effectRef>
-          <a:fontRef idx="minor">
-            <a:schemeClr val="lt1"/>
-          </a:fontRef>
-        </p:style>
-        <p:txBody>
-          <a:bodyPr rtlCol="0" anchor="ctr"/>
-          <a:lstStyle/>
-          <a:p>
-            <a:pPr algn="ctr"/>
-          </a:p>
-        </p:txBody>
-      </p:sp>
-      <p:sp>
-        <p:nvSpPr>
-          <p:cNvPr id="10" name="Rectangle 9"/>
-          <p:cNvSpPr/>
-          <p:nvPr/>
-        </p:nvSpPr>
-        <p:spPr>
-          <a:xfrm>
-            <a:off x="8366760" y="2130552"/>
-            <a:ext cx="64008" cy="1435608"/>
-          </a:xfrm>
-          <a:prstGeom prst="rect">
-            <a:avLst/>
-          </a:prstGeom>
-          <a:solidFill>
-            <a:srgbClr val="075033"/>
-          </a:solidFill>
-          <a:ln>
-            <a:noFill/>
-          </a:ln>
-        </p:spPr>
-        <p:style>
-          <a:lnRef idx="1">
-            <a:schemeClr val="accent1"/>
-          </a:lnRef>
-          <a:fillRef idx="3">
-            <a:schemeClr val="accent1"/>
-          </a:fillRef>
-          <a:effectRef idx="2">
-            <a:schemeClr val="accent1"/>
-          </a:effectRef>
-          <a:fontRef idx="minor">
-            <a:schemeClr val="lt1"/>
-          </a:fontRef>
-        </p:style>
-        <p:txBody>
-          <a:bodyPr rtlCol="0" anchor="ctr"/>
-          <a:lstStyle/>
-          <a:p>
-            <a:pPr algn="ctr"/>
-          </a:p>
-        </p:txBody>
-      </p:sp>
-      <p:sp>
-        <p:nvSpPr>
-          <p:cNvPr id="11" name="TextBox 10"/>
-          <p:cNvSpPr txBox="1"/>
-          <p:nvPr/>
-        </p:nvSpPr>
-        <p:spPr>
-          <a:xfrm>
-            <a:off x="8476488" y="2194560"/>
-            <a:ext cx="3493008" cy="1344168"/>
-          </a:xfrm>
-          <a:prstGeom prst="rect">
-            <a:avLst/>
-          </a:prstGeom>
-          <a:noFill/>
-        </p:spPr>
-        <p:txBody>
-          <a:bodyPr wrap="square">
-            <a:spAutoFit/>
-          </a:bodyPr>
-          <a:lstStyle/>
-          <a:p>
-            <a:r>
-              <a:rPr b="1" sz="900">
-                <a:solidFill>
-                  <a:srgbClr val="075033"/>
-                </a:solidFill>
-              </a:rPr>
-              <a:t>Gateways &amp; Zugriff</a:t>
-            </a:r>
-          </a:p>
-          <a:p>
-            <a:r>
-              <a:rPr sz="800">
-                <a:solidFill>
-                  <a:srgbClr val="1A1A1A"/>
-                </a:solidFill>
-              </a:rPr>
-              <a:t>VPN GW VpnGw1AZ: ~€140/Mon.</a:t>
-            </a:r>
-          </a:p>
-          <a:p>
-            <a:r>
-              <a:rPr sz="800">
-                <a:solidFill>
-                  <a:srgbClr val="1A1A1A"/>
-                </a:solidFill>
-              </a:rPr>
-              <a:t>Azure Bastion: sicheres RDP/SSH</a:t>
-            </a:r>
-          </a:p>
-          <a:p>
-            <a:r>
-              <a:rPr sz="800">
-                <a:solidFill>
-                  <a:srgbClr val="1A1A1A"/>
-                </a:solidFill>
-              </a:rPr>
-              <a:t>ohne Public IP · ~€120/Mon.</a:t>
-            </a:r>
-          </a:p>
-          <a:p>
-            <a:r>
-              <a:rPr sz="800">
-                <a:solidFill>
-                  <a:srgbClr val="1A1A1A"/>
-                </a:solidFill>
-              </a:rPr>
-              <a:t>ExpressRoute GW: deferred</a:t>
-            </a:r>
-          </a:p>
-        </p:txBody>
-      </p:sp>
-      <p:sp>
-        <p:nvSpPr>
-          <p:cNvPr id="12" name="Rectangle 11"/>
-          <p:cNvSpPr/>
-          <p:nvPr/>
-        </p:nvSpPr>
-        <p:spPr>
-          <a:xfrm>
-            <a:off x="8366760" y="3639312"/>
-            <a:ext cx="3657600" cy="1435608"/>
-          </a:xfrm>
-          <a:prstGeom prst="rect">
-            <a:avLst/>
-          </a:prstGeom>
-          <a:solidFill>
-            <a:srgbClr val="F2F9F5"/>
-          </a:solidFill>
-          <a:ln w="15875">
-            <a:solidFill>
-              <a:srgbClr val="075033"/>
-            </a:solidFill>
-          </a:ln>
-        </p:spPr>
-        <p:style>
-          <a:lnRef idx="1">
-            <a:schemeClr val="accent1"/>
-          </a:lnRef>
-          <a:fillRef idx="3">
-            <a:schemeClr val="accent1"/>
-          </a:fillRef>
-          <a:effectRef idx="2">
-            <a:schemeClr val="accent1"/>
-          </a:effectRef>
-          <a:fontRef idx="minor">
-            <a:schemeClr val="lt1"/>
-          </a:fontRef>
-        </p:style>
-        <p:txBody>
-          <a:bodyPr rtlCol="0" anchor="ctr"/>
-          <a:lstStyle/>
-          <a:p>
-            <a:pPr algn="ctr"/>
-          </a:p>
-        </p:txBody>
-      </p:sp>
-      <p:sp>
-        <p:nvSpPr>
-          <p:cNvPr id="13" name="Rectangle 12"/>
-          <p:cNvSpPr/>
-          <p:nvPr/>
-        </p:nvSpPr>
-        <p:spPr>
-          <a:xfrm>
-            <a:off x="8366760" y="3639312"/>
-            <a:ext cx="64008" cy="1435608"/>
-          </a:xfrm>
-          <a:prstGeom prst="rect">
-            <a:avLst/>
-          </a:prstGeom>
-          <a:solidFill>
-            <a:srgbClr val="075033"/>
-          </a:solidFill>
-          <a:ln>
-            <a:noFill/>
-          </a:ln>
-        </p:spPr>
-        <p:style>
-          <a:lnRef idx="1">
-            <a:schemeClr val="accent1"/>
-          </a:lnRef>
-          <a:fillRef idx="3">
-            <a:schemeClr val="accent1"/>
-          </a:fillRef>
-          <a:effectRef idx="2">
-            <a:schemeClr val="accent1"/>
-          </a:effectRef>
-          <a:fontRef idx="minor">
-            <a:schemeClr val="lt1"/>
-          </a:fontRef>
-        </p:style>
-        <p:txBody>
-          <a:bodyPr rtlCol="0" anchor="ctr"/>
-          <a:lstStyle/>
-          <a:p>
-            <a:pPr algn="ctr"/>
-          </a:p>
-        </p:txBody>
-      </p:sp>
-      <p:sp>
-        <p:nvSpPr>
-          <p:cNvPr id="14" name="TextBox 13"/>
-          <p:cNvSpPr txBox="1"/>
-          <p:nvPr/>
-        </p:nvSpPr>
-        <p:spPr>
-          <a:xfrm>
-            <a:off x="8476488" y="3703320"/>
-            <a:ext cx="3493008" cy="1344168"/>
-          </a:xfrm>
-          <a:prstGeom prst="rect">
-            <a:avLst/>
-          </a:prstGeom>
-          <a:noFill/>
-        </p:spPr>
-        <p:txBody>
-          <a:bodyPr wrap="square">
-            <a:spAutoFit/>
-          </a:bodyPr>
-          <a:lstStyle/>
-          <a:p>
-            <a:r>
-              <a:rPr b="1" sz="900">
-                <a:solidFill>
-                  <a:srgbClr val="075033"/>
-                </a:solidFill>
-              </a:rPr>
-              <a:t>DNS &amp; Private Connectivity</a:t>
-            </a:r>
-          </a:p>
-          <a:p>
-            <a:r>
-              <a:rPr sz="800">
-                <a:solidFill>
-                  <a:srgbClr val="1A1A1A"/>
-                </a:solidFill>
-              </a:rPr>
-              <a:t>DNS Private Resolver: ~€25/Mon.</a:t>
-            </a:r>
-          </a:p>
-          <a:p>
-            <a:r>
-              <a:rPr sz="800">
-                <a:solidFill>
-                  <a:srgbClr val="1A1A1A"/>
-                </a:solidFill>
-              </a:rPr>
-              <a:t>Private DNS Zones: ~€15/Mon.</a:t>
-            </a:r>
-          </a:p>
-          <a:p>
-            <a:r>
-              <a:rPr sz="800">
-                <a:solidFill>
-                  <a:srgbClr val="1A1A1A"/>
-                </a:solidFill>
-              </a:rPr>
-              <a:t>Key Vault für Zertifikate</a:t>
-            </a:r>
-          </a:p>
-          <a:p>
-            <a:r>
-              <a:rPr sz="800">
-                <a:solidFill>
-                  <a:srgbClr val="1A1A1A"/>
-                </a:solidFill>
-              </a:rPr>
-              <a:t>Event Hub → CrowdStrike SIEM</a:t>
-            </a:r>
-          </a:p>
-        </p:txBody>
-      </p:sp>
-      <p:sp>
-        <p:nvSpPr>
-          <p:cNvPr id="15" name="Rectangle 14"/>
-          <p:cNvSpPr/>
-          <p:nvPr/>
-        </p:nvSpPr>
-        <p:spPr>
-          <a:xfrm>
-            <a:off x="8366760" y="5148072"/>
-            <a:ext cx="3657600" cy="1435608"/>
-          </a:xfrm>
-          <a:prstGeom prst="rect">
-            <a:avLst/>
-          </a:prstGeom>
-          <a:solidFill>
-            <a:srgbClr val="F2F9F5"/>
-          </a:solidFill>
-          <a:ln w="15875">
-            <a:solidFill>
-              <a:srgbClr val="075033"/>
-            </a:solidFill>
-          </a:ln>
-        </p:spPr>
-        <p:style>
-          <a:lnRef idx="1">
-            <a:schemeClr val="accent1"/>
-          </a:lnRef>
-          <a:fillRef idx="3">
-            <a:schemeClr val="accent1"/>
-          </a:fillRef>
-          <a:effectRef idx="2">
-            <a:schemeClr val="accent1"/>
-          </a:effectRef>
-          <a:fontRef idx="minor">
-            <a:schemeClr val="lt1"/>
-          </a:fontRef>
-        </p:style>
-        <p:txBody>
-          <a:bodyPr rtlCol="0" anchor="ctr"/>
-          <a:lstStyle/>
-          <a:p>
-            <a:pPr algn="ctr"/>
-          </a:p>
-        </p:txBody>
-      </p:sp>
-      <p:sp>
-        <p:nvSpPr>
-          <p:cNvPr id="16" name="Rectangle 15"/>
-          <p:cNvSpPr/>
-          <p:nvPr/>
-        </p:nvSpPr>
-        <p:spPr>
-          <a:xfrm>
-            <a:off x="8366760" y="5148072"/>
-            <a:ext cx="64008" cy="1435608"/>
-          </a:xfrm>
-          <a:prstGeom prst="rect">
-            <a:avLst/>
-          </a:prstGeom>
-          <a:solidFill>
-            <a:srgbClr val="075033"/>
-          </a:solidFill>
-          <a:ln>
-            <a:noFill/>
-          </a:ln>
-        </p:spPr>
-        <p:style>
-          <a:lnRef idx="1">
-            <a:schemeClr val="accent1"/>
-          </a:lnRef>
-          <a:fillRef idx="3">
-            <a:schemeClr val="accent1"/>
-          </a:fillRef>
-          <a:effectRef idx="2">
-            <a:schemeClr val="accent1"/>
-          </a:effectRef>
-          <a:fontRef idx="minor">
-            <a:schemeClr val="lt1"/>
-          </a:fontRef>
-        </p:style>
-        <p:txBody>
-          <a:bodyPr rtlCol="0" anchor="ctr"/>
-          <a:lstStyle/>
-          <a:p>
-            <a:pPr algn="ctr"/>
-          </a:p>
-        </p:txBody>
-      </p:sp>
-      <p:sp>
-        <p:nvSpPr>
-          <p:cNvPr id="17" name="TextBox 16"/>
-          <p:cNvSpPr txBox="1"/>
-          <p:nvPr/>
-        </p:nvSpPr>
-        <p:spPr>
-          <a:xfrm>
-            <a:off x="8476488" y="5212080"/>
-            <a:ext cx="3493008" cy="1344168"/>
-          </a:xfrm>
-          <a:prstGeom prst="rect">
-            <a:avLst/>
-          </a:prstGeom>
-          <a:noFill/>
-        </p:spPr>
-        <p:txBody>
-          <a:bodyPr wrap="square">
-            <a:spAutoFit/>
-          </a:bodyPr>
-          <a:lstStyle/>
-          <a:p>
-            <a:r>
-              <a:rPr b="1" sz="900">
-                <a:solidFill>
-                  <a:srgbClr val="075033"/>
-                </a:solidFill>
-              </a:rPr>
-              <a:t>Spoke-Schutz</a:t>
-            </a:r>
-          </a:p>
-          <a:p>
-            <a:r>
-              <a:rPr sz="800">
-                <a:solidFill>
-                  <a:srgbClr val="1A1A1A"/>
-                </a:solidFill>
-              </a:rPr>
-              <a:t>Jede Workload-Sub = eigenes VNet</a:t>
-            </a:r>
-          </a:p>
-          <a:p>
-            <a:r>
-              <a:rPr sz="800">
-                <a:solidFill>
-                  <a:srgbClr val="1A1A1A"/>
-                </a:solidFill>
-              </a:rPr>
-              <a:t>Peering zum Hub-VNet</a:t>
-            </a:r>
-          </a:p>
-          <a:p>
-            <a:r>
-              <a:rPr sz="800">
-                <a:solidFill>
-                  <a:srgbClr val="1A1A1A"/>
-                </a:solidFill>
-              </a:rPr>
-              <a:t>UDR: gesamter Traffic über</a:t>
-            </a:r>
-          </a:p>
-          <a:p>
-            <a:r>
-              <a:rPr sz="800">
-                <a:solidFill>
-                  <a:srgbClr val="1A1A1A"/>
-                </a:solidFill>
-              </a:rPr>
-              <a:t>Azure Firewall zwingend geleitet</a:t>
+              <a:t>Netzwerk-Architektur</a:t>
             </a:r>
           </a:p>
         </p:txBody>
@@ -28375,14 +26400,65 @@
           <a:lstStyle/>
           <a:p>
             <a:r>
-              <a:t>6  ·  Sicherheit</a:t>
-            </a:r>
-          </a:p>
-        </p:txBody>
-      </p:sp>
-      <p:sp>
-        <p:nvSpPr>
-          <p:cNvPr id="3" name="Subtitle 2"/>
+              <a:t>Connectivity Subscription im Detail</a:t>
+            </a:r>
+          </a:p>
+        </p:txBody>
+      </p:sp>
+      <p:sp>
+        <p:nvSpPr>
+          <p:cNvPr id="3" name="Text Placeholder 2"/>
+          <p:cNvSpPr>
+            <a:spLocks noGrp="1"/>
+          </p:cNvSpPr>
+          <p:nvPr>
+            <p:ph type="body" idx="13" sz="quarter"/>
+          </p:nvPr>
+        </p:nvSpPr>
+        <p:spPr/>
+        <p:txBody>
+          <a:bodyPr wrap="square"/>
+          <a:lstStyle/>
+          <a:p>
+            <a:pPr/>
+            <a:r>
+              <a:rPr sz="1100"/>
+              <a:t>Azure Firewall Standard: FQDN · NAT · Threat Intel · ~€700/Mon.</a:t>
+            </a:r>
+          </a:p>
+          <a:p>
+            <a:pPr/>
+            <a:r>
+              <a:rPr sz="1100"/>
+              <a:t>VPN GW VpnGw1AZ: ~€140/Mon.  |  Bastion: RDP/SSH ohne Public IP · ~€120</a:t>
+            </a:r>
+          </a:p>
+          <a:p>
+            <a:pPr/>
+            <a:r>
+              <a:rPr sz="1100"/>
+              <a:t>Key Vault: Zertifikate für Monitoring-TLS</a:t>
+            </a:r>
+          </a:p>
+          <a:p>
+            <a:pPr/>
+            <a:r>
+              <a:rPr sz="1100"/>
+              <a:t>Event Hub → CrowdStrike SIEM (Log-Export)</a:t>
+            </a:r>
+          </a:p>
+          <a:p>
+            <a:pPr/>
+            <a:r>
+              <a:rPr sz="1100"/>
+              <a:t>UDR: aller Spoke-Traffic zwingend über Firewall</a:t>
+            </a:r>
+          </a:p>
+        </p:txBody>
+      </p:sp>
+      <p:sp>
+        <p:nvSpPr>
+          <p:cNvPr id="4" name="Subtitle 3"/>
           <p:cNvSpPr>
             <a:spLocks noGrp="1"/>
           </p:cNvSpPr>
@@ -28396,28 +26472,30 @@
           <a:lstStyle/>
           <a:p>
             <a:r>
-              <a:t>Defender for Cloud · Netzwerksegmentierung · Automatische Remediation</a:t>
-            </a:r>
-          </a:p>
-        </p:txBody>
-      </p:sp>
-      <p:sp>
-        <p:nvSpPr>
-          <p:cNvPr id="4" name="Text Placeholder 3"/>
-          <p:cNvSpPr>
-            <a:spLocks noGrp="1"/>
-          </p:cNvSpPr>
-          <p:nvPr>
-            <p:ph type="body" idx="13" sz="quarter"/>
-          </p:nvPr>
-        </p:nvSpPr>
+              <a:t>Netzwerk-Architektur</a:t>
+            </a:r>
+          </a:p>
+        </p:txBody>
+      </p:sp>
+      <p:pic>
+        <p:nvPicPr>
+          <p:cNvPr id="5" name="Picture Placeholder 4" descr="alz-hub-spoke.png"/>
+          <p:cNvPicPr>
+            <a:picLocks noGrp="1" noChangeAspect="1"/>
+          </p:cNvPicPr>
+          <p:nvPr>
+            <p:ph type="pic" idx="14" sz="quarter"/>
+          </p:nvPr>
+        </p:nvPicPr>
+        <p:blipFill>
+          <a:blip r:embed="rId2"/>
+          <a:srcRect l="23519" r="23519"/>
+          <a:stretch>
+            <a:fillRect/>
+          </a:stretch>
+        </p:blipFill>
         <p:spPr/>
-        <p:txBody>
-          <a:bodyPr/>
-          <a:lstStyle/>
-          <a:p/>
-        </p:txBody>
-      </p:sp>
+      </p:pic>
     </p:spTree>
   </p:cSld>
   <p:clrMapOvr>
@@ -28452,7 +26530,7 @@
           <a:lstStyle/>
           <a:p>
             <a:r>
-              <a:t>Mehrschichtige Sicherheitsarchitektur</a:t>
+              <a:t>Microsoft-Default vs. Bechtle-Empfehlung</a:t>
             </a:r>
           </a:p>
         </p:txBody>
@@ -28474,50 +26552,50 @@
           <a:p>
             <a:pPr/>
             <a:r>
-              <a:rPr sz="1300"/>
-              <a:t>Präventiv (Policies): Deny-Subnet-Without-Nsg, Deny-MgmtPorts-Internet, Deny-Public-IP, Deny-Public-Endpoints (Corp)</a:t>
-            </a:r>
-          </a:p>
-          <a:p>
-            <a:pPr/>
-            <a:r>
-              <a:rPr sz="1300"/>
-              <a:t>Defender for Cloud: auto-aktiviert via Deploy-MDFC-Config-H224 auf alz-Root (DeployIfNotExists)</a:t>
-            </a:r>
-          </a:p>
-          <a:p>
-            <a:pPr/>
-            <a:r>
-              <a:rPr sz="1300"/>
-              <a:t>Defender for Endpoint: Deploy-MDEndpoints auf allen VMs – im Defender Server-Plan enthalten</a:t>
-            </a:r>
-          </a:p>
-          <a:p>
-            <a:pPr/>
-            <a:r>
-              <a:rPr sz="1300"/>
-              <a:t>MDFC Benchmarks: Microsoft Cloud Security Benchmark v1 + v2 (kostenlos, Audit)</a:t>
-            </a:r>
-          </a:p>
-          <a:p>
-            <a:pPr/>
-            <a:r>
-              <a:rPr sz="1300"/>
-              <a:t>Activity Logs + Diagnose: alle Subscriptions und Ressourcen → Log Analytics (via DINE-Policies)</a:t>
-            </a:r>
-          </a:p>
-          <a:p>
-            <a:pPr/>
-            <a:r>
-              <a:rPr sz="1300"/>
-              <a:t>Backup: Deploy-VM-Backup sichert VMs ohne Backup-Tag automatisch in Recovery Vault</a:t>
-            </a:r>
-          </a:p>
-          <a:p>
-            <a:pPr/>
-            <a:r>
-              <a:rPr sz="1300"/>
-              <a:t>Roadmap: Microsoft Sentinel als SIEM-Folgestufe (nicht Bestandteil der Landing Zone)</a:t>
+              <a:rPr sz="1200"/>
+              <a:t>Microsoft-Default  ~€5.800/Mon.</a:t>
+            </a:r>
+          </a:p>
+          <a:p>
+            <a:pPr lvl="1"/>
+            <a:r>
+              <a:rPr sz="1200"/>
+              <a:t>Azure Firewall Premium 2× · ~€2.200</a:t>
+            </a:r>
+          </a:p>
+          <a:p>
+            <a:pPr lvl="1"/>
+            <a:r>
+              <a:rPr sz="1200"/>
+              <a:t>DDoS Network Protection · ~€2.500</a:t>
+            </a:r>
+          </a:p>
+          <a:p>
+            <a:pPr lvl="1"/>
+            <a:r>
+              <a:rPr sz="1200"/>
+              <a:t>ExpressRoute GW 2× · ~€560</a:t>
+            </a:r>
+          </a:p>
+          <a:p>
+            <a:pPr lvl="1"/>
+            <a:r>
+              <a:rPr sz="1200"/>
+              <a:t>VPN GW 2× · ~€280</a:t>
+            </a:r>
+          </a:p>
+          <a:p>
+            <a:pPr lvl="1"/>
+            <a:r>
+              <a:rPr sz="1200"/>
+              <a:t>Azure Bastion 2× · ~€240</a:t>
+            </a:r>
+          </a:p>
+          <a:p>
+            <a:pPr lvl="1"/>
+            <a:r>
+              <a:rPr sz="1200"/>
+              <a:t>2 Regionen: GWC + North Europe</a:t>
             </a:r>
           </a:p>
         </p:txBody>
@@ -28538,7 +26616,72 @@
           <a:lstStyle/>
           <a:p>
             <a:r>
-              <a:t>Sicherheit</a:t>
+              <a:t>Netzwerk-Architektur</a:t>
+            </a:r>
+          </a:p>
+        </p:txBody>
+      </p:sp>
+      <p:sp>
+        <p:nvSpPr>
+          <p:cNvPr id="5" name="Text Placeholder 4"/>
+          <p:cNvSpPr>
+            <a:spLocks noGrp="1"/>
+          </p:cNvSpPr>
+          <p:nvPr>
+            <p:ph type="body" idx="14" sz="quarter"/>
+          </p:nvPr>
+        </p:nvSpPr>
+        <p:spPr/>
+        <p:txBody>
+          <a:bodyPr wrap="square"/>
+          <a:lstStyle/>
+          <a:p>
+            <a:pPr/>
+            <a:r>
+              <a:rPr sz="1200"/>
+              <a:t>Bechtle-Empfehlung  ~€1.050/Mon.</a:t>
+            </a:r>
+          </a:p>
+          <a:p>
+            <a:pPr lvl="1"/>
+            <a:r>
+              <a:rPr sz="1200"/>
+              <a:t>Azure Firewall Standard 1× · ~€700</a:t>
+            </a:r>
+          </a:p>
+          <a:p>
+            <a:pPr lvl="1"/>
+            <a:r>
+              <a:rPr sz="1200"/>
+              <a:t>DDoS: deferred (bei Bedarf aktivieren)</a:t>
+            </a:r>
+          </a:p>
+          <a:p>
+            <a:pPr lvl="1"/>
+            <a:r>
+              <a:rPr sz="1200"/>
+              <a:t>ExpressRoute GW: deferred</a:t>
+            </a:r>
+          </a:p>
+          <a:p>
+            <a:pPr lvl="1"/>
+            <a:r>
+              <a:rPr sz="1200"/>
+              <a:t>VPN GW 1× · ~€140</a:t>
+            </a:r>
+          </a:p>
+          <a:p>
+            <a:pPr lvl="1"/>
+            <a:r>
+              <a:rPr sz="1200"/>
+              <a:t>Azure Bastion 1× · ~€120</a:t>
+            </a:r>
+          </a:p>
+          <a:p>
+            <a:pPr lvl="1"/>
+            <a:r>
+              <a:rPr sz="1200"/>
+              <a:t>1 Region: Germany West Central</a:t>
             </a:r>
           </a:p>
         </p:txBody>
@@ -28737,7 +26880,7 @@
           <a:lstStyle/>
           <a:p>
             <a:r>
-              <a:t>7  ·  Monitoring und Logging</a:t>
+              <a:t>6  ·  Sicherheit</a:t>
             </a:r>
           </a:p>
         </p:txBody>
@@ -28758,7 +26901,7 @@
           <a:lstStyle/>
           <a:p>
             <a:r>
-              <a:t>Zentraler Log Analytics Workspace + 3 Data Collection Rules</a:t>
+              <a:t>Defender for Cloud · Netzwerksegmentierung · Automatische Remediation</a:t>
             </a:r>
           </a:p>
         </p:txBody>
@@ -28814,7 +26957,7 @@
           <a:lstStyle/>
           <a:p>
             <a:r>
-              <a:t>Zentrales Logging (AVM-Pattern avm/ptn/alz/ama:0.2.0)</a:t>
+              <a:t>Mehrschichtige Sicherheitsarchitektur</a:t>
             </a:r>
           </a:p>
         </p:txBody>
@@ -28837,42 +26980,49 @@
             <a:pPr/>
             <a:r>
               <a:rPr sz="1300"/>
-              <a:t>Log Analytics Workspace: law-alz-&lt;region&gt;, PerGB2018, 365 Tage Retention</a:t>
+              <a:t>Präventiv (Policies): Deny-Subnet-Without-Nsg, Deny-MgmtPorts-Internet, Deny-Public-IP, Deny-Public-Endpoints (Corp)</a:t>
             </a:r>
           </a:p>
           <a:p>
             <a:pPr/>
             <a:r>
               <a:rPr sz="1300"/>
-              <a:t>3 Data Collection Rules: VM Insights · Change Tracking · Defender for SQL</a:t>
+              <a:t>Defender for Cloud: auto-aktiviert via Deploy-MDFC-Config-H224 auf alz-Root (DeployIfNotExists)</a:t>
             </a:r>
           </a:p>
           <a:p>
             <a:pPr/>
             <a:r>
               <a:rPr sz="1300"/>
-              <a:t>User-Assigned Managed Identity: mi-alz-&lt;region&gt; für passwortlose Policy-Remediation (DeployIfNotExists)</a:t>
+              <a:t>Defender for Endpoint: Deploy-MDEndpoints auf allen VMs – im Defender Server-Plan enthalten</a:t>
             </a:r>
           </a:p>
           <a:p>
             <a:pPr/>
             <a:r>
               <a:rPr sz="1300"/>
-              <a:t>DINE-Policies: jede neue VM verbindet sich automatisch mit LAW + DCRs – keine manuelle Konfiguration</a:t>
+              <a:t>MDFC Benchmarks: Microsoft Cloud Security Benchmark v1 + v2 (kostenlos, Audit)</a:t>
             </a:r>
           </a:p>
           <a:p>
             <a:pPr/>
             <a:r>
               <a:rPr sz="1300"/>
-              <a:t>Deploy-Diag-LogsCat: leitet alle Diagnose-Kategorien aller Ressourcen in Log Analytics</a:t>
+              <a:t>Activity Logs + Diagnose: alle Subscriptions und Ressourcen → Log Analytics (via DINE-Policies)</a:t>
             </a:r>
           </a:p>
           <a:p>
             <a:pPr/>
             <a:r>
               <a:rPr sz="1300"/>
-              <a:t>Kosten: 5 GB/Monat kostenlos; danach ~€2/GB; Automation Account optional (default: aus)</a:t>
+              <a:t>Backup: Deploy-VM-Backup sichert VMs ohne Backup-Tag automatisch in Recovery Vault</a:t>
+            </a:r>
+          </a:p>
+          <a:p>
+            <a:pPr/>
+            <a:r>
+              <a:rPr sz="1300"/>
+              <a:t>Roadmap: Microsoft Sentinel als SIEM-Folgestufe (nicht Bestandteil der Landing Zone)</a:t>
             </a:r>
           </a:p>
         </p:txBody>
@@ -28893,7 +27043,7 @@
           <a:lstStyle/>
           <a:p>
             <a:r>
-              <a:t>Monitoring und Logging</a:t>
+              <a:t>Sicherheit</a:t>
             </a:r>
           </a:p>
         </p:txBody>
@@ -28932,7 +27082,7 @@
           <a:lstStyle/>
           <a:p>
             <a:r>
-              <a:t>8  ·  Identity und RBAC</a:t>
+              <a:t>7  ·  Monitoring und Logging</a:t>
             </a:r>
           </a:p>
         </p:txBody>
@@ -28953,7 +27103,7 @@
           <a:lstStyle/>
           <a:p>
             <a:r>
-              <a:t>5 Custom-Rollen + Entra-ID-Gruppen-basierte Zuweisungen</a:t>
+              <a:t>Zentraler Log Analytics Workspace + 3 Data Collection Rules</a:t>
             </a:r>
           </a:p>
         </p:txBody>
@@ -29009,7 +27159,7 @@
           <a:lstStyle/>
           <a:p>
             <a:r>
-              <a:t>5 Custom RBAC-Rollen</a:t>
+              <a:t>Zentrales Logging (AVM-Pattern avm/ptn/alz/ama:0.2.0)</a:t>
             </a:r>
           </a:p>
         </p:txBody>
@@ -29032,49 +27182,42 @@
             <a:pPr/>
             <a:r>
               <a:rPr sz="1300"/>
-              <a:t>Subscription-Owner (alz): delegierter Owner, eingeschränkt ohne volle Owner-Rechte (1 Action)  → Plattform-Admins</a:t>
+              <a:t>Log Analytics Workspace: law-alz-&lt;region&gt;, PerGB2018, 365 Tage Retention</a:t>
             </a:r>
           </a:p>
           <a:p>
             <a:pPr/>
             <a:r>
               <a:rPr sz="1300"/>
-              <a:t>Security-Operations (alz): horizontale Sicherheitssicht über alle Subscriptions (12 Actions)  → Security-Team</a:t>
+              <a:t>3 Data Collection Rules: VM Insights · Change Tracking · Defender for SQL</a:t>
             </a:r>
           </a:p>
           <a:p>
             <a:pPr/>
             <a:r>
               <a:rPr sz="1300"/>
-              <a:t>Network-Management (alz): VNets, UDRs, NSGs, NVAs plattformweit (4 Actions)  → Netzwerk-Team</a:t>
+              <a:t>User-Assigned Managed Identity: mi-alz-&lt;region&gt; für passwortlose Policy-Remediation (DeployIfNotExists)</a:t>
             </a:r>
           </a:p>
           <a:p>
             <a:pPr/>
             <a:r>
               <a:rPr sz="1300"/>
-              <a:t>Application-Owners (alz): Contributor auf Resource-Group-Ebene (1 Action)  → App-/Ops-Teams</a:t>
+              <a:t>DINE-Policies: jede neue VM verbindet sich automatisch mit LAW + DCRs – keine manuelle Konfiguration</a:t>
             </a:r>
           </a:p>
           <a:p>
             <a:pPr/>
             <a:r>
               <a:rPr sz="1300"/>
-              <a:t>Network-Subnet-Contributor (alz): vollständiger Subnetz-Zugriff (8 Actions)  → Netzwerk-Ops</a:t>
+              <a:t>Deploy-Diag-LogsCat: leitet alle Diagnose-Kategorien aller Ressourcen in Log Analytics</a:t>
             </a:r>
           </a:p>
           <a:p>
             <a:pPr/>
             <a:r>
               <a:rPr sz="1300"/>
-              <a:t>Zuweisung: Entra-ID-Gruppen-Object-IDs in Bicep-Params; leeres Array = No-Op (gefahrlos)</a:t>
-            </a:r>
-          </a:p>
-          <a:p>
-            <a:pPr/>
-            <a:r>
-              <a:rPr sz="1300"/>
-              <a:t>Roadmap: PIM, Conditional Access, hybride Identitäten als Folge-Baustein (Identity-Baseline)</a:t>
+              <a:t>Kosten: 5 GB/Monat kostenlos; danach ~€2/GB; Automation Account optional (default: aus)</a:t>
             </a:r>
           </a:p>
         </p:txBody>
@@ -29095,7 +27238,7 @@
           <a:lstStyle/>
           <a:p>
             <a:r>
-              <a:t>Identity und RBAC</a:t>
+              <a:t>Monitoring und Logging</a:t>
             </a:r>
           </a:p>
         </p:txBody>
@@ -29134,7 +27277,7 @@
           <a:lstStyle/>
           <a:p>
             <a:r>
-              <a:t>9  ·  Automatisierung und CI/CD</a:t>
+              <a:t>8  ·  Identity und RBAC</a:t>
             </a:r>
           </a:p>
         </p:txBody>
@@ -29155,7 +27298,7 @@
           <a:lstStyle/>
           <a:p>
             <a:r>
-              <a:t>Bootstrap → 18 Deploy-Stufen → GitOps-Betrieb</a:t>
+              <a:t>5 Custom-Rollen + Entra-ID-Gruppen-basierte Zuweisungen</a:t>
             </a:r>
           </a:p>
         </p:txBody>
@@ -29211,7 +27354,7 @@
           <a:lstStyle/>
           <a:p>
             <a:r>
-              <a:t>Pipeline-Workflow (GitHub Actions)</a:t>
+              <a:t>5 Custom RBAC-Rollen</a:t>
             </a:r>
           </a:p>
         </p:txBody>
@@ -29234,49 +27377,49 @@
             <a:pPr/>
             <a:r>
               <a:rPr sz="1300"/>
-              <a:t>Bootstrap (Phase 0, Terraform): Resource Group + Storage (State) + Managed Identity (OIDC Federated Credentials)</a:t>
+              <a:t>Subscription-Owner (alz): delegierter Owner, eingeschränkt ohne volle Owner-Rechte (1 Action)  → Plattform-Admins</a:t>
             </a:r>
           </a:p>
           <a:p>
             <a:pPr/>
             <a:r>
               <a:rPr sz="1300"/>
-              <a:t>GitHub-Repo + Environments + Approval-Gates automatisch generiert</a:t>
+              <a:t>Security-Operations (alz): horizontale Sicherheitssicht über alle Subscriptions (12 Actions)  → Security-Team</a:t>
             </a:r>
           </a:p>
           <a:p>
             <a:pPr/>
             <a:r>
               <a:rPr sz="1300"/>
-              <a:t>5 Pipeline-Schritte: Trigger → Validation (bicep build) → What-If → Approval → Apply</a:t>
+              <a:t>Network-Management (alz): VNets, UDRs, NSGs, NVAs plattformweit (4 Actions)  → Netzwerk-Team</a:t>
             </a:r>
           </a:p>
           <a:p>
             <a:pPr/>
             <a:r>
               <a:rPr sz="1300"/>
-              <a:t>18 Stufen sequenziell: Governance-MGs (1–12) → RBAC (13–15) → Logging (16) → Hub-Netzwerk (17) oder vWAN (18)</a:t>
+              <a:t>Application-Owners (alz): Contributor auf Resource-Group-Ebene (1 Action)  → App-/Ops-Teams</a:t>
             </a:r>
           </a:p>
           <a:p>
             <a:pPr/>
             <a:r>
               <a:rPr sz="1300"/>
-              <a:t>OIDC Federated Identity: keine Passwörter, keine Zertifikate, keine Secrets in Pipelines</a:t>
+              <a:t>Network-Subnet-Contributor (alz): vollständiger Subnetz-Zugriff (8 Actions)  → Netzwerk-Ops</a:t>
             </a:r>
           </a:p>
           <a:p>
             <a:pPr/>
             <a:r>
               <a:rPr sz="1300"/>
-              <a:t>GitOps: PR → Review → Approval → Deploy; jede Änderung mit Autor + Timestamp in Git-History</a:t>
+              <a:t>Zuweisung: Entra-ID-Gruppen-Object-IDs in Bicep-Params; leeres Array = No-Op (gefahrlos)</a:t>
             </a:r>
           </a:p>
           <a:p>
             <a:pPr/>
             <a:r>
               <a:rPr sz="1300"/>
-              <a:t>Rückrollbarkeit: neuer Commit → Rollback-Pipeline; vollständiges Audit-Trail in Azure Activity Log</a:t>
+              <a:t>Roadmap: PIM, Conditional Access, hybride Identitäten als Folge-Baustein (Identity-Baseline)</a:t>
             </a:r>
           </a:p>
         </p:txBody>
@@ -29297,7 +27440,7 @@
           <a:lstStyle/>
           <a:p>
             <a:r>
-              <a:t>Automatisierung und CI/CD</a:t>
+              <a:t>Identity und RBAC</a:t>
             </a:r>
           </a:p>
         </p:txBody>
@@ -29336,7 +27479,7 @@
           <a:lstStyle/>
           <a:p>
             <a:r>
-              <a:t>10  ·  Kosten und Kostensteuerung</a:t>
+              <a:t>9  ·  Automatisierung und CI/CD</a:t>
             </a:r>
           </a:p>
         </p:txBody>
@@ -29357,7 +27500,7 @@
           <a:lstStyle/>
           <a:p>
             <a:r>
-              <a:t>Bechtle-Empfehlung: ~€1.050/Monat – voller Funktionsumfang, eine Region</a:t>
+              <a:t>Bootstrap → 18 Deploy-Stufen → GitOps-Betrieb</a:t>
             </a:r>
           </a:p>
         </p:txBody>
@@ -29413,7 +27556,7 @@
           <a:lstStyle/>
           <a:p>
             <a:r>
-              <a:t>Gestufter Ausbau: €0 → €1.050 → €5.800</a:t>
+              <a:t>Pipeline-Workflow (GitHub Actions)</a:t>
             </a:r>
           </a:p>
         </p:txBody>
@@ -29436,56 +27579,49 @@
             <a:pPr/>
             <a:r>
               <a:rPr sz="1300"/>
-              <a:t>Stufe 1 – Governance-Pilot: network_type: none → MGs + volles Policy-Set + Logging  ca. €50/Monat (nur LAW)</a:t>
+              <a:t>Bootstrap (Phase 0, Terraform): Resource Group + Storage (State) + Managed Identity (OIDC Federated Credentials)</a:t>
             </a:r>
           </a:p>
           <a:p>
             <a:pPr/>
             <a:r>
               <a:rPr sz="1300"/>
-              <a:t>Stufe 2 – Bechtle-Empfehlung: Firewall Standard, 1 Region, kein DDoS/ER  →  ~€1.050/Monat</a:t>
-            </a:r>
-          </a:p>
-          <a:p>
-            <a:pPr lvl="1"/>
+              <a:t>GitHub-Repo + Environments + Approval-Gates automatisch generiert</a:t>
+            </a:r>
+          </a:p>
+          <a:p>
+            <a:pPr/>
             <a:r>
               <a:rPr sz="1300"/>
-              <a:t>  Firewall Standard 1×: ~€700  |  Bastion 1×: ~€120  |  VPN GW 1×: ~€140  |  DNS: ~€40  |  LAW: ~€50</a:t>
+              <a:t>5 Pipeline-Schritte: Trigger → Validation (bicep build) → What-If → Approval → Apply</a:t>
             </a:r>
           </a:p>
           <a:p>
             <a:pPr/>
             <a:r>
               <a:rPr sz="1300"/>
-              <a:t>Stufe 3 – Geo-Redundanz: + Sekundar-Hub NE  →  ~€1.800/Monat</a:t>
+              <a:t>18 Stufen sequenziell: Governance-MGs (1–12) → RBAC (13–15) → Logging (16) → Hub-Netzwerk (17) oder vWAN (18)</a:t>
             </a:r>
           </a:p>
           <a:p>
             <a:pPr/>
             <a:r>
               <a:rPr sz="1300"/>
-              <a:t>Stufe 4 – Firewall Premium: IDPS / TLS / URL-Filterung  →  ~€2.400/Monat</a:t>
+              <a:t>OIDC Federated Identity: keine Passwörter, keine Zertifikate, keine Secrets in Pipelines</a:t>
             </a:r>
           </a:p>
           <a:p>
             <a:pPr/>
             <a:r>
               <a:rPr sz="1300"/>
-              <a:t>Stufe 5 – DDoS Protection: bei internet-facing Workloads  →  ~€4.900/Monat</a:t>
+              <a:t>GitOps: PR → Review → Approval → Deploy; jede Änderung mit Autor + Timestamp in Git-History</a:t>
             </a:r>
           </a:p>
           <a:p>
             <a:pPr/>
             <a:r>
               <a:rPr sz="1300"/>
-              <a:t>Stufe 6 – Microsoft-Default: alle Dienste, beide Regionen  →  ~€5.800/Monat</a:t>
-            </a:r>
-          </a:p>
-          <a:p>
-            <a:pPr/>
-            <a:r>
-              <a:rPr sz="1300"/>
-              <a:t>Alle Stufen sind additive Aenderungen – kein Rueckbau erforderlich</a:t>
+              <a:t>Rückrollbarkeit: neuer Commit → Rollback-Pipeline; vollständiges Audit-Trail in Azure Activity Log</a:t>
             </a:r>
           </a:p>
         </p:txBody>
@@ -29506,7 +27642,7 @@
           <a:lstStyle/>
           <a:p>
             <a:r>
-              <a:t>Kosten und Kostensteuerung</a:t>
+              <a:t>Automatisierung und CI/CD</a:t>
             </a:r>
           </a:p>
         </p:txBody>
@@ -29545,121 +27681,15 @@
           <a:lstStyle/>
           <a:p>
             <a:r>
-              <a:t>Konfigurationsvergleich: Vorteile und Nachteile (1/2)</a:t>
-            </a:r>
-          </a:p>
-        </p:txBody>
-      </p:sp>
-      <p:sp>
-        <p:nvSpPr>
-          <p:cNvPr id="3" name="Text Placeholder 2"/>
-          <p:cNvSpPr>
-            <a:spLocks noGrp="1"/>
-          </p:cNvSpPr>
-          <p:nvPr>
-            <p:ph type="body" idx="13" sz="quarter"/>
-          </p:nvPr>
-        </p:nvSpPr>
-        <p:spPr/>
-        <p:txBody>
-          <a:bodyPr wrap="square"/>
-          <a:lstStyle/>
-          <a:p>
-            <a:pPr/>
-            <a:r>
-              <a:rPr sz="1100"/>
-              <a:t>Pilot  ~€50/Monat  (network_type: none)</a:t>
-            </a:r>
-          </a:p>
-          <a:p>
-            <a:pPr lvl="1"/>
-            <a:r>
-              <a:rPr sz="1100"/>
-              <a:t>+ Nullrisiko; volles Governance-Set (MGs, Policies, Logging)</a:t>
-            </a:r>
-          </a:p>
-          <a:p>
-            <a:pPr lvl="1"/>
-            <a:r>
-              <a:rPr sz="1100"/>
-              <a:t>– Keine Netzwerkkonnektivität; Workloads nicht deploybar</a:t>
-            </a:r>
-          </a:p>
-          <a:p>
-            <a:pPr lvl="1"/>
-            <a:r>
-              <a:rPr sz="1100"/>
-              <a:t>  Empfehlung: Einstieg, PoC, Compliance-Audit ohne Netzwerkbedarf</a:t>
-            </a:r>
-          </a:p>
-          <a:p>
-            <a:pPr/>
-            <a:r>
-              <a:rPr sz="1100"/>
-              <a:t>Bechtle-Empfehlung  ~€1.050/Monat  (Standard FW, 1 Region)</a:t>
-            </a:r>
-          </a:p>
-          <a:p>
-            <a:pPr lvl="1"/>
-            <a:r>
-              <a:rPr sz="1100"/>
-              <a:t>+ Voller Funktionsumfang; 4× günstiger als Microsoft-Default</a:t>
-            </a:r>
-          </a:p>
-          <a:p>
-            <a:pPr lvl="1"/>
-            <a:r>
-              <a:rPr sz="1100"/>
-              <a:t>+ Firewall, Bastion, VPN, DNS aktiv; In-Place-Upgrade auf Premium möglich</a:t>
-            </a:r>
-          </a:p>
-          <a:p>
-            <a:pPr lvl="1"/>
-            <a:r>
-              <a:rPr sz="1100"/>
-              <a:t>– Keine zweite Region; kein IDPS/TLS; kein DDoS-Schutz</a:t>
-            </a:r>
-          </a:p>
-          <a:p>
-            <a:pPr lvl="1"/>
-            <a:r>
-              <a:rPr sz="1100"/>
-              <a:t>  Empfehlung: Standard-Produktionsumgebungen, erste Workloads</a:t>
-            </a:r>
-          </a:p>
-          <a:p>
-            <a:pPr/>
-            <a:r>
-              <a:rPr sz="1100"/>
-              <a:t>Geo-Redundanz  ~€1.800/Monat  (+ Hub North Europe)</a:t>
-            </a:r>
-          </a:p>
-          <a:p>
-            <a:pPr lvl="1"/>
-            <a:r>
-              <a:rPr sz="1100"/>
-              <a:t>+ Regionale Ausfallsicherheit; zwei unabhängige Netzwerkhubs</a:t>
-            </a:r>
-          </a:p>
-          <a:p>
-            <a:pPr lvl="1"/>
-            <a:r>
-              <a:rPr sz="1100"/>
-              <a:t>– Doppelte Netzwerkkosten; erhöhte Betriebskomplexität</a:t>
-            </a:r>
-          </a:p>
-          <a:p>
-            <a:pPr lvl="1"/>
-            <a:r>
-              <a:rPr sz="1100"/>
-              <a:t>  Empfehlung: SLA-kritische Systeme, Multi-Region-Anforderungen</a:t>
-            </a:r>
-          </a:p>
-        </p:txBody>
-      </p:sp>
-      <p:sp>
-        <p:nvSpPr>
-          <p:cNvPr id="4" name="Subtitle 3"/>
+              <a:rPr sz="2200" b="1"/>
+              <a:t>~€1.050 / Monat</a:t>
+            </a:r>
+          </a:p>
+        </p:txBody>
+      </p:sp>
+      <p:sp>
+        <p:nvSpPr>
+          <p:cNvPr id="3" name="Subtitle 2"/>
           <p:cNvSpPr>
             <a:spLocks noGrp="1"/>
           </p:cNvSpPr>
@@ -29673,7 +27703,30 @@
           <a:lstStyle/>
           <a:p>
             <a:r>
+              <a:rPr sz="1100"/>
               <a:t>Kosten und Kostensteuerung</a:t>
+            </a:r>
+          </a:p>
+        </p:txBody>
+      </p:sp>
+      <p:sp>
+        <p:nvSpPr>
+          <p:cNvPr id="4" name="Text Placeholder 3"/>
+          <p:cNvSpPr>
+            <a:spLocks noGrp="1"/>
+          </p:cNvSpPr>
+          <p:nvPr>
+            <p:ph type="body" idx="13" sz="quarter"/>
+          </p:nvPr>
+        </p:nvSpPr>
+        <p:spPr/>
+        <p:txBody>
+          <a:bodyPr/>
+          <a:lstStyle/>
+          <a:p>
+            <a:r>
+              <a:rPr sz="1200"/>
+              <a:t>Bechtle-Empfehlung: voller Funktionsumfang, eine Region, ALZ-konform – 4× günstiger als Microsoft-Default (~€5.800)</a:t>
             </a:r>
           </a:p>
         </p:txBody>
@@ -29712,114 +27765,14 @@
           <a:lstStyle/>
           <a:p>
             <a:r>
-              <a:t>Konfigurationsvergleich: Vorteile und Nachteile (2/2)</a:t>
-            </a:r>
-          </a:p>
-        </p:txBody>
-      </p:sp>
-      <p:sp>
-        <p:nvSpPr>
-          <p:cNvPr id="3" name="Text Placeholder 2"/>
-          <p:cNvSpPr>
-            <a:spLocks noGrp="1"/>
-          </p:cNvSpPr>
-          <p:nvPr>
-            <p:ph type="body" idx="13" sz="quarter"/>
-          </p:nvPr>
-        </p:nvSpPr>
-        <p:spPr/>
-        <p:txBody>
-          <a:bodyPr wrap="square"/>
-          <a:lstStyle/>
-          <a:p>
-            <a:pPr/>
-            <a:r>
-              <a:rPr sz="1100"/>
-              <a:t>Firewall Premium  ~€2.400/Monat  (+ IDPS / TLS-Inspektion)</a:t>
-            </a:r>
-          </a:p>
-          <a:p>
-            <a:pPr lvl="1"/>
-            <a:r>
-              <a:rPr sz="1100"/>
-              <a:t>+ IDPS, TLS-Inspektion, URL-Filterung; In-Place-Upgrade ohne Rebuild</a:t>
-            </a:r>
-          </a:p>
-          <a:p>
-            <a:pPr lvl="1"/>
-            <a:r>
-              <a:rPr sz="1100"/>
-              <a:t>– +€1.350 ggü. Bechtle-Empfehlung; Zertifikat-Rollout erforderlich</a:t>
-            </a:r>
-          </a:p>
-          <a:p>
-            <a:pPr lvl="1"/>
-            <a:r>
-              <a:rPr sz="1100"/>
-              <a:t>  Empfehlung: Hohe Sicherheitsanforderungen, regulierte Branchen</a:t>
-            </a:r>
-          </a:p>
-          <a:p>
-            <a:pPr/>
-            <a:r>
-              <a:rPr sz="1100"/>
-              <a:t>DDoS Protection  ~€4.900/Monat  (+ Network Protection Plan)</a:t>
-            </a:r>
-          </a:p>
-          <a:p>
-            <a:pPr lvl="1"/>
-            <a:r>
-              <a:rPr sz="1100"/>
-              <a:t>+ Vollständiger DDoS-Schutz für alle öffentlichen IPs; SLA-Garantie</a:t>
-            </a:r>
-          </a:p>
-          <a:p>
-            <a:pPr lvl="1"/>
-            <a:r>
-              <a:rPr sz="1100"/>
-              <a:t>– ~€2.500/Monat Fixkosten (Plan Fee), unabhängig von Angriffen</a:t>
-            </a:r>
-          </a:p>
-          <a:p>
-            <a:pPr lvl="1"/>
-            <a:r>
-              <a:rPr sz="1100"/>
-              <a:t>  Empfehlung: Nur bei internet-facing Workloads mit realem DDoS-Risiko</a:t>
-            </a:r>
-          </a:p>
-          <a:p>
-            <a:pPr/>
-            <a:r>
-              <a:rPr sz="1100"/>
-              <a:t>Microsoft-Default  ~€5.800/Monat  (alle Dienste, 2 Regionen)</a:t>
-            </a:r>
-          </a:p>
-          <a:p>
-            <a:pPr lvl="1"/>
-            <a:r>
-              <a:rPr sz="1100"/>
-              <a:t>+ Maximale Redundanz; Enterprise-Standard; Herstellerempfehlung</a:t>
-            </a:r>
-          </a:p>
-          <a:p>
-            <a:pPr lvl="1"/>
-            <a:r>
-              <a:rPr sz="1100"/>
-              <a:t>– Höchste Kosten; viele Komponenten initial ungenutzt; Overkill für Start</a:t>
-            </a:r>
-          </a:p>
-          <a:p>
-            <a:pPr lvl="1"/>
-            <a:r>
-              <a:rPr sz="1100"/>
-              <a:t>  Empfehlung: Unternehmenskritische Systeme mit strengster Compliance</a:t>
-            </a:r>
-          </a:p>
-        </p:txBody>
-      </p:sp>
-      <p:sp>
-        <p:nvSpPr>
-          <p:cNvPr id="4" name="Subtitle 3"/>
+              <a:t>10  ·  Kosten und Kostensteuerung</a:t>
+            </a:r>
+          </a:p>
+        </p:txBody>
+      </p:sp>
+      <p:sp>
+        <p:nvSpPr>
+          <p:cNvPr id="3" name="Subtitle 2"/>
           <p:cNvSpPr>
             <a:spLocks noGrp="1"/>
           </p:cNvSpPr>
@@ -29833,9 +27786,26 @@
           <a:lstStyle/>
           <a:p>
             <a:r>
-              <a:t>Kosten und Kostensteuerung</a:t>
-            </a:r>
-          </a:p>
+              <a:t>Bechtle-Empfehlung: ~€1.050/Monat – voller Funktionsumfang, eine Region</a:t>
+            </a:r>
+          </a:p>
+        </p:txBody>
+      </p:sp>
+      <p:sp>
+        <p:nvSpPr>
+          <p:cNvPr id="4" name="Text Placeholder 3"/>
+          <p:cNvSpPr>
+            <a:spLocks noGrp="1"/>
+          </p:cNvSpPr>
+          <p:nvPr>
+            <p:ph type="body" idx="13" sz="quarter"/>
+          </p:nvPr>
+        </p:nvSpPr>
+        <p:spPr/>
+        <p:txBody>
+          <a:bodyPr/>
+          <a:lstStyle/>
+          <a:p/>
         </p:txBody>
       </p:sp>
     </p:spTree>
@@ -29872,7 +27842,9 @@
           <a:lstStyle/>
           <a:p>
             <a:r>
-              <a:t>Management Summary</a:t>
+              <a:rPr sz="2200" b="1"/>
+              <a:t>Governance · Sicherheit · Netzwerk
+als Code – reproduzierbar und auditfähig.</a:t>
             </a:r>
           </a:p>
         </p:txBody>
@@ -29893,7 +27865,8 @@
           <a:lstStyle/>
           <a:p>
             <a:r>
-              <a:t>Governance · Netzwerk · Sicherheit · Automatisierung – als IaC-Fundament</a:t>
+              <a:rPr sz="1100"/>
+              <a:t>Management Summary</a:t>
             </a:r>
           </a:p>
         </p:txBody>
@@ -29910,48 +27883,12 @@
         </p:nvSpPr>
         <p:spPr/>
         <p:txBody>
-          <a:bodyPr wrap="square"/>
+          <a:bodyPr/>
           <a:lstStyle/>
           <a:p>
-            <a:pPr/>
             <a:r>
               <a:rPr sz="1200"/>
-              <a:t>12 Management Groups</a:t>
-            </a:r>
-          </a:p>
-          <a:p>
-            <a:pPr/>
-            <a:r>
-              <a:rPr sz="1200"/>
-              <a:t>149 Policy-Definitionen</a:t>
-            </a:r>
-          </a:p>
-          <a:p>
-            <a:pPr/>
-            <a:r>
-              <a:rPr sz="1200"/>
-              <a:t>42 Initiativen  ·  123 Assignments</a:t>
-            </a:r>
-          </a:p>
-          <a:p>
-            <a:pPr/>
-            <a:r>
-              <a:rPr sz="1200"/>
-              <a:t>22 AVM-Module</a:t>
-            </a:r>
-          </a:p>
-          <a:p>
-            <a:pPr/>
-            <a:r>
-              <a:rPr sz="1200"/>
-              <a:t>18 Deploy-Stufen</a:t>
-            </a:r>
-          </a:p>
-          <a:p>
-            <a:pPr/>
-            <a:r>
-              <a:rPr sz="1200"/>
-              <a:t>~€5.800/Monat (vollständig steuerbar)</a:t>
+              <a:t>Bechtle setzt auf den Microsoft ALZ Bicep Accelerator: 149 Policies · 12 MGs · 18 Deploy-Stufen · OIDC · ~€1.050/Monat</a:t>
             </a:r>
           </a:p>
         </p:txBody>
@@ -29990,7 +27927,7 @@
           <a:lstStyle/>
           <a:p>
             <a:r>
-              <a:t>Bechtle-Varianten: Vier Konfigurationen im Vergleich</a:t>
+              <a:t>Gestufter Ausbau: €0 → €1.050 → €5.800</a:t>
             </a:r>
           </a:p>
         </p:txBody>
@@ -30012,92 +27949,57 @@
           <a:p>
             <a:pPr/>
             <a:r>
-              <a:rPr sz="1100"/>
-              <a:t>Option A – Bechtle-Standard  ~€1.050/Monat  (Baseline)</a:t>
+              <a:rPr sz="1300"/>
+              <a:t>Stufe 1 – Governance-Pilot: network_type: none → MGs + volles Policy-Set + Logging  ca. €50/Monat (nur LAW)</a:t>
+            </a:r>
+          </a:p>
+          <a:p>
+            <a:pPr/>
+            <a:r>
+              <a:rPr sz="1300"/>
+              <a:t>Stufe 2 – Bechtle-Empfehlung: Firewall Standard, 1 Region, kein DDoS/ER  →  ~€1.050/Monat</a:t>
             </a:r>
           </a:p>
           <a:p>
             <a:pPr lvl="1"/>
             <a:r>
-              <a:rPr sz="1100"/>
-              <a:t>FW Standard 1× ~€700 | VPN GW 1× ~€140 | Bastion ~€120 | DNS ~€25 | LAW ~€50</a:t>
-            </a:r>
-          </a:p>
-          <a:p>
-            <a:pPr lvl="1"/>
-            <a:r>
-              <a:rPr sz="1100"/>
-              <a:t>ALZ-konform: Ja  |  Differenz: Referenz</a:t>
+              <a:rPr sz="1300"/>
+              <a:t>  Firewall Standard 1×: ~€700  |  Bastion 1×: ~€120  |  VPN GW 1×: ~€140  |  DNS: ~€40  |  LAW: ~€50</a:t>
             </a:r>
           </a:p>
           <a:p>
             <a:pPr/>
             <a:r>
-              <a:rPr sz="1100"/>
-              <a:t>Option B – Bechtle-Optimiert  ~€770/Monat  (ALZ-konform)</a:t>
-            </a:r>
-          </a:p>
-          <a:p>
-            <a:pPr lvl="1"/>
-            <a:r>
-              <a:rPr sz="1100"/>
-              <a:t>FW Standard reserved ~€560 | VPN Gateway deferred (€0) | Bastion ~€120 | DNS ~€25 | LAW ~€50</a:t>
-            </a:r>
-          </a:p>
-          <a:p>
-            <a:pPr lvl="1"/>
-            <a:r>
-              <a:rPr sz="1100"/>
-              <a:t>ALZ-konform: Ja  |  Differenz: −€280/Mon. (26 % günstiger)</a:t>
+              <a:rPr sz="1300"/>
+              <a:t>Stufe 3 – Geo-Redundanz: + Sekundar-Hub NE  →  ~€1.800/Monat</a:t>
             </a:r>
           </a:p>
           <a:p>
             <a:pPr/>
             <a:r>
-              <a:rPr sz="1100"/>
-              <a:t>Option C – Bechtle-Budget  ~€500/Monat  (⚠ ALZ-Bruch)</a:t>
-            </a:r>
-          </a:p>
-          <a:p>
-            <a:pPr lvl="1"/>
-            <a:r>
-              <a:rPr sz="1100"/>
-              <a:t>FW Basic ~€300 | VPN Gateway deferred (€0) | Bastion ~€120 | DNS ~€25 | LAW ~€50</a:t>
-            </a:r>
-          </a:p>
-          <a:p>
-            <a:pPr lvl="1"/>
-            <a:r>
-              <a:rPr sz="1100"/>
-              <a:t>ALZ-konform: NEIN  |  Differenz: −€550/Mon. (52 % günstiger)</a:t>
-            </a:r>
-          </a:p>
-          <a:p>
-            <a:pPr lvl="1"/>
-            <a:r>
-              <a:rPr sz="1100"/>
-              <a:t>Bruch: Firewall Basic = keine App-Rules, kein Threat Intel, kein Autoscaling</a:t>
+              <a:rPr sz="1300"/>
+              <a:t>Stufe 4 – Firewall Premium: IDPS / TLS / URL-Filterung  →  ~€2.400/Monat</a:t>
             </a:r>
           </a:p>
           <a:p>
             <a:pPr/>
             <a:r>
-              <a:rPr sz="1100"/>
-              <a:t>Option D – Microsoft-Default  ~€5.800/Monat  (maximaler Standard)</a:t>
-            </a:r>
-          </a:p>
-          <a:p>
-            <a:pPr lvl="1"/>
-            <a:r>
-              <a:rPr sz="1100"/>
-              <a:t>FW Premium 2× ~€2.200 | DDoS Plan ~€2.500 | ER GW 2× ~€560 | VPN 2× | Bastion 2× | 2 Regionen</a:t>
-            </a:r>
-          </a:p>
-          <a:p>
-            <a:pPr lvl="1"/>
-            <a:r>
-              <a:rPr sz="1100"/>
-              <a:t>ALZ-konform: Ja (vollständig)  |  Differenz: +€4.750/Mon. (452 % teurer als A)</a:t>
+              <a:rPr sz="1300"/>
+              <a:t>Stufe 5 – DDoS Protection: bei internet-facing Workloads  →  ~€4.900/Monat</a:t>
+            </a:r>
+          </a:p>
+          <a:p>
+            <a:pPr/>
+            <a:r>
+              <a:rPr sz="1300"/>
+              <a:t>Stufe 6 – Microsoft-Default: alle Dienste, beide Regionen  →  ~€5.800/Monat</a:t>
+            </a:r>
+          </a:p>
+          <a:p>
+            <a:pPr/>
+            <a:r>
+              <a:rPr sz="1300"/>
+              <a:t>Alle Stufen sind additive Aenderungen – kein Rueckbau erforderlich</a:t>
             </a:r>
           </a:p>
         </p:txBody>
@@ -30157,14 +28059,121 @@
           <a:lstStyle/>
           <a:p>
             <a:r>
-              <a:t>11  ·  Roadmap und Phasen</a:t>
-            </a:r>
-          </a:p>
-        </p:txBody>
-      </p:sp>
-      <p:sp>
-        <p:nvSpPr>
-          <p:cNvPr id="3" name="Subtitle 2"/>
+              <a:t>Konfigurationsvergleich: Vorteile und Nachteile (1/2)</a:t>
+            </a:r>
+          </a:p>
+        </p:txBody>
+      </p:sp>
+      <p:sp>
+        <p:nvSpPr>
+          <p:cNvPr id="3" name="Text Placeholder 2"/>
+          <p:cNvSpPr>
+            <a:spLocks noGrp="1"/>
+          </p:cNvSpPr>
+          <p:nvPr>
+            <p:ph type="body" idx="13" sz="quarter"/>
+          </p:nvPr>
+        </p:nvSpPr>
+        <p:spPr/>
+        <p:txBody>
+          <a:bodyPr wrap="square"/>
+          <a:lstStyle/>
+          <a:p>
+            <a:pPr/>
+            <a:r>
+              <a:rPr sz="1100"/>
+              <a:t>Pilot  ~€50/Monat  (network_type: none)</a:t>
+            </a:r>
+          </a:p>
+          <a:p>
+            <a:pPr lvl="1"/>
+            <a:r>
+              <a:rPr sz="1100"/>
+              <a:t>+ Nullrisiko; volles Governance-Set (MGs, Policies, Logging)</a:t>
+            </a:r>
+          </a:p>
+          <a:p>
+            <a:pPr lvl="1"/>
+            <a:r>
+              <a:rPr sz="1100"/>
+              <a:t>– Keine Netzwerkkonnektivität; Workloads nicht deploybar</a:t>
+            </a:r>
+          </a:p>
+          <a:p>
+            <a:pPr lvl="1"/>
+            <a:r>
+              <a:rPr sz="1100"/>
+              <a:t>  Empfehlung: Einstieg, PoC, Compliance-Audit ohne Netzwerkbedarf</a:t>
+            </a:r>
+          </a:p>
+          <a:p>
+            <a:pPr/>
+            <a:r>
+              <a:rPr sz="1100"/>
+              <a:t>Bechtle-Empfehlung  ~€1.050/Monat  (Standard FW, 1 Region)</a:t>
+            </a:r>
+          </a:p>
+          <a:p>
+            <a:pPr lvl="1"/>
+            <a:r>
+              <a:rPr sz="1100"/>
+              <a:t>+ Voller Funktionsumfang; 4× günstiger als Microsoft-Default</a:t>
+            </a:r>
+          </a:p>
+          <a:p>
+            <a:pPr lvl="1"/>
+            <a:r>
+              <a:rPr sz="1100"/>
+              <a:t>+ Firewall, Bastion, VPN, DNS aktiv; In-Place-Upgrade auf Premium möglich</a:t>
+            </a:r>
+          </a:p>
+          <a:p>
+            <a:pPr lvl="1"/>
+            <a:r>
+              <a:rPr sz="1100"/>
+              <a:t>– Keine zweite Region; kein IDPS/TLS; kein DDoS-Schutz</a:t>
+            </a:r>
+          </a:p>
+          <a:p>
+            <a:pPr lvl="1"/>
+            <a:r>
+              <a:rPr sz="1100"/>
+              <a:t>  Empfehlung: Standard-Produktionsumgebungen, erste Workloads</a:t>
+            </a:r>
+          </a:p>
+          <a:p>
+            <a:pPr/>
+            <a:r>
+              <a:rPr sz="1100"/>
+              <a:t>Geo-Redundanz  ~€1.800/Monat  (+ Hub North Europe)</a:t>
+            </a:r>
+          </a:p>
+          <a:p>
+            <a:pPr lvl="1"/>
+            <a:r>
+              <a:rPr sz="1100"/>
+              <a:t>+ Regionale Ausfallsicherheit; zwei unabhängige Netzwerkhubs</a:t>
+            </a:r>
+          </a:p>
+          <a:p>
+            <a:pPr lvl="1"/>
+            <a:r>
+              <a:rPr sz="1100"/>
+              <a:t>– Doppelte Netzwerkkosten; erhöhte Betriebskomplexität</a:t>
+            </a:r>
+          </a:p>
+          <a:p>
+            <a:pPr lvl="1"/>
+            <a:r>
+              <a:rPr sz="1100"/>
+              <a:t>  Empfehlung: SLA-kritische Systeme, Multi-Region-Anforderungen</a:t>
+            </a:r>
+          </a:p>
+        </p:txBody>
+      </p:sp>
+      <p:sp>
+        <p:nvSpPr>
+          <p:cNvPr id="4" name="Subtitle 3"/>
           <p:cNvSpPr>
             <a:spLocks noGrp="1"/>
           </p:cNvSpPr>
@@ -30178,26 +28187,9 @@
           <a:lstStyle/>
           <a:p>
             <a:r>
-              <a:t>6 Phasen – von Kickoff bis laufendem Betrieb</a:t>
-            </a:r>
-          </a:p>
-        </p:txBody>
-      </p:sp>
-      <p:sp>
-        <p:nvSpPr>
-          <p:cNvPr id="4" name="Text Placeholder 3"/>
-          <p:cNvSpPr>
-            <a:spLocks noGrp="1"/>
-          </p:cNvSpPr>
-          <p:nvPr>
-            <p:ph type="body" idx="13" sz="quarter"/>
-          </p:nvPr>
-        </p:nvSpPr>
-        <p:spPr/>
-        <p:txBody>
-          <a:bodyPr/>
-          <a:lstStyle/>
-          <a:p/>
+              <a:t>Kosten und Kostensteuerung</a:t>
+            </a:r>
+          </a:p>
         </p:txBody>
       </p:sp>
     </p:spTree>
@@ -30234,7 +28226,7 @@
           <a:lstStyle/>
           <a:p>
             <a:r>
-              <a:t>6 Projektphasen im Überblick</a:t>
+              <a:t>Konfigurationsvergleich: Vorteile und Nachteile (2/2)</a:t>
             </a:r>
           </a:p>
         </p:txBody>
@@ -30256,43 +28248,85 @@
           <a:p>
             <a:pPr/>
             <a:r>
-              <a:rPr sz="1300"/>
-              <a:t>Phase 1 – Beratung &amp; Kickoff: Discovery-Workshop; Entscheidungsprotokoll (Region, Netzwerk, DDoS, Enforcement)</a:t>
+              <a:rPr sz="1100"/>
+              <a:t>Firewall Premium  ~€2.400/Monat  (+ IDPS / TLS-Inspektion)</a:t>
+            </a:r>
+          </a:p>
+          <a:p>
+            <a:pPr lvl="1"/>
+            <a:r>
+              <a:rPr sz="1100"/>
+              <a:t>+ IDPS, TLS-Inspektion, URL-Filterung; In-Place-Upgrade ohne Rebuild</a:t>
+            </a:r>
+          </a:p>
+          <a:p>
+            <a:pPr lvl="1"/>
+            <a:r>
+              <a:rPr sz="1100"/>
+              <a:t>– +€1.350 ggü. Bechtle-Empfehlung; Zertifikat-Rollout erforderlich</a:t>
+            </a:r>
+          </a:p>
+          <a:p>
+            <a:pPr lvl="1"/>
+            <a:r>
+              <a:rPr sz="1100"/>
+              <a:t>  Empfehlung: Hohe Sicherheitsanforderungen, regulierte Branchen</a:t>
             </a:r>
           </a:p>
           <a:p>
             <a:pPr/>
             <a:r>
-              <a:rPr sz="1300"/>
-              <a:t>Phase 2 – Bootstrap &amp; Grundgerüst: Deploy-Accelerator; MGs + Policies (DoNotEnforce); Logging aktiv  ≈ €0</a:t>
+              <a:rPr sz="1100"/>
+              <a:t>DDoS Protection  ~€4.900/Monat  (+ Network Protection Plan)</a:t>
+            </a:r>
+          </a:p>
+          <a:p>
+            <a:pPr lvl="1"/>
+            <a:r>
+              <a:rPr sz="1100"/>
+              <a:t>+ Vollständiger DDoS-Schutz für alle öffentlichen IPs; SLA-Garantie</a:t>
+            </a:r>
+          </a:p>
+          <a:p>
+            <a:pPr lvl="1"/>
+            <a:r>
+              <a:rPr sz="1100"/>
+              <a:t>– ~€2.500/Monat Fixkosten (Plan Fee), unabhängig von Angriffen</a:t>
+            </a:r>
+          </a:p>
+          <a:p>
+            <a:pPr lvl="1"/>
+            <a:r>
+              <a:rPr sz="1100"/>
+              <a:t>  Empfehlung: Nur bei internet-facing Workloads mit realem DDoS-Risiko</a:t>
             </a:r>
           </a:p>
           <a:p>
             <a:pPr/>
             <a:r>
-              <a:rPr sz="1300"/>
-              <a:t>Phase 3 – Netzwerk-Pilot: Hub-VNets + DNS; erste Spoke-VNets; ggf. minimale Firewall  €15–€1.300/Monat</a:t>
-            </a:r>
-          </a:p>
-          <a:p>
-            <a:pPr/>
-            <a:r>
-              <a:rPr sz="1300"/>
-              <a:t>Phase 4 – Sicherheit &amp; Enforcement: Defender aktivieren; Guardrails einschalten; Remediation  + Defender-Kosten</a:t>
-            </a:r>
-          </a:p>
-          <a:p>
-            <a:pPr/>
-            <a:r>
-              <a:rPr sz="1300"/>
-              <a:t>Phase 5 – Workload-Onboarding: erste Applikation in ALZ; Spoke-Netzwerke; RBAC-Gruppen befüllen</a:t>
-            </a:r>
-          </a:p>
-          <a:p>
-            <a:pPr/>
-            <a:r>
-              <a:rPr sz="1300"/>
-              <a:t>Phase 6 – Betrieb &amp; Optimierung: Cost Management; Tagging; Monitoring-Dashboards; Policy-Weiterentwicklung</a:t>
+              <a:rPr sz="1100"/>
+              <a:t>Microsoft-Default  ~€5.800/Monat  (alle Dienste, 2 Regionen)</a:t>
+            </a:r>
+          </a:p>
+          <a:p>
+            <a:pPr lvl="1"/>
+            <a:r>
+              <a:rPr sz="1100"/>
+              <a:t>+ Maximale Redundanz; Enterprise-Standard; Herstellerempfehlung</a:t>
+            </a:r>
+          </a:p>
+          <a:p>
+            <a:pPr lvl="1"/>
+            <a:r>
+              <a:rPr sz="1100"/>
+              <a:t>– Höchste Kosten; viele Komponenten initial ungenutzt; Overkill für Start</a:t>
+            </a:r>
+          </a:p>
+          <a:p>
+            <a:pPr lvl="1"/>
+            <a:r>
+              <a:rPr sz="1100"/>
+              <a:t>  Empfehlung: Unternehmenskritische Systeme mit strengster Compliance</a:t>
             </a:r>
           </a:p>
         </p:txBody>
@@ -30313,7 +28347,7 @@
           <a:lstStyle/>
           <a:p>
             <a:r>
-              <a:t>Roadmap und Phasen</a:t>
+              <a:t>Kosten und Kostensteuerung</a:t>
             </a:r>
           </a:p>
         </p:txBody>
@@ -30352,14 +28386,121 @@
           <a:lstStyle/>
           <a:p>
             <a:r>
-              <a:t>12  ·  Risiken und Entscheidungen</a:t>
-            </a:r>
-          </a:p>
-        </p:txBody>
-      </p:sp>
-      <p:sp>
-        <p:nvSpPr>
-          <p:cNvPr id="3" name="Subtitle 2"/>
+              <a:t>Bechtle-Varianten: Vier Konfigurationen im Vergleich</a:t>
+            </a:r>
+          </a:p>
+        </p:txBody>
+      </p:sp>
+      <p:sp>
+        <p:nvSpPr>
+          <p:cNvPr id="3" name="Text Placeholder 2"/>
+          <p:cNvSpPr>
+            <a:spLocks noGrp="1"/>
+          </p:cNvSpPr>
+          <p:nvPr>
+            <p:ph type="body" idx="13" sz="quarter"/>
+          </p:nvPr>
+        </p:nvSpPr>
+        <p:spPr/>
+        <p:txBody>
+          <a:bodyPr wrap="square"/>
+          <a:lstStyle/>
+          <a:p>
+            <a:pPr/>
+            <a:r>
+              <a:rPr sz="1100"/>
+              <a:t>Option A – Bechtle-Standard  ~€1.050/Monat  (Baseline)</a:t>
+            </a:r>
+          </a:p>
+          <a:p>
+            <a:pPr lvl="1"/>
+            <a:r>
+              <a:rPr sz="1100"/>
+              <a:t>FW Standard 1× ~€700 | VPN GW 1× ~€140 | Bastion ~€120 | DNS ~€25 | LAW ~€50</a:t>
+            </a:r>
+          </a:p>
+          <a:p>
+            <a:pPr lvl="1"/>
+            <a:r>
+              <a:rPr sz="1100"/>
+              <a:t>ALZ-konform: Ja  |  Differenz: Referenz</a:t>
+            </a:r>
+          </a:p>
+          <a:p>
+            <a:pPr/>
+            <a:r>
+              <a:rPr sz="1100"/>
+              <a:t>Option B – Bechtle-Optimiert  ~€770/Monat  (ALZ-konform)</a:t>
+            </a:r>
+          </a:p>
+          <a:p>
+            <a:pPr lvl="1"/>
+            <a:r>
+              <a:rPr sz="1100"/>
+              <a:t>FW Standard reserved ~€560 | VPN Gateway deferred (€0) | Bastion ~€120 | DNS ~€25 | LAW ~€50</a:t>
+            </a:r>
+          </a:p>
+          <a:p>
+            <a:pPr lvl="1"/>
+            <a:r>
+              <a:rPr sz="1100"/>
+              <a:t>ALZ-konform: Ja  |  Differenz: −€280/Mon. (26 % günstiger)</a:t>
+            </a:r>
+          </a:p>
+          <a:p>
+            <a:pPr/>
+            <a:r>
+              <a:rPr sz="1100"/>
+              <a:t>Option C – Bechtle-Budget  ~€500/Monat  (⚠ ALZ-Bruch)</a:t>
+            </a:r>
+          </a:p>
+          <a:p>
+            <a:pPr lvl="1"/>
+            <a:r>
+              <a:rPr sz="1100"/>
+              <a:t>FW Basic ~€300 | VPN Gateway deferred (€0) | Bastion ~€120 | DNS ~€25 | LAW ~€50</a:t>
+            </a:r>
+          </a:p>
+          <a:p>
+            <a:pPr lvl="1"/>
+            <a:r>
+              <a:rPr sz="1100"/>
+              <a:t>ALZ-konform: NEIN  |  Differenz: −€550/Mon. (52 % günstiger)</a:t>
+            </a:r>
+          </a:p>
+          <a:p>
+            <a:pPr lvl="1"/>
+            <a:r>
+              <a:rPr sz="1100"/>
+              <a:t>Bruch: Firewall Basic = keine App-Rules, kein Threat Intel, kein Autoscaling</a:t>
+            </a:r>
+          </a:p>
+          <a:p>
+            <a:pPr/>
+            <a:r>
+              <a:rPr sz="1100"/>
+              <a:t>Option D – Microsoft-Default  ~€5.800/Monat  (maximaler Standard)</a:t>
+            </a:r>
+          </a:p>
+          <a:p>
+            <a:pPr lvl="1"/>
+            <a:r>
+              <a:rPr sz="1100"/>
+              <a:t>FW Premium 2× ~€2.200 | DDoS Plan ~€2.500 | ER GW 2× ~€560 | VPN 2× | Bastion 2× | 2 Regionen</a:t>
+            </a:r>
+          </a:p>
+          <a:p>
+            <a:pPr lvl="1"/>
+            <a:r>
+              <a:rPr sz="1100"/>
+              <a:t>ALZ-konform: Ja (vollständig)  |  Differenz: +€4.750/Mon. (452 % teurer als A)</a:t>
+            </a:r>
+          </a:p>
+        </p:txBody>
+      </p:sp>
+      <p:sp>
+        <p:nvSpPr>
+          <p:cNvPr id="4" name="Subtitle 3"/>
           <p:cNvSpPr>
             <a:spLocks noGrp="1"/>
           </p:cNvSpPr>
@@ -30373,26 +28514,9 @@
           <a:lstStyle/>
           <a:p>
             <a:r>
-              <a:t>Klare Entscheidungen für einen sicheren Start</a:t>
-            </a:r>
-          </a:p>
-        </p:txBody>
-      </p:sp>
-      <p:sp>
-        <p:nvSpPr>
-          <p:cNvPr id="4" name="Text Placeholder 3"/>
-          <p:cNvSpPr>
-            <a:spLocks noGrp="1"/>
-          </p:cNvSpPr>
-          <p:nvPr>
-            <p:ph type="body" idx="13" sz="quarter"/>
-          </p:nvPr>
-        </p:nvSpPr>
-        <p:spPr/>
-        <p:txBody>
-          <a:bodyPr/>
-          <a:lstStyle/>
-          <a:p/>
+              <a:t>Kosten und Kostensteuerung</a:t>
+            </a:r>
+          </a:p>
         </p:txBody>
       </p:sp>
     </p:spTree>
@@ -30429,79 +28553,14 @@
           <a:lstStyle/>
           <a:p>
             <a:r>
-              <a:t>Top-Risiken und Entscheidungsbedarf</a:t>
-            </a:r>
-          </a:p>
-        </p:txBody>
-      </p:sp>
-      <p:sp>
-        <p:nvSpPr>
-          <p:cNvPr id="3" name="Text Placeholder 2"/>
-          <p:cNvSpPr>
-            <a:spLocks noGrp="1"/>
-          </p:cNvSpPr>
-          <p:nvPr>
-            <p:ph type="body" idx="13" sz="quarter"/>
-          </p:nvPr>
-        </p:nvSpPr>
-        <p:spPr/>
-        <p:txBody>
-          <a:bodyPr wrap="square"/>
-          <a:lstStyle/>
-          <a:p>
-            <a:pPr/>
-            <a:r>
-              <a:rPr sz="1300"/>
-              <a:t>DDoS im Default AN → ~€2.500/Monat unerwartet; deployDdosProtectionPlan: false für Start</a:t>
-            </a:r>
-          </a:p>
-          <a:p>
-            <a:pPr/>
-            <a:r>
-              <a:rPr sz="1300"/>
-              <a:t>Subscription-Typ: kein Free Tier → EA/MCA/PAYG vor Bootstrap sicherstellen</a:t>
-            </a:r>
-          </a:p>
-          <a:p>
-            <a:pPr/>
-            <a:r>
-              <a:rPr sz="1300"/>
-              <a:t>IP-Adresskonflikt On-Prem mit Hub-VNets → IP-Plan vor Netzwerk-Deploy abstimmen</a:t>
-            </a:r>
-          </a:p>
-          <a:p>
-            <a:pPr/>
-            <a:r>
-              <a:rPr sz="1300"/>
-              <a:t>Defender-Pläne auto. per Policy aktiviert → Tier-Konfiguration vor Apply reviewen</a:t>
-            </a:r>
-          </a:p>
-          <a:p>
-            <a:pPr/>
-            <a:r>
-              <a:rPr sz="1300"/>
-              <a:t>Entscheidung: network_type: none (€0) vs. hubNetworking (~€5.800) für Pilot</a:t>
-            </a:r>
-          </a:p>
-          <a:p>
-            <a:pPr/>
-            <a:r>
-              <a:rPr sz="1300"/>
-              <a:t>Entscheidung: Enforcement-Zeitpunkt – wann von DoNotEnforce auf Enabled (Empfehlung: 4–8 Wochen Audit-Phase)</a:t>
-            </a:r>
-          </a:p>
-          <a:p>
-            <a:pPr/>
-            <a:r>
-              <a:rPr sz="1300"/>
-              <a:t>Entscheidung: On-Prem-Anbindung – VPN vs. ExpressRoute vs. keins (je nach SLA und Bandbreite)</a:t>
-            </a:r>
-          </a:p>
-        </p:txBody>
-      </p:sp>
-      <p:sp>
-        <p:nvSpPr>
-          <p:cNvPr id="4" name="Subtitle 3"/>
+              <a:t>11  ·  Roadmap und Phasen</a:t>
+            </a:r>
+          </a:p>
+        </p:txBody>
+      </p:sp>
+      <p:sp>
+        <p:nvSpPr>
+          <p:cNvPr id="3" name="Subtitle 2"/>
           <p:cNvSpPr>
             <a:spLocks noGrp="1"/>
           </p:cNvSpPr>
@@ -30515,9 +28574,26 @@
           <a:lstStyle/>
           <a:p>
             <a:r>
-              <a:t>Risiken und Entscheidungen</a:t>
-            </a:r>
-          </a:p>
+              <a:t>6 Phasen – von Kickoff bis laufendem Betrieb</a:t>
+            </a:r>
+          </a:p>
+        </p:txBody>
+      </p:sp>
+      <p:sp>
+        <p:nvSpPr>
+          <p:cNvPr id="4" name="Text Placeholder 3"/>
+          <p:cNvSpPr>
+            <a:spLocks noGrp="1"/>
+          </p:cNvSpPr>
+          <p:nvPr>
+            <p:ph type="body" idx="13" sz="quarter"/>
+          </p:nvPr>
+        </p:nvSpPr>
+        <p:spPr/>
+        <p:txBody>
+          <a:bodyPr/>
+          <a:lstStyle/>
+          <a:p/>
         </p:txBody>
       </p:sp>
     </p:spTree>
@@ -30554,14 +28630,72 @@
           <a:lstStyle/>
           <a:p>
             <a:r>
-              <a:t>13  ·  Ergänzende Randthemen</a:t>
-            </a:r>
-          </a:p>
-        </p:txBody>
-      </p:sp>
-      <p:sp>
-        <p:nvSpPr>
-          <p:cNvPr id="3" name="Subtitle 2"/>
+              <a:t>6 Projektphasen im Überblick</a:t>
+            </a:r>
+          </a:p>
+        </p:txBody>
+      </p:sp>
+      <p:sp>
+        <p:nvSpPr>
+          <p:cNvPr id="3" name="Text Placeholder 2"/>
+          <p:cNvSpPr>
+            <a:spLocks noGrp="1"/>
+          </p:cNvSpPr>
+          <p:nvPr>
+            <p:ph type="body" idx="13" sz="quarter"/>
+          </p:nvPr>
+        </p:nvSpPr>
+        <p:spPr/>
+        <p:txBody>
+          <a:bodyPr wrap="square"/>
+          <a:lstStyle/>
+          <a:p>
+            <a:pPr/>
+            <a:r>
+              <a:rPr sz="1300"/>
+              <a:t>Phase 1 – Beratung &amp; Kickoff: Discovery-Workshop; Entscheidungsprotokoll (Region, Netzwerk, DDoS, Enforcement)</a:t>
+            </a:r>
+          </a:p>
+          <a:p>
+            <a:pPr/>
+            <a:r>
+              <a:rPr sz="1300"/>
+              <a:t>Phase 2 – Bootstrap &amp; Grundgerüst: Deploy-Accelerator; MGs + Policies (DoNotEnforce); Logging aktiv  ≈ €0</a:t>
+            </a:r>
+          </a:p>
+          <a:p>
+            <a:pPr/>
+            <a:r>
+              <a:rPr sz="1300"/>
+              <a:t>Phase 3 – Netzwerk-Pilot: Hub-VNets + DNS; erste Spoke-VNets; ggf. minimale Firewall  €15–€1.300/Monat</a:t>
+            </a:r>
+          </a:p>
+          <a:p>
+            <a:pPr/>
+            <a:r>
+              <a:rPr sz="1300"/>
+              <a:t>Phase 4 – Sicherheit &amp; Enforcement: Defender aktivieren; Guardrails einschalten; Remediation  + Defender-Kosten</a:t>
+            </a:r>
+          </a:p>
+          <a:p>
+            <a:pPr/>
+            <a:r>
+              <a:rPr sz="1300"/>
+              <a:t>Phase 5 – Workload-Onboarding: erste Applikation in ALZ; Spoke-Netzwerke; RBAC-Gruppen befüllen</a:t>
+            </a:r>
+          </a:p>
+          <a:p>
+            <a:pPr/>
+            <a:r>
+              <a:rPr sz="1300"/>
+              <a:t>Phase 6 – Betrieb &amp; Optimierung: Cost Management; Tagging; Monitoring-Dashboards; Policy-Weiterentwicklung</a:t>
+            </a:r>
+          </a:p>
+        </p:txBody>
+      </p:sp>
+      <p:sp>
+        <p:nvSpPr>
+          <p:cNvPr id="4" name="Subtitle 3"/>
           <p:cNvSpPr>
             <a:spLocks noGrp="1"/>
           </p:cNvSpPr>
@@ -30575,26 +28709,9 @@
           <a:lstStyle/>
           <a:p>
             <a:r>
-              <a:t>Außerhalb des ALZ-Scopes – aber eng verknüpft</a:t>
-            </a:r>
-          </a:p>
-        </p:txBody>
-      </p:sp>
-      <p:sp>
-        <p:nvSpPr>
-          <p:cNvPr id="4" name="Text Placeholder 3"/>
-          <p:cNvSpPr>
-            <a:spLocks noGrp="1"/>
-          </p:cNvSpPr>
-          <p:nvPr>
-            <p:ph type="body" idx="13" sz="quarter"/>
-          </p:nvPr>
-        </p:nvSpPr>
-        <p:spPr/>
-        <p:txBody>
-          <a:bodyPr/>
-          <a:lstStyle/>
-          <a:p/>
+              <a:t>Roadmap und Phasen</a:t>
+            </a:r>
+          </a:p>
         </p:txBody>
       </p:sp>
     </p:spTree>
@@ -30631,72 +28748,14 @@
           <a:lstStyle/>
           <a:p>
             <a:r>
-              <a:t>Abhängigkeiten und Folge-Bausteine</a:t>
-            </a:r>
-          </a:p>
-        </p:txBody>
-      </p:sp>
-      <p:sp>
-        <p:nvSpPr>
-          <p:cNvPr id="3" name="Text Placeholder 2"/>
-          <p:cNvSpPr>
-            <a:spLocks noGrp="1"/>
-          </p:cNvSpPr>
-          <p:nvPr>
-            <p:ph type="body" idx="13" sz="quarter"/>
-          </p:nvPr>
-        </p:nvSpPr>
-        <p:spPr/>
-        <p:txBody>
-          <a:bodyPr wrap="square"/>
-          <a:lstStyle/>
-          <a:p>
-            <a:pPr/>
-            <a:r>
-              <a:rPr sz="1300"/>
-              <a:t>Entra ID &amp; Identity: PIM, Conditional Access, hybride Identitäten → Identity-Baseline als Folgestufe</a:t>
-            </a:r>
-          </a:p>
-          <a:p>
-            <a:pPr/>
-            <a:r>
-              <a:rPr sz="1300"/>
-              <a:t>On-Prem-Anbindung: VPN-Gateway (deployt, aktiv) oder ExpressRoute → Leitungsbestellung + BGP-Konfiguration außerhalb Scope</a:t>
-            </a:r>
-          </a:p>
-          <a:p>
-            <a:pPr/>
-            <a:r>
-              <a:rPr sz="1300"/>
-              <a:t>Backup &amp; DR: Deploy-VM-Backup aktiv via Policy; Recovery Vault-Konfiguration und DR-Tests als Folgestufe</a:t>
-            </a:r>
-          </a:p>
-          <a:p>
-            <a:pPr/>
-            <a:r>
-              <a:rPr sz="1300"/>
-              <a:t>Kostenmanagement: Azure Cost Management Dashboards, Budget-Alerts je MG/Sub, FinOps-Prozesse</a:t>
-            </a:r>
-          </a:p>
-          <a:p>
-            <a:pPr/>
-            <a:r>
-              <a:rPr sz="1300"/>
-              <a:t>Compliance &amp; Regulatorik: BSI, ISO 27001, DSGVO → Defender for Cloud Regulatory Compliance Dashboard</a:t>
-            </a:r>
-          </a:p>
-          <a:p>
-            <a:pPr/>
-            <a:r>
-              <a:rPr sz="1300"/>
-              <a:t>Workload-Migration: Azure Migrate Assessment → ALZ ist das Ziel, nicht der Migrations-Prozess selbst</a:t>
-            </a:r>
-          </a:p>
-        </p:txBody>
-      </p:sp>
-      <p:sp>
-        <p:nvSpPr>
-          <p:cNvPr id="4" name="Subtitle 3"/>
+              <a:t>12  ·  Risiken und Entscheidungen</a:t>
+            </a:r>
+          </a:p>
+        </p:txBody>
+      </p:sp>
+      <p:sp>
+        <p:nvSpPr>
+          <p:cNvPr id="3" name="Subtitle 2"/>
           <p:cNvSpPr>
             <a:spLocks noGrp="1"/>
           </p:cNvSpPr>
@@ -30710,9 +28769,26 @@
           <a:lstStyle/>
           <a:p>
             <a:r>
-              <a:t>Ergänzende Randthemen</a:t>
-            </a:r>
-          </a:p>
+              <a:t>Klare Entscheidungen für einen sicheren Start</a:t>
+            </a:r>
+          </a:p>
+        </p:txBody>
+      </p:sp>
+      <p:sp>
+        <p:nvSpPr>
+          <p:cNvPr id="4" name="Text Placeholder 3"/>
+          <p:cNvSpPr>
+            <a:spLocks noGrp="1"/>
+          </p:cNvSpPr>
+          <p:nvPr>
+            <p:ph type="body" idx="13" sz="quarter"/>
+          </p:nvPr>
+        </p:nvSpPr>
+        <p:spPr/>
+        <p:txBody>
+          <a:bodyPr/>
+          <a:lstStyle/>
+          <a:p/>
         </p:txBody>
       </p:sp>
     </p:spTree>
@@ -30749,14 +28825,79 @@
           <a:lstStyle/>
           <a:p>
             <a:r>
-              <a:t>14  ·  Nächste Schritte</a:t>
-            </a:r>
-          </a:p>
-        </p:txBody>
-      </p:sp>
-      <p:sp>
-        <p:nvSpPr>
-          <p:cNvPr id="3" name="Subtitle 2"/>
+              <a:t>Top-Risiken und Entscheidungsbedarf</a:t>
+            </a:r>
+          </a:p>
+        </p:txBody>
+      </p:sp>
+      <p:sp>
+        <p:nvSpPr>
+          <p:cNvPr id="3" name="Text Placeholder 2"/>
+          <p:cNvSpPr>
+            <a:spLocks noGrp="1"/>
+          </p:cNvSpPr>
+          <p:nvPr>
+            <p:ph type="body" idx="13" sz="quarter"/>
+          </p:nvPr>
+        </p:nvSpPr>
+        <p:spPr/>
+        <p:txBody>
+          <a:bodyPr wrap="square"/>
+          <a:lstStyle/>
+          <a:p>
+            <a:pPr/>
+            <a:r>
+              <a:rPr sz="1300"/>
+              <a:t>DDoS im Default AN → ~€2.500/Monat unerwartet; deployDdosProtectionPlan: false für Start</a:t>
+            </a:r>
+          </a:p>
+          <a:p>
+            <a:pPr/>
+            <a:r>
+              <a:rPr sz="1300"/>
+              <a:t>Subscription-Typ: kein Free Tier → EA/MCA/PAYG vor Bootstrap sicherstellen</a:t>
+            </a:r>
+          </a:p>
+          <a:p>
+            <a:pPr/>
+            <a:r>
+              <a:rPr sz="1300"/>
+              <a:t>IP-Adresskonflikt On-Prem mit Hub-VNets → IP-Plan vor Netzwerk-Deploy abstimmen</a:t>
+            </a:r>
+          </a:p>
+          <a:p>
+            <a:pPr/>
+            <a:r>
+              <a:rPr sz="1300"/>
+              <a:t>Defender-Pläne auto. per Policy aktiviert → Tier-Konfiguration vor Apply reviewen</a:t>
+            </a:r>
+          </a:p>
+          <a:p>
+            <a:pPr/>
+            <a:r>
+              <a:rPr sz="1300"/>
+              <a:t>Entscheidung: network_type: none (€0) vs. hubNetworking (~€5.800) für Pilot</a:t>
+            </a:r>
+          </a:p>
+          <a:p>
+            <a:pPr/>
+            <a:r>
+              <a:rPr sz="1300"/>
+              <a:t>Entscheidung: Enforcement-Zeitpunkt – wann von DoNotEnforce auf Enabled (Empfehlung: 4–8 Wochen Audit-Phase)</a:t>
+            </a:r>
+          </a:p>
+          <a:p>
+            <a:pPr/>
+            <a:r>
+              <a:rPr sz="1300"/>
+              <a:t>Entscheidung: On-Prem-Anbindung – VPN vs. ExpressRoute vs. keins (je nach SLA und Bandbreite)</a:t>
+            </a:r>
+          </a:p>
+        </p:txBody>
+      </p:sp>
+      <p:sp>
+        <p:nvSpPr>
+          <p:cNvPr id="4" name="Subtitle 3"/>
           <p:cNvSpPr>
             <a:spLocks noGrp="1"/>
           </p:cNvSpPr>
@@ -30770,26 +28911,9 @@
           <a:lstStyle/>
           <a:p>
             <a:r>
-              <a:t>Empfohlener Pilot-Pfad in 6 Schritten – ohne Kostenrisiko</a:t>
-            </a:r>
-          </a:p>
-        </p:txBody>
-      </p:sp>
-      <p:sp>
-        <p:nvSpPr>
-          <p:cNvPr id="4" name="Text Placeholder 3"/>
-          <p:cNvSpPr>
-            <a:spLocks noGrp="1"/>
-          </p:cNvSpPr>
-          <p:nvPr>
-            <p:ph type="body" idx="13" sz="quarter"/>
-          </p:nvPr>
-        </p:nvSpPr>
-        <p:spPr/>
-        <p:txBody>
-          <a:bodyPr/>
-          <a:lstStyle/>
-          <a:p/>
+              <a:t>Risiken und Entscheidungen</a:t>
+            </a:r>
+          </a:p>
         </p:txBody>
       </p:sp>
     </p:spTree>
@@ -30826,79 +28950,14 @@
           <a:lstStyle/>
           <a:p>
             <a:r>
-              <a:t>Sofortmaßnahmen und empfohlener Pilot-Pfad</a:t>
-            </a:r>
-          </a:p>
-        </p:txBody>
-      </p:sp>
-      <p:sp>
-        <p:nvSpPr>
-          <p:cNvPr id="3" name="Text Placeholder 2"/>
-          <p:cNvSpPr>
-            <a:spLocks noGrp="1"/>
-          </p:cNvSpPr>
-          <p:nvPr>
-            <p:ph type="body" idx="13" sz="quarter"/>
-          </p:nvPr>
-        </p:nvSpPr>
-        <p:spPr/>
-        <p:txBody>
-          <a:bodyPr wrap="square"/>
-          <a:lstStyle/>
-          <a:p>
-            <a:pPr/>
-            <a:r>
-              <a:rPr sz="1300"/>
-              <a:t>1.  Subscription-ID + GitHub PAT in config/inputs-github.yaml eintragen</a:t>
-            </a:r>
-          </a:p>
-          <a:p>
-            <a:pPr/>
-            <a:r>
-              <a:rPr sz="1300"/>
-              <a:t>2.  Bootstrap: Deploy-Accelerator -inputs config/inputs-github.yaml config/platform-landing-zone.yaml</a:t>
-            </a:r>
-          </a:p>
-          <a:p>
-            <a:pPr/>
-            <a:r>
-              <a:rPr sz="1300"/>
-              <a:t>3.  Pipeline mit What-If prüfen → welche Ressourcen werden erstellt?</a:t>
-            </a:r>
-          </a:p>
-          <a:p>
-            <a:pPr/>
-            <a:r>
-              <a:rPr sz="1300"/>
-              <a:t>4.  Apply genehmigen – network_type: none (≈€0) für risikofreien Pilot-Start</a:t>
-            </a:r>
-          </a:p>
-          <a:p>
-            <a:pPr/>
-            <a:r>
-              <a:rPr sz="1300"/>
-              <a:t>5.  Policy-Compliance-Dashboard reviewen → welche Guardrails greifen, welche nicht?</a:t>
-            </a:r>
-          </a:p>
-          <a:p>
-            <a:pPr/>
-            <a:r>
-              <a:rPr sz="1300"/>
-              <a:t>6.  Schrittweise Enforcement und Netzwerk-Dienste aktivieren nach Audit-Phase</a:t>
-            </a:r>
-          </a:p>
-          <a:p>
-            <a:pPr/>
-            <a:r>
-              <a:rPr sz="1300"/>
-              <a:t>Bechtle begleitet: Kickoff-Workshop → Bootstrap-Begleitung → Pilot → Workload-Onboarding</a:t>
-            </a:r>
-          </a:p>
-        </p:txBody>
-      </p:sp>
-      <p:sp>
-        <p:nvSpPr>
-          <p:cNvPr id="4" name="Subtitle 3"/>
+              <a:t>13  ·  Ergänzende Randthemen</a:t>
+            </a:r>
+          </a:p>
+        </p:txBody>
+      </p:sp>
+      <p:sp>
+        <p:nvSpPr>
+          <p:cNvPr id="3" name="Subtitle 2"/>
           <p:cNvSpPr>
             <a:spLocks noGrp="1"/>
           </p:cNvSpPr>
@@ -30912,9 +28971,26 @@
           <a:lstStyle/>
           <a:p>
             <a:r>
-              <a:t>Nächste Schritte</a:t>
-            </a:r>
-          </a:p>
+              <a:t>Außerhalb des ALZ-Scopes – aber eng verknüpft</a:t>
+            </a:r>
+          </a:p>
+        </p:txBody>
+      </p:sp>
+      <p:sp>
+        <p:nvSpPr>
+          <p:cNvPr id="4" name="Text Placeholder 3"/>
+          <p:cNvSpPr>
+            <a:spLocks noGrp="1"/>
+          </p:cNvSpPr>
+          <p:nvPr>
+            <p:ph type="body" idx="13" sz="quarter"/>
+          </p:nvPr>
+        </p:nvSpPr>
+        <p:spPr/>
+        <p:txBody>
+          <a:bodyPr/>
+          <a:lstStyle/>
+          <a:p/>
         </p:txBody>
       </p:sp>
     </p:spTree>
@@ -30951,14 +29027,72 @@
           <a:lstStyle/>
           <a:p>
             <a:r>
-              <a:t>Vielen Dank</a:t>
-            </a:r>
-          </a:p>
-        </p:txBody>
-      </p:sp>
-      <p:sp>
-        <p:nvSpPr>
-          <p:cNvPr id="3" name="Subtitle 2"/>
+              <a:t>Abhängigkeiten und Folge-Bausteine</a:t>
+            </a:r>
+          </a:p>
+        </p:txBody>
+      </p:sp>
+      <p:sp>
+        <p:nvSpPr>
+          <p:cNvPr id="3" name="Text Placeholder 2"/>
+          <p:cNvSpPr>
+            <a:spLocks noGrp="1"/>
+          </p:cNvSpPr>
+          <p:nvPr>
+            <p:ph type="body" idx="13" sz="quarter"/>
+          </p:nvPr>
+        </p:nvSpPr>
+        <p:spPr/>
+        <p:txBody>
+          <a:bodyPr wrap="square"/>
+          <a:lstStyle/>
+          <a:p>
+            <a:pPr/>
+            <a:r>
+              <a:rPr sz="1300"/>
+              <a:t>Entra ID &amp; Identity: PIM, Conditional Access, hybride Identitäten → Identity-Baseline als Folgestufe</a:t>
+            </a:r>
+          </a:p>
+          <a:p>
+            <a:pPr/>
+            <a:r>
+              <a:rPr sz="1300"/>
+              <a:t>On-Prem-Anbindung: VPN-Gateway (deployt, aktiv) oder ExpressRoute → Leitungsbestellung + BGP-Konfiguration außerhalb Scope</a:t>
+            </a:r>
+          </a:p>
+          <a:p>
+            <a:pPr/>
+            <a:r>
+              <a:rPr sz="1300"/>
+              <a:t>Backup &amp; DR: Deploy-VM-Backup aktiv via Policy; Recovery Vault-Konfiguration und DR-Tests als Folgestufe</a:t>
+            </a:r>
+          </a:p>
+          <a:p>
+            <a:pPr/>
+            <a:r>
+              <a:rPr sz="1300"/>
+              <a:t>Kostenmanagement: Azure Cost Management Dashboards, Budget-Alerts je MG/Sub, FinOps-Prozesse</a:t>
+            </a:r>
+          </a:p>
+          <a:p>
+            <a:pPr/>
+            <a:r>
+              <a:rPr sz="1300"/>
+              <a:t>Compliance &amp; Regulatorik: BSI, ISO 27001, DSGVO → Defender for Cloud Regulatory Compliance Dashboard</a:t>
+            </a:r>
+          </a:p>
+          <a:p>
+            <a:pPr/>
+            <a:r>
+              <a:rPr sz="1300"/>
+              <a:t>Workload-Migration: Azure Migrate Assessment → ALZ ist das Ziel, nicht der Migrations-Prozess selbst</a:t>
+            </a:r>
+          </a:p>
+        </p:txBody>
+      </p:sp>
+      <p:sp>
+        <p:nvSpPr>
+          <p:cNvPr id="4" name="Subtitle 3"/>
           <p:cNvSpPr>
             <a:spLocks noGrp="1"/>
           </p:cNvSpPr>
@@ -30972,58 +29106,7 @@
           <a:lstStyle/>
           <a:p>
             <a:r>
-              <a:t>Nächster Schritt: Kickoff-Workshop vereinbaren</a:t>
-            </a:r>
-          </a:p>
-        </p:txBody>
-      </p:sp>
-      <p:sp>
-        <p:nvSpPr>
-          <p:cNvPr id="4" name="Text Placeholder 3"/>
-          <p:cNvSpPr>
-            <a:spLocks noGrp="1"/>
-          </p:cNvSpPr>
-          <p:nvPr>
-            <p:ph type="body" idx="13" sz="quarter"/>
-          </p:nvPr>
-        </p:nvSpPr>
-        <p:spPr/>
-        <p:txBody>
-          <a:bodyPr wrap="square"/>
-          <a:lstStyle/>
-          <a:p>
-            <a:pPr/>
-            <a:r>
-              <a:rPr sz="1200"/>
-              <a:t>&lt;KUNDE&gt;</a:t>
-            </a:r>
-          </a:p>
-          <a:p>
-            <a:pPr/>
-            <a:r>
-              <a:rPr sz="1200"/>
-              <a:t> </a:t>
-            </a:r>
-          </a:p>
-          <a:p>
-            <a:pPr/>
-            <a:r>
-              <a:rPr sz="1200"/>
-              <a:t>Bechtle GmbH &amp; Co. KG</a:t>
-            </a:r>
-          </a:p>
-          <a:p>
-            <a:pPr/>
-            <a:r>
-              <a:rPr sz="1200"/>
-              <a:t>Gottlieb-Daimler-Straße 2 · 68165 Mannheim</a:t>
-            </a:r>
-          </a:p>
-          <a:p>
-            <a:pPr/>
-            <a:r>
-              <a:rPr sz="1200"/>
-              <a:t>T +49 621 87503-0 · www.bechtle.com</a:t>
+              <a:t>Ergänzende Randthemen</a:t>
             </a:r>
           </a:p>
         </p:txBody>
@@ -31062,14 +29145,35 @@
           <a:lstStyle/>
           <a:p>
             <a:r>
-              <a:t>Die vier Kernnutzen der Azure Landing Zone</a:t>
-            </a:r>
-          </a:p>
-        </p:txBody>
-      </p:sp>
-      <p:sp>
-        <p:nvSpPr>
-          <p:cNvPr id="3" name="Text Placeholder 2"/>
+              <a:t>Management Summary</a:t>
+            </a:r>
+          </a:p>
+        </p:txBody>
+      </p:sp>
+      <p:sp>
+        <p:nvSpPr>
+          <p:cNvPr id="3" name="Subtitle 2"/>
+          <p:cNvSpPr>
+            <a:spLocks noGrp="1"/>
+          </p:cNvSpPr>
+          <p:nvPr>
+            <p:ph type="subTitle" idx="1"/>
+          </p:nvPr>
+        </p:nvSpPr>
+        <p:spPr/>
+        <p:txBody>
+          <a:bodyPr/>
+          <a:lstStyle/>
+          <a:p>
+            <a:r>
+              <a:t>Governance · Netzwerk · Sicherheit · Automatisierung – als IaC-Fundament</a:t>
+            </a:r>
+          </a:p>
+        </p:txBody>
+      </p:sp>
+      <p:sp>
+        <p:nvSpPr>
+          <p:cNvPr id="4" name="Text Placeholder 3"/>
           <p:cNvSpPr>
             <a:spLocks noGrp="1"/>
           </p:cNvSpPr>
@@ -31084,55 +29188,73 @@
           <a:p>
             <a:pPr/>
             <a:r>
-              <a:rPr sz="1300"/>
-              <a:t>Governance &amp; Policies: 149 Policy-Defs, 42 Initiativen, 123 Assignments – automatische Guardrails auf allen MG-Ebenen</a:t>
+              <a:rPr sz="1200"/>
+              <a:t>12 Management Groups</a:t>
             </a:r>
           </a:p>
           <a:p>
             <a:pPr/>
             <a:r>
-              <a:rPr sz="1300"/>
-              <a:t>Netzwerk-Hub (Hub-and-Spoke): Azure Firewall, Bastion, Private DNS – sichere Konnektivität für alle Workloads</a:t>
+              <a:rPr sz="1200"/>
+              <a:t>149 Policy-Definitionen</a:t>
             </a:r>
           </a:p>
           <a:p>
             <a:pPr/>
             <a:r>
-              <a:rPr sz="1300"/>
-              <a:t>Sicherheit &amp; Defender: Microsoft Defender for Cloud automatisch via Policy aktiviert – keine manuelle Konfiguration</a:t>
+              <a:rPr sz="1200"/>
+              <a:t>42 Initiativen  ·  123 Assignments</a:t>
             </a:r>
           </a:p>
           <a:p>
             <a:pPr/>
             <a:r>
-              <a:rPr sz="1300"/>
-              <a:t>IaC &amp; Automatisierung: 18 Deploy-Stufen, OIDC (passwortlos), What-If vor Apply, Approval-Gate</a:t>
+              <a:rPr sz="1200"/>
+              <a:t>22 AVM-Module</a:t>
             </a:r>
           </a:p>
           <a:p>
             <a:pPr/>
             <a:r>
-              <a:rPr sz="1300"/>
-              <a:t>Kosten: Microsoft-Default ~€5.800/Monat  ↔  Pilot mit network_type: none ≈ €0</a:t>
+              <a:rPr sz="1200"/>
+              <a:t>18 Deploy-Stufen</a:t>
             </a:r>
           </a:p>
           <a:p>
             <a:pPr/>
             <a:r>
-              <a:rPr sz="1300"/>
-              <a:t>Empfehlung: Pilot mit 1 Subscription, network_type: none, Policies im DoNotEnforce-Modus – Governance vom ersten Tag an</a:t>
-            </a:r>
-          </a:p>
-        </p:txBody>
-      </p:sp>
-      <p:sp>
-        <p:nvSpPr>
-          <p:cNvPr id="4" name="Subtitle 3"/>
-          <p:cNvSpPr>
-            <a:spLocks noGrp="1"/>
-          </p:cNvSpPr>
-          <p:nvPr>
-            <p:ph type="subTitle" idx="1"/>
+              <a:rPr sz="1200"/>
+              <a:t>~€5.800/Monat (vollständig steuerbar)</a:t>
+            </a:r>
+          </a:p>
+        </p:txBody>
+      </p:sp>
+    </p:spTree>
+  </p:cSld>
+  <p:clrMapOvr>
+    <a:masterClrMapping/>
+  </p:clrMapOvr>
+</p:sld>
+</file>
+
+<file path=ppt/slides/slide40.xml><?xml version="1.0" encoding="utf-8"?>
+<p:sld xmlns:a="http://schemas.openxmlformats.org/drawingml/2006/main" xmlns:p="http://schemas.openxmlformats.org/presentationml/2006/main" xmlns:r="http://schemas.openxmlformats.org/officeDocument/2006/relationships">
+  <p:cSld>
+    <p:spTree>
+      <p:nvGrpSpPr>
+        <p:cNvPr id="1" name=""/>
+        <p:cNvGrpSpPr/>
+        <p:nvPr/>
+      </p:nvGrpSpPr>
+      <p:grpSpPr/>
+      <p:sp>
+        <p:nvSpPr>
+          <p:cNvPr id="2" name="Title 1"/>
+          <p:cNvSpPr>
+            <a:spLocks noGrp="1"/>
+          </p:cNvSpPr>
+          <p:nvPr>
+            <p:ph type="title"/>
           </p:nvPr>
         </p:nvSpPr>
         <p:spPr/>
@@ -31141,7 +29263,281 @@
           <a:lstStyle/>
           <a:p>
             <a:r>
-              <a:t>Management Summary</a:t>
+              <a:t>14  ·  Nächste Schritte</a:t>
+            </a:r>
+          </a:p>
+        </p:txBody>
+      </p:sp>
+      <p:sp>
+        <p:nvSpPr>
+          <p:cNvPr id="3" name="Subtitle 2"/>
+          <p:cNvSpPr>
+            <a:spLocks noGrp="1"/>
+          </p:cNvSpPr>
+          <p:nvPr>
+            <p:ph type="subTitle" idx="1"/>
+          </p:nvPr>
+        </p:nvSpPr>
+        <p:spPr/>
+        <p:txBody>
+          <a:bodyPr/>
+          <a:lstStyle/>
+          <a:p>
+            <a:r>
+              <a:t>Empfohlener Pilot-Pfad in 6 Schritten – ohne Kostenrisiko</a:t>
+            </a:r>
+          </a:p>
+        </p:txBody>
+      </p:sp>
+      <p:sp>
+        <p:nvSpPr>
+          <p:cNvPr id="4" name="Text Placeholder 3"/>
+          <p:cNvSpPr>
+            <a:spLocks noGrp="1"/>
+          </p:cNvSpPr>
+          <p:nvPr>
+            <p:ph type="body" idx="13" sz="quarter"/>
+          </p:nvPr>
+        </p:nvSpPr>
+        <p:spPr/>
+        <p:txBody>
+          <a:bodyPr/>
+          <a:lstStyle/>
+          <a:p/>
+        </p:txBody>
+      </p:sp>
+    </p:spTree>
+  </p:cSld>
+  <p:clrMapOvr>
+    <a:masterClrMapping/>
+  </p:clrMapOvr>
+</p:sld>
+</file>
+
+<file path=ppt/slides/slide41.xml><?xml version="1.0" encoding="utf-8"?>
+<p:sld xmlns:a="http://schemas.openxmlformats.org/drawingml/2006/main" xmlns:p="http://schemas.openxmlformats.org/presentationml/2006/main" xmlns:r="http://schemas.openxmlformats.org/officeDocument/2006/relationships">
+  <p:cSld>
+    <p:spTree>
+      <p:nvGrpSpPr>
+        <p:cNvPr id="1" name=""/>
+        <p:cNvGrpSpPr/>
+        <p:nvPr/>
+      </p:nvGrpSpPr>
+      <p:grpSpPr/>
+      <p:sp>
+        <p:nvSpPr>
+          <p:cNvPr id="2" name="Title 1"/>
+          <p:cNvSpPr>
+            <a:spLocks noGrp="1"/>
+          </p:cNvSpPr>
+          <p:nvPr>
+            <p:ph type="title"/>
+          </p:nvPr>
+        </p:nvSpPr>
+        <p:spPr/>
+        <p:txBody>
+          <a:bodyPr/>
+          <a:lstStyle/>
+          <a:p>
+            <a:r>
+              <a:t>Sofortmaßnahmen und empfohlener Pilot-Pfad</a:t>
+            </a:r>
+          </a:p>
+        </p:txBody>
+      </p:sp>
+      <p:sp>
+        <p:nvSpPr>
+          <p:cNvPr id="3" name="Text Placeholder 2"/>
+          <p:cNvSpPr>
+            <a:spLocks noGrp="1"/>
+          </p:cNvSpPr>
+          <p:nvPr>
+            <p:ph type="body" idx="13" sz="quarter"/>
+          </p:nvPr>
+        </p:nvSpPr>
+        <p:spPr/>
+        <p:txBody>
+          <a:bodyPr wrap="square"/>
+          <a:lstStyle/>
+          <a:p>
+            <a:pPr/>
+            <a:r>
+              <a:rPr sz="1300"/>
+              <a:t>1.  Subscription-ID + GitHub PAT in config/inputs-github.yaml eintragen</a:t>
+            </a:r>
+          </a:p>
+          <a:p>
+            <a:pPr/>
+            <a:r>
+              <a:rPr sz="1300"/>
+              <a:t>2.  Bootstrap: Deploy-Accelerator -inputs config/inputs-github.yaml config/platform-landing-zone.yaml</a:t>
+            </a:r>
+          </a:p>
+          <a:p>
+            <a:pPr/>
+            <a:r>
+              <a:rPr sz="1300"/>
+              <a:t>3.  Pipeline mit What-If prüfen → welche Ressourcen werden erstellt?</a:t>
+            </a:r>
+          </a:p>
+          <a:p>
+            <a:pPr/>
+            <a:r>
+              <a:rPr sz="1300"/>
+              <a:t>4.  Apply genehmigen – network_type: none (≈€0) für risikofreien Pilot-Start</a:t>
+            </a:r>
+          </a:p>
+          <a:p>
+            <a:pPr/>
+            <a:r>
+              <a:rPr sz="1300"/>
+              <a:t>5.  Policy-Compliance-Dashboard reviewen → welche Guardrails greifen, welche nicht?</a:t>
+            </a:r>
+          </a:p>
+          <a:p>
+            <a:pPr/>
+            <a:r>
+              <a:rPr sz="1300"/>
+              <a:t>6.  Schrittweise Enforcement und Netzwerk-Dienste aktivieren nach Audit-Phase</a:t>
+            </a:r>
+          </a:p>
+          <a:p>
+            <a:pPr/>
+            <a:r>
+              <a:rPr sz="1300"/>
+              <a:t>Bechtle begleitet: Kickoff-Workshop → Bootstrap-Begleitung → Pilot → Workload-Onboarding</a:t>
+            </a:r>
+          </a:p>
+        </p:txBody>
+      </p:sp>
+      <p:sp>
+        <p:nvSpPr>
+          <p:cNvPr id="4" name="Subtitle 3"/>
+          <p:cNvSpPr>
+            <a:spLocks noGrp="1"/>
+          </p:cNvSpPr>
+          <p:nvPr>
+            <p:ph type="subTitle" idx="1"/>
+          </p:nvPr>
+        </p:nvSpPr>
+        <p:spPr/>
+        <p:txBody>
+          <a:bodyPr/>
+          <a:lstStyle/>
+          <a:p>
+            <a:r>
+              <a:t>Nächste Schritte</a:t>
+            </a:r>
+          </a:p>
+        </p:txBody>
+      </p:sp>
+    </p:spTree>
+  </p:cSld>
+  <p:clrMapOvr>
+    <a:masterClrMapping/>
+  </p:clrMapOvr>
+</p:sld>
+</file>
+
+<file path=ppt/slides/slide42.xml><?xml version="1.0" encoding="utf-8"?>
+<p:sld xmlns:a="http://schemas.openxmlformats.org/drawingml/2006/main" xmlns:p="http://schemas.openxmlformats.org/presentationml/2006/main" xmlns:r="http://schemas.openxmlformats.org/officeDocument/2006/relationships">
+  <p:cSld>
+    <p:spTree>
+      <p:nvGrpSpPr>
+        <p:cNvPr id="1" name=""/>
+        <p:cNvGrpSpPr/>
+        <p:nvPr/>
+      </p:nvGrpSpPr>
+      <p:grpSpPr/>
+      <p:sp>
+        <p:nvSpPr>
+          <p:cNvPr id="2" name="Title 1"/>
+          <p:cNvSpPr>
+            <a:spLocks noGrp="1"/>
+          </p:cNvSpPr>
+          <p:nvPr>
+            <p:ph type="title"/>
+          </p:nvPr>
+        </p:nvSpPr>
+        <p:spPr/>
+        <p:txBody>
+          <a:bodyPr/>
+          <a:lstStyle/>
+          <a:p>
+            <a:r>
+              <a:t>Vielen Dank</a:t>
+            </a:r>
+          </a:p>
+        </p:txBody>
+      </p:sp>
+      <p:sp>
+        <p:nvSpPr>
+          <p:cNvPr id="3" name="Subtitle 2"/>
+          <p:cNvSpPr>
+            <a:spLocks noGrp="1"/>
+          </p:cNvSpPr>
+          <p:nvPr>
+            <p:ph type="subTitle" idx="1"/>
+          </p:nvPr>
+        </p:nvSpPr>
+        <p:spPr/>
+        <p:txBody>
+          <a:bodyPr/>
+          <a:lstStyle/>
+          <a:p>
+            <a:r>
+              <a:t>Nächster Schritt: Kickoff-Workshop vereinbaren</a:t>
+            </a:r>
+          </a:p>
+        </p:txBody>
+      </p:sp>
+      <p:sp>
+        <p:nvSpPr>
+          <p:cNvPr id="4" name="Text Placeholder 3"/>
+          <p:cNvSpPr>
+            <a:spLocks noGrp="1"/>
+          </p:cNvSpPr>
+          <p:nvPr>
+            <p:ph type="body" idx="13" sz="quarter"/>
+          </p:nvPr>
+        </p:nvSpPr>
+        <p:spPr/>
+        <p:txBody>
+          <a:bodyPr wrap="square"/>
+          <a:lstStyle/>
+          <a:p>
+            <a:pPr/>
+            <a:r>
+              <a:rPr sz="1200"/>
+              <a:t>&lt;KUNDE&gt;</a:t>
+            </a:r>
+          </a:p>
+          <a:p>
+            <a:pPr/>
+            <a:r>
+              <a:rPr sz="1200"/>
+              <a:t> </a:t>
+            </a:r>
+          </a:p>
+          <a:p>
+            <a:pPr/>
+            <a:r>
+              <a:rPr sz="1200"/>
+              <a:t>Bechtle GmbH &amp; Co. KG</a:t>
+            </a:r>
+          </a:p>
+          <a:p>
+            <a:pPr/>
+            <a:r>
+              <a:rPr sz="1200"/>
+              <a:t>Gottlieb-Daimler-Straße 2 · 68165 Mannheim</a:t>
+            </a:r>
+          </a:p>
+          <a:p>
+            <a:pPr/>
+            <a:r>
+              <a:rPr sz="1200"/>
+              <a:t>T +49 621 87503-0 · www.bechtle.com</a:t>
             </a:r>
           </a:p>
         </p:txBody>
@@ -31180,14 +29576,72 @@
           <a:lstStyle/>
           <a:p>
             <a:r>
-              <a:t>1  ·  Ausgangslage und Zielbild</a:t>
-            </a:r>
-          </a:p>
-        </p:txBody>
-      </p:sp>
-      <p:sp>
-        <p:nvSpPr>
-          <p:cNvPr id="3" name="Subtitle 2"/>
+              <a:t>Die vier Kernnutzen der Azure Landing Zone</a:t>
+            </a:r>
+          </a:p>
+        </p:txBody>
+      </p:sp>
+      <p:sp>
+        <p:nvSpPr>
+          <p:cNvPr id="3" name="Text Placeholder 2"/>
+          <p:cNvSpPr>
+            <a:spLocks noGrp="1"/>
+          </p:cNvSpPr>
+          <p:nvPr>
+            <p:ph type="body" idx="13" sz="quarter"/>
+          </p:nvPr>
+        </p:nvSpPr>
+        <p:spPr/>
+        <p:txBody>
+          <a:bodyPr wrap="square"/>
+          <a:lstStyle/>
+          <a:p>
+            <a:pPr/>
+            <a:r>
+              <a:rPr sz="1300"/>
+              <a:t>Governance &amp; Policies: 149 Policy-Defs, 42 Initiativen, 123 Assignments – automatische Guardrails auf allen MG-Ebenen</a:t>
+            </a:r>
+          </a:p>
+          <a:p>
+            <a:pPr/>
+            <a:r>
+              <a:rPr sz="1300"/>
+              <a:t>Netzwerk-Hub (Hub-and-Spoke): Azure Firewall, Bastion, Private DNS – sichere Konnektivität für alle Workloads</a:t>
+            </a:r>
+          </a:p>
+          <a:p>
+            <a:pPr/>
+            <a:r>
+              <a:rPr sz="1300"/>
+              <a:t>Sicherheit &amp; Defender: Microsoft Defender for Cloud automatisch via Policy aktiviert – keine manuelle Konfiguration</a:t>
+            </a:r>
+          </a:p>
+          <a:p>
+            <a:pPr/>
+            <a:r>
+              <a:rPr sz="1300"/>
+              <a:t>IaC &amp; Automatisierung: 18 Deploy-Stufen, OIDC (passwortlos), What-If vor Apply, Approval-Gate</a:t>
+            </a:r>
+          </a:p>
+          <a:p>
+            <a:pPr/>
+            <a:r>
+              <a:rPr sz="1300"/>
+              <a:t>Kosten: Microsoft-Default ~€5.800/Monat  ↔  Pilot mit network_type: none ≈ €0</a:t>
+            </a:r>
+          </a:p>
+          <a:p>
+            <a:pPr/>
+            <a:r>
+              <a:rPr sz="1300"/>
+              <a:t>Empfehlung: Pilot mit 1 Subscription, network_type: none, Policies im DoNotEnforce-Modus – Governance vom ersten Tag an</a:t>
+            </a:r>
+          </a:p>
+        </p:txBody>
+      </p:sp>
+      <p:sp>
+        <p:nvSpPr>
+          <p:cNvPr id="4" name="Subtitle 3"/>
           <p:cNvSpPr>
             <a:spLocks noGrp="1"/>
           </p:cNvSpPr>
@@ -31201,26 +29655,9 @@
           <a:lstStyle/>
           <a:p>
             <a:r>
-              <a:t>Von der ersten Subscription zur skalierbaren Cloud-Grundstruktur</a:t>
-            </a:r>
-          </a:p>
-        </p:txBody>
-      </p:sp>
-      <p:sp>
-        <p:nvSpPr>
-          <p:cNvPr id="4" name="Text Placeholder 3"/>
-          <p:cNvSpPr>
-            <a:spLocks noGrp="1"/>
-          </p:cNvSpPr>
-          <p:nvPr>
-            <p:ph type="body" idx="13" sz="quarter"/>
-          </p:nvPr>
-        </p:nvSpPr>
-        <p:spPr/>
-        <p:txBody>
-          <a:bodyPr/>
-          <a:lstStyle/>
-          <a:p/>
+              <a:t>Management Summary</a:t>
+            </a:r>
+          </a:p>
         </p:txBody>
       </p:sp>
     </p:spTree>
@@ -31257,79 +29694,14 @@
           <a:lstStyle/>
           <a:p>
             <a:r>
-              <a:t>Warum eine Azure Landing Zone?</a:t>
-            </a:r>
-          </a:p>
-        </p:txBody>
-      </p:sp>
-      <p:sp>
-        <p:nvSpPr>
-          <p:cNvPr id="3" name="Text Placeholder 2"/>
-          <p:cNvSpPr>
-            <a:spLocks noGrp="1"/>
-          </p:cNvSpPr>
-          <p:nvPr>
-            <p:ph type="body" idx="13" sz="quarter"/>
-          </p:nvPr>
-        </p:nvSpPr>
-        <p:spPr/>
-        <p:txBody>
-          <a:bodyPr wrap="square"/>
-          <a:lstStyle/>
-          <a:p>
-            <a:pPr/>
-            <a:r>
-              <a:rPr sz="1300"/>
-              <a:t>Ausgangssituation: Azure-Einstieg ohne Governance-Modell – Ressourcen entstehen ad hoc, ohne einheitliche Leitplanken</a:t>
-            </a:r>
-          </a:p>
-          <a:p>
-            <a:pPr/>
-            <a:r>
-              <a:rPr sz="1300"/>
-              <a:t>Chance: Von Anfang an auf industrieerprobter Basis aufbauen – statt technische Schulden durch spätere Nachrüstung</a:t>
-            </a:r>
-          </a:p>
-          <a:p>
-            <a:pPr/>
-            <a:r>
-              <a:rPr sz="1300"/>
-              <a:t>Zielbild: Standardisierte, mandantenweite Grundstruktur als stabiles Fundament für alle künftigen Workloads</a:t>
-            </a:r>
-          </a:p>
-          <a:p>
-            <a:pPr lvl="1"/>
-            <a:r>
-              <a:rPr sz="1300"/>
-              <a:t>12 MGs als strukturierter Verwaltungsrahmen für alle Subscriptions</a:t>
-            </a:r>
-          </a:p>
-          <a:p>
-            <a:pPr lvl="1"/>
-            <a:r>
-              <a:rPr sz="1300"/>
-              <a:t>Vollständiges ALZ-Policy-Set für automatische Governance ohne manuelle Eingriffe</a:t>
-            </a:r>
-          </a:p>
-          <a:p>
-            <a:pPr lvl="1"/>
-            <a:r>
-              <a:rPr sz="1300"/>
-              <a:t>Reproduzierbares IaC-Modell: audit-fähig, rückrollbar, nachvollziehbar</a:t>
-            </a:r>
-          </a:p>
-          <a:p>
-            <a:pPr/>
-            <a:r>
-              <a:rPr sz="1300"/>
-              <a:t>Abgrenzung: ALZ = Fundament – Migration, Anwendungsentwicklung und Applikationsbetrieb sind eigenständige Folgeprojekte</a:t>
-            </a:r>
-          </a:p>
-        </p:txBody>
-      </p:sp>
-      <p:sp>
-        <p:nvSpPr>
-          <p:cNvPr id="4" name="Subtitle 3"/>
+              <a:t>1  ·  Ausgangslage und Zielbild</a:t>
+            </a:r>
+          </a:p>
+        </p:txBody>
+      </p:sp>
+      <p:sp>
+        <p:nvSpPr>
+          <p:cNvPr id="3" name="Subtitle 2"/>
           <p:cNvSpPr>
             <a:spLocks noGrp="1"/>
           </p:cNvSpPr>
@@ -31343,9 +29715,26 @@
           <a:lstStyle/>
           <a:p>
             <a:r>
-              <a:t>Ausgangslage und Zielbild</a:t>
-            </a:r>
-          </a:p>
+              <a:t>Von der ersten Subscription zur skalierbaren Cloud-Grundstruktur</a:t>
+            </a:r>
+          </a:p>
+        </p:txBody>
+      </p:sp>
+      <p:sp>
+        <p:nvSpPr>
+          <p:cNvPr id="4" name="Text Placeholder 3"/>
+          <p:cNvSpPr>
+            <a:spLocks noGrp="1"/>
+          </p:cNvSpPr>
+          <p:nvPr>
+            <p:ph type="body" idx="13" sz="quarter"/>
+          </p:nvPr>
+        </p:nvSpPr>
+        <p:spPr/>
+        <p:txBody>
+          <a:bodyPr/>
+          <a:lstStyle/>
+          <a:p/>
         </p:txBody>
       </p:sp>
     </p:spTree>
@@ -31382,14 +29771,79 @@
           <a:lstStyle/>
           <a:p>
             <a:r>
-              <a:t>2  ·  Methodik und Vorgehen</a:t>
-            </a:r>
-          </a:p>
-        </p:txBody>
-      </p:sp>
-      <p:sp>
-        <p:nvSpPr>
-          <p:cNvPr id="3" name="Subtitle 2"/>
+              <a:t>Warum eine Azure Landing Zone?</a:t>
+            </a:r>
+          </a:p>
+        </p:txBody>
+      </p:sp>
+      <p:sp>
+        <p:nvSpPr>
+          <p:cNvPr id="3" name="Text Placeholder 2"/>
+          <p:cNvSpPr>
+            <a:spLocks noGrp="1"/>
+          </p:cNvSpPr>
+          <p:nvPr>
+            <p:ph type="body" idx="13" sz="quarter"/>
+          </p:nvPr>
+        </p:nvSpPr>
+        <p:spPr/>
+        <p:txBody>
+          <a:bodyPr wrap="square"/>
+          <a:lstStyle/>
+          <a:p>
+            <a:pPr/>
+            <a:r>
+              <a:rPr sz="1300"/>
+              <a:t>Ausgangssituation: Azure-Einstieg ohne Governance-Modell – Ressourcen entstehen ad hoc, ohne einheitliche Leitplanken</a:t>
+            </a:r>
+          </a:p>
+          <a:p>
+            <a:pPr/>
+            <a:r>
+              <a:rPr sz="1300"/>
+              <a:t>Chance: Von Anfang an auf industrieerprobter Basis aufbauen – statt technische Schulden durch spätere Nachrüstung</a:t>
+            </a:r>
+          </a:p>
+          <a:p>
+            <a:pPr/>
+            <a:r>
+              <a:rPr sz="1300"/>
+              <a:t>Zielbild: Standardisierte, mandantenweite Grundstruktur als stabiles Fundament für alle künftigen Workloads</a:t>
+            </a:r>
+          </a:p>
+          <a:p>
+            <a:pPr lvl="1"/>
+            <a:r>
+              <a:rPr sz="1300"/>
+              <a:t>12 MGs als strukturierter Verwaltungsrahmen für alle Subscriptions</a:t>
+            </a:r>
+          </a:p>
+          <a:p>
+            <a:pPr lvl="1"/>
+            <a:r>
+              <a:rPr sz="1300"/>
+              <a:t>Vollständiges ALZ-Policy-Set für automatische Governance ohne manuelle Eingriffe</a:t>
+            </a:r>
+          </a:p>
+          <a:p>
+            <a:pPr lvl="1"/>
+            <a:r>
+              <a:rPr sz="1300"/>
+              <a:t>Reproduzierbares IaC-Modell: audit-fähig, rückrollbar, nachvollziehbar</a:t>
+            </a:r>
+          </a:p>
+          <a:p>
+            <a:pPr/>
+            <a:r>
+              <a:rPr sz="1300"/>
+              <a:t>Abgrenzung: ALZ = Fundament – Migration, Anwendungsentwicklung und Applikationsbetrieb sind eigenständige Folgeprojekte</a:t>
+            </a:r>
+          </a:p>
+        </p:txBody>
+      </p:sp>
+      <p:sp>
+        <p:nvSpPr>
+          <p:cNvPr id="4" name="Subtitle 3"/>
           <p:cNvSpPr>
             <a:spLocks noGrp="1"/>
           </p:cNvSpPr>
@@ -31403,26 +29857,9 @@
           <a:lstStyle/>
           <a:p>
             <a:r>
-              <a:t>Microsoft ALZ Bicep Accelerator – kein Eigenbau, sondern Microsoft-Standard</a:t>
-            </a:r>
-          </a:p>
-        </p:txBody>
-      </p:sp>
-      <p:sp>
-        <p:nvSpPr>
-          <p:cNvPr id="4" name="Text Placeholder 3"/>
-          <p:cNvSpPr>
-            <a:spLocks noGrp="1"/>
-          </p:cNvSpPr>
-          <p:nvPr>
-            <p:ph type="body" idx="13" sz="quarter"/>
-          </p:nvPr>
-        </p:nvSpPr>
-        <p:spPr/>
-        <p:txBody>
-          <a:bodyPr/>
-          <a:lstStyle/>
-          <a:p/>
+              <a:t>Ausgangslage und Zielbild</a:t>
+            </a:r>
+          </a:p>
         </p:txBody>
       </p:sp>
     </p:spTree>
@@ -31459,79 +29896,14 @@
           <a:lstStyle/>
           <a:p>
             <a:r>
-              <a:t>ALZ Bicep Accelerator + 18 Deployment-Stufen</a:t>
-            </a:r>
-          </a:p>
-        </p:txBody>
-      </p:sp>
-      <p:sp>
-        <p:nvSpPr>
-          <p:cNvPr id="3" name="Text Placeholder 2"/>
-          <p:cNvSpPr>
-            <a:spLocks noGrp="1"/>
-          </p:cNvSpPr>
-          <p:nvPr>
-            <p:ph type="body" idx="13" sz="quarter"/>
-          </p:nvPr>
-        </p:nvSpPr>
-        <p:spPr/>
-        <p:txBody>
-          <a:bodyPr wrap="square"/>
-          <a:lstStyle/>
-          <a:p>
-            <a:pPr/>
-            <a:r>
-              <a:rPr sz="1300"/>
-              <a:t>Microsoft-Standard: derselbe Accelerator, den Microsoft für tausende Enterprise-Kunden empfiehlt und pflegt</a:t>
-            </a:r>
-          </a:p>
-          <a:p>
-            <a:pPr/>
-            <a:r>
-              <a:rPr sz="1300"/>
-              <a:t>Policy-Set komplett: 149 Definitionen, 42 Initiativen, 123 Assignments – automatisch aus MCR (Microsoft Container Registry)</a:t>
-            </a:r>
-          </a:p>
-          <a:p>
-            <a:pPr/>
-            <a:r>
-              <a:rPr sz="1300"/>
-              <a:t>22 Azure Verified Modules (AVM): Microsoft-zertifizierte Bicep-Module, kein Eigenbau-IaC</a:t>
-            </a:r>
-          </a:p>
-          <a:p>
-            <a:pPr/>
-            <a:r>
-              <a:rPr sz="1300"/>
-              <a:t>18 geordnete Deploy-Stufen: Governance (1–12) → RBAC (13–15) → Logging (16) → Netzwerk (17/18)</a:t>
-            </a:r>
-          </a:p>
-          <a:p>
-            <a:pPr/>
-            <a:r>
-              <a:rPr sz="1300"/>
-              <a:t>OIDC Federated Identity: passwortlose Pipelines – keine Secrets oder Zertifikate</a:t>
-            </a:r>
-          </a:p>
-          <a:p>
-            <a:pPr/>
-            <a:r>
-              <a:rPr sz="1300"/>
-              <a:t>What-If vor Apply: Pipeline zeigt geplante Änderungen zur Freigabe, bevor etwas ausgeführt wird</a:t>
-            </a:r>
-          </a:p>
-          <a:p>
-            <a:pPr/>
-            <a:r>
-              <a:rPr sz="1300"/>
-              <a:t>Qualitätssicherung: bicep build aller 20 Templates offline; 20/20 grün (Bicep 0.44.1)</a:t>
-            </a:r>
-          </a:p>
-        </p:txBody>
-      </p:sp>
-      <p:sp>
-        <p:nvSpPr>
-          <p:cNvPr id="4" name="Subtitle 3"/>
+              <a:t>2  ·  Methodik und Vorgehen</a:t>
+            </a:r>
+          </a:p>
+        </p:txBody>
+      </p:sp>
+      <p:sp>
+        <p:nvSpPr>
+          <p:cNvPr id="3" name="Subtitle 2"/>
           <p:cNvSpPr>
             <a:spLocks noGrp="1"/>
           </p:cNvSpPr>
@@ -31545,9 +29917,26 @@
           <a:lstStyle/>
           <a:p>
             <a:r>
-              <a:t>Methodik und Vorgehen</a:t>
-            </a:r>
-          </a:p>
+              <a:t>Microsoft ALZ Bicep Accelerator – kein Eigenbau, sondern Microsoft-Standard</a:t>
+            </a:r>
+          </a:p>
+        </p:txBody>
+      </p:sp>
+      <p:sp>
+        <p:nvSpPr>
+          <p:cNvPr id="4" name="Text Placeholder 3"/>
+          <p:cNvSpPr>
+            <a:spLocks noGrp="1"/>
+          </p:cNvSpPr>
+          <p:nvPr>
+            <p:ph type="body" idx="13" sz="quarter"/>
+          </p:nvPr>
+        </p:nvSpPr>
+        <p:spPr/>
+        <p:txBody>
+          <a:bodyPr/>
+          <a:lstStyle/>
+          <a:p/>
         </p:txBody>
       </p:sp>
     </p:spTree>
@@ -31584,14 +29973,79 @@
           <a:lstStyle/>
           <a:p>
             <a:r>
-              <a:t>3  ·  Zielarchitektur</a:t>
-            </a:r>
-          </a:p>
-        </p:txBody>
-      </p:sp>
-      <p:sp>
-        <p:nvSpPr>
-          <p:cNvPr id="3" name="Subtitle 2"/>
+              <a:t>ALZ Bicep Accelerator + 18 Deployment-Stufen</a:t>
+            </a:r>
+          </a:p>
+        </p:txBody>
+      </p:sp>
+      <p:sp>
+        <p:nvSpPr>
+          <p:cNvPr id="3" name="Text Placeholder 2"/>
+          <p:cNvSpPr>
+            <a:spLocks noGrp="1"/>
+          </p:cNvSpPr>
+          <p:nvPr>
+            <p:ph type="body" idx="13" sz="quarter"/>
+          </p:nvPr>
+        </p:nvSpPr>
+        <p:spPr/>
+        <p:txBody>
+          <a:bodyPr wrap="square"/>
+          <a:lstStyle/>
+          <a:p>
+            <a:pPr/>
+            <a:r>
+              <a:rPr sz="1300"/>
+              <a:t>Microsoft-Standard: derselbe Accelerator, den Microsoft für tausende Enterprise-Kunden empfiehlt und pflegt</a:t>
+            </a:r>
+          </a:p>
+          <a:p>
+            <a:pPr/>
+            <a:r>
+              <a:rPr sz="1300"/>
+              <a:t>Policy-Set komplett: 149 Definitionen, 42 Initiativen, 123 Assignments – automatisch aus MCR (Microsoft Container Registry)</a:t>
+            </a:r>
+          </a:p>
+          <a:p>
+            <a:pPr/>
+            <a:r>
+              <a:rPr sz="1300"/>
+              <a:t>22 Azure Verified Modules (AVM): Microsoft-zertifizierte Bicep-Module, kein Eigenbau-IaC</a:t>
+            </a:r>
+          </a:p>
+          <a:p>
+            <a:pPr/>
+            <a:r>
+              <a:rPr sz="1300"/>
+              <a:t>18 geordnete Deploy-Stufen: Governance (1–12) → RBAC (13–15) → Logging (16) → Netzwerk (17/18)</a:t>
+            </a:r>
+          </a:p>
+          <a:p>
+            <a:pPr/>
+            <a:r>
+              <a:rPr sz="1300"/>
+              <a:t>OIDC Federated Identity: passwortlose Pipelines – keine Secrets oder Zertifikate</a:t>
+            </a:r>
+          </a:p>
+          <a:p>
+            <a:pPr/>
+            <a:r>
+              <a:rPr sz="1300"/>
+              <a:t>What-If vor Apply: Pipeline zeigt geplante Änderungen zur Freigabe, bevor etwas ausgeführt wird</a:t>
+            </a:r>
+          </a:p>
+          <a:p>
+            <a:pPr/>
+            <a:r>
+              <a:rPr sz="1300"/>
+              <a:t>Qualitätssicherung: bicep build aller 20 Templates offline; 20/20 grün (Bicep 0.44.1)</a:t>
+            </a:r>
+          </a:p>
+        </p:txBody>
+      </p:sp>
+      <p:sp>
+        <p:nvSpPr>
+          <p:cNvPr id="4" name="Subtitle 3"/>
           <p:cNvSpPr>
             <a:spLocks noGrp="1"/>
           </p:cNvSpPr>
@@ -31605,26 +30059,9 @@
           <a:lstStyle/>
           <a:p>
             <a:r>
-              <a:t>12 Management Groups + Hub-and-Spoke-Netzwerk in zwei Regionen</a:t>
-            </a:r>
-          </a:p>
-        </p:txBody>
-      </p:sp>
-      <p:sp>
-        <p:nvSpPr>
-          <p:cNvPr id="4" name="Text Placeholder 3"/>
-          <p:cNvSpPr>
-            <a:spLocks noGrp="1"/>
-          </p:cNvSpPr>
-          <p:nvPr>
-            <p:ph type="body" idx="13" sz="quarter"/>
-          </p:nvPr>
-        </p:nvSpPr>
-        <p:spPr/>
-        <p:txBody>
-          <a:bodyPr/>
-          <a:lstStyle/>
-          <a:p/>
+              <a:t>Methodik und Vorgehen</a:t>
+            </a:r>
+          </a:p>
         </p:txBody>
       </p:sp>
     </p:spTree>

--- a/docs/konzept/Powerpoint/Azure-Landing-Zone-Konzept.pptx
+++ b/docs/konzept/Powerpoint/Azure-Landing-Zone-Konzept.pptx
@@ -51,11 +51,6 @@
     <p:sldId id="290" r:id="rId46"/>
     <p:sldId id="291" r:id="rId47"/>
     <p:sldId id="292" r:id="rId48"/>
-    <p:sldId id="293" r:id="rId49"/>
-    <p:sldId id="294" r:id="rId50"/>
-    <p:sldId id="295" r:id="rId51"/>
-    <p:sldId id="296" r:id="rId52"/>
-    <p:sldId id="297" r:id="rId53"/>
   </p:sldIdLst>
   <p:sldSz cx="12192000" cy="6858000"/>
   <p:notesSz cx="7099300" cy="10234613"/>
@@ -25397,6 +25392,7 @@
           <a:lstStyle/>
           <a:p>
             <a:r>
+              <a:rPr sz="3600" b="1"/>
               <a:t>Azure Landing Zone</a:t>
             </a:r>
           </a:p>
@@ -25418,6 +25414,7 @@
           <a:lstStyle/>
           <a:p>
             <a:r>
+              <a:rPr sz="1800"/>
               <a:t>Konzept und Umsetzungsfahrplan</a:t>
             </a:r>
           </a:p>
@@ -25440,7 +25437,7 @@
           <a:p>
             <a:r>
               <a:rPr sz="1000"/>
-              <a:t>&lt;KUNDE&gt;  ·  Bechtle GmbH &amp; Co. KG  ·  16.06.2026</a:t>
+              <a:t>&lt;KUNDE&gt;  ·  Bechtle GmbH &amp; Co. KG  ·  17.06.2026</a:t>
             </a:r>
           </a:p>
         </p:txBody>
@@ -25479,6 +25476,7 @@
           <a:lstStyle/>
           <a:p>
             <a:r>
+              <a:rPr sz="2800" b="1"/>
               <a:t>3  ·  Zielarchitektur</a:t>
             </a:r>
           </a:p>
@@ -25500,7 +25498,8 @@
           <a:lstStyle/>
           <a:p>
             <a:r>
-              <a:t>12 Management Groups + Hub-and-Spoke-Netzwerk in zwei Regionen</a:t>
+              <a:rPr sz="1400"/>
+              <a:t>12 Management Groups  ·  Hub-and-Spoke  ·  Germany West Central</a:t>
             </a:r>
           </a:p>
         </p:txBody>
@@ -25517,9 +25516,29 @@
         </p:nvSpPr>
         <p:spPr/>
         <p:txBody>
-          <a:bodyPr/>
+          <a:bodyPr wrap="square"/>
           <a:lstStyle/>
-          <a:p/>
+          <a:p>
+            <a:pPr/>
+            <a:r>
+              <a:rPr sz="1300"/>
+              <a:t>12 MGs</a:t>
+            </a:r>
+          </a:p>
+          <a:p>
+            <a:pPr/>
+            <a:r>
+              <a:rPr sz="1300"/>
+              <a:t>Hub-VNet 10.0.0.0/22</a:t>
+            </a:r>
+          </a:p>
+          <a:p>
+            <a:pPr/>
+            <a:r>
+              <a:rPr sz="1300"/>
+              <a:t>Private DNS 59 Zonen</a:t>
+            </a:r>
+          </a:p>
         </p:txBody>
       </p:sp>
     </p:spTree>
@@ -25540,9 +25559,28 @@
         <p:nvPr/>
       </p:nvGrpSpPr>
       <p:grpSpPr/>
-      <p:sp>
-        <p:nvSpPr>
-          <p:cNvPr id="2" name="Title 1"/>
+      <p:pic>
+        <p:nvPicPr>
+          <p:cNvPr id="2" name="Picture Placeholder 1" descr="alz-hub-spoke.png"/>
+          <p:cNvPicPr>
+            <a:picLocks noGrp="1" noChangeAspect="1"/>
+          </p:cNvPicPr>
+          <p:nvPr>
+            <p:ph type="pic" idx="14" sz="quarter"/>
+          </p:nvPr>
+        </p:nvPicPr>
+        <p:blipFill>
+          <a:blip r:embed="rId2"/>
+          <a:srcRect l="14133" r="14133"/>
+          <a:stretch>
+            <a:fillRect/>
+          </a:stretch>
+        </p:blipFill>
+        <p:spPr/>
+      </p:pic>
+      <p:sp>
+        <p:nvSpPr>
+          <p:cNvPr id="3" name="Title 2"/>
           <p:cNvSpPr>
             <a:spLocks noGrp="1"/>
           </p:cNvSpPr>
@@ -25556,14 +25594,14 @@
           <a:lstStyle/>
           <a:p>
             <a:r>
-              <a:t>Management Group Hierarchie (12 MGs)</a:t>
-            </a:r>
-          </a:p>
-        </p:txBody>
-      </p:sp>
-      <p:sp>
-        <p:nvSpPr>
-          <p:cNvPr id="3" name="Text Placeholder 2"/>
+              <a:t>Hub-and-Spoke-Topologie</a:t>
+            </a:r>
+          </a:p>
+        </p:txBody>
+      </p:sp>
+      <p:sp>
+        <p:nvSpPr>
+          <p:cNvPr id="4" name="Text Placeholder 3"/>
           <p:cNvSpPr>
             <a:spLocks noGrp="1"/>
           </p:cNvSpPr>
@@ -25578,85 +25616,43 @@
           <a:p>
             <a:pPr/>
             <a:r>
-              <a:rPr sz="1300"/>
-              <a:t>Tenant Root</a:t>
-            </a:r>
-          </a:p>
-          <a:p>
-            <a:pPr lvl="1"/>
-            <a:r>
-              <a:rPr sz="1300"/>
-              <a:t>alz (Intermediate Root) – alle ALZ-Policies erben von hier</a:t>
-            </a:r>
-          </a:p>
-          <a:p>
-            <a:pPr lvl="1"/>
-            <a:r>
-              <a:rPr sz="1300"/>
-              <a:t>alz-platform: connectivity · identity · management · security</a:t>
-            </a:r>
-          </a:p>
-          <a:p>
-            <a:pPr lvl="1"/>
-            <a:r>
-              <a:rPr sz="1300"/>
-              <a:t>alz-platform-connectivity  → Hub-Netzwerk, Firewall, DNS</a:t>
-            </a:r>
-          </a:p>
-          <a:p>
-            <a:pPr lvl="1"/>
-            <a:r>
-              <a:rPr sz="1300"/>
-              <a:t>alz-platform-identity      → Identity-Dienste (Entra, AD DS)</a:t>
-            </a:r>
-          </a:p>
-          <a:p>
-            <a:pPr lvl="1"/>
-            <a:r>
-              <a:rPr sz="1300"/>
-              <a:t>alz-platform-management    → Logging, Monitoring, Operations</a:t>
-            </a:r>
-          </a:p>
-          <a:p>
-            <a:pPr lvl="1"/>
-            <a:r>
-              <a:rPr sz="1300"/>
-              <a:t>alz-platform-security      → Security-Tooling, Defender</a:t>
-            </a:r>
-          </a:p>
-          <a:p>
-            <a:pPr lvl="1"/>
-            <a:r>
-              <a:rPr sz="1300"/>
-              <a:t>alz-landingzones: corp · online · local</a:t>
-            </a:r>
-          </a:p>
-          <a:p>
-            <a:pPr lvl="1"/>
-            <a:r>
-              <a:rPr sz="1300"/>
-              <a:t>alz-sandbox  ·  alz-decommissioned</a:t>
+              <a:rPr sz="1100"/>
+              <a:t>Connectivity Sub: Firewall · Bastion · VPN · DNS</a:t>
             </a:r>
           </a:p>
           <a:p>
             <a:pPr/>
             <a:r>
-              <a:rPr sz="1300"/>
-              <a:t>Region: Germany West Central (primär 10.0.0.0/22) + North Europe (sekundär 10.1.0.0/22)</a:t>
+              <a:rPr sz="1100"/>
+              <a:t>alz-corp: interne Workloads, Private Endpoints</a:t>
             </a:r>
           </a:p>
           <a:p>
             <a:pPr/>
             <a:r>
-              <a:rPr sz="1300"/>
-              <a:t>Subscription-Strategie: Single-Sub für Pilot → 4 dedizierte Platform-Subs für Produktion</a:t>
-            </a:r>
-          </a:p>
-        </p:txBody>
-      </p:sp>
-      <p:sp>
-        <p:nvSpPr>
-          <p:cNvPr id="4" name="Subtitle 3"/>
+              <a:rPr sz="1100"/>
+              <a:t>alz-online: internet-facing Dienste</a:t>
+            </a:r>
+          </a:p>
+          <a:p>
+            <a:pPr/>
+            <a:r>
+              <a:rPr sz="1100"/>
+              <a:t>On-Prem: VPN aktiv · ExpressRoute deferred</a:t>
+            </a:r>
+          </a:p>
+          <a:p>
+            <a:pPr/>
+            <a:r>
+              <a:rPr sz="1100"/>
+              <a:t>SIEM: CrowdStrike via Event Hub</a:t>
+            </a:r>
+          </a:p>
+        </p:txBody>
+      </p:sp>
+      <p:sp>
+        <p:nvSpPr>
+          <p:cNvPr id="5" name="Subtitle 4"/>
           <p:cNvSpPr>
             <a:spLocks noGrp="1"/>
           </p:cNvSpPr>
@@ -25693,9 +25689,102 @@
         <p:nvPr/>
       </p:nvGrpSpPr>
       <p:grpSpPr/>
+      <p:sp>
+        <p:nvSpPr>
+          <p:cNvPr id="2" name="Title 1"/>
+          <p:cNvSpPr>
+            <a:spLocks noGrp="1"/>
+          </p:cNvSpPr>
+          <p:nvPr>
+            <p:ph type="title"/>
+          </p:nvPr>
+        </p:nvSpPr>
+        <p:spPr/>
+        <p:txBody>
+          <a:bodyPr/>
+          <a:lstStyle/>
+          <a:p>
+            <a:r>
+              <a:t>Management Group Hierarchie (12 MGs)</a:t>
+            </a:r>
+          </a:p>
+        </p:txBody>
+      </p:sp>
+      <p:sp>
+        <p:nvSpPr>
+          <p:cNvPr id="3" name="Text Placeholder 2"/>
+          <p:cNvSpPr>
+            <a:spLocks noGrp="1"/>
+          </p:cNvSpPr>
+          <p:nvPr>
+            <p:ph type="body" idx="13" sz="quarter"/>
+          </p:nvPr>
+        </p:nvSpPr>
+        <p:spPr/>
+        <p:txBody>
+          <a:bodyPr wrap="square"/>
+          <a:lstStyle/>
+          <a:p>
+            <a:pPr/>
+            <a:r>
+              <a:rPr sz="1100"/>
+              <a:t>alz → alz-platform → connectivity / identity / management / security</a:t>
+            </a:r>
+          </a:p>
+          <a:p>
+            <a:pPr/>
+            <a:r>
+              <a:rPr sz="1100"/>
+              <a:t>alz → alz-landingzones → corp / online / local</a:t>
+            </a:r>
+          </a:p>
+          <a:p>
+            <a:pPr/>
+            <a:r>
+              <a:rPr sz="1100"/>
+              <a:t>alz → alz-sandbox  ·  alz-decommissioned</a:t>
+            </a:r>
+          </a:p>
+          <a:p>
+            <a:pPr/>
+            <a:r>
+              <a:rPr sz="1100"/>
+              <a:t>DoNotEnforce: Audit-Modus schützt Bestand</a:t>
+            </a:r>
+          </a:p>
+          <a:p>
+            <a:pPr/>
+            <a:r>
+              <a:rPr sz="1100"/>
+              <a:t>Exemptions für Legacy-Ressourcen möglich</a:t>
+            </a:r>
+          </a:p>
+        </p:txBody>
+      </p:sp>
+      <p:sp>
+        <p:nvSpPr>
+          <p:cNvPr id="4" name="Subtitle 3"/>
+          <p:cNvSpPr>
+            <a:spLocks noGrp="1"/>
+          </p:cNvSpPr>
+          <p:nvPr>
+            <p:ph type="subTitle" idx="1"/>
+          </p:nvPr>
+        </p:nvSpPr>
+        <p:spPr/>
+        <p:txBody>
+          <a:bodyPr/>
+          <a:lstStyle/>
+          <a:p>
+            <a:r>
+              <a:t>Zielarchitektur</a:t>
+            </a:r>
+          </a:p>
+        </p:txBody>
+      </p:sp>
       <p:pic>
         <p:nvPicPr>
-          <p:cNvPr id="2" name="Picture Placeholder 1" descr="alz-hub-spoke.png"/>
+          <p:cNvPr id="5" name="Picture Placeholder 4" descr="alz-mg-hierarchy.png"/>
           <p:cNvPicPr>
             <a:picLocks noGrp="1" noChangeAspect="1"/>
           </p:cNvPicPr>
@@ -25705,106 +25794,13 @@
         </p:nvPicPr>
         <p:blipFill>
           <a:blip r:embed="rId2"/>
-          <a:srcRect l="14133" r="14133"/>
+          <a:srcRect l="35306" r="35306"/>
           <a:stretch>
             <a:fillRect/>
           </a:stretch>
         </p:blipFill>
         <p:spPr/>
       </p:pic>
-      <p:sp>
-        <p:nvSpPr>
-          <p:cNvPr id="3" name="Title 2"/>
-          <p:cNvSpPr>
-            <a:spLocks noGrp="1"/>
-          </p:cNvSpPr>
-          <p:nvPr>
-            <p:ph type="title"/>
-          </p:nvPr>
-        </p:nvSpPr>
-        <p:spPr/>
-        <p:txBody>
-          <a:bodyPr/>
-          <a:lstStyle/>
-          <a:p>
-            <a:r>
-              <a:t>Hub-and-Spoke-Topologie</a:t>
-            </a:r>
-          </a:p>
-        </p:txBody>
-      </p:sp>
-      <p:sp>
-        <p:nvSpPr>
-          <p:cNvPr id="4" name="Text Placeholder 3"/>
-          <p:cNvSpPr>
-            <a:spLocks noGrp="1"/>
-          </p:cNvSpPr>
-          <p:nvPr>
-            <p:ph type="body" idx="13" sz="quarter"/>
-          </p:nvPr>
-        </p:nvSpPr>
-        <p:spPr/>
-        <p:txBody>
-          <a:bodyPr wrap="square"/>
-          <a:lstStyle/>
-          <a:p>
-            <a:pPr/>
-            <a:r>
-              <a:rPr sz="1100"/>
-              <a:t>Bechtle-Empfehlung: GWC · Firewall Standard · ~€1.050/Mon.</a:t>
-            </a:r>
-          </a:p>
-          <a:p>
-            <a:pPr/>
-            <a:r>
-              <a:rPr sz="1100"/>
-              <a:t>Connectivity Sub: Firewall · Bastion · VPN GW · DNS Resolver</a:t>
-            </a:r>
-          </a:p>
-          <a:p>
-            <a:pPr/>
-            <a:r>
-              <a:rPr sz="1100"/>
-              <a:t>Landing Zones: alz-corp · alz-online · alz-sandbox</a:t>
-            </a:r>
-          </a:p>
-          <a:p>
-            <a:pPr/>
-            <a:r>
-              <a:rPr sz="1100"/>
-              <a:t>On-Prem: VPN aktiv · ExpressRoute deferred</a:t>
-            </a:r>
-          </a:p>
-          <a:p>
-            <a:pPr/>
-            <a:r>
-              <a:rPr sz="1100"/>
-              <a:t>SIEM: CrowdStrike via Event-Hub-Export</a:t>
-            </a:r>
-          </a:p>
-        </p:txBody>
-      </p:sp>
-      <p:sp>
-        <p:nvSpPr>
-          <p:cNvPr id="5" name="Subtitle 4"/>
-          <p:cNvSpPr>
-            <a:spLocks noGrp="1"/>
-          </p:cNvSpPr>
-          <p:nvPr>
-            <p:ph type="subTitle" idx="1"/>
-          </p:nvPr>
-        </p:nvSpPr>
-        <p:spPr/>
-        <p:txBody>
-          <a:bodyPr/>
-          <a:lstStyle/>
-          <a:p>
-            <a:r>
-              <a:t>Zielarchitektur</a:t>
-            </a:r>
-          </a:p>
-        </p:txBody>
-      </p:sp>
     </p:spTree>
   </p:cSld>
   <p:clrMapOvr>
@@ -25839,7 +25835,7 @@
           <a:lstStyle/>
           <a:p>
             <a:r>
-              <a:t>Management Group Hierarchie (12 MGs)</a:t>
+              <a:t>Einstieg (Single-Sub) vs. Produktionsbetrieb (Multi-Sub)</a:t>
             </a:r>
           </a:p>
         </p:txBody>
@@ -25861,36 +25857,43 @@
           <a:p>
             <a:pPr/>
             <a:r>
-              <a:rPr sz="1100"/>
-              <a:t>Vollständig per ALZ Bicep Accelerator deployt</a:t>
-            </a:r>
-          </a:p>
-          <a:p>
-            <a:pPr/>
-            <a:r>
-              <a:rPr sz="1100"/>
-              <a:t>149 Definitionen · 42 Initiativen · 123 Assignments</a:t>
-            </a:r>
-          </a:p>
-          <a:p>
-            <a:pPr/>
-            <a:r>
-              <a:rPr sz="1100"/>
-              <a:t>DoNotEnforce: Audit-Modus schützt Bestandsressourcen</a:t>
-            </a:r>
-          </a:p>
-          <a:p>
-            <a:pPr/>
-            <a:r>
-              <a:rPr sz="1100"/>
-              <a:t>What-If vor jedem Subscription-Move</a:t>
-            </a:r>
-          </a:p>
-          <a:p>
-            <a:pPr/>
-            <a:r>
-              <a:rPr sz="1100"/>
-              <a:t>Exemptions für Legacy-Ressourcen möglich</a:t>
+              <a:rPr sz="1200"/>
+              <a:t>Phase 1 – Single Subscription</a:t>
+            </a:r>
+          </a:p>
+          <a:p>
+            <a:pPr lvl="1"/>
+            <a:r>
+              <a:rPr sz="1200"/>
+              <a:t>Alle Platform-Rollen auf 1 Sub</a:t>
+            </a:r>
+          </a:p>
+          <a:p>
+            <a:pPr lvl="1"/>
+            <a:r>
+              <a:rPr sz="1200"/>
+              <a:t>MG-Hierarchie identisch zu Prod</a:t>
+            </a:r>
+          </a:p>
+          <a:p>
+            <a:pPr lvl="1"/>
+            <a:r>
+              <a:rPr sz="1200"/>
+              <a:t>Sofortiger Pilot ohne PoC-Overhead</a:t>
+            </a:r>
+          </a:p>
+          <a:p>
+            <a:pPr lvl="1"/>
+            <a:r>
+              <a:rPr sz="1200"/>
+              <a:t>Smoke Run: bash smokerun/run.sh</a:t>
+            </a:r>
+          </a:p>
+          <a:p>
+            <a:pPr lvl="1"/>
+            <a:r>
+              <a:rPr sz="1200"/>
+              <a:t>Kosten: Ressourcen wie Prod</a:t>
             </a:r>
           </a:p>
         </p:txBody>
@@ -25911,30 +25914,69 @@
           <a:lstStyle/>
           <a:p>
             <a:r>
-              <a:t>Zielarchitektur</a:t>
-            </a:r>
-          </a:p>
-        </p:txBody>
-      </p:sp>
-      <p:pic>
-        <p:nvPicPr>
-          <p:cNvPr id="5" name="Picture Placeholder 4" descr="alz-mg-hierarchy.png"/>
-          <p:cNvPicPr>
-            <a:picLocks noGrp="1" noChangeAspect="1"/>
-          </p:cNvPicPr>
-          <p:nvPr>
-            <p:ph type="pic" idx="14" sz="quarter"/>
-          </p:nvPr>
-        </p:nvPicPr>
-        <p:blipFill>
-          <a:blip r:embed="rId2"/>
-          <a:srcRect l="35306" r="35306"/>
-          <a:stretch>
-            <a:fillRect/>
-          </a:stretch>
-        </p:blipFill>
+              <a:t>Zielarchitektur · Subscription-Strategie</a:t>
+            </a:r>
+          </a:p>
+        </p:txBody>
+      </p:sp>
+      <p:sp>
+        <p:nvSpPr>
+          <p:cNvPr id="5" name="Text Placeholder 4"/>
+          <p:cNvSpPr>
+            <a:spLocks noGrp="1"/>
+          </p:cNvSpPr>
+          <p:nvPr>
+            <p:ph type="body" idx="14" sz="quarter"/>
+          </p:nvPr>
+        </p:nvSpPr>
         <p:spPr/>
-      </p:pic>
+        <p:txBody>
+          <a:bodyPr wrap="square"/>
+          <a:lstStyle/>
+          <a:p>
+            <a:pPr/>
+            <a:r>
+              <a:rPr sz="1200"/>
+              <a:t>Phase 2 – Dedizierte Platform-Subs</a:t>
+            </a:r>
+          </a:p>
+          <a:p>
+            <a:pPr lvl="1"/>
+            <a:r>
+              <a:rPr sz="1200"/>
+              <a:t>sub-alz-connectivity (Hub/FW)</a:t>
+            </a:r>
+          </a:p>
+          <a:p>
+            <a:pPr lvl="1"/>
+            <a:r>
+              <a:rPr sz="1200"/>
+              <a:t>sub-alz-management  (LAW/DCR)</a:t>
+            </a:r>
+          </a:p>
+          <a:p>
+            <a:pPr lvl="1"/>
+            <a:r>
+              <a:rPr sz="1200"/>
+              <a:t>sub-alz-identity     (AD DS)</a:t>
+            </a:r>
+          </a:p>
+          <a:p>
+            <a:pPr lvl="1"/>
+            <a:r>
+              <a:rPr sz="1200"/>
+              <a:t>sub-alz-security     (Defender)</a:t>
+            </a:r>
+          </a:p>
+          <a:p>
+            <a:pPr lvl="1"/>
+            <a:r>
+              <a:rPr sz="1200"/>
+              <a:t>Blast-Radius-Isolation je Rolle</a:t>
+            </a:r>
+          </a:p>
+        </p:txBody>
+      </p:sp>
     </p:spTree>
   </p:cSld>
   <p:clrMapOvr>
@@ -25969,6 +26011,7 @@
           <a:lstStyle/>
           <a:p>
             <a:r>
+              <a:rPr sz="2800" b="1"/>
               <a:t>4  ·  Governance und Policies</a:t>
             </a:r>
           </a:p>
@@ -25990,7 +26033,8 @@
           <a:lstStyle/>
           <a:p>
             <a:r>
-              <a:t>149 Policy-Definitionen · 42 Initiativen · 123 Assignments</a:t>
+              <a:rPr sz="1400"/>
+              <a:t>149 Definitionen · 42 Initiativen · 123 Assignments</a:t>
             </a:r>
           </a:p>
         </p:txBody>
@@ -26012,22 +26056,22 @@
           <a:p>
             <a:pPr/>
             <a:r>
-              <a:rPr sz="1200"/>
-              <a:t>9 MG-Ebenen mit Assignments</a:t>
+              <a:rPr sz="1300"/>
+              <a:t>9 MG-Ebenen</a:t>
             </a:r>
           </a:p>
           <a:p>
             <a:pPr/>
             <a:r>
-              <a:rPr sz="1200"/>
+              <a:rPr sz="1300"/>
               <a:t>5 Custom RBAC-Rollen</a:t>
             </a:r>
           </a:p>
           <a:p>
             <a:pPr/>
             <a:r>
-              <a:rPr sz="1200"/>
-              <a:t>DoNotEnforce → sanftes Onboarding</a:t>
+              <a:rPr sz="1300"/>
+              <a:t>DoNotEnforce → kein Produktionsrisiko</a:t>
             </a:r>
           </a:p>
         </p:txBody>
@@ -26052,7 +26096,19 @@
       <p:grpSpPr/>
       <p:sp>
         <p:nvSpPr>
-          <p:cNvPr id="2" name="Title 1"/>
+          <p:cNvPr id="2" name="Picture Placeholder 1"/>
+          <p:cNvSpPr>
+            <a:spLocks noGrp="1"/>
+          </p:cNvSpPr>
+          <p:nvPr>
+            <p:ph type="pic" idx="18" sz="quarter"/>
+          </p:nvPr>
+        </p:nvSpPr>
+        <p:spPr/>
+      </p:sp>
+      <p:sp>
+        <p:nvSpPr>
+          <p:cNvPr id="3" name="Title 2"/>
           <p:cNvSpPr>
             <a:spLocks noGrp="1"/>
           </p:cNvSpPr>
@@ -26073,7 +26129,7 @@
       </p:sp>
       <p:sp>
         <p:nvSpPr>
-          <p:cNvPr id="3" name="Text Placeholder 2"/>
+          <p:cNvPr id="4" name="Text Placeholder 3"/>
           <p:cNvSpPr>
             <a:spLocks noGrp="1"/>
           </p:cNvSpPr>
@@ -26088,57 +26144,211 @@
           <a:p>
             <a:pPr/>
             <a:r>
-              <a:rPr sz="1300"/>
-              <a:t>Policy-Definitionen (Custom): 149 – Monitoring (55), Netzwerk (20), Storage (16), SQL (13), Guardrails je Dienst</a:t>
+              <a:rPr sz="1100"/>
+              <a:t>Monitoring / Diagnose: 67</a:t>
             </a:r>
           </a:p>
           <a:p>
             <a:pPr/>
             <a:r>
-              <a:rPr sz="1300"/>
-              <a:t>Policy-Set-Definitionen (Initiativen): 42 – Deploy-MDFC-Config, Deploy-Private-DNS-Zones, Enforce-Guardrails-* je Dienst</a:t>
+              <a:rPr sz="1100"/>
+              <a:t>Netzwerk: 20</a:t>
             </a:r>
           </a:p>
           <a:p>
             <a:pPr/>
             <a:r>
-              <a:rPr sz="1300"/>
-              <a:t>Policy-Assignments: 123 – verteilt auf 9 MG-Ebenen; Kind-MGs erben zusätzlich</a:t>
-            </a:r>
-          </a:p>
-          <a:p>
-            <a:pPr lvl="1"/>
-            <a:r>
-              <a:rPr sz="1300"/>
-              <a:t>alz-Root: 17  ·  alz-landingzones: 53  ·  alz-platform: 40  ·  alz-corp: 5  ·  weitere: 8</a:t>
+              <a:rPr sz="1100"/>
+              <a:t>Storage: 16</a:t>
             </a:r>
           </a:p>
           <a:p>
             <a:pPr/>
             <a:r>
-              <a:rPr sz="1300"/>
-              <a:t>5 Custom RBAC-Rollen: Subscription-Owner · Security-Ops · Network-Mgmt · App-Owners · Subnet-Contributor</a:t>
+              <a:rPr sz="1100"/>
+              <a:t>SQL &amp; Datenbanken: 13</a:t>
             </a:r>
           </a:p>
           <a:p>
             <a:pPr/>
             <a:r>
-              <a:rPr sz="1300"/>
-              <a:t>DoNotEnforce-Modus: Policies greifen (Compliance-Dashboard), blockieren aber nichts → sanftes Onboarding</a:t>
+              <a:rPr sz="1100"/>
+              <a:t>Security &amp; Defender: 12</a:t>
             </a:r>
           </a:p>
           <a:p>
             <a:pPr/>
             <a:r>
-              <a:rPr sz="1300"/>
-              <a:t>Stufenplan: Audit → selektiv Enabled → vollständiges Enforcement nach Remediation</a:t>
-            </a:r>
-          </a:p>
-        </p:txBody>
-      </p:sp>
-      <p:sp>
-        <p:nvSpPr>
-          <p:cNvPr id="4" name="Subtitle 3"/>
+              <a:rPr sz="1100"/>
+              <a:t>Compute &amp; Backup: 11</a:t>
+            </a:r>
+          </a:p>
+          <a:p>
+            <a:pPr/>
+            <a:r>
+              <a:rPr sz="1100"/>
+              <a:t>Governance &amp; Tagging: 10</a:t>
+            </a:r>
+          </a:p>
+        </p:txBody>
+      </p:sp>
+      <p:sp>
+        <p:nvSpPr>
+          <p:cNvPr id="5" name="Text Placeholder 4"/>
+          <p:cNvSpPr>
+            <a:spLocks noGrp="1"/>
+          </p:cNvSpPr>
+          <p:nvPr>
+            <p:ph type="body" idx="14" sz="quarter"/>
+          </p:nvPr>
+        </p:nvSpPr>
+        <p:spPr/>
+        <p:txBody>
+          <a:bodyPr wrap="square"/>
+          <a:lstStyle/>
+          <a:p>
+            <a:pPr/>
+            <a:r>
+              <a:rPr sz="1100"/>
+              <a:t>Deploy-MDFC-Config</a:t>
+            </a:r>
+          </a:p>
+          <a:p>
+            <a:pPr/>
+            <a:r>
+              <a:rPr sz="1100"/>
+              <a:t>Deploy-Private-DNS-Zones (59)</a:t>
+            </a:r>
+          </a:p>
+          <a:p>
+            <a:pPr/>
+            <a:r>
+              <a:rPr sz="1100"/>
+              <a:t>Enforce-Guardrails-* (26 Dienste)</a:t>
+            </a:r>
+          </a:p>
+          <a:p>
+            <a:pPr/>
+            <a:r>
+              <a:rPr sz="1100"/>
+              <a:t>Deploy-VM/VMSS-Monitoring</a:t>
+            </a:r>
+          </a:p>
+          <a:p>
+            <a:pPr/>
+            <a:r>
+              <a:rPr sz="1100"/>
+              <a:t>Deploy-MDEndpoints</a:t>
+            </a:r>
+          </a:p>
+          <a:p>
+            <a:pPr/>
+            <a:r>
+              <a:rPr sz="1100"/>
+              <a:t>Enforce-ACSB</a:t>
+            </a:r>
+          </a:p>
+          <a:p>
+            <a:pPr/>
+            <a:r>
+              <a:rPr sz="1100"/>
+              <a:t>Deploy-VM-Backup</a:t>
+            </a:r>
+          </a:p>
+        </p:txBody>
+      </p:sp>
+      <p:sp>
+        <p:nvSpPr>
+          <p:cNvPr id="6" name="Picture Placeholder 5"/>
+          <p:cNvSpPr>
+            <a:spLocks noGrp="1"/>
+          </p:cNvSpPr>
+          <p:nvPr>
+            <p:ph type="pic" idx="19" sz="quarter"/>
+          </p:nvPr>
+        </p:nvSpPr>
+        <p:spPr/>
+      </p:sp>
+      <p:sp>
+        <p:nvSpPr>
+          <p:cNvPr id="7" name="Picture Placeholder 6"/>
+          <p:cNvSpPr>
+            <a:spLocks noGrp="1"/>
+          </p:cNvSpPr>
+          <p:nvPr>
+            <p:ph type="pic" idx="20" sz="quarter"/>
+          </p:nvPr>
+        </p:nvSpPr>
+        <p:spPr/>
+      </p:sp>
+      <p:sp>
+        <p:nvSpPr>
+          <p:cNvPr id="8" name="Text Placeholder 7"/>
+          <p:cNvSpPr>
+            <a:spLocks noGrp="1"/>
+          </p:cNvSpPr>
+          <p:nvPr>
+            <p:ph type="body" idx="21" sz="quarter"/>
+          </p:nvPr>
+        </p:nvSpPr>
+        <p:spPr/>
+        <p:txBody>
+          <a:bodyPr wrap="square"/>
+          <a:lstStyle/>
+          <a:p>
+            <a:pPr/>
+            <a:r>
+              <a:rPr sz="1100"/>
+              <a:t>alz-Root:             17</a:t>
+            </a:r>
+          </a:p>
+          <a:p>
+            <a:pPr/>
+            <a:r>
+              <a:rPr sz="1100"/>
+              <a:t>alz-landingzones:     53</a:t>
+            </a:r>
+          </a:p>
+          <a:p>
+            <a:pPr/>
+            <a:r>
+              <a:rPr sz="1100"/>
+              <a:t>alz-platform:         40</a:t>
+            </a:r>
+          </a:p>
+          <a:p>
+            <a:pPr/>
+            <a:r>
+              <a:rPr sz="1100"/>
+              <a:t>alz-corp:              5</a:t>
+            </a:r>
+          </a:p>
+          <a:p>
+            <a:pPr/>
+            <a:r>
+              <a:rPr sz="1100"/>
+              <a:t>alz-identity:          4</a:t>
+            </a:r>
+          </a:p>
+          <a:p>
+            <a:pPr/>
+            <a:r>
+              <a:rPr sz="1100"/>
+              <a:t>alz-connectivity:      1</a:t>
+            </a:r>
+          </a:p>
+          <a:p>
+            <a:pPr/>
+            <a:r>
+              <a:rPr sz="1100"/>
+              <a:t>Sandbox + Decomm:      2</a:t>
+            </a:r>
+          </a:p>
+        </p:txBody>
+      </p:sp>
+      <p:sp>
+        <p:nvSpPr>
+          <p:cNvPr id="9" name="Subtitle 8"/>
           <p:cNvSpPr>
             <a:spLocks noGrp="1"/>
           </p:cNvSpPr>
@@ -26153,6 +26363,159 @@
           <a:p>
             <a:r>
               <a:t>Governance und Policies</a:t>
+            </a:r>
+          </a:p>
+        </p:txBody>
+      </p:sp>
+      <p:sp>
+        <p:nvSpPr>
+          <p:cNvPr id="10" name="Rectangle 9"/>
+          <p:cNvSpPr/>
+          <p:nvPr/>
+        </p:nvSpPr>
+        <p:spPr>
+          <a:xfrm>
+            <a:off x="338328" y="2167128"/>
+            <a:ext cx="3602736" cy="2523744"/>
+          </a:xfrm>
+          <a:prstGeom prst="rect">
+            <a:avLst/>
+          </a:prstGeom>
+          <a:solidFill>
+            <a:srgbClr val="075033"/>
+          </a:solidFill>
+          <a:ln>
+            <a:noFill/>
+          </a:ln>
+        </p:spPr>
+        <p:style>
+          <a:lnRef idx="1">
+            <a:schemeClr val="accent1"/>
+          </a:lnRef>
+          <a:fillRef idx="3">
+            <a:schemeClr val="accent1"/>
+          </a:fillRef>
+          <a:effectRef idx="2">
+            <a:schemeClr val="accent1"/>
+          </a:effectRef>
+          <a:fontRef idx="minor">
+            <a:schemeClr val="lt1"/>
+          </a:fontRef>
+        </p:style>
+        <p:txBody>
+          <a:bodyPr rtlCol="0" anchor="ctr" wrap="square"/>
+          <a:lstStyle/>
+          <a:p>
+            <a:pPr algn="ctr"/>
+            <a:r>
+              <a:rPr sz="1800" b="1">
+                <a:solidFill>
+                  <a:srgbClr val="FFFFFF"/>
+                </a:solidFill>
+              </a:rPr>
+              <a:t>149 Definitionen</a:t>
+            </a:r>
+          </a:p>
+        </p:txBody>
+      </p:sp>
+      <p:sp>
+        <p:nvSpPr>
+          <p:cNvPr id="11" name="Rectangle 10"/>
+          <p:cNvSpPr/>
+          <p:nvPr/>
+        </p:nvSpPr>
+        <p:spPr>
+          <a:xfrm>
+            <a:off x="4297680" y="2167128"/>
+            <a:ext cx="3602736" cy="2523744"/>
+          </a:xfrm>
+          <a:prstGeom prst="rect">
+            <a:avLst/>
+          </a:prstGeom>
+          <a:solidFill>
+            <a:srgbClr val="23A96A"/>
+          </a:solidFill>
+          <a:ln>
+            <a:noFill/>
+          </a:ln>
+        </p:spPr>
+        <p:style>
+          <a:lnRef idx="1">
+            <a:schemeClr val="accent1"/>
+          </a:lnRef>
+          <a:fillRef idx="3">
+            <a:schemeClr val="accent1"/>
+          </a:fillRef>
+          <a:effectRef idx="2">
+            <a:schemeClr val="accent1"/>
+          </a:effectRef>
+          <a:fontRef idx="minor">
+            <a:schemeClr val="lt1"/>
+          </a:fontRef>
+        </p:style>
+        <p:txBody>
+          <a:bodyPr rtlCol="0" anchor="ctr" wrap="square"/>
+          <a:lstStyle/>
+          <a:p>
+            <a:pPr algn="ctr"/>
+            <a:r>
+              <a:rPr sz="1800" b="1">
+                <a:solidFill>
+                  <a:srgbClr val="FFFFFF"/>
+                </a:solidFill>
+              </a:rPr>
+              <a:t>42 Initiativen</a:t>
+            </a:r>
+          </a:p>
+        </p:txBody>
+      </p:sp>
+      <p:sp>
+        <p:nvSpPr>
+          <p:cNvPr id="12" name="Rectangle 11"/>
+          <p:cNvSpPr/>
+          <p:nvPr/>
+        </p:nvSpPr>
+        <p:spPr>
+          <a:xfrm>
+            <a:off x="8257031" y="2167128"/>
+            <a:ext cx="3602736" cy="2523744"/>
+          </a:xfrm>
+          <a:prstGeom prst="rect">
+            <a:avLst/>
+          </a:prstGeom>
+          <a:solidFill>
+            <a:srgbClr val="053B25"/>
+          </a:solidFill>
+          <a:ln>
+            <a:noFill/>
+          </a:ln>
+        </p:spPr>
+        <p:style>
+          <a:lnRef idx="1">
+            <a:schemeClr val="accent1"/>
+          </a:lnRef>
+          <a:fillRef idx="3">
+            <a:schemeClr val="accent1"/>
+          </a:fillRef>
+          <a:effectRef idx="2">
+            <a:schemeClr val="accent1"/>
+          </a:effectRef>
+          <a:fontRef idx="minor">
+            <a:schemeClr val="lt1"/>
+          </a:fontRef>
+        </p:style>
+        <p:txBody>
+          <a:bodyPr rtlCol="0" anchor="ctr" wrap="square"/>
+          <a:lstStyle/>
+          <a:p>
+            <a:pPr algn="ctr"/>
+            <a:r>
+              <a:rPr sz="1800" b="1">
+                <a:solidFill>
+                  <a:srgbClr val="FFFFFF"/>
+                </a:solidFill>
+              </a:rPr>
+              <a:t>123 Assignments</a:t>
             </a:r>
           </a:p>
         </p:txBody>
@@ -26191,14 +26554,72 @@
           <a:lstStyle/>
           <a:p>
             <a:r>
-              <a:t>5  ·  Netzwerk-Architektur</a:t>
-            </a:r>
-          </a:p>
-        </p:txBody>
-      </p:sp>
-      <p:sp>
-        <p:nvSpPr>
-          <p:cNvPr id="3" name="Subtitle 2"/>
+              <a:t>DoNotEnforce-Modus: sicheres Onboarding bestehender Ressourcen</a:t>
+            </a:r>
+          </a:p>
+        </p:txBody>
+      </p:sp>
+      <p:sp>
+        <p:nvSpPr>
+          <p:cNvPr id="3" name="Text Placeholder 2"/>
+          <p:cNvSpPr>
+            <a:spLocks noGrp="1"/>
+          </p:cNvSpPr>
+          <p:nvPr>
+            <p:ph type="body" idx="13" sz="quarter"/>
+          </p:nvPr>
+        </p:nvSpPr>
+        <p:spPr/>
+        <p:txBody>
+          <a:bodyPr wrap="square"/>
+          <a:lstStyle/>
+          <a:p>
+            <a:pPr/>
+            <a:r>
+              <a:rPr sz="1200"/>
+              <a:t>Ohne DoNotEnforce</a:t>
+            </a:r>
+          </a:p>
+          <a:p>
+            <a:pPr lvl="1"/>
+            <a:r>
+              <a:rPr sz="1200"/>
+              <a:t>Policies blockieren sofort</a:t>
+            </a:r>
+          </a:p>
+          <a:p>
+            <a:pPr lvl="1"/>
+            <a:r>
+              <a:rPr sz="1200"/>
+              <a:t>Bestehende Ressourcen brechen</a:t>
+            </a:r>
+          </a:p>
+          <a:p>
+            <a:pPr lvl="1"/>
+            <a:r>
+              <a:rPr sz="1200"/>
+              <a:t>Produktion kann unterbrochen werden</a:t>
+            </a:r>
+          </a:p>
+          <a:p>
+            <a:pPr lvl="1"/>
+            <a:r>
+              <a:rPr sz="1200"/>
+              <a:t>Kein Audit vor Enforcement</a:t>
+            </a:r>
+          </a:p>
+          <a:p>
+            <a:pPr lvl="1"/>
+            <a:r>
+              <a:rPr sz="1200"/>
+              <a:t>Rollback-Risiko bei Fehlkonfiguration</a:t>
+            </a:r>
+          </a:p>
+        </p:txBody>
+      </p:sp>
+      <p:sp>
+        <p:nvSpPr>
+          <p:cNvPr id="4" name="Subtitle 3"/>
           <p:cNvSpPr>
             <a:spLocks noGrp="1"/>
           </p:cNvSpPr>
@@ -26212,26 +26633,67 @@
           <a:lstStyle/>
           <a:p>
             <a:r>
-              <a:t>Hub-and-Spoke · Bechtle-Empfehlung: 1 Region · Firewall Standard · ~€1.050/Monat</a:t>
-            </a:r>
-          </a:p>
-        </p:txBody>
-      </p:sp>
-      <p:sp>
-        <p:nvSpPr>
-          <p:cNvPr id="4" name="Text Placeholder 3"/>
-          <p:cNvSpPr>
-            <a:spLocks noGrp="1"/>
-          </p:cNvSpPr>
-          <p:nvPr>
-            <p:ph type="body" idx="13" sz="quarter"/>
+              <a:t>Governance und Policies · Onboarding</a:t>
+            </a:r>
+          </a:p>
+        </p:txBody>
+      </p:sp>
+      <p:sp>
+        <p:nvSpPr>
+          <p:cNvPr id="5" name="Text Placeholder 4"/>
+          <p:cNvSpPr>
+            <a:spLocks noGrp="1"/>
+          </p:cNvSpPr>
+          <p:nvPr>
+            <p:ph type="body" idx="14" sz="quarter"/>
           </p:nvPr>
         </p:nvSpPr>
         <p:spPr/>
         <p:txBody>
-          <a:bodyPr/>
+          <a:bodyPr wrap="square"/>
           <a:lstStyle/>
-          <a:p/>
+          <a:p>
+            <a:pPr/>
+            <a:r>
+              <a:rPr sz="1200"/>
+              <a:t>Mit DoNotEnforce (Bechtle-Standard)</a:t>
+            </a:r>
+          </a:p>
+          <a:p>
+            <a:pPr lvl="1"/>
+            <a:r>
+              <a:rPr sz="1200"/>
+              <a:t>Policies werden ausgewertet, nicht erzwungen</a:t>
+            </a:r>
+          </a:p>
+          <a:p>
+            <a:pPr lvl="1"/>
+            <a:r>
+              <a:rPr sz="1200"/>
+              <a:t>Compliance-Dashboard zeigt Handlungsbedarf</a:t>
+            </a:r>
+          </a:p>
+          <a:p>
+            <a:pPr lvl="1"/>
+            <a:r>
+              <a:rPr sz="1200"/>
+              <a:t>Bestehende Ressourcen laufen ungestört</a:t>
+            </a:r>
+          </a:p>
+          <a:p>
+            <a:pPr lvl="1"/>
+            <a:r>
+              <a:rPr sz="1200"/>
+              <a:t>Audit-Phase 4–8 Wochen</a:t>
+            </a:r>
+          </a:p>
+          <a:p>
+            <a:pPr lvl="1"/>
+            <a:r>
+              <a:rPr sz="1200"/>
+              <a:t>Selektives Enforcing nach Remediation</a:t>
+            </a:r>
+          </a:p>
         </p:txBody>
       </p:sp>
     </p:spTree>
@@ -26268,86 +26730,15 @@
           <a:lstStyle/>
           <a:p>
             <a:r>
-              <a:t>Hub-and-Spoke: Bechtle-Empfehlung vs. Microsoft-Default</a:t>
-            </a:r>
-          </a:p>
-        </p:txBody>
-      </p:sp>
-      <p:sp>
-        <p:nvSpPr>
-          <p:cNvPr id="3" name="Text Placeholder 2"/>
-          <p:cNvSpPr>
-            <a:spLocks noGrp="1"/>
-          </p:cNvSpPr>
-          <p:nvPr>
-            <p:ph type="body" idx="13" sz="quarter"/>
-          </p:nvPr>
-        </p:nvSpPr>
-        <p:spPr/>
-        <p:txBody>
-          <a:bodyPr wrap="square"/>
-          <a:lstStyle/>
-          <a:p>
-            <a:pPr/>
-            <a:r>
-              <a:rPr sz="1300"/>
-              <a:t>Bechtle-Empfehlung: 1× Hub-VNet GWC 10.0.0.0/22 – alle Kernfunktionen, eine Region, ~€1.050/Monat</a:t>
-            </a:r>
-          </a:p>
-          <a:p>
-            <a:pPr/>
-            <a:r>
-              <a:rPr sz="1300"/>
-              <a:t>Microsoft-Default: 2× Hub-VNets (GWC + NE) – alle Dienste, beide Regionen, ~€5.800/Monat</a:t>
-            </a:r>
-          </a:p>
-          <a:p>
-            <a:pPr/>
-            <a:r>
-              <a:rPr sz="1300"/>
-              <a:t>Azure Firewall Standard (1×): ~€700/Monat  [Default: Premium 2× = ~€2.200]</a:t>
-            </a:r>
-          </a:p>
-          <a:p>
-            <a:pPr/>
-            <a:r>
-              <a:rPr sz="1300"/>
-              <a:t>Azure Bastion Standard (1×): ~€120/Monat  [Default: 2× = €240]</a:t>
-            </a:r>
-          </a:p>
-          <a:p>
-            <a:pPr/>
-            <a:r>
-              <a:rPr sz="1300"/>
-              <a:t>VPN Gateway VpnGw1AZ (1×): ~€140/Monat  [Default: 2× = €280]</a:t>
-            </a:r>
-          </a:p>
-          <a:p>
-            <a:pPr/>
-            <a:r>
-              <a:rPr sz="1300"/>
-              <a:t>ExpressRoute Gateway: deaktiviert – bei ER-Leitung aktivieren [Default: 2× = €560]</a:t>
-            </a:r>
-          </a:p>
-          <a:p>
-            <a:pPr/>
-            <a:r>
-              <a:rPr sz="1300"/>
-              <a:t>DDoS Protection: deaktiviert – bei internet-facing Workloads aktivieren [Default: €2.500]</a:t>
-            </a:r>
-          </a:p>
-          <a:p>
-            <a:pPr/>
-            <a:r>
-              <a:rPr sz="1300"/>
-              <a:t>Private DNS Zones + DNS Resolver: aktiv – unveraendert  ~€40/Monat</a:t>
-            </a:r>
-          </a:p>
-        </p:txBody>
-      </p:sp>
-      <p:sp>
-        <p:nvSpPr>
-          <p:cNvPr id="4" name="Subtitle 3"/>
+              <a:rPr sz="2800" b="1"/>
+              <a:t>5  ·  Netzwerk-Architektur</a:t>
+            </a:r>
+          </a:p>
+        </p:txBody>
+      </p:sp>
+      <p:sp>
+        <p:nvSpPr>
+          <p:cNvPr id="3" name="Subtitle 2"/>
           <p:cNvSpPr>
             <a:spLocks noGrp="1"/>
           </p:cNvSpPr>
@@ -26361,9 +26752,27 @@
           <a:lstStyle/>
           <a:p>
             <a:r>
-              <a:t>Netzwerk-Architektur</a:t>
-            </a:r>
-          </a:p>
+              <a:rPr sz="1400"/>
+              <a:t>Hub-and-Spoke · Germany West Central  ·  Firewall Standard · ~€1.050/Monat</a:t>
+            </a:r>
+          </a:p>
+        </p:txBody>
+      </p:sp>
+      <p:sp>
+        <p:nvSpPr>
+          <p:cNvPr id="4" name="Text Placeholder 3"/>
+          <p:cNvSpPr>
+            <a:spLocks noGrp="1"/>
+          </p:cNvSpPr>
+          <p:nvPr>
+            <p:ph type="body" idx="13" sz="quarter"/>
+          </p:nvPr>
+        </p:nvSpPr>
+        <p:spPr/>
+        <p:txBody>
+          <a:bodyPr/>
+          <a:lstStyle/>
+          <a:p/>
         </p:txBody>
       </p:sp>
     </p:spTree>
@@ -26384,102 +26793,9 @@
         <p:nvPr/>
       </p:nvGrpSpPr>
       <p:grpSpPr/>
-      <p:sp>
-        <p:nvSpPr>
-          <p:cNvPr id="2" name="Title 1"/>
-          <p:cNvSpPr>
-            <a:spLocks noGrp="1"/>
-          </p:cNvSpPr>
-          <p:nvPr>
-            <p:ph type="title"/>
-          </p:nvPr>
-        </p:nvSpPr>
-        <p:spPr/>
-        <p:txBody>
-          <a:bodyPr/>
-          <a:lstStyle/>
-          <a:p>
-            <a:r>
-              <a:t>Connectivity Subscription im Detail</a:t>
-            </a:r>
-          </a:p>
-        </p:txBody>
-      </p:sp>
-      <p:sp>
-        <p:nvSpPr>
-          <p:cNvPr id="3" name="Text Placeholder 2"/>
-          <p:cNvSpPr>
-            <a:spLocks noGrp="1"/>
-          </p:cNvSpPr>
-          <p:nvPr>
-            <p:ph type="body" idx="13" sz="quarter"/>
-          </p:nvPr>
-        </p:nvSpPr>
-        <p:spPr/>
-        <p:txBody>
-          <a:bodyPr wrap="square"/>
-          <a:lstStyle/>
-          <a:p>
-            <a:pPr/>
-            <a:r>
-              <a:rPr sz="1100"/>
-              <a:t>Azure Firewall Standard: FQDN · NAT · Threat Intel · ~€700/Mon.</a:t>
-            </a:r>
-          </a:p>
-          <a:p>
-            <a:pPr/>
-            <a:r>
-              <a:rPr sz="1100"/>
-              <a:t>VPN GW VpnGw1AZ: ~€140/Mon.  |  Bastion: RDP/SSH ohne Public IP · ~€120</a:t>
-            </a:r>
-          </a:p>
-          <a:p>
-            <a:pPr/>
-            <a:r>
-              <a:rPr sz="1100"/>
-              <a:t>Key Vault: Zertifikate für Monitoring-TLS</a:t>
-            </a:r>
-          </a:p>
-          <a:p>
-            <a:pPr/>
-            <a:r>
-              <a:rPr sz="1100"/>
-              <a:t>Event Hub → CrowdStrike SIEM (Log-Export)</a:t>
-            </a:r>
-          </a:p>
-          <a:p>
-            <a:pPr/>
-            <a:r>
-              <a:rPr sz="1100"/>
-              <a:t>UDR: aller Spoke-Traffic zwingend über Firewall</a:t>
-            </a:r>
-          </a:p>
-        </p:txBody>
-      </p:sp>
-      <p:sp>
-        <p:nvSpPr>
-          <p:cNvPr id="4" name="Subtitle 3"/>
-          <p:cNvSpPr>
-            <a:spLocks noGrp="1"/>
-          </p:cNvSpPr>
-          <p:nvPr>
-            <p:ph type="subTitle" idx="1"/>
-          </p:nvPr>
-        </p:nvSpPr>
-        <p:spPr/>
-        <p:txBody>
-          <a:bodyPr/>
-          <a:lstStyle/>
-          <a:p>
-            <a:r>
-              <a:t>Netzwerk-Architektur</a:t>
-            </a:r>
-          </a:p>
-        </p:txBody>
-      </p:sp>
       <p:pic>
         <p:nvPicPr>
-          <p:cNvPr id="5" name="Picture Placeholder 4" descr="alz-hub-spoke.png"/>
+          <p:cNvPr id="2" name="Picture Placeholder 1" descr="alz-hub-spoke.png"/>
           <p:cNvPicPr>
             <a:picLocks noGrp="1" noChangeAspect="1"/>
           </p:cNvPicPr>
@@ -26489,13 +26805,106 @@
         </p:nvPicPr>
         <p:blipFill>
           <a:blip r:embed="rId2"/>
-          <a:srcRect l="23519" r="23519"/>
+          <a:srcRect l="14133" r="14133"/>
           <a:stretch>
             <a:fillRect/>
           </a:stretch>
         </p:blipFill>
         <p:spPr/>
       </p:pic>
+      <p:sp>
+        <p:nvSpPr>
+          <p:cNvPr id="3" name="Title 2"/>
+          <p:cNvSpPr>
+            <a:spLocks noGrp="1"/>
+          </p:cNvSpPr>
+          <p:nvPr>
+            <p:ph type="title"/>
+          </p:nvPr>
+        </p:nvSpPr>
+        <p:spPr/>
+        <p:txBody>
+          <a:bodyPr/>
+          <a:lstStyle/>
+          <a:p>
+            <a:r>
+              <a:t>Connectivity Subscription im Detail</a:t>
+            </a:r>
+          </a:p>
+        </p:txBody>
+      </p:sp>
+      <p:sp>
+        <p:nvSpPr>
+          <p:cNvPr id="4" name="Text Placeholder 3"/>
+          <p:cNvSpPr>
+            <a:spLocks noGrp="1"/>
+          </p:cNvSpPr>
+          <p:nvPr>
+            <p:ph type="body" idx="13" sz="quarter"/>
+          </p:nvPr>
+        </p:nvSpPr>
+        <p:spPr/>
+        <p:txBody>
+          <a:bodyPr wrap="square"/>
+          <a:lstStyle/>
+          <a:p>
+            <a:pPr/>
+            <a:r>
+              <a:rPr sz="1100"/>
+              <a:t>Azure Firewall Standard:  ~€700/Mon.</a:t>
+            </a:r>
+          </a:p>
+          <a:p>
+            <a:pPr/>
+            <a:r>
+              <a:rPr sz="1100"/>
+              <a:t>Azure Bastion Standard:   ~€120/Mon.</a:t>
+            </a:r>
+          </a:p>
+          <a:p>
+            <a:pPr/>
+            <a:r>
+              <a:rPr sz="1100"/>
+              <a:t>VPN Gateway VpnGw1AZ:     ~€140/Mon.</a:t>
+            </a:r>
+          </a:p>
+          <a:p>
+            <a:pPr/>
+            <a:r>
+              <a:rPr sz="1100"/>
+              <a:t>DNS Private Resolver + 59 Zonen: ~€25</a:t>
+            </a:r>
+          </a:p>
+          <a:p>
+            <a:pPr/>
+            <a:r>
+              <a:rPr sz="1100"/>
+              <a:t>Key Vault · Event Hub · UDR → FW</a:t>
+            </a:r>
+          </a:p>
+        </p:txBody>
+      </p:sp>
+      <p:sp>
+        <p:nvSpPr>
+          <p:cNvPr id="5" name="Subtitle 4"/>
+          <p:cNvSpPr>
+            <a:spLocks noGrp="1"/>
+          </p:cNvSpPr>
+          <p:nvPr>
+            <p:ph type="subTitle" idx="1"/>
+          </p:nvPr>
+        </p:nvSpPr>
+        <p:spPr/>
+        <p:txBody>
+          <a:bodyPr/>
+          <a:lstStyle/>
+          <a:p>
+            <a:r>
+              <a:t>Netzwerk-Architektur</a:t>
+            </a:r>
+          </a:p>
+        </p:txBody>
+      </p:sp>
     </p:spTree>
   </p:cSld>
   <p:clrMapOvr>
@@ -26560,35 +26969,35 @@
             <a:pPr lvl="1"/>
             <a:r>
               <a:rPr sz="1200"/>
-              <a:t>Azure Firewall Premium 2× · ~€2.200</a:t>
+              <a:t>Azure Firewall Premium 2×   ~€2.200</a:t>
             </a:r>
           </a:p>
           <a:p>
             <a:pPr lvl="1"/>
             <a:r>
               <a:rPr sz="1200"/>
-              <a:t>DDoS Network Protection · ~€2.500</a:t>
+              <a:t>DDoS Network Protection      ~€2.500</a:t>
             </a:r>
           </a:p>
           <a:p>
             <a:pPr lvl="1"/>
             <a:r>
               <a:rPr sz="1200"/>
-              <a:t>ExpressRoute GW 2× · ~€560</a:t>
+              <a:t>ExpressRoute Gateway 2×        ~€560</a:t>
             </a:r>
           </a:p>
           <a:p>
             <a:pPr lvl="1"/>
             <a:r>
               <a:rPr sz="1200"/>
-              <a:t>VPN GW 2× · ~€280</a:t>
+              <a:t>VPN Gateway 2×                  ~€280</a:t>
             </a:r>
           </a:p>
           <a:p>
             <a:pPr lvl="1"/>
             <a:r>
               <a:rPr sz="1200"/>
-              <a:t>Azure Bastion 2× · ~€240</a:t>
+              <a:t>Azure Bastion 2×                ~€240</a:t>
             </a:r>
           </a:p>
           <a:p>
@@ -26598,6 +27007,13 @@
               <a:t>2 Regionen: GWC + North Europe</a:t>
             </a:r>
           </a:p>
+          <a:p>
+            <a:pPr lvl="1"/>
+            <a:r>
+              <a:rPr sz="1200"/>
+              <a:t>Alle Dienste von Beginn an aktiv</a:t>
+            </a:r>
+          </a:p>
         </p:txBody>
       </p:sp>
       <p:sp>
@@ -26616,7 +27032,7 @@
           <a:lstStyle/>
           <a:p>
             <a:r>
-              <a:t>Netzwerk-Architektur</a:t>
+              <a:t>Netzwerk-Architektur · Kostenvergleich</a:t>
             </a:r>
           </a:p>
         </p:txBody>
@@ -26646,14 +27062,14 @@
             <a:pPr lvl="1"/>
             <a:r>
               <a:rPr sz="1200"/>
-              <a:t>Azure Firewall Standard 1× · ~€700</a:t>
+              <a:t>Azure Firewall Standard 1×     ~€700</a:t>
             </a:r>
           </a:p>
           <a:p>
             <a:pPr lvl="1"/>
             <a:r>
               <a:rPr sz="1200"/>
-              <a:t>DDoS: deferred (bei Bedarf aktivieren)</a:t>
+              <a:t>DDoS: deferred (aktivierbar)</a:t>
             </a:r>
           </a:p>
           <a:p>
@@ -26667,14 +27083,14 @@
             <a:pPr lvl="1"/>
             <a:r>
               <a:rPr sz="1200"/>
-              <a:t>VPN GW 1× · ~€140</a:t>
+              <a:t>VPN Gateway 1×                  ~€140</a:t>
             </a:r>
           </a:p>
           <a:p>
             <a:pPr lvl="1"/>
             <a:r>
               <a:rPr sz="1200"/>
-              <a:t>Azure Bastion 1× · ~€120</a:t>
+              <a:t>Azure Bastion 1×                ~€120</a:t>
             </a:r>
           </a:p>
           <a:p>
@@ -26682,6 +27098,13 @@
             <a:r>
               <a:rPr sz="1200"/>
               <a:t>1 Region: Germany West Central</a:t>
+            </a:r>
+          </a:p>
+          <a:p>
+            <a:pPr lvl="1"/>
+            <a:r>
+              <a:rPr sz="1200"/>
+              <a:t>In-Place-Upgrade ohne Rebuild</a:t>
             </a:r>
           </a:p>
         </p:txBody>
@@ -26706,12 +27129,33 @@
       <p:grpSpPr/>
       <p:sp>
         <p:nvSpPr>
-          <p:cNvPr id="2" name="Text Placeholder 1"/>
-          <p:cNvSpPr>
-            <a:spLocks noGrp="1"/>
-          </p:cNvSpPr>
-          <p:nvPr>
-            <p:ph type="body" idx="13" sz="quarter"/>
+          <p:cNvPr id="2" name="Title 1"/>
+          <p:cNvSpPr>
+            <a:spLocks noGrp="1"/>
+          </p:cNvSpPr>
+          <p:nvPr>
+            <p:ph type="title"/>
+          </p:nvPr>
+        </p:nvSpPr>
+        <p:spPr/>
+        <p:txBody>
+          <a:bodyPr/>
+          <a:lstStyle/>
+          <a:p>
+            <a:r>
+              <a:t>Agenda</a:t>
+            </a:r>
+          </a:p>
+        </p:txBody>
+      </p:sp>
+      <p:sp>
+        <p:nvSpPr>
+          <p:cNvPr id="3" name="Text Placeholder 2"/>
+          <p:cNvSpPr>
+            <a:spLocks noGrp="1"/>
+          </p:cNvSpPr>
+          <p:nvPr>
+            <p:ph type="body" idx="20" sz="quarter"/>
           </p:nvPr>
         </p:nvSpPr>
         <p:spPr/>
@@ -26729,119 +27173,181 @@
             <a:pPr/>
             <a:r>
               <a:rPr sz="1300"/>
-              <a:t>1  ·  Ausgangslage und Zielbild</a:t>
+              <a:t> </a:t>
             </a:r>
           </a:p>
           <a:p>
             <a:pPr/>
             <a:r>
               <a:rPr sz="1300"/>
-              <a:t>2  ·  Methodik und Vorgehen</a:t>
+              <a:t>Ausgangslage</a:t>
             </a:r>
           </a:p>
           <a:p>
             <a:pPr/>
             <a:r>
               <a:rPr sz="1300"/>
-              <a:t>3  ·  Zielarchitektur</a:t>
+              <a:t>Methodik</a:t>
             </a:r>
           </a:p>
           <a:p>
             <a:pPr/>
             <a:r>
               <a:rPr sz="1300"/>
-              <a:t>4  ·  Governance und Policies</a:t>
-            </a:r>
-          </a:p>
+              <a:t>Zielarchitektur</a:t>
+            </a:r>
+          </a:p>
+        </p:txBody>
+      </p:sp>
+      <p:sp>
+        <p:nvSpPr>
+          <p:cNvPr id="4" name="Text Placeholder 3"/>
+          <p:cNvSpPr>
+            <a:spLocks noGrp="1"/>
+          </p:cNvSpPr>
+          <p:nvPr>
+            <p:ph type="body" idx="21" sz="quarter"/>
+          </p:nvPr>
+        </p:nvSpPr>
+        <p:spPr/>
+        <p:txBody>
+          <a:bodyPr wrap="square"/>
+          <a:lstStyle/>
           <a:p>
             <a:pPr/>
             <a:r>
               <a:rPr sz="1300"/>
-              <a:t>5  ·  Netzwerk-Architektur</a:t>
+              <a:t>Governance</a:t>
             </a:r>
           </a:p>
           <a:p>
             <a:pPr/>
             <a:r>
               <a:rPr sz="1300"/>
-              <a:t>6  ·  Sicherheit</a:t>
+              <a:t> </a:t>
             </a:r>
           </a:p>
           <a:p>
             <a:pPr/>
             <a:r>
               <a:rPr sz="1300"/>
-              <a:t>7  ·  Monitoring und Logging</a:t>
+              <a:t>§ 4  Policies &amp; Assignments</a:t>
             </a:r>
           </a:p>
           <a:p>
             <a:pPr/>
             <a:r>
               <a:rPr sz="1300"/>
-              <a:t>8  ·  Identity und RBAC</a:t>
+              <a:t>§ 5  Netzwerk-Architektur</a:t>
             </a:r>
           </a:p>
           <a:p>
             <a:pPr/>
             <a:r>
               <a:rPr sz="1300"/>
-              <a:t>9  ·  Automatisierung und CI/CD</a:t>
-            </a:r>
-          </a:p>
+              <a:t>§ 6  Sicherheit</a:t>
+            </a:r>
+          </a:p>
+        </p:txBody>
+      </p:sp>
+      <p:sp>
+        <p:nvSpPr>
+          <p:cNvPr id="5" name="Text Placeholder 4"/>
+          <p:cNvSpPr>
+            <a:spLocks noGrp="1"/>
+          </p:cNvSpPr>
+          <p:nvPr>
+            <p:ph type="body" idx="22" sz="quarter"/>
+          </p:nvPr>
+        </p:nvSpPr>
+        <p:spPr/>
+        <p:txBody>
+          <a:bodyPr wrap="square"/>
+          <a:lstStyle/>
           <a:p>
             <a:pPr/>
             <a:r>
               <a:rPr sz="1300"/>
-              <a:t>10  ·  Kosten und Kostensteuerung</a:t>
+              <a:t>Betrieb</a:t>
             </a:r>
           </a:p>
           <a:p>
             <a:pPr/>
             <a:r>
               <a:rPr sz="1300"/>
-              <a:t>11  ·  Roadmap und Phasen</a:t>
+              <a:t> </a:t>
             </a:r>
           </a:p>
           <a:p>
             <a:pPr/>
             <a:r>
               <a:rPr sz="1300"/>
-              <a:t>12  ·  Risiken und Entscheidungen</a:t>
+              <a:t>§ 7  Monitoring &amp; Logging</a:t>
             </a:r>
           </a:p>
           <a:p>
             <a:pPr/>
             <a:r>
               <a:rPr sz="1300"/>
-              <a:t>13  ·  Ergänzende Randthemen</a:t>
+              <a:t>§ 8  Identity &amp; RBAC</a:t>
             </a:r>
           </a:p>
           <a:p>
             <a:pPr/>
             <a:r>
               <a:rPr sz="1300"/>
-              <a:t>14  ·  Nächste Schritte</a:t>
-            </a:r>
-          </a:p>
-        </p:txBody>
-      </p:sp>
-      <p:sp>
-        <p:nvSpPr>
-          <p:cNvPr id="3" name="Title 2"/>
-          <p:cNvSpPr>
-            <a:spLocks noGrp="1"/>
-          </p:cNvSpPr>
-          <p:nvPr>
-            <p:ph type="title"/>
+              <a:t>§ 9  Automatisierung</a:t>
+            </a:r>
+          </a:p>
+        </p:txBody>
+      </p:sp>
+      <p:sp>
+        <p:nvSpPr>
+          <p:cNvPr id="6" name="Text Placeholder 5"/>
+          <p:cNvSpPr>
+            <a:spLocks noGrp="1"/>
+          </p:cNvSpPr>
+          <p:nvPr>
+            <p:ph type="body" idx="23" sz="quarter"/>
           </p:nvPr>
         </p:nvSpPr>
         <p:spPr/>
         <p:txBody>
-          <a:bodyPr/>
+          <a:bodyPr wrap="square"/>
           <a:lstStyle/>
           <a:p>
-            <a:r>
-              <a:t>Agenda</a:t>
+            <a:pPr/>
+            <a:r>
+              <a:rPr sz="1300"/>
+              <a:t>Wirtschaftlichkeit</a:t>
+            </a:r>
+          </a:p>
+          <a:p>
+            <a:pPr/>
+            <a:r>
+              <a:rPr sz="1300"/>
+              <a:t> </a:t>
+            </a:r>
+          </a:p>
+          <a:p>
+            <a:pPr/>
+            <a:r>
+              <a:rPr sz="1300"/>
+              <a:t>§ 10  Kosten &amp; Varianten</a:t>
+            </a:r>
+          </a:p>
+          <a:p>
+            <a:pPr/>
+            <a:r>
+              <a:rPr sz="1300"/>
+              <a:t>§ 11  Roadmap &amp; Phasen</a:t>
+            </a:r>
+          </a:p>
+          <a:p>
+            <a:pPr/>
+            <a:r>
+              <a:rPr sz="1300"/>
+              <a:t>§ 12–14  Risiken &amp; Next Steps</a:t>
             </a:r>
           </a:p>
         </p:txBody>
@@ -26880,6 +27386,7 @@
           <a:lstStyle/>
           <a:p>
             <a:r>
+              <a:rPr sz="2800" b="1"/>
               <a:t>6  ·  Sicherheit</a:t>
             </a:r>
           </a:p>
@@ -26901,7 +27408,8 @@
           <a:lstStyle/>
           <a:p>
             <a:r>
-              <a:t>Defender for Cloud · Netzwerksegmentierung · Automatische Remediation</a:t>
+              <a:rPr sz="1400"/>
+              <a:t>Defender for Cloud · CrowdStrike SIEM · Automatische Remediation</a:t>
             </a:r>
           </a:p>
         </p:txBody>
@@ -26943,7 +27451,19 @@
       <p:grpSpPr/>
       <p:sp>
         <p:nvSpPr>
-          <p:cNvPr id="2" name="Title 1"/>
+          <p:cNvPr id="2" name="Picture Placeholder 1"/>
+          <p:cNvSpPr>
+            <a:spLocks noGrp="1"/>
+          </p:cNvSpPr>
+          <p:nvPr>
+            <p:ph type="pic" idx="18" sz="quarter"/>
+          </p:nvPr>
+        </p:nvSpPr>
+        <p:spPr/>
+      </p:sp>
+      <p:sp>
+        <p:nvSpPr>
+          <p:cNvPr id="3" name="Title 2"/>
           <p:cNvSpPr>
             <a:spLocks noGrp="1"/>
           </p:cNvSpPr>
@@ -26957,14 +27477,14 @@
           <a:lstStyle/>
           <a:p>
             <a:r>
-              <a:t>Mehrschichtige Sicherheitsarchitektur</a:t>
-            </a:r>
-          </a:p>
-        </p:txBody>
-      </p:sp>
-      <p:sp>
-        <p:nvSpPr>
-          <p:cNvPr id="3" name="Text Placeholder 2"/>
+              <a:t>Drei Sicherheitsebenen</a:t>
+            </a:r>
+          </a:p>
+        </p:txBody>
+      </p:sp>
+      <p:sp>
+        <p:nvSpPr>
+          <p:cNvPr id="4" name="Text Placeholder 3"/>
           <p:cNvSpPr>
             <a:spLocks noGrp="1"/>
           </p:cNvSpPr>
@@ -26979,57 +27499,169 @@
           <a:p>
             <a:pPr/>
             <a:r>
-              <a:rPr sz="1300"/>
-              <a:t>Präventiv (Policies): Deny-Subnet-Without-Nsg, Deny-MgmtPorts-Internet, Deny-Public-IP, Deny-Public-Endpoints (Corp)</a:t>
+              <a:rPr sz="1100"/>
+              <a:t>Deny-Subnet-Without-Nsg</a:t>
             </a:r>
           </a:p>
           <a:p>
             <a:pPr/>
             <a:r>
-              <a:rPr sz="1300"/>
-              <a:t>Defender for Cloud: auto-aktiviert via Deploy-MDFC-Config-H224 auf alz-Root (DeployIfNotExists)</a:t>
+              <a:rPr sz="1100"/>
+              <a:t>Deny-MgmtPorts-Internet</a:t>
             </a:r>
           </a:p>
           <a:p>
             <a:pPr/>
             <a:r>
-              <a:rPr sz="1300"/>
-              <a:t>Defender for Endpoint: Deploy-MDEndpoints auf allen VMs – im Defender Server-Plan enthalten</a:t>
+              <a:rPr sz="1100"/>
+              <a:t>Deny-Public-IP (corp)</a:t>
             </a:r>
           </a:p>
           <a:p>
             <a:pPr/>
             <a:r>
-              <a:rPr sz="1300"/>
-              <a:t>MDFC Benchmarks: Microsoft Cloud Security Benchmark v1 + v2 (kostenlos, Audit)</a:t>
+              <a:rPr sz="1100"/>
+              <a:t>Deny-Public-Endpoints (59 PaaS)</a:t>
             </a:r>
           </a:p>
           <a:p>
             <a:pPr/>
             <a:r>
-              <a:rPr sz="1300"/>
-              <a:t>Activity Logs + Diagnose: alle Subscriptions und Ressourcen → Log Analytics (via DINE-Policies)</a:t>
-            </a:r>
-          </a:p>
+              <a:rPr sz="1100"/>
+              <a:t>HTTPS-only (Storage, SQL, AppGW)</a:t>
+            </a:r>
+          </a:p>
+        </p:txBody>
+      </p:sp>
+      <p:sp>
+        <p:nvSpPr>
+          <p:cNvPr id="5" name="Text Placeholder 4"/>
+          <p:cNvSpPr>
+            <a:spLocks noGrp="1"/>
+          </p:cNvSpPr>
+          <p:nvPr>
+            <p:ph type="body" idx="14" sz="quarter"/>
+          </p:nvPr>
+        </p:nvSpPr>
+        <p:spPr/>
+        <p:txBody>
+          <a:bodyPr wrap="square"/>
+          <a:lstStyle/>
           <a:p>
             <a:pPr/>
             <a:r>
-              <a:rPr sz="1300"/>
-              <a:t>Backup: Deploy-VM-Backup sichert VMs ohne Backup-Tag automatisch in Recovery Vault</a:t>
+              <a:rPr sz="1100"/>
+              <a:t>Defender for Cloud (via Policy)</a:t>
             </a:r>
           </a:p>
           <a:p>
             <a:pPr/>
             <a:r>
-              <a:rPr sz="1300"/>
-              <a:t>Roadmap: Microsoft Sentinel als SIEM-Folgestufe (nicht Bestandteil der Landing Zone)</a:t>
-            </a:r>
-          </a:p>
-        </p:txBody>
-      </p:sp>
-      <p:sp>
-        <p:nvSpPr>
-          <p:cNvPr id="4" name="Subtitle 3"/>
+              <a:rPr sz="1100"/>
+              <a:t>Activity Logs → Log Analytics</a:t>
+            </a:r>
+          </a:p>
+          <a:p>
+            <a:pPr/>
+            <a:r>
+              <a:rPr sz="1100"/>
+              <a:t>Diagnose-Policies (67 Ressourcentypen)</a:t>
+            </a:r>
+          </a:p>
+          <a:p>
+            <a:pPr/>
+            <a:r>
+              <a:rPr sz="1100"/>
+              <a:t>CrowdStrike SIEM via Event Hub</a:t>
+            </a:r>
+          </a:p>
+          <a:p>
+            <a:pPr/>
+            <a:r>
+              <a:rPr sz="1100"/>
+              <a:t>Break-Glass-Account-Logging</a:t>
+            </a:r>
+          </a:p>
+        </p:txBody>
+      </p:sp>
+      <p:sp>
+        <p:nvSpPr>
+          <p:cNvPr id="6" name="Picture Placeholder 5"/>
+          <p:cNvSpPr>
+            <a:spLocks noGrp="1"/>
+          </p:cNvSpPr>
+          <p:nvPr>
+            <p:ph type="pic" idx="19" sz="quarter"/>
+          </p:nvPr>
+        </p:nvSpPr>
+        <p:spPr/>
+      </p:sp>
+      <p:sp>
+        <p:nvSpPr>
+          <p:cNvPr id="7" name="Picture Placeholder 6"/>
+          <p:cNvSpPr>
+            <a:spLocks noGrp="1"/>
+          </p:cNvSpPr>
+          <p:nvPr>
+            <p:ph type="pic" idx="20" sz="quarter"/>
+          </p:nvPr>
+        </p:nvSpPr>
+        <p:spPr/>
+      </p:sp>
+      <p:sp>
+        <p:nvSpPr>
+          <p:cNvPr id="8" name="Text Placeholder 7"/>
+          <p:cNvSpPr>
+            <a:spLocks noGrp="1"/>
+          </p:cNvSpPr>
+          <p:nvPr>
+            <p:ph type="body" idx="21" sz="quarter"/>
+          </p:nvPr>
+        </p:nvSpPr>
+        <p:spPr/>
+        <p:txBody>
+          <a:bodyPr wrap="square"/>
+          <a:lstStyle/>
+          <a:p>
+            <a:pPr/>
+            <a:r>
+              <a:rPr sz="1100"/>
+              <a:t>Deploy-MDFC-Config-H224 (auto)</a:t>
+            </a:r>
+          </a:p>
+          <a:p>
+            <a:pPr/>
+            <a:r>
+              <a:rPr sz="1100"/>
+              <a:t>Deploy-MDEndpoints auf alle VMs</a:t>
+            </a:r>
+          </a:p>
+          <a:p>
+            <a:pPr/>
+            <a:r>
+              <a:rPr sz="1100"/>
+              <a:t>Defender for SQL (ATP)</a:t>
+            </a:r>
+          </a:p>
+          <a:p>
+            <a:pPr/>
+            <a:r>
+              <a:rPr sz="1100"/>
+              <a:t>VM Backup Policy (auto-Sicherung)</a:t>
+            </a:r>
+          </a:p>
+          <a:p>
+            <a:pPr/>
+            <a:r>
+              <a:rPr sz="1100"/>
+              <a:t>Logic Apps → On-Prem-Monitoring</a:t>
+            </a:r>
+          </a:p>
+        </p:txBody>
+      </p:sp>
+      <p:sp>
+        <p:nvSpPr>
+          <p:cNvPr id="9" name="Subtitle 8"/>
           <p:cNvSpPr>
             <a:spLocks noGrp="1"/>
           </p:cNvSpPr>
@@ -27044,6 +27676,159 @@
           <a:p>
             <a:r>
               <a:t>Sicherheit</a:t>
+            </a:r>
+          </a:p>
+        </p:txBody>
+      </p:sp>
+      <p:sp>
+        <p:nvSpPr>
+          <p:cNvPr id="10" name="Rectangle 9"/>
+          <p:cNvSpPr/>
+          <p:nvPr/>
+        </p:nvSpPr>
+        <p:spPr>
+          <a:xfrm>
+            <a:off x="338328" y="2167128"/>
+            <a:ext cx="3602736" cy="2523744"/>
+          </a:xfrm>
+          <a:prstGeom prst="rect">
+            <a:avLst/>
+          </a:prstGeom>
+          <a:solidFill>
+            <a:srgbClr val="075033"/>
+          </a:solidFill>
+          <a:ln>
+            <a:noFill/>
+          </a:ln>
+        </p:spPr>
+        <p:style>
+          <a:lnRef idx="1">
+            <a:schemeClr val="accent1"/>
+          </a:lnRef>
+          <a:fillRef idx="3">
+            <a:schemeClr val="accent1"/>
+          </a:fillRef>
+          <a:effectRef idx="2">
+            <a:schemeClr val="accent1"/>
+          </a:effectRef>
+          <a:fontRef idx="minor">
+            <a:schemeClr val="lt1"/>
+          </a:fontRef>
+        </p:style>
+        <p:txBody>
+          <a:bodyPr rtlCol="0" anchor="ctr" wrap="square"/>
+          <a:lstStyle/>
+          <a:p>
+            <a:pPr algn="ctr"/>
+            <a:r>
+              <a:rPr sz="1800" b="1">
+                <a:solidFill>
+                  <a:srgbClr val="FFFFFF"/>
+                </a:solidFill>
+              </a:rPr>
+              <a:t>Präventiv</a:t>
+            </a:r>
+          </a:p>
+        </p:txBody>
+      </p:sp>
+      <p:sp>
+        <p:nvSpPr>
+          <p:cNvPr id="11" name="Rectangle 10"/>
+          <p:cNvSpPr/>
+          <p:nvPr/>
+        </p:nvSpPr>
+        <p:spPr>
+          <a:xfrm>
+            <a:off x="4297680" y="2167128"/>
+            <a:ext cx="3602736" cy="2523744"/>
+          </a:xfrm>
+          <a:prstGeom prst="rect">
+            <a:avLst/>
+          </a:prstGeom>
+          <a:solidFill>
+            <a:srgbClr val="23A96A"/>
+          </a:solidFill>
+          <a:ln>
+            <a:noFill/>
+          </a:ln>
+        </p:spPr>
+        <p:style>
+          <a:lnRef idx="1">
+            <a:schemeClr val="accent1"/>
+          </a:lnRef>
+          <a:fillRef idx="3">
+            <a:schemeClr val="accent1"/>
+          </a:fillRef>
+          <a:effectRef idx="2">
+            <a:schemeClr val="accent1"/>
+          </a:effectRef>
+          <a:fontRef idx="minor">
+            <a:schemeClr val="lt1"/>
+          </a:fontRef>
+        </p:style>
+        <p:txBody>
+          <a:bodyPr rtlCol="0" anchor="ctr" wrap="square"/>
+          <a:lstStyle/>
+          <a:p>
+            <a:pPr algn="ctr"/>
+            <a:r>
+              <a:rPr sz="1800" b="1">
+                <a:solidFill>
+                  <a:srgbClr val="FFFFFF"/>
+                </a:solidFill>
+              </a:rPr>
+              <a:t>Detektiv</a:t>
+            </a:r>
+          </a:p>
+        </p:txBody>
+      </p:sp>
+      <p:sp>
+        <p:nvSpPr>
+          <p:cNvPr id="12" name="Rectangle 11"/>
+          <p:cNvSpPr/>
+          <p:nvPr/>
+        </p:nvSpPr>
+        <p:spPr>
+          <a:xfrm>
+            <a:off x="8257031" y="2167128"/>
+            <a:ext cx="3602736" cy="2523744"/>
+          </a:xfrm>
+          <a:prstGeom prst="rect">
+            <a:avLst/>
+          </a:prstGeom>
+          <a:solidFill>
+            <a:srgbClr val="053B25"/>
+          </a:solidFill>
+          <a:ln>
+            <a:noFill/>
+          </a:ln>
+        </p:spPr>
+        <p:style>
+          <a:lnRef idx="1">
+            <a:schemeClr val="accent1"/>
+          </a:lnRef>
+          <a:fillRef idx="3">
+            <a:schemeClr val="accent1"/>
+          </a:fillRef>
+          <a:effectRef idx="2">
+            <a:schemeClr val="accent1"/>
+          </a:effectRef>
+          <a:fontRef idx="minor">
+            <a:schemeClr val="lt1"/>
+          </a:fontRef>
+        </p:style>
+        <p:txBody>
+          <a:bodyPr rtlCol="0" anchor="ctr" wrap="square"/>
+          <a:lstStyle/>
+          <a:p>
+            <a:pPr algn="ctr"/>
+            <a:r>
+              <a:rPr sz="1800" b="1">
+                <a:solidFill>
+                  <a:srgbClr val="FFFFFF"/>
+                </a:solidFill>
+              </a:rPr>
+              <a:t>Reaktiv</a:t>
             </a:r>
           </a:p>
         </p:txBody>
@@ -27082,6 +27867,7 @@
           <a:lstStyle/>
           <a:p>
             <a:r>
+              <a:rPr sz="2800" b="1"/>
               <a:t>7  ·  Monitoring und Logging</a:t>
             </a:r>
           </a:p>
@@ -27103,7 +27889,8 @@
           <a:lstStyle/>
           <a:p>
             <a:r>
-              <a:t>Zentraler Log Analytics Workspace + 3 Data Collection Rules</a:t>
+              <a:rPr sz="1400"/>
+              <a:t>Zentraler Log Analytics Workspace  ·  3 Data Collection Rules</a:t>
             </a:r>
           </a:p>
         </p:txBody>
@@ -27159,7 +27946,7 @@
           <a:lstStyle/>
           <a:p>
             <a:r>
-              <a:t>Zentrales Logging (AVM-Pattern avm/ptn/alz/ama:0.2.0)</a:t>
+              <a:t>Zentrale Logging-Plattform (AVM avm/ptn/alz/ama:0.2.0)</a:t>
             </a:r>
           </a:p>
         </p:txBody>
@@ -27181,43 +27968,50 @@
           <a:p>
             <a:pPr/>
             <a:r>
-              <a:rPr sz="1300"/>
-              <a:t>Log Analytics Workspace: law-alz-&lt;region&gt;, PerGB2018, 365 Tage Retention</a:t>
-            </a:r>
-          </a:p>
-          <a:p>
-            <a:pPr/>
-            <a:r>
-              <a:rPr sz="1300"/>
-              <a:t>3 Data Collection Rules: VM Insights · Change Tracking · Defender for SQL</a:t>
-            </a:r>
-          </a:p>
-          <a:p>
-            <a:pPr/>
-            <a:r>
-              <a:rPr sz="1300"/>
-              <a:t>User-Assigned Managed Identity: mi-alz-&lt;region&gt; für passwortlose Policy-Remediation (DeployIfNotExists)</a:t>
-            </a:r>
-          </a:p>
-          <a:p>
-            <a:pPr/>
-            <a:r>
-              <a:rPr sz="1300"/>
-              <a:t>DINE-Policies: jede neue VM verbindet sich automatisch mit LAW + DCRs – keine manuelle Konfiguration</a:t>
-            </a:r>
-          </a:p>
-          <a:p>
-            <a:pPr/>
-            <a:r>
-              <a:rPr sz="1300"/>
-              <a:t>Deploy-Diag-LogsCat: leitet alle Diagnose-Kategorien aller Ressourcen in Log Analytics</a:t>
-            </a:r>
-          </a:p>
-          <a:p>
-            <a:pPr/>
-            <a:r>
-              <a:rPr sz="1300"/>
-              <a:t>Kosten: 5 GB/Monat kostenlos; danach ~€2/GB; Automation Account optional (default: aus)</a:t>
+              <a:rPr sz="1200"/>
+              <a:t>Infrastruktur (deployed)</a:t>
+            </a:r>
+          </a:p>
+          <a:p>
+            <a:pPr lvl="1"/>
+            <a:r>
+              <a:rPr sz="1200"/>
+              <a:t>law-alz-gwe  (365 Tage, PerGB2018)</a:t>
+            </a:r>
+          </a:p>
+          <a:p>
+            <a:pPr lvl="1"/>
+            <a:r>
+              <a:rPr sz="1200"/>
+              <a:t>mi-alz-gwe   (Managed Identity)</a:t>
+            </a:r>
+          </a:p>
+          <a:p>
+            <a:pPr lvl="1"/>
+            <a:r>
+              <a:rPr sz="1200"/>
+              <a:t>dcr-vmi-alz-gwe  (VM Insights)</a:t>
+            </a:r>
+          </a:p>
+          <a:p>
+            <a:pPr lvl="1"/>
+            <a:r>
+              <a:rPr sz="1200"/>
+              <a:t>dcr-ct-alz-gwe   (Change Tracking)</a:t>
+            </a:r>
+          </a:p>
+          <a:p>
+            <a:pPr lvl="1"/>
+            <a:r>
+              <a:rPr sz="1200"/>
+              <a:t>dcr-mdfcsql-alz-gwe (Defender SQL)</a:t>
+            </a:r>
+          </a:p>
+          <a:p>
+            <a:pPr lvl="1"/>
+            <a:r>
+              <a:rPr sz="1200"/>
+              <a:t>Kosten: 5 GB/Mon. kostenlos, ~€2/GB</a:t>
             </a:r>
           </a:p>
         </p:txBody>
@@ -27239,6 +28033,71 @@
           <a:p>
             <a:r>
               <a:t>Monitoring und Logging</a:t>
+            </a:r>
+          </a:p>
+        </p:txBody>
+      </p:sp>
+      <p:sp>
+        <p:nvSpPr>
+          <p:cNvPr id="5" name="Text Placeholder 4"/>
+          <p:cNvSpPr>
+            <a:spLocks noGrp="1"/>
+          </p:cNvSpPr>
+          <p:nvPr>
+            <p:ph type="body" idx="14" sz="quarter"/>
+          </p:nvPr>
+        </p:nvSpPr>
+        <p:spPr/>
+        <p:txBody>
+          <a:bodyPr wrap="square"/>
+          <a:lstStyle/>
+          <a:p>
+            <a:pPr/>
+            <a:r>
+              <a:rPr sz="1200"/>
+              <a:t>Automatik (via DINE-Policies)</a:t>
+            </a:r>
+          </a:p>
+          <a:p>
+            <a:pPr lvl="1"/>
+            <a:r>
+              <a:rPr sz="1200"/>
+              <a:t>Jede neue VM → AMA + DCR (auto)</a:t>
+            </a:r>
+          </a:p>
+          <a:p>
+            <a:pPr lvl="1"/>
+            <a:r>
+              <a:rPr sz="1200"/>
+              <a:t>Activity Logs aller Subs → LAW</a:t>
+            </a:r>
+          </a:p>
+          <a:p>
+            <a:pPr lvl="1"/>
+            <a:r>
+              <a:rPr sz="1200"/>
+              <a:t>Diagnose aller Ressourcentypen → LAW</a:t>
+            </a:r>
+          </a:p>
+          <a:p>
+            <a:pPr lvl="1"/>
+            <a:r>
+              <a:rPr sz="1200"/>
+              <a:t>Defender for Cloud → Security-Events</a:t>
+            </a:r>
+          </a:p>
+          <a:p>
+            <a:pPr lvl="1"/>
+            <a:r>
+              <a:rPr sz="1200"/>
+              <a:t>CrowdStrike: Event Hub Export → SIEM</a:t>
+            </a:r>
+          </a:p>
+          <a:p>
+            <a:pPr lvl="1"/>
+            <a:r>
+              <a:rPr sz="1200"/>
+              <a:t>Roadmap: Microsoft Sentinel optional</a:t>
             </a:r>
           </a:p>
         </p:txBody>
@@ -27277,6 +28136,7 @@
           <a:lstStyle/>
           <a:p>
             <a:r>
+              <a:rPr sz="2800" b="1"/>
               <a:t>8  ·  Identity und RBAC</a:t>
             </a:r>
           </a:p>
@@ -27298,7 +28158,8 @@
           <a:lstStyle/>
           <a:p>
             <a:r>
-              <a:t>5 Custom-Rollen + Entra-ID-Gruppen-basierte Zuweisungen</a:t>
+              <a:rPr sz="1400"/>
+              <a:t>5 Custom-Rollen  ·  Entra-ID-Gruppen  ·  Least Privilege</a:t>
             </a:r>
           </a:p>
         </p:txBody>
@@ -27354,7 +28215,7 @@
           <a:lstStyle/>
           <a:p>
             <a:r>
-              <a:t>5 Custom RBAC-Rollen</a:t>
+              <a:t>5 Custom RBAC-Rollen auf Management-Group-Ebene</a:t>
             </a:r>
           </a:p>
         </p:txBody>
@@ -27376,50 +28237,71 @@
           <a:p>
             <a:pPr/>
             <a:r>
-              <a:rPr sz="1300"/>
-              <a:t>Subscription-Owner (alz): delegierter Owner, eingeschränkt ohne volle Owner-Rechte (1 Action)  → Plattform-Admins</a:t>
+              <a:rPr sz="1200"/>
+              <a:t>Subscription-Owner (alz)</a:t>
+            </a:r>
+          </a:p>
+          <a:p>
+            <a:pPr lvl="1"/>
+            <a:r>
+              <a:rPr sz="1200"/>
+              <a:t>Delegierter Owner für Subscriptions – ohne volle Tenant-Rechte  →  Plattform-Admins</a:t>
             </a:r>
           </a:p>
           <a:p>
             <a:pPr/>
             <a:r>
-              <a:rPr sz="1300"/>
-              <a:t>Security-Operations (alz): horizontale Sicherheitssicht über alle Subscriptions (12 Actions)  → Security-Team</a:t>
+              <a:rPr sz="1200"/>
+              <a:t>Security-Operations (alz)</a:t>
+            </a:r>
+          </a:p>
+          <a:p>
+            <a:pPr lvl="1"/>
+            <a:r>
+              <a:rPr sz="1200"/>
+              <a:t>Horizontale Sicherheitssicht: Defender, MDFC, Sentinel  →  SOC-Team</a:t>
             </a:r>
           </a:p>
           <a:p>
             <a:pPr/>
             <a:r>
-              <a:rPr sz="1300"/>
-              <a:t>Network-Management (alz): VNets, UDRs, NSGs, NVAs plattformweit (4 Actions)  → Netzwerk-Team</a:t>
+              <a:rPr sz="1200"/>
+              <a:t>Network-Management (alz-platform-connectivity)</a:t>
+            </a:r>
+          </a:p>
+          <a:p>
+            <a:pPr lvl="1"/>
+            <a:r>
+              <a:rPr sz="1200"/>
+              <a:t>VNets · UDRs · NSGs · Firewall  →  Netzwerk-Team</a:t>
             </a:r>
           </a:p>
           <a:p>
             <a:pPr/>
             <a:r>
-              <a:rPr sz="1300"/>
-              <a:t>Application-Owners (alz): Contributor auf Resource-Group-Ebene (1 Action)  → App-/Ops-Teams</a:t>
+              <a:rPr sz="1200"/>
+              <a:t>Application-Owners (alz-landingzones)</a:t>
+            </a:r>
+          </a:p>
+          <a:p>
+            <a:pPr lvl="1"/>
+            <a:r>
+              <a:rPr sz="1200"/>
+              <a:t>Contributor auf eigene Resource Groups  →  Workload-Teams</a:t>
             </a:r>
           </a:p>
           <a:p>
             <a:pPr/>
             <a:r>
-              <a:rPr sz="1300"/>
-              <a:t>Network-Subnet-Contributor (alz): vollständiger Subnetz-Zugriff (8 Actions)  → Netzwerk-Ops</a:t>
-            </a:r>
-          </a:p>
-          <a:p>
-            <a:pPr/>
-            <a:r>
-              <a:rPr sz="1300"/>
-              <a:t>Zuweisung: Entra-ID-Gruppen-Object-IDs in Bicep-Params; leeres Array = No-Op (gefahrlos)</a:t>
-            </a:r>
-          </a:p>
-          <a:p>
-            <a:pPr/>
-            <a:r>
-              <a:rPr sz="1300"/>
-              <a:t>Roadmap: PIM, Conditional Access, hybride Identitäten als Folge-Baustein (Identity-Baseline)</a:t>
+              <a:rPr sz="1200"/>
+              <a:t>Network-Subnet-Contributor (alz-landingzones)</a:t>
+            </a:r>
+          </a:p>
+          <a:p>
+            <a:pPr lvl="1"/>
+            <a:r>
+              <a:rPr sz="1200"/>
+              <a:t>Nur Subnetze in bestehenden VNets  →  delegierter Netzwerkzugriff</a:t>
             </a:r>
           </a:p>
         </p:txBody>
@@ -27479,6 +28361,7 @@
           <a:lstStyle/>
           <a:p>
             <a:r>
+              <a:rPr sz="2800" b="1"/>
               <a:t>9  ·  Automatisierung und CI/CD</a:t>
             </a:r>
           </a:p>
@@ -27500,6 +28383,7 @@
           <a:lstStyle/>
           <a:p>
             <a:r>
+              <a:rPr sz="1400"/>
               <a:t>Bootstrap → 18 Deploy-Stufen → GitOps-Betrieb</a:t>
             </a:r>
           </a:p>
@@ -27556,7 +28440,7 @@
           <a:lstStyle/>
           <a:p>
             <a:r>
-              <a:t>Pipeline-Workflow (GitHub Actions)</a:t>
+              <a:t>Pipeline-Workflow: Trigger → Validate → What-If → Approve → Deploy</a:t>
             </a:r>
           </a:p>
         </p:txBody>
@@ -27579,49 +28463,49 @@
             <a:pPr/>
             <a:r>
               <a:rPr sz="1300"/>
-              <a:t>Bootstrap (Phase 0, Terraform): Resource Group + Storage (State) + Managed Identity (OIDC Federated Credentials)</a:t>
+              <a:t>OIDC Federated Identity: keine Secrets, keine Zertifikate, keine Passwörter</a:t>
             </a:r>
           </a:p>
           <a:p>
             <a:pPr/>
             <a:r>
               <a:rPr sz="1300"/>
-              <a:t>GitHub-Repo + Environments + Approval-Gates automatisch generiert</a:t>
+              <a:t>Bicep Build auf jedem PR – statische Validierung ohne Azure-Verbindung</a:t>
             </a:r>
           </a:p>
           <a:p>
             <a:pPr/>
             <a:r>
               <a:rPr sz="1300"/>
-              <a:t>5 Pipeline-Schritte: Trigger → Validation (bicep build) → What-If → Approval → Apply</a:t>
+              <a:t>What-If Preview: ARM-API zeigt geplante Änderungen vor dem Apply</a:t>
             </a:r>
           </a:p>
           <a:p>
             <a:pPr/>
             <a:r>
               <a:rPr sz="1300"/>
-              <a:t>18 Stufen sequenziell: Governance-MGs (1–12) → RBAC (13–15) → Logging (16) → Hub-Netzwerk (17) oder vWAN (18)</a:t>
+              <a:t>Approval-Gate (GitHub Environment 'production'): explizite Freigabe erforderlich</a:t>
             </a:r>
           </a:p>
           <a:p>
             <a:pPr/>
             <a:r>
               <a:rPr sz="1300"/>
-              <a:t>OIDC Federated Identity: keine Passwörter, keine Zertifikate, keine Secrets in Pipelines</a:t>
+              <a:t>18 Stufen sequenziell:  1–12 Governance  ·  13–15 RBAC  ·  16 Logging  ·  17/18 Netzwerk</a:t>
             </a:r>
           </a:p>
           <a:p>
             <a:pPr/>
             <a:r>
               <a:rPr sz="1300"/>
-              <a:t>GitOps: PR → Review → Approval → Deploy; jede Änderung mit Autor + Timestamp in Git-History</a:t>
+              <a:t>GitOps: jede Änderung = Commit → vollständiges Audit-Trail in Git-History</a:t>
             </a:r>
           </a:p>
           <a:p>
             <a:pPr/>
             <a:r>
               <a:rPr sz="1300"/>
-              <a:t>Rückrollbarkeit: neuer Commit → Rollback-Pipeline; vollständiges Audit-Trail in Azure Activity Log</a:t>
+              <a:t>Smoke Run in einer einzigen Sub: bash smokerun/run.sh --deploy</a:t>
             </a:r>
           </a:p>
         </p:txBody>
@@ -27681,8 +28565,8 @@
           <a:lstStyle/>
           <a:p>
             <a:r>
-              <a:rPr sz="2200" b="1"/>
-              <a:t>~€1.050 / Monat</a:t>
+              <a:rPr sz="2800" b="1"/>
+              <a:t>10  ·  Kosten und Kostensteuerung</a:t>
             </a:r>
           </a:p>
         </p:txBody>
@@ -27703,8 +28587,8 @@
           <a:lstStyle/>
           <a:p>
             <a:r>
-              <a:rPr sz="1100"/>
-              <a:t>Kosten und Kostensteuerung</a:t>
+              <a:rPr sz="1400"/>
+              <a:t>Gestufter Ausbau: €50 → €1.050 → €5.800 – volle Kostenkontrolle</a:t>
             </a:r>
           </a:p>
         </p:txBody>
@@ -27723,12 +28607,7 @@
         <p:txBody>
           <a:bodyPr/>
           <a:lstStyle/>
-          <a:p>
-            <a:r>
-              <a:rPr sz="1200"/>
-              <a:t>Bechtle-Empfehlung: voller Funktionsumfang, eine Region, ALZ-konform – 4× günstiger als Microsoft-Default (~€5.800)</a:t>
-            </a:r>
-          </a:p>
+          <a:p/>
         </p:txBody>
       </p:sp>
     </p:spTree>
@@ -27765,7 +28644,8 @@
           <a:lstStyle/>
           <a:p>
             <a:r>
-              <a:t>10  ·  Kosten und Kostensteuerung</a:t>
+              <a:rPr sz="4000" b="1"/>
+              <a:t>~€1.050 / Monat</a:t>
             </a:r>
           </a:p>
         </p:txBody>
@@ -27786,26 +28666,43 @@
           <a:lstStyle/>
           <a:p>
             <a:r>
-              <a:t>Bechtle-Empfehlung: ~€1.050/Monat – voller Funktionsumfang, eine Region</a:t>
-            </a:r>
-          </a:p>
-        </p:txBody>
-      </p:sp>
-      <p:sp>
-        <p:nvSpPr>
-          <p:cNvPr id="4" name="Text Placeholder 3"/>
-          <p:cNvSpPr>
-            <a:spLocks noGrp="1"/>
-          </p:cNvSpPr>
-          <p:nvPr>
-            <p:ph type="body" idx="13" sz="quarter"/>
-          </p:nvPr>
-        </p:nvSpPr>
-        <p:spPr/>
-        <p:txBody>
-          <a:bodyPr/>
+              <a:rPr sz="1200"/>
+              <a:t>Kosten und Kostensteuerung · Bechtle-Empfehlung</a:t>
+            </a:r>
+          </a:p>
+        </p:txBody>
+      </p:sp>
+      <p:sp>
+        <p:nvSpPr>
+          <p:cNvPr id="4" name="TextBox 3"/>
+          <p:cNvSpPr txBox="1"/>
+          <p:nvPr/>
+        </p:nvSpPr>
+        <p:spPr>
+          <a:xfrm>
+            <a:off x="338328" y="4754880"/>
+            <a:ext cx="5029200" cy="914400"/>
+          </a:xfrm>
+          <a:prstGeom prst="rect">
+            <a:avLst/>
+          </a:prstGeom>
+          <a:noFill/>
+        </p:spPr>
+        <p:txBody>
+          <a:bodyPr wrap="square">
+            <a:spAutoFit/>
+          </a:bodyPr>
           <a:lstStyle/>
-          <a:p/>
+          <a:p>
+            <a:r>
+              <a:rPr sz="1300">
+                <a:solidFill>
+                  <a:srgbClr val="595959"/>
+                </a:solidFill>
+              </a:rPr>
+              <a:t>Option A – Bechtle-Standard: Firewall Standard 1×  ·  Bastion  ·  VPN Gateway  ·  ALZ-konform</a:t>
+            </a:r>
+          </a:p>
         </p:txBody>
       </p:sp>
     </p:spTree>
@@ -27842,8 +28739,8 @@
           <a:lstStyle/>
           <a:p>
             <a:r>
-              <a:rPr sz="2200" b="1"/>
-              <a:t>Governance · Sicherheit · Netzwerk
+              <a:rPr sz="2400" b="1"/>
+              <a:t>Governance · Netzwerk · Sicherheit
 als Code – reproduzierbar und auditfähig.</a:t>
             </a:r>
           </a:p>
@@ -27888,7 +28785,7 @@
           <a:p>
             <a:r>
               <a:rPr sz="1200"/>
-              <a:t>Bechtle setzt auf den Microsoft ALZ Bicep Accelerator: 149 Policies · 12 MGs · 18 Deploy-Stufen · OIDC · ~€1.050/Monat</a:t>
+              <a:t>Microsoft ALZ Bicep Accelerator  ·  149 Policies  ·  12 MGs  ·  ~€1.050/Monat</a:t>
             </a:r>
           </a:p>
         </p:txBody>
@@ -27927,7 +28824,7 @@
           <a:lstStyle/>
           <a:p>
             <a:r>
-              <a:t>Gestufter Ausbau: €0 → €1.050 → €5.800</a:t>
+              <a:t>Gestufter Ausbau: 6 Kostenstufen</a:t>
             </a:r>
           </a:p>
         </p:txBody>
@@ -27949,57 +28846,85 @@
           <a:p>
             <a:pPr/>
             <a:r>
-              <a:rPr sz="1300"/>
-              <a:t>Stufe 1 – Governance-Pilot: network_type: none → MGs + volles Policy-Set + Logging  ca. €50/Monat (nur LAW)</a:t>
+              <a:rPr sz="1100"/>
+              <a:t>Stufe 1 – Governance-Pilot     ~€50/Mon.</a:t>
+            </a:r>
+          </a:p>
+          <a:p>
+            <a:pPr lvl="1"/>
+            <a:r>
+              <a:rPr sz="1100"/>
+              <a:t>network_type: none · MGs + Policies (DoNotEnforce) + Logging · kein Netzwerk</a:t>
             </a:r>
           </a:p>
           <a:p>
             <a:pPr/>
             <a:r>
-              <a:rPr sz="1300"/>
-              <a:t>Stufe 2 – Bechtle-Empfehlung: Firewall Standard, 1 Region, kein DDoS/ER  →  ~€1.050/Monat</a:t>
+              <a:rPr sz="1100"/>
+              <a:t>Stufe 2 – Bechtle-Standard     ~€1.050/Mon.  ✅ Empfohlen</a:t>
             </a:r>
           </a:p>
           <a:p>
             <a:pPr lvl="1"/>
             <a:r>
-              <a:rPr sz="1300"/>
-              <a:t>  Firewall Standard 1×: ~€700  |  Bastion 1×: ~€120  |  VPN GW 1×: ~€140  |  DNS: ~€40  |  LAW: ~€50</a:t>
+              <a:rPr sz="1100"/>
+              <a:t>FW Standard ~€700 · Bastion ~€120 · VPN GW ~€140 · DNS ~€25 · LAW ~€50</a:t>
             </a:r>
           </a:p>
           <a:p>
             <a:pPr/>
             <a:r>
-              <a:rPr sz="1300"/>
-              <a:t>Stufe 3 – Geo-Redundanz: + Sekundar-Hub NE  →  ~€1.800/Monat</a:t>
+              <a:rPr sz="1100"/>
+              <a:t>Stufe 3 – Geo-Redundanz        ~€1.800/Mon.</a:t>
+            </a:r>
+          </a:p>
+          <a:p>
+            <a:pPr lvl="1"/>
+            <a:r>
+              <a:rPr sz="1100"/>
+              <a:t>+ Sekundärer Hub North Europe · bidirektionales Peering</a:t>
             </a:r>
           </a:p>
           <a:p>
             <a:pPr/>
             <a:r>
-              <a:rPr sz="1300"/>
-              <a:t>Stufe 4 – Firewall Premium: IDPS / TLS / URL-Filterung  →  ~€2.400/Monat</a:t>
+              <a:rPr sz="1100"/>
+              <a:t>Stufe 4 – Firewall Premium     ~€2.400/Mon.</a:t>
+            </a:r>
+          </a:p>
+          <a:p>
+            <a:pPr lvl="1"/>
+            <a:r>
+              <a:rPr sz="1100"/>
+              <a:t>+ IDPS · TLS-Inspektion · URL-Filterung · Zertifikat-Rollout</a:t>
             </a:r>
           </a:p>
           <a:p>
             <a:pPr/>
             <a:r>
-              <a:rPr sz="1300"/>
-              <a:t>Stufe 5 – DDoS Protection: bei internet-facing Workloads  →  ~€4.900/Monat</a:t>
+              <a:rPr sz="1100"/>
+              <a:t>Stufe 5 – DDoS Protection      ~€4.900/Mon.</a:t>
+            </a:r>
+          </a:p>
+          <a:p>
+            <a:pPr lvl="1"/>
+            <a:r>
+              <a:rPr sz="1100"/>
+              <a:t>+ DDoS Network Protection Plan (~€2.500 Fix) · nur bei internet-facing Workloads</a:t>
             </a:r>
           </a:p>
           <a:p>
             <a:pPr/>
             <a:r>
-              <a:rPr sz="1300"/>
-              <a:t>Stufe 6 – Microsoft-Default: alle Dienste, beide Regionen  →  ~€5.800/Monat</a:t>
-            </a:r>
-          </a:p>
-          <a:p>
-            <a:pPr/>
-            <a:r>
-              <a:rPr sz="1300"/>
-              <a:t>Alle Stufen sind additive Aenderungen – kein Rueckbau erforderlich</a:t>
+              <a:rPr sz="1100"/>
+              <a:t>Stufe 6 – Microsoft-Default    ~€5.800/Mon.</a:t>
+            </a:r>
+          </a:p>
+          <a:p>
+            <a:pPr lvl="1"/>
+            <a:r>
+              <a:rPr sz="1100"/>
+              <a:t>Alle Dienste · beide Regionen · maximale Redundanz</a:t>
             </a:r>
           </a:p>
         </p:txBody>
@@ -28059,7 +28984,7 @@
           <a:lstStyle/>
           <a:p>
             <a:r>
-              <a:t>Konfigurationsvergleich: Vorteile und Nachteile (1/2)</a:t>
+              <a:t>Bechtle-Varianten: ALZ-konform vs. Budget</a:t>
             </a:r>
           </a:p>
         </p:txBody>
@@ -28081,92 +29006,64 @@
           <a:p>
             <a:pPr/>
             <a:r>
-              <a:rPr sz="1100"/>
-              <a:t>Pilot  ~€50/Monat  (network_type: none)</a:t>
+              <a:rPr sz="1200"/>
+              <a:t>Option A  ~€1.050 / B  ~€770  (ALZ-konform)</a:t>
             </a:r>
           </a:p>
           <a:p>
             <a:pPr lvl="1"/>
             <a:r>
-              <a:rPr sz="1100"/>
-              <a:t>+ Nullrisiko; volles Governance-Set (MGs, Policies, Logging)</a:t>
+              <a:rPr sz="1200"/>
+              <a:t>A: Firewall Standard 1×  ~€700</a:t>
             </a:r>
           </a:p>
           <a:p>
             <a:pPr lvl="1"/>
             <a:r>
-              <a:rPr sz="1100"/>
-              <a:t>– Keine Netzwerkkonnektivität; Workloads nicht deploybar</a:t>
+              <a:rPr sz="1200"/>
+              <a:t>A: Bastion ~€120  ·  VPN GW ~€140</a:t>
             </a:r>
           </a:p>
           <a:p>
             <a:pPr lvl="1"/>
             <a:r>
-              <a:rPr sz="1100"/>
-              <a:t>  Empfehlung: Einstieg, PoC, Compliance-Audit ohne Netzwerkbedarf</a:t>
-            </a:r>
-          </a:p>
-          <a:p>
-            <a:pPr/>
-            <a:r>
-              <a:rPr sz="1100"/>
-              <a:t>Bechtle-Empfehlung  ~€1.050/Monat  (Standard FW, 1 Region)</a:t>
+              <a:rPr sz="1200"/>
+              <a:t>A: DNS ~€25  ·  LAW ~€50  →  €1.050</a:t>
             </a:r>
           </a:p>
           <a:p>
             <a:pPr lvl="1"/>
             <a:r>
-              <a:rPr sz="1100"/>
-              <a:t>+ Voller Funktionsumfang; 4× günstiger als Microsoft-Default</a:t>
+              <a:rPr sz="1200"/>
+              <a:t>─────────────────────────────</a:t>
             </a:r>
           </a:p>
           <a:p>
             <a:pPr lvl="1"/>
             <a:r>
-              <a:rPr sz="1100"/>
-              <a:t>+ Firewall, Bastion, VPN, DNS aktiv; In-Place-Upgrade auf Premium möglich</a:t>
+              <a:rPr sz="1200"/>
+              <a:t>B: FW Standard reserved  ~€560</a:t>
             </a:r>
           </a:p>
           <a:p>
             <a:pPr lvl="1"/>
             <a:r>
-              <a:rPr sz="1100"/>
-              <a:t>– Keine zweite Region; kein IDPS/TLS; kein DDoS-Schutz</a:t>
+              <a:rPr sz="1200"/>
+              <a:t>B: VPN GW deferred (€0) · Bastion ~€120</a:t>
             </a:r>
           </a:p>
           <a:p>
             <a:pPr lvl="1"/>
             <a:r>
-              <a:rPr sz="1100"/>
-              <a:t>  Empfehlung: Standard-Produktionsumgebungen, erste Workloads</a:t>
-            </a:r>
-          </a:p>
-          <a:p>
-            <a:pPr/>
-            <a:r>
-              <a:rPr sz="1100"/>
-              <a:t>Geo-Redundanz  ~€1.800/Monat  (+ Hub North Europe)</a:t>
+              <a:rPr sz="1200"/>
+              <a:t>B: DNS ~€25  ·  LAW ~€50  →  ~€770</a:t>
             </a:r>
           </a:p>
           <a:p>
             <a:pPr lvl="1"/>
             <a:r>
-              <a:rPr sz="1100"/>
-              <a:t>+ Regionale Ausfallsicherheit; zwei unabhängige Netzwerkhubs</a:t>
-            </a:r>
-          </a:p>
-          <a:p>
-            <a:pPr lvl="1"/>
-            <a:r>
-              <a:rPr sz="1100"/>
-              <a:t>– Doppelte Netzwerkkosten; erhöhte Betriebskomplexität</a:t>
-            </a:r>
-          </a:p>
-          <a:p>
-            <a:pPr lvl="1"/>
-            <a:r>
-              <a:rPr sz="1100"/>
-              <a:t>  Empfehlung: SLA-kritische Systeme, Multi-Region-Anforderungen</a:t>
+              <a:rPr sz="1200"/>
+              <a:t>B: 26 % günstiger als A · ALZ-konform ✅</a:t>
             </a:r>
           </a:p>
         </p:txBody>
@@ -28187,7 +29084,86 @@
           <a:lstStyle/>
           <a:p>
             <a:r>
-              <a:t>Kosten und Kostensteuerung</a:t>
+              <a:t>Kosten und Kostensteuerung · Vier Varianten</a:t>
+            </a:r>
+          </a:p>
+        </p:txBody>
+      </p:sp>
+      <p:sp>
+        <p:nvSpPr>
+          <p:cNvPr id="5" name="Text Placeholder 4"/>
+          <p:cNvSpPr>
+            <a:spLocks noGrp="1"/>
+          </p:cNvSpPr>
+          <p:nvPr>
+            <p:ph type="body" idx="14" sz="quarter"/>
+          </p:nvPr>
+        </p:nvSpPr>
+        <p:spPr/>
+        <p:txBody>
+          <a:bodyPr wrap="square"/>
+          <a:lstStyle/>
+          <a:p>
+            <a:pPr/>
+            <a:r>
+              <a:rPr sz="1200"/>
+              <a:t>Option C  ~€500  (ALZ-Bruch)  /  D  ~€5.800</a:t>
+            </a:r>
+          </a:p>
+          <a:p>
+            <a:pPr lvl="1"/>
+            <a:r>
+              <a:rPr sz="1200"/>
+              <a:t>C: Firewall Basic  ~€300  ⚠ ALZ-Bruch</a:t>
+            </a:r>
+          </a:p>
+          <a:p>
+            <a:pPr lvl="1"/>
+            <a:r>
+              <a:rPr sz="1200"/>
+              <a:t>C: Kein App-Rules · kein Threat Intel</a:t>
+            </a:r>
+          </a:p>
+          <a:p>
+            <a:pPr lvl="1"/>
+            <a:r>
+              <a:rPr sz="1200"/>
+              <a:t>C: Bastion ~€120  ·  DNS ~€25 · LAW ~€50</a:t>
+            </a:r>
+          </a:p>
+          <a:p>
+            <a:pPr lvl="1"/>
+            <a:r>
+              <a:rPr sz="1200"/>
+              <a:t>C: 52 % günstiger – aber eingeschränkt</a:t>
+            </a:r>
+          </a:p>
+          <a:p>
+            <a:pPr lvl="1"/>
+            <a:r>
+              <a:rPr sz="1200"/>
+              <a:t>─────────────────────────────</a:t>
+            </a:r>
+          </a:p>
+          <a:p>
+            <a:pPr lvl="1"/>
+            <a:r>
+              <a:rPr sz="1200"/>
+              <a:t>D: Microsoft-Default  ~€5.800/Mon.</a:t>
+            </a:r>
+          </a:p>
+          <a:p>
+            <a:pPr lvl="1"/>
+            <a:r>
+              <a:rPr sz="1200"/>
+              <a:t>D: FW Premium 2× · DDoS Plan · ER GW 2×</a:t>
+            </a:r>
+          </a:p>
+          <a:p>
+            <a:pPr lvl="1"/>
+            <a:r>
+              <a:rPr sz="1200"/>
+              <a:t>D: Maximale Redundanz · 452 % vs. A</a:t>
             </a:r>
           </a:p>
         </p:txBody>
@@ -28226,114 +29202,15 @@
           <a:lstStyle/>
           <a:p>
             <a:r>
-              <a:t>Konfigurationsvergleich: Vorteile und Nachteile (2/2)</a:t>
-            </a:r>
-          </a:p>
-        </p:txBody>
-      </p:sp>
-      <p:sp>
-        <p:nvSpPr>
-          <p:cNvPr id="3" name="Text Placeholder 2"/>
-          <p:cNvSpPr>
-            <a:spLocks noGrp="1"/>
-          </p:cNvSpPr>
-          <p:nvPr>
-            <p:ph type="body" idx="13" sz="quarter"/>
-          </p:nvPr>
-        </p:nvSpPr>
-        <p:spPr/>
-        <p:txBody>
-          <a:bodyPr wrap="square"/>
-          <a:lstStyle/>
-          <a:p>
-            <a:pPr/>
-            <a:r>
-              <a:rPr sz="1100"/>
-              <a:t>Firewall Premium  ~€2.400/Monat  (+ IDPS / TLS-Inspektion)</a:t>
-            </a:r>
-          </a:p>
-          <a:p>
-            <a:pPr lvl="1"/>
-            <a:r>
-              <a:rPr sz="1100"/>
-              <a:t>+ IDPS, TLS-Inspektion, URL-Filterung; In-Place-Upgrade ohne Rebuild</a:t>
-            </a:r>
-          </a:p>
-          <a:p>
-            <a:pPr lvl="1"/>
-            <a:r>
-              <a:rPr sz="1100"/>
-              <a:t>– +€1.350 ggü. Bechtle-Empfehlung; Zertifikat-Rollout erforderlich</a:t>
-            </a:r>
-          </a:p>
-          <a:p>
-            <a:pPr lvl="1"/>
-            <a:r>
-              <a:rPr sz="1100"/>
-              <a:t>  Empfehlung: Hohe Sicherheitsanforderungen, regulierte Branchen</a:t>
-            </a:r>
-          </a:p>
-          <a:p>
-            <a:pPr/>
-            <a:r>
-              <a:rPr sz="1100"/>
-              <a:t>DDoS Protection  ~€4.900/Monat  (+ Network Protection Plan)</a:t>
-            </a:r>
-          </a:p>
-          <a:p>
-            <a:pPr lvl="1"/>
-            <a:r>
-              <a:rPr sz="1100"/>
-              <a:t>+ Vollständiger DDoS-Schutz für alle öffentlichen IPs; SLA-Garantie</a:t>
-            </a:r>
-          </a:p>
-          <a:p>
-            <a:pPr lvl="1"/>
-            <a:r>
-              <a:rPr sz="1100"/>
-              <a:t>– ~€2.500/Monat Fixkosten (Plan Fee), unabhängig von Angriffen</a:t>
-            </a:r>
-          </a:p>
-          <a:p>
-            <a:pPr lvl="1"/>
-            <a:r>
-              <a:rPr sz="1100"/>
-              <a:t>  Empfehlung: Nur bei internet-facing Workloads mit realem DDoS-Risiko</a:t>
-            </a:r>
-          </a:p>
-          <a:p>
-            <a:pPr/>
-            <a:r>
-              <a:rPr sz="1100"/>
-              <a:t>Microsoft-Default  ~€5.800/Monat  (alle Dienste, 2 Regionen)</a:t>
-            </a:r>
-          </a:p>
-          <a:p>
-            <a:pPr lvl="1"/>
-            <a:r>
-              <a:rPr sz="1100"/>
-              <a:t>+ Maximale Redundanz; Enterprise-Standard; Herstellerempfehlung</a:t>
-            </a:r>
-          </a:p>
-          <a:p>
-            <a:pPr lvl="1"/>
-            <a:r>
-              <a:rPr sz="1100"/>
-              <a:t>– Höchste Kosten; viele Komponenten initial ungenutzt; Overkill für Start</a:t>
-            </a:r>
-          </a:p>
-          <a:p>
-            <a:pPr lvl="1"/>
-            <a:r>
-              <a:rPr sz="1100"/>
-              <a:t>  Empfehlung: Unternehmenskritische Systeme mit strengster Compliance</a:t>
-            </a:r>
-          </a:p>
-        </p:txBody>
-      </p:sp>
-      <p:sp>
-        <p:nvSpPr>
-          <p:cNvPr id="4" name="Subtitle 3"/>
+              <a:rPr sz="2800" b="1"/>
+              <a:t>11  ·  Roadmap und Phasen</a:t>
+            </a:r>
+          </a:p>
+        </p:txBody>
+      </p:sp>
+      <p:sp>
+        <p:nvSpPr>
+          <p:cNvPr id="3" name="Subtitle 2"/>
           <p:cNvSpPr>
             <a:spLocks noGrp="1"/>
           </p:cNvSpPr>
@@ -28347,9 +29224,27 @@
           <a:lstStyle/>
           <a:p>
             <a:r>
-              <a:t>Kosten und Kostensteuerung</a:t>
-            </a:r>
-          </a:p>
+              <a:rPr sz="1400"/>
+              <a:t>6 Phasen – von Kickoff bis laufendem Betrieb</a:t>
+            </a:r>
+          </a:p>
+        </p:txBody>
+      </p:sp>
+      <p:sp>
+        <p:nvSpPr>
+          <p:cNvPr id="4" name="Text Placeholder 3"/>
+          <p:cNvSpPr>
+            <a:spLocks noGrp="1"/>
+          </p:cNvSpPr>
+          <p:nvPr>
+            <p:ph type="body" idx="13" sz="quarter"/>
+          </p:nvPr>
+        </p:nvSpPr>
+        <p:spPr/>
+        <p:txBody>
+          <a:bodyPr/>
+          <a:lstStyle/>
+          <a:p/>
         </p:txBody>
       </p:sp>
     </p:spTree>
@@ -28386,7 +29281,7 @@
           <a:lstStyle/>
           <a:p>
             <a:r>
-              <a:t>Bechtle-Varianten: Vier Konfigurationen im Vergleich</a:t>
+              <a:t>6 Projektphasen</a:t>
             </a:r>
           </a:p>
         </p:txBody>
@@ -28408,92 +29303,43 @@
           <a:p>
             <a:pPr/>
             <a:r>
-              <a:rPr sz="1100"/>
-              <a:t>Option A – Bechtle-Standard  ~€1.050/Monat  (Baseline)</a:t>
-            </a:r>
-          </a:p>
-          <a:p>
-            <a:pPr lvl="1"/>
-            <a:r>
-              <a:rPr sz="1100"/>
-              <a:t>FW Standard 1× ~€700 | VPN GW 1× ~€140 | Bastion ~€120 | DNS ~€25 | LAW ~€50</a:t>
-            </a:r>
-          </a:p>
-          <a:p>
-            <a:pPr lvl="1"/>
-            <a:r>
-              <a:rPr sz="1100"/>
-              <a:t>ALZ-konform: Ja  |  Differenz: Referenz</a:t>
+              <a:rPr sz="1300"/>
+              <a:t>Phase 1 – Kickoff &amp; Discovery: Workshop · Region · Netzwerk · DDoS · Enforcement</a:t>
             </a:r>
           </a:p>
           <a:p>
             <a:pPr/>
             <a:r>
-              <a:rPr sz="1100"/>
-              <a:t>Option B – Bechtle-Optimiert  ~€770/Monat  (ALZ-konform)</a:t>
-            </a:r>
-          </a:p>
-          <a:p>
-            <a:pPr lvl="1"/>
-            <a:r>
-              <a:rPr sz="1100"/>
-              <a:t>FW Standard reserved ~€560 | VPN Gateway deferred (€0) | Bastion ~€120 | DNS ~€25 | LAW ~€50</a:t>
-            </a:r>
-          </a:p>
-          <a:p>
-            <a:pPr lvl="1"/>
-            <a:r>
-              <a:rPr sz="1100"/>
-              <a:t>ALZ-konform: Ja  |  Differenz: −€280/Mon. (26 % günstiger)</a:t>
+              <a:rPr sz="1300"/>
+              <a:t>Phase 2 – Bootstrap:  Deploy-Accelerator · MGs + Policies (DoNotEnforce) · Logging  ≈ €0</a:t>
             </a:r>
           </a:p>
           <a:p>
             <a:pPr/>
             <a:r>
-              <a:rPr sz="1100"/>
-              <a:t>Option C – Bechtle-Budget  ~€500/Monat  (⚠ ALZ-Bruch)</a:t>
-            </a:r>
-          </a:p>
-          <a:p>
-            <a:pPr lvl="1"/>
-            <a:r>
-              <a:rPr sz="1100"/>
-              <a:t>FW Basic ~€300 | VPN Gateway deferred (€0) | Bastion ~€120 | DNS ~€25 | LAW ~€50</a:t>
-            </a:r>
-          </a:p>
-          <a:p>
-            <a:pPr lvl="1"/>
-            <a:r>
-              <a:rPr sz="1100"/>
-              <a:t>ALZ-konform: NEIN  |  Differenz: −€550/Mon. (52 % günstiger)</a:t>
-            </a:r>
-          </a:p>
-          <a:p>
-            <a:pPr lvl="1"/>
-            <a:r>
-              <a:rPr sz="1100"/>
-              <a:t>Bruch: Firewall Basic = keine App-Rules, kein Threat Intel, kein Autoscaling</a:t>
+              <a:rPr sz="1300"/>
+              <a:t>Phase 3 – Netzwerk-Pilot:  Hub-VNets · DNS · erste Spokes  →  ~€1.050/Mon.</a:t>
             </a:r>
           </a:p>
           <a:p>
             <a:pPr/>
             <a:r>
-              <a:rPr sz="1100"/>
-              <a:t>Option D – Microsoft-Default  ~€5.800/Monat  (maximaler Standard)</a:t>
-            </a:r>
-          </a:p>
-          <a:p>
-            <a:pPr lvl="1"/>
-            <a:r>
-              <a:rPr sz="1100"/>
-              <a:t>FW Premium 2× ~€2.200 | DDoS Plan ~€2.500 | ER GW 2× ~€560 | VPN 2× | Bastion 2× | 2 Regionen</a:t>
-            </a:r>
-          </a:p>
-          <a:p>
-            <a:pPr lvl="1"/>
-            <a:r>
-              <a:rPr sz="1100"/>
-              <a:t>ALZ-konform: Ja (vollständig)  |  Differenz: +€4.750/Mon. (452 % teurer als A)</a:t>
+              <a:rPr sz="1300"/>
+              <a:t>Phase 4 – Sicherheit:  Defender aktivieren · Guardrails einschalten · Remediation</a:t>
+            </a:r>
+          </a:p>
+          <a:p>
+            <a:pPr/>
+            <a:r>
+              <a:rPr sz="1300"/>
+              <a:t>Phase 5 – Workload-Onboarding:  erste Applikation in ALZ · RBAC-Gruppen befüllen</a:t>
+            </a:r>
+          </a:p>
+          <a:p>
+            <a:pPr/>
+            <a:r>
+              <a:rPr sz="1300"/>
+              <a:t>Phase 6 – Betrieb:  Cost Management · Tagging · Monitoring-Dashboards</a:t>
             </a:r>
           </a:p>
         </p:txBody>
@@ -28514,7 +29360,7 @@
           <a:lstStyle/>
           <a:p>
             <a:r>
-              <a:t>Kosten und Kostensteuerung</a:t>
+              <a:t>Roadmap und Phasen</a:t>
             </a:r>
           </a:p>
         </p:txBody>
@@ -28553,7 +29399,8 @@
           <a:lstStyle/>
           <a:p>
             <a:r>
-              <a:t>11  ·  Roadmap und Phasen</a:t>
+              <a:rPr sz="2800" b="1"/>
+              <a:t>12–14  ·  Risiken · Randthemen · Nächste Schritte</a:t>
             </a:r>
           </a:p>
         </p:txBody>
@@ -28574,7 +29421,8 @@
           <a:lstStyle/>
           <a:p>
             <a:r>
-              <a:t>6 Phasen – von Kickoff bis laufendem Betrieb</a:t>
+              <a:rPr sz="1400"/>
+              <a:t>Entscheidungen vor Projektstart – klären, bevor der Bootstrap läuft</a:t>
             </a:r>
           </a:p>
         </p:txBody>
@@ -28630,7 +29478,7 @@
           <a:lstStyle/>
           <a:p>
             <a:r>
-              <a:t>6 Projektphasen im Überblick</a:t>
+              <a:t>Klärungsbedarf vor Bootstrap</a:t>
             </a:r>
           </a:p>
         </p:txBody>
@@ -28652,43 +29500,50 @@
           <a:p>
             <a:pPr/>
             <a:r>
-              <a:rPr sz="1300"/>
-              <a:t>Phase 1 – Beratung &amp; Kickoff: Discovery-Workshop; Entscheidungsprotokoll (Region, Netzwerk, DDoS, Enforcement)</a:t>
-            </a:r>
-          </a:p>
-          <a:p>
-            <a:pPr/>
-            <a:r>
-              <a:rPr sz="1300"/>
-              <a:t>Phase 2 – Bootstrap &amp; Grundgerüst: Deploy-Accelerator; MGs + Policies (DoNotEnforce); Logging aktiv  ≈ €0</a:t>
-            </a:r>
-          </a:p>
-          <a:p>
-            <a:pPr/>
-            <a:r>
-              <a:rPr sz="1300"/>
-              <a:t>Phase 3 – Netzwerk-Pilot: Hub-VNets + DNS; erste Spoke-VNets; ggf. minimale Firewall  €15–€1.300/Monat</a:t>
-            </a:r>
-          </a:p>
-          <a:p>
-            <a:pPr/>
-            <a:r>
-              <a:rPr sz="1300"/>
-              <a:t>Phase 4 – Sicherheit &amp; Enforcement: Defender aktivieren; Guardrails einschalten; Remediation  + Defender-Kosten</a:t>
-            </a:r>
-          </a:p>
-          <a:p>
-            <a:pPr/>
-            <a:r>
-              <a:rPr sz="1300"/>
-              <a:t>Phase 5 – Workload-Onboarding: erste Applikation in ALZ; Spoke-Netzwerke; RBAC-Gruppen befüllen</a:t>
-            </a:r>
-          </a:p>
-          <a:p>
-            <a:pPr/>
-            <a:r>
-              <a:rPr sz="1300"/>
-              <a:t>Phase 6 – Betrieb &amp; Optimierung: Cost Management; Tagging; Monitoring-Dashboards; Policy-Weiterentwicklung</a:t>
+              <a:rPr sz="1200"/>
+              <a:t>Offene Entscheidungen</a:t>
+            </a:r>
+          </a:p>
+          <a:p>
+            <a:pPr lvl="1"/>
+            <a:r>
+              <a:rPr sz="1200"/>
+              <a:t>network_type: none (€0) vs. hubNetworking (~€1.050)?</a:t>
+            </a:r>
+          </a:p>
+          <a:p>
+            <a:pPr lvl="1"/>
+            <a:r>
+              <a:rPr sz="1200"/>
+              <a:t>Enforcement-Zeitpunkt: wann von DoNotEnforce auf Enabled?</a:t>
+            </a:r>
+          </a:p>
+          <a:p>
+            <a:pPr lvl="1"/>
+            <a:r>
+              <a:rPr sz="1200"/>
+              <a:t>On-Prem-Anbindung: VPN vs. ExpressRoute vs. keins?</a:t>
+            </a:r>
+          </a:p>
+          <a:p>
+            <a:pPr lvl="1"/>
+            <a:r>
+              <a:rPr sz="1200"/>
+              <a:t>Subscription-Typ: EA / MCA / PAYG?</a:t>
+            </a:r>
+          </a:p>
+          <a:p>
+            <a:pPr lvl="1"/>
+            <a:r>
+              <a:rPr sz="1200"/>
+              <a:t>DDoS: deployDdosProtectionPlan: false für Start</a:t>
+            </a:r>
+          </a:p>
+          <a:p>
+            <a:pPr lvl="1"/>
+            <a:r>
+              <a:rPr sz="1200"/>
+              <a:t>Defender-Tier: welche Pläne aktivieren?</a:t>
             </a:r>
           </a:p>
         </p:txBody>
@@ -28709,7 +29564,72 @@
           <a:lstStyle/>
           <a:p>
             <a:r>
-              <a:t>Roadmap und Phasen</a:t>
+              <a:t>Risiken und Entscheidungen</a:t>
+            </a:r>
+          </a:p>
+        </p:txBody>
+      </p:sp>
+      <p:sp>
+        <p:nvSpPr>
+          <p:cNvPr id="5" name="Text Placeholder 4"/>
+          <p:cNvSpPr>
+            <a:spLocks noGrp="1"/>
+          </p:cNvSpPr>
+          <p:nvPr>
+            <p:ph type="body" idx="14" sz="quarter"/>
+          </p:nvPr>
+        </p:nvSpPr>
+        <p:spPr/>
+        <p:txBody>
+          <a:bodyPr wrap="square"/>
+          <a:lstStyle/>
+          <a:p>
+            <a:pPr/>
+            <a:r>
+              <a:rPr sz="1200"/>
+              <a:t>Sofortmaßnahmen vom Kunden</a:t>
+            </a:r>
+          </a:p>
+          <a:p>
+            <a:pPr lvl="1"/>
+            <a:r>
+              <a:rPr sz="1200"/>
+              <a:t>Azure Tenant ID + Owner-Zugriff Tenant Root</a:t>
+            </a:r>
+          </a:p>
+          <a:p>
+            <a:pPr lvl="1"/>
+            <a:r>
+              <a:rPr sz="1200"/>
+              <a:t>Subscription ID(s) bereitstellen</a:t>
+            </a:r>
+          </a:p>
+          <a:p>
+            <a:pPr lvl="1"/>
+            <a:r>
+              <a:rPr sz="1200"/>
+              <a:t>Bestehende IP-Ranges mitteilen (Konfliktcheck)</a:t>
+            </a:r>
+          </a:p>
+          <a:p>
+            <a:pPr lvl="1"/>
+            <a:r>
+              <a:rPr sz="1200"/>
+              <a:t>5 Entra-Gruppen anlegen + Object IDs</a:t>
+            </a:r>
+          </a:p>
+          <a:p>
+            <a:pPr lvl="1"/>
+            <a:r>
+              <a:rPr sz="1200"/>
+              <a:t>Security-Contact-E-Mail benennen</a:t>
+            </a:r>
+          </a:p>
+          <a:p>
+            <a:pPr lvl="1"/>
+            <a:r>
+              <a:rPr sz="1200"/>
+              <a:t>CrowdStrike-Ansprechpartner benennen</a:t>
             </a:r>
           </a:p>
         </p:txBody>
@@ -28748,7 +29668,8 @@
           <a:lstStyle/>
           <a:p>
             <a:r>
-              <a:t>12  ·  Risiken und Entscheidungen</a:t>
+              <a:rPr sz="2400" b="1"/>
+              <a:t>Tenant ID + Subscription ID → Smoke Run → Live in einer Woche.</a:t>
             </a:r>
           </a:p>
         </p:txBody>
@@ -28769,7 +29690,8 @@
           <a:lstStyle/>
           <a:p>
             <a:r>
-              <a:t>Klare Entscheidungen für einen sicheren Start</a:t>
+              <a:rPr sz="1100"/>
+              <a:t>Nächste Schritte</a:t>
             </a:r>
           </a:p>
         </p:txBody>
@@ -28788,7 +29710,12 @@
         <p:txBody>
           <a:bodyPr/>
           <a:lstStyle/>
-          <a:p/>
+          <a:p>
+            <a:r>
+              <a:rPr sz="1200"/>
+              <a:t>bash smokerun/run.sh --deploy  ·  verify.sh prüft 24 Checks automatisch  ·  teardown.sh für Cleanup</a:t>
+            </a:r>
+          </a:p>
         </p:txBody>
       </p:sp>
     </p:spTree>
@@ -28825,14 +29752,37 @@
           <a:lstStyle/>
           <a:p>
             <a:r>
-              <a:t>Top-Risiken und Entscheidungsbedarf</a:t>
-            </a:r>
-          </a:p>
-        </p:txBody>
-      </p:sp>
-      <p:sp>
-        <p:nvSpPr>
-          <p:cNvPr id="3" name="Text Placeholder 2"/>
+              <a:rPr sz="2800" b="1"/>
+              <a:t>Vielen Dank</a:t>
+            </a:r>
+          </a:p>
+        </p:txBody>
+      </p:sp>
+      <p:sp>
+        <p:nvSpPr>
+          <p:cNvPr id="3" name="Subtitle 2"/>
+          <p:cNvSpPr>
+            <a:spLocks noGrp="1"/>
+          </p:cNvSpPr>
+          <p:nvPr>
+            <p:ph type="subTitle" idx="1"/>
+          </p:nvPr>
+        </p:nvSpPr>
+        <p:spPr/>
+        <p:txBody>
+          <a:bodyPr/>
+          <a:lstStyle/>
+          <a:p>
+            <a:r>
+              <a:rPr sz="1400"/>
+              <a:t>Nächster Schritt: Kickoff-Workshop vereinbaren</a:t>
+            </a:r>
+          </a:p>
+        </p:txBody>
+      </p:sp>
+      <p:sp>
+        <p:nvSpPr>
+          <p:cNvPr id="4" name="Text Placeholder 3"/>
           <p:cNvSpPr>
             <a:spLocks noGrp="1"/>
           </p:cNvSpPr>
@@ -28848,265 +29798,35 @@
             <a:pPr/>
             <a:r>
               <a:rPr sz="1300"/>
-              <a:t>DDoS im Default AN → ~€2.500/Monat unerwartet; deployDdosProtectionPlan: false für Start</a:t>
+              <a:t>&lt;KUNDE&gt;</a:t>
             </a:r>
           </a:p>
           <a:p>
             <a:pPr/>
             <a:r>
               <a:rPr sz="1300"/>
-              <a:t>Subscription-Typ: kein Free Tier → EA/MCA/PAYG vor Bootstrap sicherstellen</a:t>
+              <a:t> </a:t>
             </a:r>
           </a:p>
           <a:p>
             <a:pPr/>
             <a:r>
               <a:rPr sz="1300"/>
-              <a:t>IP-Adresskonflikt On-Prem mit Hub-VNets → IP-Plan vor Netzwerk-Deploy abstimmen</a:t>
+              <a:t>Bechtle GmbH &amp; Co. KG</a:t>
             </a:r>
           </a:p>
           <a:p>
             <a:pPr/>
             <a:r>
               <a:rPr sz="1300"/>
-              <a:t>Defender-Pläne auto. per Policy aktiviert → Tier-Konfiguration vor Apply reviewen</a:t>
+              <a:t>Gottlieb-Daimler-Straße 2  ·  74172 Neckarsulm</a:t>
             </a:r>
           </a:p>
           <a:p>
             <a:pPr/>
             <a:r>
               <a:rPr sz="1300"/>
-              <a:t>Entscheidung: network_type: none (€0) vs. hubNetworking (~€5.800) für Pilot</a:t>
-            </a:r>
-          </a:p>
-          <a:p>
-            <a:pPr/>
-            <a:r>
-              <a:rPr sz="1300"/>
-              <a:t>Entscheidung: Enforcement-Zeitpunkt – wann von DoNotEnforce auf Enabled (Empfehlung: 4–8 Wochen Audit-Phase)</a:t>
-            </a:r>
-          </a:p>
-          <a:p>
-            <a:pPr/>
-            <a:r>
-              <a:rPr sz="1300"/>
-              <a:t>Entscheidung: On-Prem-Anbindung – VPN vs. ExpressRoute vs. keins (je nach SLA und Bandbreite)</a:t>
-            </a:r>
-          </a:p>
-        </p:txBody>
-      </p:sp>
-      <p:sp>
-        <p:nvSpPr>
-          <p:cNvPr id="4" name="Subtitle 3"/>
-          <p:cNvSpPr>
-            <a:spLocks noGrp="1"/>
-          </p:cNvSpPr>
-          <p:nvPr>
-            <p:ph type="subTitle" idx="1"/>
-          </p:nvPr>
-        </p:nvSpPr>
-        <p:spPr/>
-        <p:txBody>
-          <a:bodyPr/>
-          <a:lstStyle/>
-          <a:p>
-            <a:r>
-              <a:t>Risiken und Entscheidungen</a:t>
-            </a:r>
-          </a:p>
-        </p:txBody>
-      </p:sp>
-    </p:spTree>
-  </p:cSld>
-  <p:clrMapOvr>
-    <a:masterClrMapping/>
-  </p:clrMapOvr>
-</p:sld>
-</file>
-
-<file path=ppt/slides/slide38.xml><?xml version="1.0" encoding="utf-8"?>
-<p:sld xmlns:a="http://schemas.openxmlformats.org/drawingml/2006/main" xmlns:p="http://schemas.openxmlformats.org/presentationml/2006/main" xmlns:r="http://schemas.openxmlformats.org/officeDocument/2006/relationships">
-  <p:cSld>
-    <p:spTree>
-      <p:nvGrpSpPr>
-        <p:cNvPr id="1" name=""/>
-        <p:cNvGrpSpPr/>
-        <p:nvPr/>
-      </p:nvGrpSpPr>
-      <p:grpSpPr/>
-      <p:sp>
-        <p:nvSpPr>
-          <p:cNvPr id="2" name="Title 1"/>
-          <p:cNvSpPr>
-            <a:spLocks noGrp="1"/>
-          </p:cNvSpPr>
-          <p:nvPr>
-            <p:ph type="title"/>
-          </p:nvPr>
-        </p:nvSpPr>
-        <p:spPr/>
-        <p:txBody>
-          <a:bodyPr/>
-          <a:lstStyle/>
-          <a:p>
-            <a:r>
-              <a:t>13  ·  Ergänzende Randthemen</a:t>
-            </a:r>
-          </a:p>
-        </p:txBody>
-      </p:sp>
-      <p:sp>
-        <p:nvSpPr>
-          <p:cNvPr id="3" name="Subtitle 2"/>
-          <p:cNvSpPr>
-            <a:spLocks noGrp="1"/>
-          </p:cNvSpPr>
-          <p:nvPr>
-            <p:ph type="subTitle" idx="1"/>
-          </p:nvPr>
-        </p:nvSpPr>
-        <p:spPr/>
-        <p:txBody>
-          <a:bodyPr/>
-          <a:lstStyle/>
-          <a:p>
-            <a:r>
-              <a:t>Außerhalb des ALZ-Scopes – aber eng verknüpft</a:t>
-            </a:r>
-          </a:p>
-        </p:txBody>
-      </p:sp>
-      <p:sp>
-        <p:nvSpPr>
-          <p:cNvPr id="4" name="Text Placeholder 3"/>
-          <p:cNvSpPr>
-            <a:spLocks noGrp="1"/>
-          </p:cNvSpPr>
-          <p:nvPr>
-            <p:ph type="body" idx="13" sz="quarter"/>
-          </p:nvPr>
-        </p:nvSpPr>
-        <p:spPr/>
-        <p:txBody>
-          <a:bodyPr/>
-          <a:lstStyle/>
-          <a:p/>
-        </p:txBody>
-      </p:sp>
-    </p:spTree>
-  </p:cSld>
-  <p:clrMapOvr>
-    <a:masterClrMapping/>
-  </p:clrMapOvr>
-</p:sld>
-</file>
-
-<file path=ppt/slides/slide39.xml><?xml version="1.0" encoding="utf-8"?>
-<p:sld xmlns:a="http://schemas.openxmlformats.org/drawingml/2006/main" xmlns:p="http://schemas.openxmlformats.org/presentationml/2006/main" xmlns:r="http://schemas.openxmlformats.org/officeDocument/2006/relationships">
-  <p:cSld>
-    <p:spTree>
-      <p:nvGrpSpPr>
-        <p:cNvPr id="1" name=""/>
-        <p:cNvGrpSpPr/>
-        <p:nvPr/>
-      </p:nvGrpSpPr>
-      <p:grpSpPr/>
-      <p:sp>
-        <p:nvSpPr>
-          <p:cNvPr id="2" name="Title 1"/>
-          <p:cNvSpPr>
-            <a:spLocks noGrp="1"/>
-          </p:cNvSpPr>
-          <p:nvPr>
-            <p:ph type="title"/>
-          </p:nvPr>
-        </p:nvSpPr>
-        <p:spPr/>
-        <p:txBody>
-          <a:bodyPr/>
-          <a:lstStyle/>
-          <a:p>
-            <a:r>
-              <a:t>Abhängigkeiten und Folge-Bausteine</a:t>
-            </a:r>
-          </a:p>
-        </p:txBody>
-      </p:sp>
-      <p:sp>
-        <p:nvSpPr>
-          <p:cNvPr id="3" name="Text Placeholder 2"/>
-          <p:cNvSpPr>
-            <a:spLocks noGrp="1"/>
-          </p:cNvSpPr>
-          <p:nvPr>
-            <p:ph type="body" idx="13" sz="quarter"/>
-          </p:nvPr>
-        </p:nvSpPr>
-        <p:spPr/>
-        <p:txBody>
-          <a:bodyPr wrap="square"/>
-          <a:lstStyle/>
-          <a:p>
-            <a:pPr/>
-            <a:r>
-              <a:rPr sz="1300"/>
-              <a:t>Entra ID &amp; Identity: PIM, Conditional Access, hybride Identitäten → Identity-Baseline als Folgestufe</a:t>
-            </a:r>
-          </a:p>
-          <a:p>
-            <a:pPr/>
-            <a:r>
-              <a:rPr sz="1300"/>
-              <a:t>On-Prem-Anbindung: VPN-Gateway (deployt, aktiv) oder ExpressRoute → Leitungsbestellung + BGP-Konfiguration außerhalb Scope</a:t>
-            </a:r>
-          </a:p>
-          <a:p>
-            <a:pPr/>
-            <a:r>
-              <a:rPr sz="1300"/>
-              <a:t>Backup &amp; DR: Deploy-VM-Backup aktiv via Policy; Recovery Vault-Konfiguration und DR-Tests als Folgestufe</a:t>
-            </a:r>
-          </a:p>
-          <a:p>
-            <a:pPr/>
-            <a:r>
-              <a:rPr sz="1300"/>
-              <a:t>Kostenmanagement: Azure Cost Management Dashboards, Budget-Alerts je MG/Sub, FinOps-Prozesse</a:t>
-            </a:r>
-          </a:p>
-          <a:p>
-            <a:pPr/>
-            <a:r>
-              <a:rPr sz="1300"/>
-              <a:t>Compliance &amp; Regulatorik: BSI, ISO 27001, DSGVO → Defender for Cloud Regulatory Compliance Dashboard</a:t>
-            </a:r>
-          </a:p>
-          <a:p>
-            <a:pPr/>
-            <a:r>
-              <a:rPr sz="1300"/>
-              <a:t>Workload-Migration: Azure Migrate Assessment → ALZ ist das Ziel, nicht der Migrations-Prozess selbst</a:t>
-            </a:r>
-          </a:p>
-        </p:txBody>
-      </p:sp>
-      <p:sp>
-        <p:nvSpPr>
-          <p:cNvPr id="4" name="Subtitle 3"/>
-          <p:cNvSpPr>
-            <a:spLocks noGrp="1"/>
-          </p:cNvSpPr>
-          <p:nvPr>
-            <p:ph type="subTitle" idx="1"/>
-          </p:nvPr>
-        </p:nvSpPr>
-        <p:spPr/>
-        <p:txBody>
-          <a:bodyPr/>
-          <a:lstStyle/>
-          <a:p>
-            <a:r>
-              <a:t>Ergänzende Randthemen</a:t>
+              <a:t>www.bechtle.com</a:t>
             </a:r>
           </a:p>
         </p:txBody>
@@ -29131,7 +29851,19 @@
       <p:grpSpPr/>
       <p:sp>
         <p:nvSpPr>
-          <p:cNvPr id="2" name="Title 1"/>
+          <p:cNvPr id="2" name="Picture Placeholder 1"/>
+          <p:cNvSpPr>
+            <a:spLocks noGrp="1"/>
+          </p:cNvSpPr>
+          <p:nvPr>
+            <p:ph type="pic" idx="18" sz="quarter"/>
+          </p:nvPr>
+        </p:nvSpPr>
+        <p:spPr/>
+      </p:sp>
+      <p:sp>
+        <p:nvSpPr>
+          <p:cNvPr id="3" name="Title 2"/>
           <p:cNvSpPr>
             <a:spLocks noGrp="1"/>
           </p:cNvSpPr>
@@ -29145,14 +29877,170 @@
           <a:lstStyle/>
           <a:p>
             <a:r>
-              <a:t>Management Summary</a:t>
-            </a:r>
-          </a:p>
-        </p:txBody>
-      </p:sp>
-      <p:sp>
-        <p:nvSpPr>
-          <p:cNvPr id="3" name="Subtitle 2"/>
+              <a:t>Drei Kernnutzen der Azure Landing Zone</a:t>
+            </a:r>
+          </a:p>
+        </p:txBody>
+      </p:sp>
+      <p:sp>
+        <p:nvSpPr>
+          <p:cNvPr id="4" name="Text Placeholder 3"/>
+          <p:cNvSpPr>
+            <a:spLocks noGrp="1"/>
+          </p:cNvSpPr>
+          <p:nvPr>
+            <p:ph type="body" idx="13" sz="quarter"/>
+          </p:nvPr>
+        </p:nvSpPr>
+        <p:spPr/>
+        <p:txBody>
+          <a:bodyPr wrap="square"/>
+          <a:lstStyle/>
+          <a:p>
+            <a:pPr/>
+            <a:r>
+              <a:rPr sz="1100"/>
+              <a:t>149 Policy-Definitionen</a:t>
+            </a:r>
+          </a:p>
+          <a:p>
+            <a:pPr/>
+            <a:r>
+              <a:rPr sz="1100"/>
+              <a:t>42 Initiativen</a:t>
+            </a:r>
+          </a:p>
+          <a:p>
+            <a:pPr/>
+            <a:r>
+              <a:rPr sz="1100"/>
+              <a:t>123 Assignments auf 9 MG-Ebenen</a:t>
+            </a:r>
+          </a:p>
+          <a:p>
+            <a:pPr/>
+            <a:r>
+              <a:rPr sz="1100"/>
+              <a:t>Automatisch – kein manueller Eingriff</a:t>
+            </a:r>
+          </a:p>
+        </p:txBody>
+      </p:sp>
+      <p:sp>
+        <p:nvSpPr>
+          <p:cNvPr id="5" name="Text Placeholder 4"/>
+          <p:cNvSpPr>
+            <a:spLocks noGrp="1"/>
+          </p:cNvSpPr>
+          <p:nvPr>
+            <p:ph type="body" idx="14" sz="quarter"/>
+          </p:nvPr>
+        </p:nvSpPr>
+        <p:spPr/>
+        <p:txBody>
+          <a:bodyPr wrap="square"/>
+          <a:lstStyle/>
+          <a:p>
+            <a:pPr/>
+            <a:r>
+              <a:rPr sz="1100"/>
+              <a:t>Hub-and-Spoke in GWC</a:t>
+            </a:r>
+          </a:p>
+          <a:p>
+            <a:pPr/>
+            <a:r>
+              <a:rPr sz="1100"/>
+              <a:t>Azure Firewall · Bastion · VPN</a:t>
+            </a:r>
+          </a:p>
+          <a:p>
+            <a:pPr/>
+            <a:r>
+              <a:rPr sz="1100"/>
+              <a:t>59 Private DNS Zonen</a:t>
+            </a:r>
+          </a:p>
+          <a:p>
+            <a:pPr/>
+            <a:r>
+              <a:rPr sz="1100"/>
+              <a:t>Spoke-VNets per Vending-Template</a:t>
+            </a:r>
+          </a:p>
+        </p:txBody>
+      </p:sp>
+      <p:sp>
+        <p:nvSpPr>
+          <p:cNvPr id="6" name="Picture Placeholder 5"/>
+          <p:cNvSpPr>
+            <a:spLocks noGrp="1"/>
+          </p:cNvSpPr>
+          <p:nvPr>
+            <p:ph type="pic" idx="19" sz="quarter"/>
+          </p:nvPr>
+        </p:nvSpPr>
+        <p:spPr/>
+      </p:sp>
+      <p:sp>
+        <p:nvSpPr>
+          <p:cNvPr id="7" name="Picture Placeholder 6"/>
+          <p:cNvSpPr>
+            <a:spLocks noGrp="1"/>
+          </p:cNvSpPr>
+          <p:nvPr>
+            <p:ph type="pic" idx="20" sz="quarter"/>
+          </p:nvPr>
+        </p:nvSpPr>
+        <p:spPr/>
+      </p:sp>
+      <p:sp>
+        <p:nvSpPr>
+          <p:cNvPr id="8" name="Text Placeholder 7"/>
+          <p:cNvSpPr>
+            <a:spLocks noGrp="1"/>
+          </p:cNvSpPr>
+          <p:nvPr>
+            <p:ph type="body" idx="21" sz="quarter"/>
+          </p:nvPr>
+        </p:nvSpPr>
+        <p:spPr/>
+        <p:txBody>
+          <a:bodyPr wrap="square"/>
+          <a:lstStyle/>
+          <a:p>
+            <a:pPr/>
+            <a:r>
+              <a:rPr sz="1100"/>
+              <a:t>Defender for Cloud auto-aktiviert</a:t>
+            </a:r>
+          </a:p>
+          <a:p>
+            <a:pPr/>
+            <a:r>
+              <a:rPr sz="1100"/>
+              <a:t>CrowdStrike SIEM via Event Hub</a:t>
+            </a:r>
+          </a:p>
+          <a:p>
+            <a:pPr/>
+            <a:r>
+              <a:rPr sz="1100"/>
+              <a:t>Break-Glass-Logging</a:t>
+            </a:r>
+          </a:p>
+          <a:p>
+            <a:pPr/>
+            <a:r>
+              <a:rPr sz="1100"/>
+              <a:t>OIDC – keine Passwörter in Pipelines</a:t>
+            </a:r>
+          </a:p>
+        </p:txBody>
+      </p:sp>
+      <p:sp>
+        <p:nvSpPr>
+          <p:cNvPr id="9" name="Subtitle 8"/>
           <p:cNvSpPr>
             <a:spLocks noGrp="1"/>
           </p:cNvSpPr>
@@ -29166,378 +30054,160 @@
           <a:lstStyle/>
           <a:p>
             <a:r>
-              <a:t>Governance · Netzwerk · Sicherheit · Automatisierung – als IaC-Fundament</a:t>
-            </a:r>
-          </a:p>
-        </p:txBody>
-      </p:sp>
-      <p:sp>
-        <p:nvSpPr>
-          <p:cNvPr id="4" name="Text Placeholder 3"/>
-          <p:cNvSpPr>
-            <a:spLocks noGrp="1"/>
-          </p:cNvSpPr>
-          <p:nvPr>
-            <p:ph type="body" idx="13" sz="quarter"/>
-          </p:nvPr>
-        </p:nvSpPr>
-        <p:spPr/>
-        <p:txBody>
-          <a:bodyPr wrap="square"/>
+              <a:t>Management Summary</a:t>
+            </a:r>
+          </a:p>
+        </p:txBody>
+      </p:sp>
+      <p:sp>
+        <p:nvSpPr>
+          <p:cNvPr id="10" name="Rectangle 9"/>
+          <p:cNvSpPr/>
+          <p:nvPr/>
+        </p:nvSpPr>
+        <p:spPr>
+          <a:xfrm>
+            <a:off x="338328" y="2167128"/>
+            <a:ext cx="3602736" cy="2523744"/>
+          </a:xfrm>
+          <a:prstGeom prst="rect">
+            <a:avLst/>
+          </a:prstGeom>
+          <a:solidFill>
+            <a:srgbClr val="075033"/>
+          </a:solidFill>
+          <a:ln>
+            <a:noFill/>
+          </a:ln>
+        </p:spPr>
+        <p:style>
+          <a:lnRef idx="1">
+            <a:schemeClr val="accent1"/>
+          </a:lnRef>
+          <a:fillRef idx="3">
+            <a:schemeClr val="accent1"/>
+          </a:fillRef>
+          <a:effectRef idx="2">
+            <a:schemeClr val="accent1"/>
+          </a:effectRef>
+          <a:fontRef idx="minor">
+            <a:schemeClr val="lt1"/>
+          </a:fontRef>
+        </p:style>
+        <p:txBody>
+          <a:bodyPr rtlCol="0" anchor="ctr" wrap="square"/>
           <a:lstStyle/>
           <a:p>
-            <a:pPr/>
-            <a:r>
-              <a:rPr sz="1200"/>
-              <a:t>12 Management Groups</a:t>
-            </a:r>
-          </a:p>
-          <a:p>
-            <a:pPr/>
-            <a:r>
-              <a:rPr sz="1200"/>
-              <a:t>149 Policy-Definitionen</a:t>
-            </a:r>
-          </a:p>
-          <a:p>
-            <a:pPr/>
-            <a:r>
-              <a:rPr sz="1200"/>
-              <a:t>42 Initiativen  ·  123 Assignments</a:t>
-            </a:r>
-          </a:p>
-          <a:p>
-            <a:pPr/>
-            <a:r>
-              <a:rPr sz="1200"/>
-              <a:t>22 AVM-Module</a:t>
-            </a:r>
-          </a:p>
-          <a:p>
-            <a:pPr/>
-            <a:r>
-              <a:rPr sz="1200"/>
-              <a:t>18 Deploy-Stufen</a:t>
-            </a:r>
-          </a:p>
-          <a:p>
-            <a:pPr/>
-            <a:r>
-              <a:rPr sz="1200"/>
-              <a:t>~€5.800/Monat (vollständig steuerbar)</a:t>
-            </a:r>
-          </a:p>
-        </p:txBody>
-      </p:sp>
-    </p:spTree>
-  </p:cSld>
-  <p:clrMapOvr>
-    <a:masterClrMapping/>
-  </p:clrMapOvr>
-</p:sld>
-</file>
-
-<file path=ppt/slides/slide40.xml><?xml version="1.0" encoding="utf-8"?>
-<p:sld xmlns:a="http://schemas.openxmlformats.org/drawingml/2006/main" xmlns:p="http://schemas.openxmlformats.org/presentationml/2006/main" xmlns:r="http://schemas.openxmlformats.org/officeDocument/2006/relationships">
-  <p:cSld>
-    <p:spTree>
-      <p:nvGrpSpPr>
-        <p:cNvPr id="1" name=""/>
-        <p:cNvGrpSpPr/>
-        <p:nvPr/>
-      </p:nvGrpSpPr>
-      <p:grpSpPr/>
-      <p:sp>
-        <p:nvSpPr>
-          <p:cNvPr id="2" name="Title 1"/>
-          <p:cNvSpPr>
-            <a:spLocks noGrp="1"/>
-          </p:cNvSpPr>
-          <p:nvPr>
-            <p:ph type="title"/>
-          </p:nvPr>
-        </p:nvSpPr>
-        <p:spPr/>
-        <p:txBody>
-          <a:bodyPr/>
+            <a:pPr algn="ctr"/>
+            <a:r>
+              <a:rPr sz="1800" b="1">
+                <a:solidFill>
+                  <a:srgbClr val="FFFFFF"/>
+                </a:solidFill>
+              </a:rPr>
+              <a:t>Governance</a:t>
+            </a:r>
+          </a:p>
+        </p:txBody>
+      </p:sp>
+      <p:sp>
+        <p:nvSpPr>
+          <p:cNvPr id="11" name="Rectangle 10"/>
+          <p:cNvSpPr/>
+          <p:nvPr/>
+        </p:nvSpPr>
+        <p:spPr>
+          <a:xfrm>
+            <a:off x="4297680" y="2167128"/>
+            <a:ext cx="3602736" cy="2523744"/>
+          </a:xfrm>
+          <a:prstGeom prst="rect">
+            <a:avLst/>
+          </a:prstGeom>
+          <a:solidFill>
+            <a:srgbClr val="23A96A"/>
+          </a:solidFill>
+          <a:ln>
+            <a:noFill/>
+          </a:ln>
+        </p:spPr>
+        <p:style>
+          <a:lnRef idx="1">
+            <a:schemeClr val="accent1"/>
+          </a:lnRef>
+          <a:fillRef idx="3">
+            <a:schemeClr val="accent1"/>
+          </a:fillRef>
+          <a:effectRef idx="2">
+            <a:schemeClr val="accent1"/>
+          </a:effectRef>
+          <a:fontRef idx="minor">
+            <a:schemeClr val="lt1"/>
+          </a:fontRef>
+        </p:style>
+        <p:txBody>
+          <a:bodyPr rtlCol="0" anchor="ctr" wrap="square"/>
           <a:lstStyle/>
           <a:p>
-            <a:r>
-              <a:t>14  ·  Nächste Schritte</a:t>
-            </a:r>
-          </a:p>
-        </p:txBody>
-      </p:sp>
-      <p:sp>
-        <p:nvSpPr>
-          <p:cNvPr id="3" name="Subtitle 2"/>
-          <p:cNvSpPr>
-            <a:spLocks noGrp="1"/>
-          </p:cNvSpPr>
-          <p:nvPr>
-            <p:ph type="subTitle" idx="1"/>
-          </p:nvPr>
-        </p:nvSpPr>
-        <p:spPr/>
-        <p:txBody>
-          <a:bodyPr/>
+            <a:pPr algn="ctr"/>
+            <a:r>
+              <a:rPr sz="1800" b="1">
+                <a:solidFill>
+                  <a:srgbClr val="FFFFFF"/>
+                </a:solidFill>
+              </a:rPr>
+              <a:t>Netzwerk</a:t>
+            </a:r>
+          </a:p>
+        </p:txBody>
+      </p:sp>
+      <p:sp>
+        <p:nvSpPr>
+          <p:cNvPr id="12" name="Rectangle 11"/>
+          <p:cNvSpPr/>
+          <p:nvPr/>
+        </p:nvSpPr>
+        <p:spPr>
+          <a:xfrm>
+            <a:off x="8257031" y="2167128"/>
+            <a:ext cx="3602736" cy="2523744"/>
+          </a:xfrm>
+          <a:prstGeom prst="rect">
+            <a:avLst/>
+          </a:prstGeom>
+          <a:solidFill>
+            <a:srgbClr val="053B25"/>
+          </a:solidFill>
+          <a:ln>
+            <a:noFill/>
+          </a:ln>
+        </p:spPr>
+        <p:style>
+          <a:lnRef idx="1">
+            <a:schemeClr val="accent1"/>
+          </a:lnRef>
+          <a:fillRef idx="3">
+            <a:schemeClr val="accent1"/>
+          </a:fillRef>
+          <a:effectRef idx="2">
+            <a:schemeClr val="accent1"/>
+          </a:effectRef>
+          <a:fontRef idx="minor">
+            <a:schemeClr val="lt1"/>
+          </a:fontRef>
+        </p:style>
+        <p:txBody>
+          <a:bodyPr rtlCol="0" anchor="ctr" wrap="square"/>
           <a:lstStyle/>
           <a:p>
-            <a:r>
-              <a:t>Empfohlener Pilot-Pfad in 6 Schritten – ohne Kostenrisiko</a:t>
-            </a:r>
-          </a:p>
-        </p:txBody>
-      </p:sp>
-      <p:sp>
-        <p:nvSpPr>
-          <p:cNvPr id="4" name="Text Placeholder 3"/>
-          <p:cNvSpPr>
-            <a:spLocks noGrp="1"/>
-          </p:cNvSpPr>
-          <p:nvPr>
-            <p:ph type="body" idx="13" sz="quarter"/>
-          </p:nvPr>
-        </p:nvSpPr>
-        <p:spPr/>
-        <p:txBody>
-          <a:bodyPr/>
-          <a:lstStyle/>
-          <a:p/>
-        </p:txBody>
-      </p:sp>
-    </p:spTree>
-  </p:cSld>
-  <p:clrMapOvr>
-    <a:masterClrMapping/>
-  </p:clrMapOvr>
-</p:sld>
-</file>
-
-<file path=ppt/slides/slide41.xml><?xml version="1.0" encoding="utf-8"?>
-<p:sld xmlns:a="http://schemas.openxmlformats.org/drawingml/2006/main" xmlns:p="http://schemas.openxmlformats.org/presentationml/2006/main" xmlns:r="http://schemas.openxmlformats.org/officeDocument/2006/relationships">
-  <p:cSld>
-    <p:spTree>
-      <p:nvGrpSpPr>
-        <p:cNvPr id="1" name=""/>
-        <p:cNvGrpSpPr/>
-        <p:nvPr/>
-      </p:nvGrpSpPr>
-      <p:grpSpPr/>
-      <p:sp>
-        <p:nvSpPr>
-          <p:cNvPr id="2" name="Title 1"/>
-          <p:cNvSpPr>
-            <a:spLocks noGrp="1"/>
-          </p:cNvSpPr>
-          <p:nvPr>
-            <p:ph type="title"/>
-          </p:nvPr>
-        </p:nvSpPr>
-        <p:spPr/>
-        <p:txBody>
-          <a:bodyPr/>
-          <a:lstStyle/>
-          <a:p>
-            <a:r>
-              <a:t>Sofortmaßnahmen und empfohlener Pilot-Pfad</a:t>
-            </a:r>
-          </a:p>
-        </p:txBody>
-      </p:sp>
-      <p:sp>
-        <p:nvSpPr>
-          <p:cNvPr id="3" name="Text Placeholder 2"/>
-          <p:cNvSpPr>
-            <a:spLocks noGrp="1"/>
-          </p:cNvSpPr>
-          <p:nvPr>
-            <p:ph type="body" idx="13" sz="quarter"/>
-          </p:nvPr>
-        </p:nvSpPr>
-        <p:spPr/>
-        <p:txBody>
-          <a:bodyPr wrap="square"/>
-          <a:lstStyle/>
-          <a:p>
-            <a:pPr/>
-            <a:r>
-              <a:rPr sz="1300"/>
-              <a:t>1.  Subscription-ID + GitHub PAT in config/inputs-github.yaml eintragen</a:t>
-            </a:r>
-          </a:p>
-          <a:p>
-            <a:pPr/>
-            <a:r>
-              <a:rPr sz="1300"/>
-              <a:t>2.  Bootstrap: Deploy-Accelerator -inputs config/inputs-github.yaml config/platform-landing-zone.yaml</a:t>
-            </a:r>
-          </a:p>
-          <a:p>
-            <a:pPr/>
-            <a:r>
-              <a:rPr sz="1300"/>
-              <a:t>3.  Pipeline mit What-If prüfen → welche Ressourcen werden erstellt?</a:t>
-            </a:r>
-          </a:p>
-          <a:p>
-            <a:pPr/>
-            <a:r>
-              <a:rPr sz="1300"/>
-              <a:t>4.  Apply genehmigen – network_type: none (≈€0) für risikofreien Pilot-Start</a:t>
-            </a:r>
-          </a:p>
-          <a:p>
-            <a:pPr/>
-            <a:r>
-              <a:rPr sz="1300"/>
-              <a:t>5.  Policy-Compliance-Dashboard reviewen → welche Guardrails greifen, welche nicht?</a:t>
-            </a:r>
-          </a:p>
-          <a:p>
-            <a:pPr/>
-            <a:r>
-              <a:rPr sz="1300"/>
-              <a:t>6.  Schrittweise Enforcement und Netzwerk-Dienste aktivieren nach Audit-Phase</a:t>
-            </a:r>
-          </a:p>
-          <a:p>
-            <a:pPr/>
-            <a:r>
-              <a:rPr sz="1300"/>
-              <a:t>Bechtle begleitet: Kickoff-Workshop → Bootstrap-Begleitung → Pilot → Workload-Onboarding</a:t>
-            </a:r>
-          </a:p>
-        </p:txBody>
-      </p:sp>
-      <p:sp>
-        <p:nvSpPr>
-          <p:cNvPr id="4" name="Subtitle 3"/>
-          <p:cNvSpPr>
-            <a:spLocks noGrp="1"/>
-          </p:cNvSpPr>
-          <p:nvPr>
-            <p:ph type="subTitle" idx="1"/>
-          </p:nvPr>
-        </p:nvSpPr>
-        <p:spPr/>
-        <p:txBody>
-          <a:bodyPr/>
-          <a:lstStyle/>
-          <a:p>
-            <a:r>
-              <a:t>Nächste Schritte</a:t>
-            </a:r>
-          </a:p>
-        </p:txBody>
-      </p:sp>
-    </p:spTree>
-  </p:cSld>
-  <p:clrMapOvr>
-    <a:masterClrMapping/>
-  </p:clrMapOvr>
-</p:sld>
-</file>
-
-<file path=ppt/slides/slide42.xml><?xml version="1.0" encoding="utf-8"?>
-<p:sld xmlns:a="http://schemas.openxmlformats.org/drawingml/2006/main" xmlns:p="http://schemas.openxmlformats.org/presentationml/2006/main" xmlns:r="http://schemas.openxmlformats.org/officeDocument/2006/relationships">
-  <p:cSld>
-    <p:spTree>
-      <p:nvGrpSpPr>
-        <p:cNvPr id="1" name=""/>
-        <p:cNvGrpSpPr/>
-        <p:nvPr/>
-      </p:nvGrpSpPr>
-      <p:grpSpPr/>
-      <p:sp>
-        <p:nvSpPr>
-          <p:cNvPr id="2" name="Title 1"/>
-          <p:cNvSpPr>
-            <a:spLocks noGrp="1"/>
-          </p:cNvSpPr>
-          <p:nvPr>
-            <p:ph type="title"/>
-          </p:nvPr>
-        </p:nvSpPr>
-        <p:spPr/>
-        <p:txBody>
-          <a:bodyPr/>
-          <a:lstStyle/>
-          <a:p>
-            <a:r>
-              <a:t>Vielen Dank</a:t>
-            </a:r>
-          </a:p>
-        </p:txBody>
-      </p:sp>
-      <p:sp>
-        <p:nvSpPr>
-          <p:cNvPr id="3" name="Subtitle 2"/>
-          <p:cNvSpPr>
-            <a:spLocks noGrp="1"/>
-          </p:cNvSpPr>
-          <p:nvPr>
-            <p:ph type="subTitle" idx="1"/>
-          </p:nvPr>
-        </p:nvSpPr>
-        <p:spPr/>
-        <p:txBody>
-          <a:bodyPr/>
-          <a:lstStyle/>
-          <a:p>
-            <a:r>
-              <a:t>Nächster Schritt: Kickoff-Workshop vereinbaren</a:t>
-            </a:r>
-          </a:p>
-        </p:txBody>
-      </p:sp>
-      <p:sp>
-        <p:nvSpPr>
-          <p:cNvPr id="4" name="Text Placeholder 3"/>
-          <p:cNvSpPr>
-            <a:spLocks noGrp="1"/>
-          </p:cNvSpPr>
-          <p:nvPr>
-            <p:ph type="body" idx="13" sz="quarter"/>
-          </p:nvPr>
-        </p:nvSpPr>
-        <p:spPr/>
-        <p:txBody>
-          <a:bodyPr wrap="square"/>
-          <a:lstStyle/>
-          <a:p>
-            <a:pPr/>
-            <a:r>
-              <a:rPr sz="1200"/>
-              <a:t>&lt;KUNDE&gt;</a:t>
-            </a:r>
-          </a:p>
-          <a:p>
-            <a:pPr/>
-            <a:r>
-              <a:rPr sz="1200"/>
-              <a:t> </a:t>
-            </a:r>
-          </a:p>
-          <a:p>
-            <a:pPr/>
-            <a:r>
-              <a:rPr sz="1200"/>
-              <a:t>Bechtle GmbH &amp; Co. KG</a:t>
-            </a:r>
-          </a:p>
-          <a:p>
-            <a:pPr/>
-            <a:r>
-              <a:rPr sz="1200"/>
-              <a:t>Gottlieb-Daimler-Straße 2 · 68165 Mannheim</a:t>
-            </a:r>
-          </a:p>
-          <a:p>
-            <a:pPr/>
-            <a:r>
-              <a:rPr sz="1200"/>
-              <a:t>T +49 621 87503-0 · www.bechtle.com</a:t>
+            <a:pPr algn="ctr"/>
+            <a:r>
+              <a:rPr sz="1800" b="1">
+                <a:solidFill>
+                  <a:srgbClr val="FFFFFF"/>
+                </a:solidFill>
+              </a:rPr>
+              <a:t>Sicherheit</a:t>
             </a:r>
           </a:p>
         </p:txBody>
@@ -29576,72 +30246,15 @@
           <a:lstStyle/>
           <a:p>
             <a:r>
-              <a:t>Die vier Kernnutzen der Azure Landing Zone</a:t>
-            </a:r>
-          </a:p>
-        </p:txBody>
-      </p:sp>
-      <p:sp>
-        <p:nvSpPr>
-          <p:cNvPr id="3" name="Text Placeholder 2"/>
-          <p:cNvSpPr>
-            <a:spLocks noGrp="1"/>
-          </p:cNvSpPr>
-          <p:nvPr>
-            <p:ph type="body" idx="13" sz="quarter"/>
-          </p:nvPr>
-        </p:nvSpPr>
-        <p:spPr/>
-        <p:txBody>
-          <a:bodyPr wrap="square"/>
-          <a:lstStyle/>
-          <a:p>
-            <a:pPr/>
-            <a:r>
-              <a:rPr sz="1300"/>
-              <a:t>Governance &amp; Policies: 149 Policy-Defs, 42 Initiativen, 123 Assignments – automatische Guardrails auf allen MG-Ebenen</a:t>
-            </a:r>
-          </a:p>
-          <a:p>
-            <a:pPr/>
-            <a:r>
-              <a:rPr sz="1300"/>
-              <a:t>Netzwerk-Hub (Hub-and-Spoke): Azure Firewall, Bastion, Private DNS – sichere Konnektivität für alle Workloads</a:t>
-            </a:r>
-          </a:p>
-          <a:p>
-            <a:pPr/>
-            <a:r>
-              <a:rPr sz="1300"/>
-              <a:t>Sicherheit &amp; Defender: Microsoft Defender for Cloud automatisch via Policy aktiviert – keine manuelle Konfiguration</a:t>
-            </a:r>
-          </a:p>
-          <a:p>
-            <a:pPr/>
-            <a:r>
-              <a:rPr sz="1300"/>
-              <a:t>IaC &amp; Automatisierung: 18 Deploy-Stufen, OIDC (passwortlos), What-If vor Apply, Approval-Gate</a:t>
-            </a:r>
-          </a:p>
-          <a:p>
-            <a:pPr/>
-            <a:r>
-              <a:rPr sz="1300"/>
-              <a:t>Kosten: Microsoft-Default ~€5.800/Monat  ↔  Pilot mit network_type: none ≈ €0</a:t>
-            </a:r>
-          </a:p>
-          <a:p>
-            <a:pPr/>
-            <a:r>
-              <a:rPr sz="1300"/>
-              <a:t>Empfehlung: Pilot mit 1 Subscription, network_type: none, Policies im DoNotEnforce-Modus – Governance vom ersten Tag an</a:t>
-            </a:r>
-          </a:p>
-        </p:txBody>
-      </p:sp>
-      <p:sp>
-        <p:nvSpPr>
-          <p:cNvPr id="4" name="Subtitle 3"/>
+              <a:rPr sz="4000" b="1"/>
+              <a:t>~€1.050 / Monat</a:t>
+            </a:r>
+          </a:p>
+        </p:txBody>
+      </p:sp>
+      <p:sp>
+        <p:nvSpPr>
+          <p:cNvPr id="3" name="Subtitle 2"/>
           <p:cNvSpPr>
             <a:spLocks noGrp="1"/>
           </p:cNvSpPr>
@@ -29655,7 +30268,41 @@
           <a:lstStyle/>
           <a:p>
             <a:r>
-              <a:t>Management Summary</a:t>
+              <a:rPr sz="1200"/>
+              <a:t>Management Summary · Bechtle-Empfehlung</a:t>
+            </a:r>
+          </a:p>
+        </p:txBody>
+      </p:sp>
+      <p:sp>
+        <p:nvSpPr>
+          <p:cNvPr id="4" name="TextBox 3"/>
+          <p:cNvSpPr txBox="1"/>
+          <p:nvPr/>
+        </p:nvSpPr>
+        <p:spPr>
+          <a:xfrm>
+            <a:off x="338328" y="4754880"/>
+            <a:ext cx="5029200" cy="914400"/>
+          </a:xfrm>
+          <a:prstGeom prst="rect">
+            <a:avLst/>
+          </a:prstGeom>
+          <a:noFill/>
+        </p:spPr>
+        <p:txBody>
+          <a:bodyPr wrap="square">
+            <a:spAutoFit/>
+          </a:bodyPr>
+          <a:lstStyle/>
+          <a:p>
+            <a:r>
+              <a:rPr sz="1300">
+                <a:solidFill>
+                  <a:srgbClr val="595959"/>
+                </a:solidFill>
+              </a:rPr>
+              <a:t>Voller ALZ-Funktionsumfang · eine Region · 4× günstiger als Microsoft-Default (~€5.800)</a:t>
             </a:r>
           </a:p>
         </p:txBody>
@@ -29694,6 +30341,7 @@
           <a:lstStyle/>
           <a:p>
             <a:r>
+              <a:rPr sz="2800" b="1"/>
               <a:t>1  ·  Ausgangslage und Zielbild</a:t>
             </a:r>
           </a:p>
@@ -29715,6 +30363,7 @@
           <a:lstStyle/>
           <a:p>
             <a:r>
+              <a:rPr sz="1400"/>
               <a:t>Von der ersten Subscription zur skalierbaren Cloud-Grundstruktur</a:t>
             </a:r>
           </a:p>
@@ -29771,7 +30420,7 @@
           <a:lstStyle/>
           <a:p>
             <a:r>
-              <a:t>Warum eine Azure Landing Zone?</a:t>
+              <a:t>Ohne Azure Landing Zone vs. Mit Azure Landing Zone</a:t>
             </a:r>
           </a:p>
         </p:txBody>
@@ -29793,50 +30442,50 @@
           <a:p>
             <a:pPr/>
             <a:r>
-              <a:rPr sz="1300"/>
-              <a:t>Ausgangssituation: Azure-Einstieg ohne Governance-Modell – Ressourcen entstehen ad hoc, ohne einheitliche Leitplanken</a:t>
-            </a:r>
-          </a:p>
-          <a:p>
-            <a:pPr/>
-            <a:r>
-              <a:rPr sz="1300"/>
-              <a:t>Chance: Von Anfang an auf industrieerprobter Basis aufbauen – statt technische Schulden durch spätere Nachrüstung</a:t>
-            </a:r>
-          </a:p>
-          <a:p>
-            <a:pPr/>
-            <a:r>
-              <a:rPr sz="1300"/>
-              <a:t>Zielbild: Standardisierte, mandantenweite Grundstruktur als stabiles Fundament für alle künftigen Workloads</a:t>
+              <a:rPr sz="1200"/>
+              <a:t>Ohne ALZ</a:t>
             </a:r>
           </a:p>
           <a:p>
             <a:pPr lvl="1"/>
             <a:r>
-              <a:rPr sz="1300"/>
-              <a:t>12 MGs als strukturierter Verwaltungsrahmen für alle Subscriptions</a:t>
+              <a:rPr sz="1200"/>
+              <a:t>Ressourcen entstehen ad hoc</a:t>
             </a:r>
           </a:p>
           <a:p>
             <a:pPr lvl="1"/>
             <a:r>
-              <a:rPr sz="1300"/>
-              <a:t>Vollständiges ALZ-Policy-Set für automatische Governance ohne manuelle Eingriffe</a:t>
+              <a:rPr sz="1200"/>
+              <a:t>Keine einheitlichen Guardrails</a:t>
             </a:r>
           </a:p>
           <a:p>
             <a:pPr lvl="1"/>
             <a:r>
-              <a:rPr sz="1300"/>
-              <a:t>Reproduzierbares IaC-Modell: audit-fähig, rückrollbar, nachvollziehbar</a:t>
-            </a:r>
-          </a:p>
-          <a:p>
-            <a:pPr/>
-            <a:r>
-              <a:rPr sz="1300"/>
-              <a:t>Abgrenzung: ALZ = Fundament – Migration, Anwendungsentwicklung und Applikationsbetrieb sind eigenständige Folgeprojekte</a:t>
+              <a:rPr sz="1200"/>
+              <a:t>Sicherheitsbaselines manuell</a:t>
+            </a:r>
+          </a:p>
+          <a:p>
+            <a:pPr lvl="1"/>
+            <a:r>
+              <a:rPr sz="1200"/>
+              <a:t>Keine Netzwerksegmentierung</a:t>
+            </a:r>
+          </a:p>
+          <a:p>
+            <a:pPr lvl="1"/>
+            <a:r>
+              <a:rPr sz="1200"/>
+              <a:t>Compliance mühsam nachzuweisen</a:t>
+            </a:r>
+          </a:p>
+          <a:p>
+            <a:pPr lvl="1"/>
+            <a:r>
+              <a:rPr sz="1200"/>
+              <a:t>Technische Schulden ab Tag 1</a:t>
             </a:r>
           </a:p>
         </p:txBody>
@@ -29858,6 +30507,71 @@
           <a:p>
             <a:r>
               <a:t>Ausgangslage und Zielbild</a:t>
+            </a:r>
+          </a:p>
+        </p:txBody>
+      </p:sp>
+      <p:sp>
+        <p:nvSpPr>
+          <p:cNvPr id="5" name="Text Placeholder 4"/>
+          <p:cNvSpPr>
+            <a:spLocks noGrp="1"/>
+          </p:cNvSpPr>
+          <p:nvPr>
+            <p:ph type="body" idx="14" sz="quarter"/>
+          </p:nvPr>
+        </p:nvSpPr>
+        <p:spPr/>
+        <p:txBody>
+          <a:bodyPr wrap="square"/>
+          <a:lstStyle/>
+          <a:p>
+            <a:pPr/>
+            <a:r>
+              <a:rPr sz="1200"/>
+              <a:t>Mit ALZ (Bechtle)</a:t>
+            </a:r>
+          </a:p>
+          <a:p>
+            <a:pPr lvl="1"/>
+            <a:r>
+              <a:rPr sz="1200"/>
+              <a:t>Standardisierter Verwaltungsrahmen</a:t>
+            </a:r>
+          </a:p>
+          <a:p>
+            <a:pPr lvl="1"/>
+            <a:r>
+              <a:rPr sz="1200"/>
+              <a:t>149 Policies – automatische Guardrails</a:t>
+            </a:r>
+          </a:p>
+          <a:p>
+            <a:pPr lvl="1"/>
+            <a:r>
+              <a:rPr sz="1200"/>
+              <a:t>Defender for Cloud via Policy</a:t>
+            </a:r>
+          </a:p>
+          <a:p>
+            <a:pPr lvl="1"/>
+            <a:r>
+              <a:rPr sz="1200"/>
+              <a:t>Hub-and-Spoke – zentrale Firewall</a:t>
+            </a:r>
+          </a:p>
+          <a:p>
+            <a:pPr lvl="1"/>
+            <a:r>
+              <a:rPr sz="1200"/>
+              <a:t>Audit-Trail in Git + Activity Log</a:t>
+            </a:r>
+          </a:p>
+          <a:p>
+            <a:pPr lvl="1"/>
+            <a:r>
+              <a:rPr sz="1200"/>
+              <a:t>Skalierbar ohne Rearchitektur</a:t>
             </a:r>
           </a:p>
         </p:txBody>
@@ -29896,6 +30610,7 @@
           <a:lstStyle/>
           <a:p>
             <a:r>
+              <a:rPr sz="2800" b="1"/>
               <a:t>2  ·  Methodik und Vorgehen</a:t>
             </a:r>
           </a:p>
@@ -29917,7 +30632,8 @@
           <a:lstStyle/>
           <a:p>
             <a:r>
-              <a:t>Microsoft ALZ Bicep Accelerator – kein Eigenbau, sondern Microsoft-Standard</a:t>
+              <a:rPr sz="1400"/>
+              <a:t>Microsoft ALZ Bicep Accelerator – kein Eigenbau, kein Vendor-Lock-in</a:t>
             </a:r>
           </a:p>
         </p:txBody>
@@ -29973,7 +30689,7 @@
           <a:lstStyle/>
           <a:p>
             <a:r>
-              <a:t>ALZ Bicep Accelerator + 18 Deployment-Stufen</a:t>
+              <a:t>ALZ Bicep Accelerator + 18 Deploy-Stufen</a:t>
             </a:r>
           </a:p>
         </p:txBody>
@@ -29996,49 +30712,42 @@
             <a:pPr/>
             <a:r>
               <a:rPr sz="1300"/>
-              <a:t>Microsoft-Standard: derselbe Accelerator, den Microsoft für tausende Enterprise-Kunden empfiehlt und pflegt</a:t>
+              <a:t>Microsoft-Standard – tausendfach erprobt, Microsoft-gepflegt</a:t>
             </a:r>
           </a:p>
           <a:p>
             <a:pPr/>
             <a:r>
               <a:rPr sz="1300"/>
-              <a:t>Policy-Set komplett: 149 Definitionen, 42 Initiativen, 123 Assignments – automatisch aus MCR (Microsoft Container Registry)</a:t>
+              <a:t>20 Azure Verified Modules (AVM) – zertifiziertes IaC, kein Eigenbau</a:t>
             </a:r>
           </a:p>
           <a:p>
             <a:pPr/>
             <a:r>
               <a:rPr sz="1300"/>
-              <a:t>22 Azure Verified Modules (AVM): Microsoft-zertifizierte Bicep-Module, kein Eigenbau-IaC</a:t>
+              <a:t>18 geordnete Stufen:  Governance (1–12)  →  RBAC (13–15)  →  Logging (16)  →  Netzwerk (17/18)</a:t>
             </a:r>
           </a:p>
           <a:p>
             <a:pPr/>
             <a:r>
               <a:rPr sz="1300"/>
-              <a:t>18 geordnete Deploy-Stufen: Governance (1–12) → RBAC (13–15) → Logging (16) → Netzwerk (17/18)</a:t>
+              <a:t>OIDC Federated Identity – keine Secrets oder Zertifikate in Pipelines</a:t>
             </a:r>
           </a:p>
           <a:p>
             <a:pPr/>
             <a:r>
               <a:rPr sz="1300"/>
-              <a:t>OIDC Federated Identity: passwortlose Pipelines – keine Secrets oder Zertifikate</a:t>
+              <a:t>What-If vor Apply – Änderungsvorschau und Approval-Gate vor jedem Deploy</a:t>
             </a:r>
           </a:p>
           <a:p>
             <a:pPr/>
             <a:r>
               <a:rPr sz="1300"/>
-              <a:t>What-If vor Apply: Pipeline zeigt geplante Änderungen zur Freigabe, bevor etwas ausgeführt wird</a:t>
-            </a:r>
-          </a:p>
-          <a:p>
-            <a:pPr/>
-            <a:r>
-              <a:rPr sz="1300"/>
-              <a:t>Qualitätssicherung: bicep build aller 20 Templates offline; 20/20 grün (Bicep 0.44.1)</a:t>
+              <a:t>Bicep Build: alle 20 Templates grün (Bicep 0.44.1) · CI läuft auf jedem PR</a:t>
             </a:r>
           </a:p>
         </p:txBody>
